--- a/docs/pptx/carbo/jx-carbo-linsubhr-ratio-throm2.pptx
+++ b/docs/pptx/carbo/jx-carbo-linsubhr-ratio-throm2.pptx
@@ -2271,7 +2271,7 @@
           </p:nvSpPr>
           <p:spPr>
             <a:xfrm>
-              <a:off x="817517" y="5114368"/>
+              <a:off x="817517" y="5142518"/>
               <a:ext cx="7799693" cy="0"/>
             </a:xfrm>
             <a:custGeom>
@@ -2314,7 +2314,7 @@
           </p:nvSpPr>
           <p:spPr>
             <a:xfrm>
-              <a:off x="817517" y="4244691"/>
+              <a:off x="817517" y="4313054"/>
               <a:ext cx="7799693" cy="0"/>
             </a:xfrm>
             <a:custGeom>
@@ -2357,7 +2357,7 @@
           </p:nvSpPr>
           <p:spPr>
             <a:xfrm>
-              <a:off x="817517" y="3375014"/>
+              <a:off x="817517" y="3483591"/>
               <a:ext cx="7799693" cy="0"/>
             </a:xfrm>
             <a:custGeom>
@@ -2400,7 +2400,7 @@
           </p:nvSpPr>
           <p:spPr>
             <a:xfrm>
-              <a:off x="817517" y="2505337"/>
+              <a:off x="817517" y="2654127"/>
               <a:ext cx="7799693" cy="0"/>
             </a:xfrm>
             <a:custGeom>
@@ -2443,15 +2443,15 @@
           </p:nvSpPr>
           <p:spPr>
             <a:xfrm>
-              <a:off x="1615213" y="1896563"/>
-              <a:ext cx="0" cy="3826579"/>
+              <a:off x="1615213" y="2073503"/>
+              <a:ext cx="0" cy="3649639"/>
             </a:xfrm>
             <a:custGeom>
               <a:avLst/>
               <a:pathLst>
-                <a:path w="0" h="3826579">
+                <a:path w="0" h="3649639">
                   <a:moveTo>
-                    <a:pt x="0" y="3826579"/>
+                    <a:pt x="0" y="3649639"/>
                   </a:moveTo>
                   <a:lnTo>
                     <a:pt x="0" y="0"/>
@@ -2486,15 +2486,15 @@
           </p:nvSpPr>
           <p:spPr>
             <a:xfrm>
-              <a:off x="3387871" y="1896563"/>
-              <a:ext cx="0" cy="3826579"/>
+              <a:off x="3387871" y="2073503"/>
+              <a:ext cx="0" cy="3649639"/>
             </a:xfrm>
             <a:custGeom>
               <a:avLst/>
               <a:pathLst>
-                <a:path w="0" h="3826579">
+                <a:path w="0" h="3649639">
                   <a:moveTo>
-                    <a:pt x="0" y="3826579"/>
+                    <a:pt x="0" y="3649639"/>
                   </a:moveTo>
                   <a:lnTo>
                     <a:pt x="0" y="0"/>
@@ -2529,15 +2529,15 @@
           </p:nvSpPr>
           <p:spPr>
             <a:xfrm>
-              <a:off x="5160528" y="1896563"/>
-              <a:ext cx="0" cy="3826579"/>
+              <a:off x="5160528" y="2073503"/>
+              <a:ext cx="0" cy="3649639"/>
             </a:xfrm>
             <a:custGeom>
               <a:avLst/>
               <a:pathLst>
-                <a:path w="0" h="3826579">
+                <a:path w="0" h="3649639">
                   <a:moveTo>
-                    <a:pt x="0" y="3826579"/>
+                    <a:pt x="0" y="3649639"/>
                   </a:moveTo>
                   <a:lnTo>
                     <a:pt x="0" y="0"/>
@@ -2572,15 +2572,15 @@
           </p:nvSpPr>
           <p:spPr>
             <a:xfrm>
-              <a:off x="6933186" y="1896563"/>
-              <a:ext cx="0" cy="3826579"/>
+              <a:off x="6933186" y="2073503"/>
+              <a:ext cx="0" cy="3649639"/>
             </a:xfrm>
             <a:custGeom>
               <a:avLst/>
               <a:pathLst>
-                <a:path w="0" h="3826579">
+                <a:path w="0" h="3649639">
                   <a:moveTo>
-                    <a:pt x="0" y="3826579"/>
+                    <a:pt x="0" y="3649639"/>
                   </a:moveTo>
                   <a:lnTo>
                     <a:pt x="0" y="0"/>
@@ -2615,7 +2615,7 @@
           </p:nvSpPr>
           <p:spPr>
             <a:xfrm>
-              <a:off x="817517" y="5549207"/>
+              <a:off x="817517" y="5557249"/>
               <a:ext cx="7799693" cy="0"/>
             </a:xfrm>
             <a:custGeom>
@@ -2658,7 +2658,7 @@
           </p:nvSpPr>
           <p:spPr>
             <a:xfrm>
-              <a:off x="817517" y="4679530"/>
+              <a:off x="817517" y="4727786"/>
               <a:ext cx="7799693" cy="0"/>
             </a:xfrm>
             <a:custGeom>
@@ -2701,7 +2701,7 @@
           </p:nvSpPr>
           <p:spPr>
             <a:xfrm>
-              <a:off x="817517" y="3809853"/>
+              <a:off x="817517" y="3898322"/>
               <a:ext cx="7799693" cy="0"/>
             </a:xfrm>
             <a:custGeom>
@@ -2744,7 +2744,7 @@
           </p:nvSpPr>
           <p:spPr>
             <a:xfrm>
-              <a:off x="817517" y="2940175"/>
+              <a:off x="817517" y="3068859"/>
               <a:ext cx="7799693" cy="0"/>
             </a:xfrm>
             <a:custGeom>
@@ -2787,7 +2787,7 @@
           </p:nvSpPr>
           <p:spPr>
             <a:xfrm>
-              <a:off x="817517" y="2070498"/>
+              <a:off x="817517" y="2239395"/>
               <a:ext cx="7799693" cy="0"/>
             </a:xfrm>
             <a:custGeom>
@@ -2830,15 +2830,15 @@
           </p:nvSpPr>
           <p:spPr>
             <a:xfrm>
-              <a:off x="2501542" y="1896563"/>
-              <a:ext cx="0" cy="3826579"/>
+              <a:off x="2501542" y="2073503"/>
+              <a:ext cx="0" cy="3649639"/>
             </a:xfrm>
             <a:custGeom>
               <a:avLst/>
               <a:pathLst>
-                <a:path w="0" h="3826579">
+                <a:path w="0" h="3649639">
                   <a:moveTo>
-                    <a:pt x="0" y="3826579"/>
+                    <a:pt x="0" y="3649639"/>
                   </a:moveTo>
                   <a:lnTo>
                     <a:pt x="0" y="0"/>
@@ -2873,15 +2873,15 @@
           </p:nvSpPr>
           <p:spPr>
             <a:xfrm>
-              <a:off x="4274200" y="1896563"/>
-              <a:ext cx="0" cy="3826579"/>
+              <a:off x="4274200" y="2073503"/>
+              <a:ext cx="0" cy="3649639"/>
             </a:xfrm>
             <a:custGeom>
               <a:avLst/>
               <a:pathLst>
-                <a:path w="0" h="3826579">
+                <a:path w="0" h="3649639">
                   <a:moveTo>
-                    <a:pt x="0" y="3826579"/>
+                    <a:pt x="0" y="3649639"/>
                   </a:moveTo>
                   <a:lnTo>
                     <a:pt x="0" y="0"/>
@@ -2916,15 +2916,15 @@
           </p:nvSpPr>
           <p:spPr>
             <a:xfrm>
-              <a:off x="6046857" y="1896563"/>
-              <a:ext cx="0" cy="3826579"/>
+              <a:off x="6046857" y="2073503"/>
+              <a:ext cx="0" cy="3649639"/>
             </a:xfrm>
             <a:custGeom>
               <a:avLst/>
               <a:pathLst>
-                <a:path w="0" h="3826579">
+                <a:path w="0" h="3649639">
                   <a:moveTo>
-                    <a:pt x="0" y="3826579"/>
+                    <a:pt x="0" y="3649639"/>
                   </a:moveTo>
                   <a:lnTo>
                     <a:pt x="0" y="0"/>
@@ -2959,15 +2959,15 @@
           </p:nvSpPr>
           <p:spPr>
             <a:xfrm>
-              <a:off x="7819515" y="1896563"/>
-              <a:ext cx="0" cy="3826579"/>
+              <a:off x="7819515" y="2073503"/>
+              <a:ext cx="0" cy="3649639"/>
             </a:xfrm>
             <a:custGeom>
               <a:avLst/>
               <a:pathLst>
-                <a:path w="0" h="3826579">
+                <a:path w="0" h="3649639">
                   <a:moveTo>
-                    <a:pt x="0" y="3826579"/>
+                    <a:pt x="0" y="3649639"/>
                   </a:moveTo>
                   <a:lnTo>
                     <a:pt x="0" y="0"/>
@@ -3002,576 +3002,576 @@
           </p:nvSpPr>
           <p:spPr>
             <a:xfrm>
-              <a:off x="817517" y="1896563"/>
-              <a:ext cx="7403783" cy="3542359"/>
+              <a:off x="817517" y="2073503"/>
+              <a:ext cx="7403783" cy="3378562"/>
             </a:xfrm>
             <a:custGeom>
               <a:avLst/>
               <a:pathLst>
-                <a:path w="7403783" h="3542359">
+                <a:path w="7403783" h="3378562">
                   <a:moveTo>
                     <a:pt x="629428" y="0"/>
                   </a:moveTo>
                   <a:lnTo>
-                    <a:pt x="660118" y="58138"/>
-                  </a:lnTo>
-                  <a:lnTo>
-                    <a:pt x="736751" y="197671"/>
-                  </a:lnTo>
-                  <a:lnTo>
-                    <a:pt x="813384" y="331788"/>
-                  </a:lnTo>
-                  <a:lnTo>
-                    <a:pt x="890016" y="460699"/>
-                  </a:lnTo>
-                  <a:lnTo>
-                    <a:pt x="966649" y="584606"/>
-                  </a:lnTo>
-                  <a:lnTo>
-                    <a:pt x="1043281" y="703703"/>
-                  </a:lnTo>
-                  <a:lnTo>
-                    <a:pt x="1119914" y="818176"/>
-                  </a:lnTo>
-                  <a:lnTo>
-                    <a:pt x="1196546" y="928206"/>
-                  </a:lnTo>
-                  <a:lnTo>
-                    <a:pt x="1273179" y="1033965"/>
-                  </a:lnTo>
-                  <a:lnTo>
-                    <a:pt x="1349811" y="1135618"/>
-                  </a:lnTo>
-                  <a:lnTo>
-                    <a:pt x="1426444" y="1233326"/>
-                  </a:lnTo>
-                  <a:lnTo>
-                    <a:pt x="1503076" y="1327240"/>
-                  </a:lnTo>
-                  <a:lnTo>
-                    <a:pt x="1579709" y="1417509"/>
-                  </a:lnTo>
-                  <a:lnTo>
-                    <a:pt x="1656342" y="1504274"/>
-                  </a:lnTo>
-                  <a:lnTo>
-                    <a:pt x="1732974" y="1587670"/>
-                  </a:lnTo>
-                  <a:lnTo>
-                    <a:pt x="1809607" y="1667830"/>
-                  </a:lnTo>
-                  <a:lnTo>
-                    <a:pt x="1886239" y="1744877"/>
-                  </a:lnTo>
-                  <a:lnTo>
-                    <a:pt x="1962872" y="1818934"/>
-                  </a:lnTo>
-                  <a:lnTo>
-                    <a:pt x="2039504" y="1890116"/>
-                  </a:lnTo>
-                  <a:lnTo>
-                    <a:pt x="2116137" y="1958535"/>
-                  </a:lnTo>
-                  <a:lnTo>
-                    <a:pt x="2192769" y="2024298"/>
-                  </a:lnTo>
-                  <a:lnTo>
-                    <a:pt x="2269402" y="2087508"/>
-                  </a:lnTo>
-                  <a:lnTo>
-                    <a:pt x="2346034" y="2148264"/>
-                  </a:lnTo>
-                  <a:lnTo>
-                    <a:pt x="2422667" y="2206662"/>
-                  </a:lnTo>
-                  <a:lnTo>
-                    <a:pt x="2499300" y="2262793"/>
-                  </a:lnTo>
-                  <a:lnTo>
-                    <a:pt x="2575932" y="2316745"/>
-                  </a:lnTo>
-                  <a:lnTo>
-                    <a:pt x="2652565" y="2368602"/>
-                  </a:lnTo>
-                  <a:lnTo>
-                    <a:pt x="2729197" y="2418447"/>
-                  </a:lnTo>
-                  <a:lnTo>
-                    <a:pt x="2805830" y="2466357"/>
-                  </a:lnTo>
-                  <a:lnTo>
-                    <a:pt x="2882462" y="2512407"/>
-                  </a:lnTo>
-                  <a:lnTo>
-                    <a:pt x="2959095" y="2556669"/>
-                  </a:lnTo>
-                  <a:lnTo>
-                    <a:pt x="3035727" y="2599213"/>
-                  </a:lnTo>
-                  <a:lnTo>
-                    <a:pt x="3112360" y="2640106"/>
-                  </a:lnTo>
-                  <a:lnTo>
-                    <a:pt x="3188993" y="2679411"/>
-                  </a:lnTo>
-                  <a:lnTo>
-                    <a:pt x="3265625" y="2717191"/>
-                  </a:lnTo>
-                  <a:lnTo>
-                    <a:pt x="3342258" y="2753504"/>
-                  </a:lnTo>
-                  <a:lnTo>
-                    <a:pt x="3418890" y="2784509"/>
-                  </a:lnTo>
-                  <a:lnTo>
-                    <a:pt x="3495523" y="2794179"/>
-                  </a:lnTo>
-                  <a:lnTo>
-                    <a:pt x="3572155" y="2803741"/>
-                  </a:lnTo>
-                  <a:lnTo>
-                    <a:pt x="3648788" y="2813197"/>
-                  </a:lnTo>
-                  <a:lnTo>
-                    <a:pt x="3725420" y="2822548"/>
-                  </a:lnTo>
-                  <a:lnTo>
-                    <a:pt x="3802053" y="2831794"/>
-                  </a:lnTo>
-                  <a:lnTo>
-                    <a:pt x="3878685" y="2840937"/>
-                  </a:lnTo>
-                  <a:lnTo>
-                    <a:pt x="3955318" y="2849979"/>
-                  </a:lnTo>
-                  <a:lnTo>
-                    <a:pt x="4031951" y="2858919"/>
-                  </a:lnTo>
-                  <a:lnTo>
-                    <a:pt x="4108583" y="2867761"/>
-                  </a:lnTo>
-                  <a:lnTo>
-                    <a:pt x="4185216" y="2876503"/>
-                  </a:lnTo>
-                  <a:lnTo>
-                    <a:pt x="4261848" y="2885149"/>
-                  </a:lnTo>
-                  <a:lnTo>
-                    <a:pt x="4338481" y="2893698"/>
-                  </a:lnTo>
-                  <a:lnTo>
-                    <a:pt x="4415113" y="2902151"/>
-                  </a:lnTo>
-                  <a:lnTo>
-                    <a:pt x="4491746" y="2910511"/>
-                  </a:lnTo>
-                  <a:lnTo>
-                    <a:pt x="4568378" y="2918778"/>
-                  </a:lnTo>
-                  <a:lnTo>
-                    <a:pt x="4645011" y="2926952"/>
-                  </a:lnTo>
-                  <a:lnTo>
-                    <a:pt x="4721644" y="2935035"/>
-                  </a:lnTo>
-                  <a:lnTo>
-                    <a:pt x="4798276" y="2943029"/>
-                  </a:lnTo>
-                  <a:lnTo>
-                    <a:pt x="4874909" y="2950933"/>
-                  </a:lnTo>
-                  <a:lnTo>
-                    <a:pt x="4951541" y="2958749"/>
-                  </a:lnTo>
-                  <a:lnTo>
-                    <a:pt x="5028174" y="2966478"/>
-                  </a:lnTo>
-                  <a:lnTo>
-                    <a:pt x="5104806" y="2974122"/>
-                  </a:lnTo>
-                  <a:lnTo>
-                    <a:pt x="5181439" y="2981680"/>
-                  </a:lnTo>
-                  <a:lnTo>
-                    <a:pt x="5258071" y="2989153"/>
-                  </a:lnTo>
-                  <a:lnTo>
-                    <a:pt x="5334704" y="2996544"/>
-                  </a:lnTo>
-                  <a:lnTo>
-                    <a:pt x="5411336" y="3003852"/>
-                  </a:lnTo>
-                  <a:lnTo>
-                    <a:pt x="5487969" y="3011079"/>
-                  </a:lnTo>
-                  <a:lnTo>
-                    <a:pt x="5564602" y="3018225"/>
-                  </a:lnTo>
-                  <a:lnTo>
-                    <a:pt x="5641234" y="3025292"/>
-                  </a:lnTo>
-                  <a:lnTo>
-                    <a:pt x="5717867" y="3032280"/>
-                  </a:lnTo>
-                  <a:lnTo>
-                    <a:pt x="5794499" y="3039190"/>
-                  </a:lnTo>
-                  <a:lnTo>
-                    <a:pt x="5871132" y="3046023"/>
-                  </a:lnTo>
-                  <a:lnTo>
-                    <a:pt x="5947764" y="3052780"/>
-                  </a:lnTo>
-                  <a:lnTo>
-                    <a:pt x="6024397" y="3059462"/>
-                  </a:lnTo>
-                  <a:lnTo>
-                    <a:pt x="6101029" y="3066069"/>
-                  </a:lnTo>
-                  <a:lnTo>
-                    <a:pt x="6177662" y="3072603"/>
-                  </a:lnTo>
-                  <a:lnTo>
-                    <a:pt x="6254294" y="3079064"/>
-                  </a:lnTo>
-                  <a:lnTo>
-                    <a:pt x="6330927" y="3085453"/>
-                  </a:lnTo>
-                  <a:lnTo>
-                    <a:pt x="6407560" y="3091771"/>
-                  </a:lnTo>
-                  <a:lnTo>
-                    <a:pt x="6484192" y="3098018"/>
-                  </a:lnTo>
-                  <a:lnTo>
-                    <a:pt x="6560825" y="3104196"/>
-                  </a:lnTo>
-                  <a:lnTo>
-                    <a:pt x="6637457" y="3110305"/>
-                  </a:lnTo>
-                  <a:lnTo>
-                    <a:pt x="6714090" y="3116346"/>
-                  </a:lnTo>
-                  <a:lnTo>
-                    <a:pt x="6790722" y="3122320"/>
-                  </a:lnTo>
-                  <a:lnTo>
-                    <a:pt x="6867355" y="3128227"/>
-                  </a:lnTo>
-                  <a:lnTo>
-                    <a:pt x="6943987" y="3134069"/>
-                  </a:lnTo>
-                  <a:lnTo>
-                    <a:pt x="7020620" y="3139845"/>
-                  </a:lnTo>
-                  <a:lnTo>
-                    <a:pt x="7097253" y="3145557"/>
-                  </a:lnTo>
-                  <a:lnTo>
-                    <a:pt x="7173885" y="3151205"/>
-                  </a:lnTo>
-                  <a:lnTo>
-                    <a:pt x="7250518" y="3156791"/>
-                  </a:lnTo>
-                  <a:lnTo>
-                    <a:pt x="7327150" y="3162314"/>
-                  </a:lnTo>
-                  <a:lnTo>
-                    <a:pt x="7403783" y="3167776"/>
-                  </a:lnTo>
-                  <a:lnTo>
-                    <a:pt x="7403783" y="3542359"/>
-                  </a:lnTo>
-                  <a:lnTo>
-                    <a:pt x="7327150" y="3537905"/>
-                  </a:lnTo>
-                  <a:lnTo>
-                    <a:pt x="7250518" y="3533272"/>
-                  </a:lnTo>
-                  <a:lnTo>
-                    <a:pt x="7173885" y="3528451"/>
-                  </a:lnTo>
-                  <a:lnTo>
-                    <a:pt x="7097253" y="3523435"/>
-                  </a:lnTo>
-                  <a:lnTo>
-                    <a:pt x="7020620" y="3518217"/>
-                  </a:lnTo>
-                  <a:lnTo>
-                    <a:pt x="6943987" y="3512788"/>
-                  </a:lnTo>
-                  <a:lnTo>
-                    <a:pt x="6867355" y="3507139"/>
-                  </a:lnTo>
-                  <a:lnTo>
-                    <a:pt x="6790722" y="3501263"/>
-                  </a:lnTo>
-                  <a:lnTo>
-                    <a:pt x="6714090" y="3495149"/>
-                  </a:lnTo>
-                  <a:lnTo>
-                    <a:pt x="6637457" y="3488789"/>
-                  </a:lnTo>
-                  <a:lnTo>
-                    <a:pt x="6560825" y="3482171"/>
-                  </a:lnTo>
-                  <a:lnTo>
-                    <a:pt x="6484192" y="3475287"/>
-                  </a:lnTo>
-                  <a:lnTo>
-                    <a:pt x="6407560" y="3468124"/>
-                  </a:lnTo>
-                  <a:lnTo>
-                    <a:pt x="6330927" y="3460672"/>
-                  </a:lnTo>
-                  <a:lnTo>
-                    <a:pt x="6254294" y="3452919"/>
-                  </a:lnTo>
-                  <a:lnTo>
-                    <a:pt x="6177662" y="3444853"/>
-                  </a:lnTo>
-                  <a:lnTo>
-                    <a:pt x="6101029" y="3436461"/>
-                  </a:lnTo>
-                  <a:lnTo>
-                    <a:pt x="6024397" y="3427730"/>
-                  </a:lnTo>
-                  <a:lnTo>
-                    <a:pt x="5947764" y="3418647"/>
-                  </a:lnTo>
-                  <a:lnTo>
-                    <a:pt x="5871132" y="3409196"/>
-                  </a:lnTo>
-                  <a:lnTo>
-                    <a:pt x="5794499" y="3399364"/>
-                  </a:lnTo>
-                  <a:lnTo>
-                    <a:pt x="5717867" y="3389135"/>
-                  </a:lnTo>
-                  <a:lnTo>
-                    <a:pt x="5641234" y="3378493"/>
-                  </a:lnTo>
-                  <a:lnTo>
-                    <a:pt x="5564602" y="3367421"/>
-                  </a:lnTo>
-                  <a:lnTo>
-                    <a:pt x="5487969" y="3355902"/>
-                  </a:lnTo>
-                  <a:lnTo>
-                    <a:pt x="5411336" y="3343918"/>
-                  </a:lnTo>
-                  <a:lnTo>
-                    <a:pt x="5334704" y="3331450"/>
-                  </a:lnTo>
-                  <a:lnTo>
-                    <a:pt x="5258071" y="3318478"/>
-                  </a:lnTo>
-                  <a:lnTo>
-                    <a:pt x="5181439" y="3304982"/>
-                  </a:lnTo>
-                  <a:lnTo>
-                    <a:pt x="5104806" y="3290941"/>
-                  </a:lnTo>
-                  <a:lnTo>
-                    <a:pt x="5028174" y="3276334"/>
-                  </a:lnTo>
-                  <a:lnTo>
-                    <a:pt x="4951541" y="3261136"/>
-                  </a:lnTo>
-                  <a:lnTo>
-                    <a:pt x="4874909" y="3245324"/>
-                  </a:lnTo>
-                  <a:lnTo>
-                    <a:pt x="4798276" y="3228874"/>
-                  </a:lnTo>
-                  <a:lnTo>
-                    <a:pt x="4721644" y="3211760"/>
-                  </a:lnTo>
-                  <a:lnTo>
-                    <a:pt x="4645011" y="3193954"/>
-                  </a:lnTo>
-                  <a:lnTo>
-                    <a:pt x="4568378" y="3175429"/>
-                  </a:lnTo>
-                  <a:lnTo>
-                    <a:pt x="4491746" y="3156156"/>
-                  </a:lnTo>
-                  <a:lnTo>
-                    <a:pt x="4415113" y="3136105"/>
-                  </a:lnTo>
-                  <a:lnTo>
-                    <a:pt x="4338481" y="3115244"/>
-                  </a:lnTo>
-                  <a:lnTo>
-                    <a:pt x="4261848" y="3093540"/>
-                  </a:lnTo>
-                  <a:lnTo>
-                    <a:pt x="4185216" y="3070960"/>
-                  </a:lnTo>
-                  <a:lnTo>
-                    <a:pt x="4108583" y="3047468"/>
-                  </a:lnTo>
-                  <a:lnTo>
-                    <a:pt x="4031951" y="3023028"/>
-                  </a:lnTo>
-                  <a:lnTo>
-                    <a:pt x="3955318" y="2997600"/>
-                  </a:lnTo>
-                  <a:lnTo>
-                    <a:pt x="3878685" y="2971145"/>
-                  </a:lnTo>
-                  <a:lnTo>
-                    <a:pt x="3802053" y="2943622"/>
-                  </a:lnTo>
-                  <a:lnTo>
-                    <a:pt x="3725420" y="2914987"/>
-                  </a:lnTo>
-                  <a:lnTo>
-                    <a:pt x="3648788" y="2885196"/>
-                  </a:lnTo>
-                  <a:lnTo>
-                    <a:pt x="3572155" y="2854201"/>
-                  </a:lnTo>
-                  <a:lnTo>
-                    <a:pt x="3495523" y="2821955"/>
-                  </a:lnTo>
-                  <a:lnTo>
-                    <a:pt x="3418890" y="2788407"/>
-                  </a:lnTo>
-                  <a:lnTo>
-                    <a:pt x="3342258" y="2774730"/>
-                  </a:lnTo>
-                  <a:lnTo>
-                    <a:pt x="3265625" y="2764841"/>
-                  </a:lnTo>
-                  <a:lnTo>
-                    <a:pt x="3188993" y="2754840"/>
-                  </a:lnTo>
-                  <a:lnTo>
-                    <a:pt x="3112360" y="2744727"/>
-                  </a:lnTo>
-                  <a:lnTo>
-                    <a:pt x="3035727" y="2734500"/>
-                  </a:lnTo>
-                  <a:lnTo>
-                    <a:pt x="2959095" y="2724158"/>
-                  </a:lnTo>
-                  <a:lnTo>
-                    <a:pt x="2882462" y="2713699"/>
-                  </a:lnTo>
-                  <a:lnTo>
-                    <a:pt x="2805830" y="2703123"/>
-                  </a:lnTo>
-                  <a:lnTo>
-                    <a:pt x="2729197" y="2692427"/>
-                  </a:lnTo>
-                  <a:lnTo>
-                    <a:pt x="2652565" y="2681611"/>
-                  </a:lnTo>
-                  <a:lnTo>
-                    <a:pt x="2575932" y="2670673"/>
-                  </a:lnTo>
-                  <a:lnTo>
-                    <a:pt x="2499300" y="2659611"/>
-                  </a:lnTo>
-                  <a:lnTo>
-                    <a:pt x="2422667" y="2648425"/>
-                  </a:lnTo>
-                  <a:lnTo>
-                    <a:pt x="2346034" y="2637114"/>
-                  </a:lnTo>
-                  <a:lnTo>
-                    <a:pt x="2269402" y="2625674"/>
-                  </a:lnTo>
-                  <a:lnTo>
-                    <a:pt x="2192769" y="2614106"/>
-                  </a:lnTo>
-                  <a:lnTo>
-                    <a:pt x="2116137" y="2602408"/>
-                  </a:lnTo>
-                  <a:lnTo>
-                    <a:pt x="2039504" y="2590578"/>
-                  </a:lnTo>
-                  <a:lnTo>
-                    <a:pt x="1962872" y="2578614"/>
-                  </a:lnTo>
-                  <a:lnTo>
-                    <a:pt x="1886239" y="2566516"/>
-                  </a:lnTo>
-                  <a:lnTo>
-                    <a:pt x="1809607" y="2554281"/>
-                  </a:lnTo>
-                  <a:lnTo>
-                    <a:pt x="1732974" y="2541909"/>
-                  </a:lnTo>
-                  <a:lnTo>
-                    <a:pt x="1656342" y="2529397"/>
-                  </a:lnTo>
-                  <a:lnTo>
-                    <a:pt x="1579709" y="2516745"/>
-                  </a:lnTo>
-                  <a:lnTo>
-                    <a:pt x="1503076" y="2503950"/>
-                  </a:lnTo>
-                  <a:lnTo>
-                    <a:pt x="1426444" y="2491010"/>
-                  </a:lnTo>
-                  <a:lnTo>
-                    <a:pt x="1349811" y="2477925"/>
-                  </a:lnTo>
-                  <a:lnTo>
-                    <a:pt x="1273179" y="2464693"/>
-                  </a:lnTo>
-                  <a:lnTo>
-                    <a:pt x="1196546" y="2451312"/>
-                  </a:lnTo>
-                  <a:lnTo>
-                    <a:pt x="1119914" y="2437779"/>
-                  </a:lnTo>
-                  <a:lnTo>
-                    <a:pt x="1043281" y="2424095"/>
-                  </a:lnTo>
-                  <a:lnTo>
-                    <a:pt x="966649" y="2410256"/>
-                  </a:lnTo>
-                  <a:lnTo>
-                    <a:pt x="890016" y="2396261"/>
-                  </a:lnTo>
-                  <a:lnTo>
-                    <a:pt x="813384" y="2382109"/>
-                  </a:lnTo>
-                  <a:lnTo>
-                    <a:pt x="736751" y="2367797"/>
-                  </a:lnTo>
-                  <a:lnTo>
-                    <a:pt x="660118" y="2353324"/>
-                  </a:lnTo>
-                  <a:lnTo>
-                    <a:pt x="583486" y="2338688"/>
-                  </a:lnTo>
-                  <a:lnTo>
-                    <a:pt x="506853" y="2323887"/>
-                  </a:lnTo>
-                  <a:lnTo>
-                    <a:pt x="430221" y="2308920"/>
-                  </a:lnTo>
-                  <a:lnTo>
-                    <a:pt x="353588" y="2293784"/>
-                  </a:lnTo>
-                  <a:lnTo>
-                    <a:pt x="276956" y="2278477"/>
-                  </a:lnTo>
-                  <a:lnTo>
-                    <a:pt x="200323" y="2262998"/>
-                  </a:lnTo>
-                  <a:lnTo>
-                    <a:pt x="123691" y="2247345"/>
-                  </a:lnTo>
-                  <a:lnTo>
-                    <a:pt x="47058" y="2231515"/>
-                  </a:lnTo>
-                  <a:lnTo>
-                    <a:pt x="0" y="2221685"/>
+                    <a:pt x="660118" y="55449"/>
+                  </a:lnTo>
+                  <a:lnTo>
+                    <a:pt x="736751" y="188531"/>
+                  </a:lnTo>
+                  <a:lnTo>
+                    <a:pt x="813384" y="316447"/>
+                  </a:lnTo>
+                  <a:lnTo>
+                    <a:pt x="890016" y="439397"/>
+                  </a:lnTo>
+                  <a:lnTo>
+                    <a:pt x="966649" y="557574"/>
+                  </a:lnTo>
+                  <a:lnTo>
+                    <a:pt x="1043281" y="671164"/>
+                  </a:lnTo>
+                  <a:lnTo>
+                    <a:pt x="1119914" y="780344"/>
+                  </a:lnTo>
+                  <a:lnTo>
+                    <a:pt x="1196546" y="885286"/>
+                  </a:lnTo>
+                  <a:lnTo>
+                    <a:pt x="1273179" y="986155"/>
+                  </a:lnTo>
+                  <a:lnTo>
+                    <a:pt x="1349811" y="1083108"/>
+                  </a:lnTo>
+                  <a:lnTo>
+                    <a:pt x="1426444" y="1176297"/>
+                  </a:lnTo>
+                  <a:lnTo>
+                    <a:pt x="1503076" y="1265869"/>
+                  </a:lnTo>
+                  <a:lnTo>
+                    <a:pt x="1579709" y="1351964"/>
+                  </a:lnTo>
+                  <a:lnTo>
+                    <a:pt x="1656342" y="1434717"/>
+                  </a:lnTo>
+                  <a:lnTo>
+                    <a:pt x="1732974" y="1514257"/>
+                  </a:lnTo>
+                  <a:lnTo>
+                    <a:pt x="1809607" y="1590710"/>
+                  </a:lnTo>
+                  <a:lnTo>
+                    <a:pt x="1886239" y="1664195"/>
+                  </a:lnTo>
+                  <a:lnTo>
+                    <a:pt x="1962872" y="1734827"/>
+                  </a:lnTo>
+                  <a:lnTo>
+                    <a:pt x="2039504" y="1802718"/>
+                  </a:lnTo>
+                  <a:lnTo>
+                    <a:pt x="2116137" y="1867973"/>
+                  </a:lnTo>
+                  <a:lnTo>
+                    <a:pt x="2192769" y="1930695"/>
+                  </a:lnTo>
+                  <a:lnTo>
+                    <a:pt x="2269402" y="1990982"/>
+                  </a:lnTo>
+                  <a:lnTo>
+                    <a:pt x="2346034" y="2048929"/>
+                  </a:lnTo>
+                  <a:lnTo>
+                    <a:pt x="2422667" y="2104627"/>
+                  </a:lnTo>
+                  <a:lnTo>
+                    <a:pt x="2499300" y="2158162"/>
+                  </a:lnTo>
+                  <a:lnTo>
+                    <a:pt x="2575932" y="2209619"/>
+                  </a:lnTo>
+                  <a:lnTo>
+                    <a:pt x="2652565" y="2259079"/>
+                  </a:lnTo>
+                  <a:lnTo>
+                    <a:pt x="2729197" y="2306619"/>
+                  </a:lnTo>
+                  <a:lnTo>
+                    <a:pt x="2805830" y="2352313"/>
+                  </a:lnTo>
+                  <a:lnTo>
+                    <a:pt x="2882462" y="2396234"/>
+                  </a:lnTo>
+                  <a:lnTo>
+                    <a:pt x="2959095" y="2438450"/>
+                  </a:lnTo>
+                  <a:lnTo>
+                    <a:pt x="3035727" y="2479027"/>
+                  </a:lnTo>
+                  <a:lnTo>
+                    <a:pt x="3112360" y="2518028"/>
+                  </a:lnTo>
+                  <a:lnTo>
+                    <a:pt x="3188993" y="2555516"/>
+                  </a:lnTo>
+                  <a:lnTo>
+                    <a:pt x="3265625" y="2591549"/>
+                  </a:lnTo>
+                  <a:lnTo>
+                    <a:pt x="3342258" y="2626183"/>
+                  </a:lnTo>
+                  <a:lnTo>
+                    <a:pt x="3418890" y="2655754"/>
+                  </a:lnTo>
+                  <a:lnTo>
+                    <a:pt x="3495523" y="2664977"/>
+                  </a:lnTo>
+                  <a:lnTo>
+                    <a:pt x="3572155" y="2674097"/>
+                  </a:lnTo>
+                  <a:lnTo>
+                    <a:pt x="3648788" y="2683116"/>
+                  </a:lnTo>
+                  <a:lnTo>
+                    <a:pt x="3725420" y="2692034"/>
+                  </a:lnTo>
+                  <a:lnTo>
+                    <a:pt x="3802053" y="2700853"/>
+                  </a:lnTo>
+                  <a:lnTo>
+                    <a:pt x="3878685" y="2709573"/>
+                  </a:lnTo>
+                  <a:lnTo>
+                    <a:pt x="3955318" y="2718197"/>
+                  </a:lnTo>
+                  <a:lnTo>
+                    <a:pt x="4031951" y="2726724"/>
+                  </a:lnTo>
+                  <a:lnTo>
+                    <a:pt x="4108583" y="2735156"/>
+                  </a:lnTo>
+                  <a:lnTo>
+                    <a:pt x="4185216" y="2743495"/>
+                  </a:lnTo>
+                  <a:lnTo>
+                    <a:pt x="4261848" y="2751740"/>
+                  </a:lnTo>
+                  <a:lnTo>
+                    <a:pt x="4338481" y="2759894"/>
+                  </a:lnTo>
+                  <a:lnTo>
+                    <a:pt x="4415113" y="2767957"/>
+                  </a:lnTo>
+                  <a:lnTo>
+                    <a:pt x="4491746" y="2775930"/>
+                  </a:lnTo>
+                  <a:lnTo>
+                    <a:pt x="4568378" y="2783814"/>
+                  </a:lnTo>
+                  <a:lnTo>
+                    <a:pt x="4645011" y="2791611"/>
+                  </a:lnTo>
+                  <a:lnTo>
+                    <a:pt x="4721644" y="2799320"/>
+                  </a:lnTo>
+                  <a:lnTo>
+                    <a:pt x="4798276" y="2806944"/>
+                  </a:lnTo>
+                  <a:lnTo>
+                    <a:pt x="4874909" y="2814483"/>
+                  </a:lnTo>
+                  <a:lnTo>
+                    <a:pt x="4951541" y="2821938"/>
+                  </a:lnTo>
+                  <a:lnTo>
+                    <a:pt x="5028174" y="2829310"/>
+                  </a:lnTo>
+                  <a:lnTo>
+                    <a:pt x="5104806" y="2836599"/>
+                  </a:lnTo>
+                  <a:lnTo>
+                    <a:pt x="5181439" y="2843808"/>
+                  </a:lnTo>
+                  <a:lnTo>
+                    <a:pt x="5258071" y="2850936"/>
+                  </a:lnTo>
+                  <a:lnTo>
+                    <a:pt x="5334704" y="2857985"/>
+                  </a:lnTo>
+                  <a:lnTo>
+                    <a:pt x="5411336" y="2864955"/>
+                  </a:lnTo>
+                  <a:lnTo>
+                    <a:pt x="5487969" y="2871848"/>
+                  </a:lnTo>
+                  <a:lnTo>
+                    <a:pt x="5564602" y="2878663"/>
+                  </a:lnTo>
+                  <a:lnTo>
+                    <a:pt x="5641234" y="2885403"/>
+                  </a:lnTo>
+                  <a:lnTo>
+                    <a:pt x="5717867" y="2892068"/>
+                  </a:lnTo>
+                  <a:lnTo>
+                    <a:pt x="5794499" y="2898659"/>
+                  </a:lnTo>
+                  <a:lnTo>
+                    <a:pt x="5871132" y="2905176"/>
+                  </a:lnTo>
+                  <a:lnTo>
+                    <a:pt x="5947764" y="2911621"/>
+                  </a:lnTo>
+                  <a:lnTo>
+                    <a:pt x="6024397" y="2917994"/>
+                  </a:lnTo>
+                  <a:lnTo>
+                    <a:pt x="6101029" y="2924295"/>
+                  </a:lnTo>
+                  <a:lnTo>
+                    <a:pt x="6177662" y="2930527"/>
+                  </a:lnTo>
+                  <a:lnTo>
+                    <a:pt x="6254294" y="2936689"/>
+                  </a:lnTo>
+                  <a:lnTo>
+                    <a:pt x="6330927" y="2942783"/>
+                  </a:lnTo>
+                  <a:lnTo>
+                    <a:pt x="6407560" y="2948809"/>
+                  </a:lnTo>
+                  <a:lnTo>
+                    <a:pt x="6484192" y="2954767"/>
+                  </a:lnTo>
+                  <a:lnTo>
+                    <a:pt x="6560825" y="2960659"/>
+                  </a:lnTo>
+                  <a:lnTo>
+                    <a:pt x="6637457" y="2966486"/>
+                  </a:lnTo>
+                  <a:lnTo>
+                    <a:pt x="6714090" y="2972248"/>
+                  </a:lnTo>
+                  <a:lnTo>
+                    <a:pt x="6790722" y="2977945"/>
+                  </a:lnTo>
+                  <a:lnTo>
+                    <a:pt x="6867355" y="2983579"/>
+                  </a:lnTo>
+                  <a:lnTo>
+                    <a:pt x="6943987" y="2989151"/>
+                  </a:lnTo>
+                  <a:lnTo>
+                    <a:pt x="7020620" y="2994660"/>
+                  </a:lnTo>
+                  <a:lnTo>
+                    <a:pt x="7097253" y="3000108"/>
+                  </a:lnTo>
+                  <a:lnTo>
+                    <a:pt x="7173885" y="3005495"/>
+                  </a:lnTo>
+                  <a:lnTo>
+                    <a:pt x="7250518" y="3010822"/>
+                  </a:lnTo>
+                  <a:lnTo>
+                    <a:pt x="7327150" y="3016090"/>
+                  </a:lnTo>
+                  <a:lnTo>
+                    <a:pt x="7403783" y="3021299"/>
+                  </a:lnTo>
+                  <a:lnTo>
+                    <a:pt x="7403783" y="3378562"/>
+                  </a:lnTo>
+                  <a:lnTo>
+                    <a:pt x="7327150" y="3374314"/>
+                  </a:lnTo>
+                  <a:lnTo>
+                    <a:pt x="7250518" y="3369894"/>
+                  </a:lnTo>
+                  <a:lnTo>
+                    <a:pt x="7173885" y="3365296"/>
+                  </a:lnTo>
+                  <a:lnTo>
+                    <a:pt x="7097253" y="3360513"/>
+                  </a:lnTo>
+                  <a:lnTo>
+                    <a:pt x="7020620" y="3355536"/>
+                  </a:lnTo>
+                  <a:lnTo>
+                    <a:pt x="6943987" y="3350358"/>
+                  </a:lnTo>
+                  <a:lnTo>
+                    <a:pt x="6867355" y="3344971"/>
+                  </a:lnTo>
+                  <a:lnTo>
+                    <a:pt x="6790722" y="3339366"/>
+                  </a:lnTo>
+                  <a:lnTo>
+                    <a:pt x="6714090" y="3333535"/>
+                  </a:lnTo>
+                  <a:lnTo>
+                    <a:pt x="6637457" y="3327469"/>
+                  </a:lnTo>
+                  <a:lnTo>
+                    <a:pt x="6560825" y="3321157"/>
+                  </a:lnTo>
+                  <a:lnTo>
+                    <a:pt x="6484192" y="3314591"/>
+                  </a:lnTo>
+                  <a:lnTo>
+                    <a:pt x="6407560" y="3307759"/>
+                  </a:lnTo>
+                  <a:lnTo>
+                    <a:pt x="6330927" y="3300652"/>
+                  </a:lnTo>
+                  <a:lnTo>
+                    <a:pt x="6254294" y="3293257"/>
+                  </a:lnTo>
+                  <a:lnTo>
+                    <a:pt x="6177662" y="3285564"/>
+                  </a:lnTo>
+                  <a:lnTo>
+                    <a:pt x="6101029" y="3277560"/>
+                  </a:lnTo>
+                  <a:lnTo>
+                    <a:pt x="6024397" y="3269233"/>
+                  </a:lnTo>
+                  <a:lnTo>
+                    <a:pt x="5947764" y="3260570"/>
+                  </a:lnTo>
+                  <a:lnTo>
+                    <a:pt x="5871132" y="3251556"/>
+                  </a:lnTo>
+                  <a:lnTo>
+                    <a:pt x="5794499" y="3242179"/>
+                  </a:lnTo>
+                  <a:lnTo>
+                    <a:pt x="5717867" y="3232423"/>
+                  </a:lnTo>
+                  <a:lnTo>
+                    <a:pt x="5641234" y="3222273"/>
+                  </a:lnTo>
+                  <a:lnTo>
+                    <a:pt x="5564602" y="3211713"/>
+                  </a:lnTo>
+                  <a:lnTo>
+                    <a:pt x="5487969" y="3200727"/>
+                  </a:lnTo>
+                  <a:lnTo>
+                    <a:pt x="5411336" y="3189296"/>
+                  </a:lnTo>
+                  <a:lnTo>
+                    <a:pt x="5334704" y="3177405"/>
+                  </a:lnTo>
+                  <a:lnTo>
+                    <a:pt x="5258071" y="3165033"/>
+                  </a:lnTo>
+                  <a:lnTo>
+                    <a:pt x="5181439" y="3152161"/>
+                  </a:lnTo>
+                  <a:lnTo>
+                    <a:pt x="5104806" y="3138769"/>
+                  </a:lnTo>
+                  <a:lnTo>
+                    <a:pt x="5028174" y="3124837"/>
+                  </a:lnTo>
+                  <a:lnTo>
+                    <a:pt x="4951541" y="3110342"/>
+                  </a:lnTo>
+                  <a:lnTo>
+                    <a:pt x="4874909" y="3095262"/>
+                  </a:lnTo>
+                  <a:lnTo>
+                    <a:pt x="4798276" y="3079572"/>
+                  </a:lnTo>
+                  <a:lnTo>
+                    <a:pt x="4721644" y="3063249"/>
+                  </a:lnTo>
+                  <a:lnTo>
+                    <a:pt x="4645011" y="3046267"/>
+                  </a:lnTo>
+                  <a:lnTo>
+                    <a:pt x="4568378" y="3028599"/>
+                  </a:lnTo>
+                  <a:lnTo>
+                    <a:pt x="4491746" y="3010217"/>
+                  </a:lnTo>
+                  <a:lnTo>
+                    <a:pt x="4415113" y="2991093"/>
+                  </a:lnTo>
+                  <a:lnTo>
+                    <a:pt x="4338481" y="2971196"/>
+                  </a:lnTo>
+                  <a:lnTo>
+                    <a:pt x="4261848" y="2950496"/>
+                  </a:lnTo>
+                  <a:lnTo>
+                    <a:pt x="4185216" y="2928960"/>
+                  </a:lnTo>
+                  <a:lnTo>
+                    <a:pt x="4108583" y="2906555"/>
+                  </a:lnTo>
+                  <a:lnTo>
+                    <a:pt x="4031951" y="2883244"/>
+                  </a:lnTo>
+                  <a:lnTo>
+                    <a:pt x="3955318" y="2858992"/>
+                  </a:lnTo>
+                  <a:lnTo>
+                    <a:pt x="3878685" y="2833760"/>
+                  </a:lnTo>
+                  <a:lnTo>
+                    <a:pt x="3802053" y="2807510"/>
+                  </a:lnTo>
+                  <a:lnTo>
+                    <a:pt x="3725420" y="2780199"/>
+                  </a:lnTo>
+                  <a:lnTo>
+                    <a:pt x="3648788" y="2751785"/>
+                  </a:lnTo>
+                  <a:lnTo>
+                    <a:pt x="3572155" y="2722224"/>
+                  </a:lnTo>
+                  <a:lnTo>
+                    <a:pt x="3495523" y="2691469"/>
+                  </a:lnTo>
+                  <a:lnTo>
+                    <a:pt x="3418890" y="2659472"/>
+                  </a:lnTo>
+                  <a:lnTo>
+                    <a:pt x="3342258" y="2646427"/>
+                  </a:lnTo>
+                  <a:lnTo>
+                    <a:pt x="3265625" y="2636996"/>
+                  </a:lnTo>
+                  <a:lnTo>
+                    <a:pt x="3188993" y="2627458"/>
+                  </a:lnTo>
+                  <a:lnTo>
+                    <a:pt x="3112360" y="2617812"/>
+                  </a:lnTo>
+                  <a:lnTo>
+                    <a:pt x="3035727" y="2608058"/>
+                  </a:lnTo>
+                  <a:lnTo>
+                    <a:pt x="2959095" y="2598194"/>
+                  </a:lnTo>
+                  <a:lnTo>
+                    <a:pt x="2882462" y="2588219"/>
+                  </a:lnTo>
+                  <a:lnTo>
+                    <a:pt x="2805830" y="2578131"/>
+                  </a:lnTo>
+                  <a:lnTo>
+                    <a:pt x="2729197" y="2567930"/>
+                  </a:lnTo>
+                  <a:lnTo>
+                    <a:pt x="2652565" y="2557614"/>
+                  </a:lnTo>
+                  <a:lnTo>
+                    <a:pt x="2575932" y="2547182"/>
+                  </a:lnTo>
+                  <a:lnTo>
+                    <a:pt x="2499300" y="2536632"/>
+                  </a:lnTo>
+                  <a:lnTo>
+                    <a:pt x="2422667" y="2525963"/>
+                  </a:lnTo>
+                  <a:lnTo>
+                    <a:pt x="2346034" y="2515174"/>
+                  </a:lnTo>
+                  <a:lnTo>
+                    <a:pt x="2269402" y="2504264"/>
+                  </a:lnTo>
+                  <a:lnTo>
+                    <a:pt x="2192769" y="2493231"/>
+                  </a:lnTo>
+                  <a:lnTo>
+                    <a:pt x="2116137" y="2482073"/>
+                  </a:lnTo>
+                  <a:lnTo>
+                    <a:pt x="2039504" y="2470790"/>
+                  </a:lnTo>
+                  <a:lnTo>
+                    <a:pt x="1962872" y="2459380"/>
+                  </a:lnTo>
+                  <a:lnTo>
+                    <a:pt x="1886239" y="2447841"/>
+                  </a:lnTo>
+                  <a:lnTo>
+                    <a:pt x="1809607" y="2436172"/>
+                  </a:lnTo>
+                  <a:lnTo>
+                    <a:pt x="1732974" y="2424372"/>
+                  </a:lnTo>
+                  <a:lnTo>
+                    <a:pt x="1656342" y="2412439"/>
+                  </a:lnTo>
+                  <a:lnTo>
+                    <a:pt x="1579709" y="2400371"/>
+                  </a:lnTo>
+                  <a:lnTo>
+                    <a:pt x="1503076" y="2388168"/>
+                  </a:lnTo>
+                  <a:lnTo>
+                    <a:pt x="1426444" y="2375827"/>
+                  </a:lnTo>
+                  <a:lnTo>
+                    <a:pt x="1349811" y="2363347"/>
+                  </a:lnTo>
+                  <a:lnTo>
+                    <a:pt x="1273179" y="2350726"/>
+                  </a:lnTo>
+                  <a:lnTo>
+                    <a:pt x="1196546" y="2337964"/>
+                  </a:lnTo>
+                  <a:lnTo>
+                    <a:pt x="1119914" y="2325057"/>
+                  </a:lnTo>
+                  <a:lnTo>
+                    <a:pt x="1043281" y="2312005"/>
+                  </a:lnTo>
+                  <a:lnTo>
+                    <a:pt x="966649" y="2298807"/>
+                  </a:lnTo>
+                  <a:lnTo>
+                    <a:pt x="890016" y="2285459"/>
+                  </a:lnTo>
+                  <a:lnTo>
+                    <a:pt x="813384" y="2271961"/>
+                  </a:lnTo>
+                  <a:lnTo>
+                    <a:pt x="736751" y="2258311"/>
+                  </a:lnTo>
+                  <a:lnTo>
+                    <a:pt x="660118" y="2244507"/>
+                  </a:lnTo>
+                  <a:lnTo>
+                    <a:pt x="583486" y="2230548"/>
+                  </a:lnTo>
+                  <a:lnTo>
+                    <a:pt x="506853" y="2216432"/>
+                  </a:lnTo>
+                  <a:lnTo>
+                    <a:pt x="430221" y="2202156"/>
+                  </a:lnTo>
+                  <a:lnTo>
+                    <a:pt x="353588" y="2187720"/>
+                  </a:lnTo>
+                  <a:lnTo>
+                    <a:pt x="276956" y="2173121"/>
+                  </a:lnTo>
+                  <a:lnTo>
+                    <a:pt x="200323" y="2158358"/>
+                  </a:lnTo>
+                  <a:lnTo>
+                    <a:pt x="123691" y="2143428"/>
+                  </a:lnTo>
+                  <a:lnTo>
+                    <a:pt x="47058" y="2128330"/>
+                  </a:lnTo>
+                  <a:lnTo>
+                    <a:pt x="0" y="2118955"/>
                   </a:lnTo>
                   <a:close/>
                 </a:path>
@@ -3597,282 +3597,282 @@
           </p:nvSpPr>
           <p:spPr>
             <a:xfrm>
-              <a:off x="1446946" y="1896563"/>
-              <a:ext cx="6774354" cy="3167776"/>
+              <a:off x="1446946" y="2073503"/>
+              <a:ext cx="6774354" cy="3021299"/>
             </a:xfrm>
             <a:custGeom>
               <a:avLst/>
               <a:pathLst>
-                <a:path w="6774354" h="3167776">
+                <a:path w="6774354" h="3021299">
                   <a:moveTo>
                     <a:pt x="0" y="0"/>
                   </a:moveTo>
                   <a:lnTo>
-                    <a:pt x="30690" y="58138"/>
-                  </a:lnTo>
-                  <a:lnTo>
-                    <a:pt x="107322" y="197671"/>
-                  </a:lnTo>
-                  <a:lnTo>
-                    <a:pt x="183955" y="331788"/>
-                  </a:lnTo>
-                  <a:lnTo>
-                    <a:pt x="260587" y="460699"/>
-                  </a:lnTo>
-                  <a:lnTo>
-                    <a:pt x="337220" y="584606"/>
-                  </a:lnTo>
-                  <a:lnTo>
-                    <a:pt x="413853" y="703703"/>
-                  </a:lnTo>
-                  <a:lnTo>
-                    <a:pt x="490485" y="818176"/>
-                  </a:lnTo>
-                  <a:lnTo>
-                    <a:pt x="567118" y="928206"/>
-                  </a:lnTo>
-                  <a:lnTo>
-                    <a:pt x="643750" y="1033965"/>
-                  </a:lnTo>
-                  <a:lnTo>
-                    <a:pt x="720383" y="1135618"/>
-                  </a:lnTo>
-                  <a:lnTo>
-                    <a:pt x="797015" y="1233326"/>
-                  </a:lnTo>
-                  <a:lnTo>
-                    <a:pt x="873648" y="1327240"/>
-                  </a:lnTo>
-                  <a:lnTo>
-                    <a:pt x="950280" y="1417509"/>
-                  </a:lnTo>
-                  <a:lnTo>
-                    <a:pt x="1026913" y="1504274"/>
-                  </a:lnTo>
-                  <a:lnTo>
-                    <a:pt x="1103546" y="1587670"/>
-                  </a:lnTo>
-                  <a:lnTo>
-                    <a:pt x="1180178" y="1667830"/>
-                  </a:lnTo>
-                  <a:lnTo>
-                    <a:pt x="1256811" y="1744877"/>
-                  </a:lnTo>
-                  <a:lnTo>
-                    <a:pt x="1333443" y="1818934"/>
-                  </a:lnTo>
-                  <a:lnTo>
-                    <a:pt x="1410076" y="1890116"/>
-                  </a:lnTo>
-                  <a:lnTo>
-                    <a:pt x="1486708" y="1958535"/>
-                  </a:lnTo>
-                  <a:lnTo>
-                    <a:pt x="1563341" y="2024298"/>
-                  </a:lnTo>
-                  <a:lnTo>
-                    <a:pt x="1639973" y="2087508"/>
-                  </a:lnTo>
-                  <a:lnTo>
-                    <a:pt x="1716606" y="2148264"/>
-                  </a:lnTo>
-                  <a:lnTo>
-                    <a:pt x="1793238" y="2206662"/>
-                  </a:lnTo>
-                  <a:lnTo>
-                    <a:pt x="1869871" y="2262793"/>
-                  </a:lnTo>
-                  <a:lnTo>
-                    <a:pt x="1946504" y="2316745"/>
-                  </a:lnTo>
-                  <a:lnTo>
-                    <a:pt x="2023136" y="2368602"/>
-                  </a:lnTo>
-                  <a:lnTo>
-                    <a:pt x="2099769" y="2418447"/>
-                  </a:lnTo>
-                  <a:lnTo>
-                    <a:pt x="2176401" y="2466357"/>
-                  </a:lnTo>
-                  <a:lnTo>
-                    <a:pt x="2253034" y="2512407"/>
-                  </a:lnTo>
-                  <a:lnTo>
-                    <a:pt x="2329666" y="2556669"/>
-                  </a:lnTo>
-                  <a:lnTo>
-                    <a:pt x="2406299" y="2599213"/>
-                  </a:lnTo>
-                  <a:lnTo>
-                    <a:pt x="2482931" y="2640106"/>
-                  </a:lnTo>
-                  <a:lnTo>
-                    <a:pt x="2559564" y="2679411"/>
-                  </a:lnTo>
-                  <a:lnTo>
-                    <a:pt x="2636197" y="2717191"/>
-                  </a:lnTo>
-                  <a:lnTo>
-                    <a:pt x="2712829" y="2753504"/>
-                  </a:lnTo>
-                  <a:lnTo>
-                    <a:pt x="2789462" y="2784509"/>
-                  </a:lnTo>
-                  <a:lnTo>
-                    <a:pt x="2866094" y="2794179"/>
-                  </a:lnTo>
-                  <a:lnTo>
-                    <a:pt x="2942727" y="2803741"/>
-                  </a:lnTo>
-                  <a:lnTo>
-                    <a:pt x="3019359" y="2813197"/>
-                  </a:lnTo>
-                  <a:lnTo>
-                    <a:pt x="3095992" y="2822548"/>
-                  </a:lnTo>
-                  <a:lnTo>
-                    <a:pt x="3172624" y="2831794"/>
-                  </a:lnTo>
-                  <a:lnTo>
-                    <a:pt x="3249257" y="2840937"/>
-                  </a:lnTo>
-                  <a:lnTo>
-                    <a:pt x="3325889" y="2849979"/>
-                  </a:lnTo>
-                  <a:lnTo>
-                    <a:pt x="3402522" y="2858919"/>
-                  </a:lnTo>
-                  <a:lnTo>
-                    <a:pt x="3479155" y="2867761"/>
-                  </a:lnTo>
-                  <a:lnTo>
-                    <a:pt x="3555787" y="2876503"/>
-                  </a:lnTo>
-                  <a:lnTo>
-                    <a:pt x="3632420" y="2885149"/>
-                  </a:lnTo>
-                  <a:lnTo>
-                    <a:pt x="3709052" y="2893698"/>
-                  </a:lnTo>
-                  <a:lnTo>
-                    <a:pt x="3785685" y="2902151"/>
-                  </a:lnTo>
-                  <a:lnTo>
-                    <a:pt x="3862317" y="2910511"/>
-                  </a:lnTo>
-                  <a:lnTo>
-                    <a:pt x="3938950" y="2918778"/>
-                  </a:lnTo>
-                  <a:lnTo>
-                    <a:pt x="4015582" y="2926952"/>
-                  </a:lnTo>
-                  <a:lnTo>
-                    <a:pt x="4092215" y="2935035"/>
-                  </a:lnTo>
-                  <a:lnTo>
-                    <a:pt x="4168847" y="2943029"/>
-                  </a:lnTo>
-                  <a:lnTo>
-                    <a:pt x="4245480" y="2950933"/>
-                  </a:lnTo>
-                  <a:lnTo>
-                    <a:pt x="4322113" y="2958749"/>
-                  </a:lnTo>
-                  <a:lnTo>
-                    <a:pt x="4398745" y="2966478"/>
-                  </a:lnTo>
-                  <a:lnTo>
-                    <a:pt x="4475378" y="2974122"/>
-                  </a:lnTo>
-                  <a:lnTo>
-                    <a:pt x="4552010" y="2981680"/>
-                  </a:lnTo>
-                  <a:lnTo>
-                    <a:pt x="4628643" y="2989153"/>
-                  </a:lnTo>
-                  <a:lnTo>
-                    <a:pt x="4705275" y="2996544"/>
-                  </a:lnTo>
-                  <a:lnTo>
-                    <a:pt x="4781908" y="3003852"/>
-                  </a:lnTo>
-                  <a:lnTo>
-                    <a:pt x="4858540" y="3011079"/>
-                  </a:lnTo>
-                  <a:lnTo>
-                    <a:pt x="4935173" y="3018225"/>
-                  </a:lnTo>
-                  <a:lnTo>
-                    <a:pt x="5011806" y="3025292"/>
-                  </a:lnTo>
-                  <a:lnTo>
-                    <a:pt x="5088438" y="3032280"/>
-                  </a:lnTo>
-                  <a:lnTo>
-                    <a:pt x="5165071" y="3039190"/>
-                  </a:lnTo>
-                  <a:lnTo>
-                    <a:pt x="5241703" y="3046023"/>
-                  </a:lnTo>
-                  <a:lnTo>
-                    <a:pt x="5318336" y="3052780"/>
-                  </a:lnTo>
-                  <a:lnTo>
-                    <a:pt x="5394968" y="3059462"/>
-                  </a:lnTo>
-                  <a:lnTo>
-                    <a:pt x="5471601" y="3066069"/>
-                  </a:lnTo>
-                  <a:lnTo>
-                    <a:pt x="5548233" y="3072603"/>
-                  </a:lnTo>
-                  <a:lnTo>
-                    <a:pt x="5624866" y="3079064"/>
-                  </a:lnTo>
-                  <a:lnTo>
-                    <a:pt x="5701498" y="3085453"/>
-                  </a:lnTo>
-                  <a:lnTo>
-                    <a:pt x="5778131" y="3091771"/>
-                  </a:lnTo>
-                  <a:lnTo>
-                    <a:pt x="5854764" y="3098018"/>
-                  </a:lnTo>
-                  <a:lnTo>
-                    <a:pt x="5931396" y="3104196"/>
-                  </a:lnTo>
-                  <a:lnTo>
-                    <a:pt x="6008029" y="3110305"/>
-                  </a:lnTo>
-                  <a:lnTo>
-                    <a:pt x="6084661" y="3116346"/>
-                  </a:lnTo>
-                  <a:lnTo>
-                    <a:pt x="6161294" y="3122320"/>
-                  </a:lnTo>
-                  <a:lnTo>
-                    <a:pt x="6237926" y="3128227"/>
-                  </a:lnTo>
-                  <a:lnTo>
-                    <a:pt x="6314559" y="3134069"/>
-                  </a:lnTo>
-                  <a:lnTo>
-                    <a:pt x="6391191" y="3139845"/>
-                  </a:lnTo>
-                  <a:lnTo>
-                    <a:pt x="6467824" y="3145557"/>
-                  </a:lnTo>
-                  <a:lnTo>
-                    <a:pt x="6544457" y="3151205"/>
-                  </a:lnTo>
-                  <a:lnTo>
-                    <a:pt x="6621089" y="3156791"/>
-                  </a:lnTo>
-                  <a:lnTo>
-                    <a:pt x="6697722" y="3162314"/>
-                  </a:lnTo>
-                  <a:lnTo>
-                    <a:pt x="6774354" y="3167776"/>
+                    <a:pt x="30690" y="55449"/>
+                  </a:lnTo>
+                  <a:lnTo>
+                    <a:pt x="107322" y="188531"/>
+                  </a:lnTo>
+                  <a:lnTo>
+                    <a:pt x="183955" y="316447"/>
+                  </a:lnTo>
+                  <a:lnTo>
+                    <a:pt x="260587" y="439397"/>
+                  </a:lnTo>
+                  <a:lnTo>
+                    <a:pt x="337220" y="557574"/>
+                  </a:lnTo>
+                  <a:lnTo>
+                    <a:pt x="413853" y="671164"/>
+                  </a:lnTo>
+                  <a:lnTo>
+                    <a:pt x="490485" y="780344"/>
+                  </a:lnTo>
+                  <a:lnTo>
+                    <a:pt x="567118" y="885286"/>
+                  </a:lnTo>
+                  <a:lnTo>
+                    <a:pt x="643750" y="986155"/>
+                  </a:lnTo>
+                  <a:lnTo>
+                    <a:pt x="720383" y="1083108"/>
+                  </a:lnTo>
+                  <a:lnTo>
+                    <a:pt x="797015" y="1176297"/>
+                  </a:lnTo>
+                  <a:lnTo>
+                    <a:pt x="873648" y="1265869"/>
+                  </a:lnTo>
+                  <a:lnTo>
+                    <a:pt x="950280" y="1351964"/>
+                  </a:lnTo>
+                  <a:lnTo>
+                    <a:pt x="1026913" y="1434717"/>
+                  </a:lnTo>
+                  <a:lnTo>
+                    <a:pt x="1103546" y="1514257"/>
+                  </a:lnTo>
+                  <a:lnTo>
+                    <a:pt x="1180178" y="1590710"/>
+                  </a:lnTo>
+                  <a:lnTo>
+                    <a:pt x="1256811" y="1664195"/>
+                  </a:lnTo>
+                  <a:lnTo>
+                    <a:pt x="1333443" y="1734827"/>
+                  </a:lnTo>
+                  <a:lnTo>
+                    <a:pt x="1410076" y="1802718"/>
+                  </a:lnTo>
+                  <a:lnTo>
+                    <a:pt x="1486708" y="1867973"/>
+                  </a:lnTo>
+                  <a:lnTo>
+                    <a:pt x="1563341" y="1930695"/>
+                  </a:lnTo>
+                  <a:lnTo>
+                    <a:pt x="1639973" y="1990982"/>
+                  </a:lnTo>
+                  <a:lnTo>
+                    <a:pt x="1716606" y="2048929"/>
+                  </a:lnTo>
+                  <a:lnTo>
+                    <a:pt x="1793238" y="2104627"/>
+                  </a:lnTo>
+                  <a:lnTo>
+                    <a:pt x="1869871" y="2158162"/>
+                  </a:lnTo>
+                  <a:lnTo>
+                    <a:pt x="1946504" y="2209619"/>
+                  </a:lnTo>
+                  <a:lnTo>
+                    <a:pt x="2023136" y="2259079"/>
+                  </a:lnTo>
+                  <a:lnTo>
+                    <a:pt x="2099769" y="2306619"/>
+                  </a:lnTo>
+                  <a:lnTo>
+                    <a:pt x="2176401" y="2352313"/>
+                  </a:lnTo>
+                  <a:lnTo>
+                    <a:pt x="2253034" y="2396234"/>
+                  </a:lnTo>
+                  <a:lnTo>
+                    <a:pt x="2329666" y="2438450"/>
+                  </a:lnTo>
+                  <a:lnTo>
+                    <a:pt x="2406299" y="2479027"/>
+                  </a:lnTo>
+                  <a:lnTo>
+                    <a:pt x="2482931" y="2518028"/>
+                  </a:lnTo>
+                  <a:lnTo>
+                    <a:pt x="2559564" y="2555516"/>
+                  </a:lnTo>
+                  <a:lnTo>
+                    <a:pt x="2636197" y="2591549"/>
+                  </a:lnTo>
+                  <a:lnTo>
+                    <a:pt x="2712829" y="2626183"/>
+                  </a:lnTo>
+                  <a:lnTo>
+                    <a:pt x="2789462" y="2655754"/>
+                  </a:lnTo>
+                  <a:lnTo>
+                    <a:pt x="2866094" y="2664977"/>
+                  </a:lnTo>
+                  <a:lnTo>
+                    <a:pt x="2942727" y="2674097"/>
+                  </a:lnTo>
+                  <a:lnTo>
+                    <a:pt x="3019359" y="2683116"/>
+                  </a:lnTo>
+                  <a:lnTo>
+                    <a:pt x="3095992" y="2692034"/>
+                  </a:lnTo>
+                  <a:lnTo>
+                    <a:pt x="3172624" y="2700853"/>
+                  </a:lnTo>
+                  <a:lnTo>
+                    <a:pt x="3249257" y="2709573"/>
+                  </a:lnTo>
+                  <a:lnTo>
+                    <a:pt x="3325889" y="2718197"/>
+                  </a:lnTo>
+                  <a:lnTo>
+                    <a:pt x="3402522" y="2726724"/>
+                  </a:lnTo>
+                  <a:lnTo>
+                    <a:pt x="3479155" y="2735156"/>
+                  </a:lnTo>
+                  <a:lnTo>
+                    <a:pt x="3555787" y="2743495"/>
+                  </a:lnTo>
+                  <a:lnTo>
+                    <a:pt x="3632420" y="2751740"/>
+                  </a:lnTo>
+                  <a:lnTo>
+                    <a:pt x="3709052" y="2759894"/>
+                  </a:lnTo>
+                  <a:lnTo>
+                    <a:pt x="3785685" y="2767957"/>
+                  </a:lnTo>
+                  <a:lnTo>
+                    <a:pt x="3862317" y="2775930"/>
+                  </a:lnTo>
+                  <a:lnTo>
+                    <a:pt x="3938950" y="2783814"/>
+                  </a:lnTo>
+                  <a:lnTo>
+                    <a:pt x="4015582" y="2791611"/>
+                  </a:lnTo>
+                  <a:lnTo>
+                    <a:pt x="4092215" y="2799320"/>
+                  </a:lnTo>
+                  <a:lnTo>
+                    <a:pt x="4168847" y="2806944"/>
+                  </a:lnTo>
+                  <a:lnTo>
+                    <a:pt x="4245480" y="2814483"/>
+                  </a:lnTo>
+                  <a:lnTo>
+                    <a:pt x="4322113" y="2821938"/>
+                  </a:lnTo>
+                  <a:lnTo>
+                    <a:pt x="4398745" y="2829310"/>
+                  </a:lnTo>
+                  <a:lnTo>
+                    <a:pt x="4475378" y="2836599"/>
+                  </a:lnTo>
+                  <a:lnTo>
+                    <a:pt x="4552010" y="2843808"/>
+                  </a:lnTo>
+                  <a:lnTo>
+                    <a:pt x="4628643" y="2850936"/>
+                  </a:lnTo>
+                  <a:lnTo>
+                    <a:pt x="4705275" y="2857985"/>
+                  </a:lnTo>
+                  <a:lnTo>
+                    <a:pt x="4781908" y="2864955"/>
+                  </a:lnTo>
+                  <a:lnTo>
+                    <a:pt x="4858540" y="2871848"/>
+                  </a:lnTo>
+                  <a:lnTo>
+                    <a:pt x="4935173" y="2878663"/>
+                  </a:lnTo>
+                  <a:lnTo>
+                    <a:pt x="5011806" y="2885403"/>
+                  </a:lnTo>
+                  <a:lnTo>
+                    <a:pt x="5088438" y="2892068"/>
+                  </a:lnTo>
+                  <a:lnTo>
+                    <a:pt x="5165071" y="2898659"/>
+                  </a:lnTo>
+                  <a:lnTo>
+                    <a:pt x="5241703" y="2905176"/>
+                  </a:lnTo>
+                  <a:lnTo>
+                    <a:pt x="5318336" y="2911621"/>
+                  </a:lnTo>
+                  <a:lnTo>
+                    <a:pt x="5394968" y="2917994"/>
+                  </a:lnTo>
+                  <a:lnTo>
+                    <a:pt x="5471601" y="2924295"/>
+                  </a:lnTo>
+                  <a:lnTo>
+                    <a:pt x="5548233" y="2930527"/>
+                  </a:lnTo>
+                  <a:lnTo>
+                    <a:pt x="5624866" y="2936689"/>
+                  </a:lnTo>
+                  <a:lnTo>
+                    <a:pt x="5701498" y="2942783"/>
+                  </a:lnTo>
+                  <a:lnTo>
+                    <a:pt x="5778131" y="2948809"/>
+                  </a:lnTo>
+                  <a:lnTo>
+                    <a:pt x="5854764" y="2954767"/>
+                  </a:lnTo>
+                  <a:lnTo>
+                    <a:pt x="5931396" y="2960659"/>
+                  </a:lnTo>
+                  <a:lnTo>
+                    <a:pt x="6008029" y="2966486"/>
+                  </a:lnTo>
+                  <a:lnTo>
+                    <a:pt x="6084661" y="2972248"/>
+                  </a:lnTo>
+                  <a:lnTo>
+                    <a:pt x="6161294" y="2977945"/>
+                  </a:lnTo>
+                  <a:lnTo>
+                    <a:pt x="6237926" y="2983579"/>
+                  </a:lnTo>
+                  <a:lnTo>
+                    <a:pt x="6314559" y="2989151"/>
+                  </a:lnTo>
+                  <a:lnTo>
+                    <a:pt x="6391191" y="2994660"/>
+                  </a:lnTo>
+                  <a:lnTo>
+                    <a:pt x="6467824" y="3000108"/>
+                  </a:lnTo>
+                  <a:lnTo>
+                    <a:pt x="6544457" y="3005495"/>
+                  </a:lnTo>
+                  <a:lnTo>
+                    <a:pt x="6621089" y="3010822"/>
+                  </a:lnTo>
+                  <a:lnTo>
+                    <a:pt x="6697722" y="3016090"/>
+                  </a:lnTo>
+                  <a:lnTo>
+                    <a:pt x="6774354" y="3021299"/>
                   </a:lnTo>
                 </a:path>
               </a:pathLst>
@@ -3892,303 +3892,303 @@
           </p:nvSpPr>
           <p:spPr>
             <a:xfrm>
-              <a:off x="817517" y="4118248"/>
-              <a:ext cx="7403783" cy="1320674"/>
+              <a:off x="817517" y="4192458"/>
+              <a:ext cx="7403783" cy="1259607"/>
             </a:xfrm>
             <a:custGeom>
               <a:avLst/>
               <a:pathLst>
-                <a:path w="7403783" h="1320674">
+                <a:path w="7403783" h="1259607">
                   <a:moveTo>
-                    <a:pt x="7403783" y="1320674"/>
+                    <a:pt x="7403783" y="1259607"/>
                   </a:moveTo>
                   <a:lnTo>
-                    <a:pt x="7327150" y="1316220"/>
-                  </a:lnTo>
-                  <a:lnTo>
-                    <a:pt x="7250518" y="1311586"/>
-                  </a:lnTo>
-                  <a:lnTo>
-                    <a:pt x="7173885" y="1306765"/>
-                  </a:lnTo>
-                  <a:lnTo>
-                    <a:pt x="7097253" y="1301750"/>
-                  </a:lnTo>
-                  <a:lnTo>
-                    <a:pt x="7020620" y="1296532"/>
-                  </a:lnTo>
-                  <a:lnTo>
-                    <a:pt x="6943987" y="1291103"/>
-                  </a:lnTo>
-                  <a:lnTo>
-                    <a:pt x="6867355" y="1285454"/>
-                  </a:lnTo>
-                  <a:lnTo>
-                    <a:pt x="6790722" y="1279578"/>
-                  </a:lnTo>
-                  <a:lnTo>
-                    <a:pt x="6714090" y="1273464"/>
-                  </a:lnTo>
-                  <a:lnTo>
-                    <a:pt x="6637457" y="1267104"/>
-                  </a:lnTo>
-                  <a:lnTo>
-                    <a:pt x="6560825" y="1260486"/>
-                  </a:lnTo>
-                  <a:lnTo>
-                    <a:pt x="6484192" y="1253601"/>
-                  </a:lnTo>
-                  <a:lnTo>
-                    <a:pt x="6407560" y="1246439"/>
-                  </a:lnTo>
-                  <a:lnTo>
-                    <a:pt x="6330927" y="1238987"/>
-                  </a:lnTo>
-                  <a:lnTo>
-                    <a:pt x="6254294" y="1231234"/>
-                  </a:lnTo>
-                  <a:lnTo>
-                    <a:pt x="6177662" y="1223167"/>
-                  </a:lnTo>
-                  <a:lnTo>
-                    <a:pt x="6101029" y="1214776"/>
-                  </a:lnTo>
-                  <a:lnTo>
-                    <a:pt x="6024397" y="1206045"/>
-                  </a:lnTo>
-                  <a:lnTo>
-                    <a:pt x="5947764" y="1196961"/>
-                  </a:lnTo>
-                  <a:lnTo>
-                    <a:pt x="5871132" y="1187511"/>
-                  </a:lnTo>
-                  <a:lnTo>
-                    <a:pt x="5794499" y="1177679"/>
-                  </a:lnTo>
-                  <a:lnTo>
-                    <a:pt x="5717867" y="1167450"/>
-                  </a:lnTo>
-                  <a:lnTo>
-                    <a:pt x="5641234" y="1156808"/>
-                  </a:lnTo>
-                  <a:lnTo>
-                    <a:pt x="5564602" y="1145736"/>
-                  </a:lnTo>
-                  <a:lnTo>
-                    <a:pt x="5487969" y="1134217"/>
-                  </a:lnTo>
-                  <a:lnTo>
-                    <a:pt x="5411336" y="1122233"/>
-                  </a:lnTo>
-                  <a:lnTo>
-                    <a:pt x="5334704" y="1109765"/>
-                  </a:lnTo>
-                  <a:lnTo>
-                    <a:pt x="5258071" y="1096793"/>
-                  </a:lnTo>
-                  <a:lnTo>
-                    <a:pt x="5181439" y="1083297"/>
-                  </a:lnTo>
-                  <a:lnTo>
-                    <a:pt x="5104806" y="1069256"/>
-                  </a:lnTo>
-                  <a:lnTo>
-                    <a:pt x="5028174" y="1054648"/>
-                  </a:lnTo>
-                  <a:lnTo>
-                    <a:pt x="4951541" y="1039451"/>
-                  </a:lnTo>
-                  <a:lnTo>
-                    <a:pt x="4874909" y="1023639"/>
-                  </a:lnTo>
-                  <a:lnTo>
-                    <a:pt x="4798276" y="1007189"/>
-                  </a:lnTo>
-                  <a:lnTo>
-                    <a:pt x="4721644" y="990075"/>
-                  </a:lnTo>
-                  <a:lnTo>
-                    <a:pt x="4645011" y="972269"/>
-                  </a:lnTo>
-                  <a:lnTo>
-                    <a:pt x="4568378" y="953744"/>
-                  </a:lnTo>
-                  <a:lnTo>
-                    <a:pt x="4491746" y="934471"/>
-                  </a:lnTo>
-                  <a:lnTo>
-                    <a:pt x="4415113" y="914420"/>
-                  </a:lnTo>
-                  <a:lnTo>
-                    <a:pt x="4338481" y="893559"/>
-                  </a:lnTo>
-                  <a:lnTo>
-                    <a:pt x="4261848" y="871855"/>
-                  </a:lnTo>
-                  <a:lnTo>
-                    <a:pt x="4185216" y="849275"/>
-                  </a:lnTo>
-                  <a:lnTo>
-                    <a:pt x="4108583" y="825783"/>
-                  </a:lnTo>
-                  <a:lnTo>
-                    <a:pt x="4031951" y="801342"/>
-                  </a:lnTo>
-                  <a:lnTo>
-                    <a:pt x="3955318" y="775915"/>
-                  </a:lnTo>
-                  <a:lnTo>
-                    <a:pt x="3878685" y="749460"/>
-                  </a:lnTo>
-                  <a:lnTo>
-                    <a:pt x="3802053" y="721937"/>
-                  </a:lnTo>
-                  <a:lnTo>
-                    <a:pt x="3725420" y="693302"/>
-                  </a:lnTo>
-                  <a:lnTo>
-                    <a:pt x="3648788" y="663511"/>
-                  </a:lnTo>
-                  <a:lnTo>
-                    <a:pt x="3572155" y="632516"/>
-                  </a:lnTo>
-                  <a:lnTo>
-                    <a:pt x="3495523" y="600270"/>
-                  </a:lnTo>
-                  <a:lnTo>
-                    <a:pt x="3418890" y="566722"/>
-                  </a:lnTo>
-                  <a:lnTo>
-                    <a:pt x="3342258" y="553045"/>
-                  </a:lnTo>
-                  <a:lnTo>
-                    <a:pt x="3265625" y="543156"/>
-                  </a:lnTo>
-                  <a:lnTo>
-                    <a:pt x="3188993" y="533155"/>
-                  </a:lnTo>
-                  <a:lnTo>
-                    <a:pt x="3112360" y="523042"/>
-                  </a:lnTo>
-                  <a:lnTo>
-                    <a:pt x="3035727" y="512815"/>
-                  </a:lnTo>
-                  <a:lnTo>
-                    <a:pt x="2959095" y="502473"/>
-                  </a:lnTo>
-                  <a:lnTo>
-                    <a:pt x="2882462" y="492014"/>
-                  </a:lnTo>
-                  <a:lnTo>
-                    <a:pt x="2805830" y="481437"/>
-                  </a:lnTo>
-                  <a:lnTo>
-                    <a:pt x="2729197" y="470742"/>
-                  </a:lnTo>
-                  <a:lnTo>
-                    <a:pt x="2652565" y="459925"/>
-                  </a:lnTo>
-                  <a:lnTo>
-                    <a:pt x="2575932" y="448987"/>
-                  </a:lnTo>
-                  <a:lnTo>
-                    <a:pt x="2499300" y="437926"/>
-                  </a:lnTo>
-                  <a:lnTo>
-                    <a:pt x="2422667" y="426740"/>
-                  </a:lnTo>
-                  <a:lnTo>
-                    <a:pt x="2346034" y="415428"/>
-                  </a:lnTo>
-                  <a:lnTo>
-                    <a:pt x="2269402" y="403989"/>
-                  </a:lnTo>
-                  <a:lnTo>
-                    <a:pt x="2192769" y="392421"/>
-                  </a:lnTo>
-                  <a:lnTo>
-                    <a:pt x="2116137" y="380723"/>
-                  </a:lnTo>
-                  <a:lnTo>
-                    <a:pt x="2039504" y="368892"/>
-                  </a:lnTo>
-                  <a:lnTo>
-                    <a:pt x="1962872" y="356929"/>
-                  </a:lnTo>
-                  <a:lnTo>
-                    <a:pt x="1886239" y="344831"/>
-                  </a:lnTo>
-                  <a:lnTo>
-                    <a:pt x="1809607" y="332596"/>
-                  </a:lnTo>
-                  <a:lnTo>
-                    <a:pt x="1732974" y="320224"/>
-                  </a:lnTo>
-                  <a:lnTo>
-                    <a:pt x="1656342" y="307712"/>
-                  </a:lnTo>
-                  <a:lnTo>
-                    <a:pt x="1579709" y="295060"/>
-                  </a:lnTo>
-                  <a:lnTo>
-                    <a:pt x="1503076" y="282265"/>
-                  </a:lnTo>
-                  <a:lnTo>
-                    <a:pt x="1426444" y="269325"/>
-                  </a:lnTo>
-                  <a:lnTo>
-                    <a:pt x="1349811" y="256240"/>
-                  </a:lnTo>
-                  <a:lnTo>
-                    <a:pt x="1273179" y="243008"/>
-                  </a:lnTo>
-                  <a:lnTo>
-                    <a:pt x="1196546" y="229626"/>
-                  </a:lnTo>
-                  <a:lnTo>
-                    <a:pt x="1119914" y="216094"/>
-                  </a:lnTo>
-                  <a:lnTo>
-                    <a:pt x="1043281" y="202410"/>
-                  </a:lnTo>
-                  <a:lnTo>
-                    <a:pt x="966649" y="188571"/>
-                  </a:lnTo>
-                  <a:lnTo>
-                    <a:pt x="890016" y="174576"/>
-                  </a:lnTo>
-                  <a:lnTo>
-                    <a:pt x="813384" y="160424"/>
-                  </a:lnTo>
-                  <a:lnTo>
-                    <a:pt x="736751" y="146112"/>
-                  </a:lnTo>
-                  <a:lnTo>
-                    <a:pt x="660118" y="131639"/>
-                  </a:lnTo>
-                  <a:lnTo>
-                    <a:pt x="583486" y="117003"/>
-                  </a:lnTo>
-                  <a:lnTo>
-                    <a:pt x="506853" y="102202"/>
-                  </a:lnTo>
-                  <a:lnTo>
-                    <a:pt x="430221" y="87235"/>
-                  </a:lnTo>
-                  <a:lnTo>
-                    <a:pt x="353588" y="72099"/>
-                  </a:lnTo>
-                  <a:lnTo>
-                    <a:pt x="276956" y="56792"/>
-                  </a:lnTo>
-                  <a:lnTo>
-                    <a:pt x="200323" y="41313"/>
-                  </a:lnTo>
-                  <a:lnTo>
-                    <a:pt x="123691" y="25659"/>
-                  </a:lnTo>
-                  <a:lnTo>
-                    <a:pt x="47058" y="9830"/>
+                    <a:pt x="7327150" y="1255359"/>
+                  </a:lnTo>
+                  <a:lnTo>
+                    <a:pt x="7250518" y="1250939"/>
+                  </a:lnTo>
+                  <a:lnTo>
+                    <a:pt x="7173885" y="1246341"/>
+                  </a:lnTo>
+                  <a:lnTo>
+                    <a:pt x="7097253" y="1241557"/>
+                  </a:lnTo>
+                  <a:lnTo>
+                    <a:pt x="7020620" y="1236580"/>
+                  </a:lnTo>
+                  <a:lnTo>
+                    <a:pt x="6943987" y="1231402"/>
+                  </a:lnTo>
+                  <a:lnTo>
+                    <a:pt x="6867355" y="1226015"/>
+                  </a:lnTo>
+                  <a:lnTo>
+                    <a:pt x="6790722" y="1220411"/>
+                  </a:lnTo>
+                  <a:lnTo>
+                    <a:pt x="6714090" y="1214580"/>
+                  </a:lnTo>
+                  <a:lnTo>
+                    <a:pt x="6637457" y="1208513"/>
+                  </a:lnTo>
+                  <a:lnTo>
+                    <a:pt x="6560825" y="1202202"/>
+                  </a:lnTo>
+                  <a:lnTo>
+                    <a:pt x="6484192" y="1195635"/>
+                  </a:lnTo>
+                  <a:lnTo>
+                    <a:pt x="6407560" y="1188804"/>
+                  </a:lnTo>
+                  <a:lnTo>
+                    <a:pt x="6330927" y="1181696"/>
+                  </a:lnTo>
+                  <a:lnTo>
+                    <a:pt x="6254294" y="1174302"/>
+                  </a:lnTo>
+                  <a:lnTo>
+                    <a:pt x="6177662" y="1166609"/>
+                  </a:lnTo>
+                  <a:lnTo>
+                    <a:pt x="6101029" y="1158605"/>
+                  </a:lnTo>
+                  <a:lnTo>
+                    <a:pt x="6024397" y="1150278"/>
+                  </a:lnTo>
+                  <a:lnTo>
+                    <a:pt x="5947764" y="1141614"/>
+                  </a:lnTo>
+                  <a:lnTo>
+                    <a:pt x="5871132" y="1132601"/>
+                  </a:lnTo>
+                  <a:lnTo>
+                    <a:pt x="5794499" y="1123224"/>
+                  </a:lnTo>
+                  <a:lnTo>
+                    <a:pt x="5717867" y="1113468"/>
+                  </a:lnTo>
+                  <a:lnTo>
+                    <a:pt x="5641234" y="1103318"/>
+                  </a:lnTo>
+                  <a:lnTo>
+                    <a:pt x="5564602" y="1092758"/>
+                  </a:lnTo>
+                  <a:lnTo>
+                    <a:pt x="5487969" y="1081771"/>
+                  </a:lnTo>
+                  <a:lnTo>
+                    <a:pt x="5411336" y="1070341"/>
+                  </a:lnTo>
+                  <a:lnTo>
+                    <a:pt x="5334704" y="1058449"/>
+                  </a:lnTo>
+                  <a:lnTo>
+                    <a:pt x="5258071" y="1046077"/>
+                  </a:lnTo>
+                  <a:lnTo>
+                    <a:pt x="5181439" y="1033206"/>
+                  </a:lnTo>
+                  <a:lnTo>
+                    <a:pt x="5104806" y="1019814"/>
+                  </a:lnTo>
+                  <a:lnTo>
+                    <a:pt x="5028174" y="1005882"/>
+                  </a:lnTo>
+                  <a:lnTo>
+                    <a:pt x="4951541" y="991387"/>
+                  </a:lnTo>
+                  <a:lnTo>
+                    <a:pt x="4874909" y="976306"/>
+                  </a:lnTo>
+                  <a:lnTo>
+                    <a:pt x="4798276" y="960617"/>
+                  </a:lnTo>
+                  <a:lnTo>
+                    <a:pt x="4721644" y="944294"/>
+                  </a:lnTo>
+                  <a:lnTo>
+                    <a:pt x="4645011" y="927312"/>
+                  </a:lnTo>
+                  <a:lnTo>
+                    <a:pt x="4568378" y="909643"/>
+                  </a:lnTo>
+                  <a:lnTo>
+                    <a:pt x="4491746" y="891262"/>
+                  </a:lnTo>
+                  <a:lnTo>
+                    <a:pt x="4415113" y="872137"/>
+                  </a:lnTo>
+                  <a:lnTo>
+                    <a:pt x="4338481" y="852241"/>
+                  </a:lnTo>
+                  <a:lnTo>
+                    <a:pt x="4261848" y="831541"/>
+                  </a:lnTo>
+                  <a:lnTo>
+                    <a:pt x="4185216" y="810005"/>
+                  </a:lnTo>
+                  <a:lnTo>
+                    <a:pt x="4108583" y="787599"/>
+                  </a:lnTo>
+                  <a:lnTo>
+                    <a:pt x="4031951" y="764289"/>
+                  </a:lnTo>
+                  <a:lnTo>
+                    <a:pt x="3955318" y="740037"/>
+                  </a:lnTo>
+                  <a:lnTo>
+                    <a:pt x="3878685" y="714805"/>
+                  </a:lnTo>
+                  <a:lnTo>
+                    <a:pt x="3802053" y="688554"/>
+                  </a:lnTo>
+                  <a:lnTo>
+                    <a:pt x="3725420" y="661244"/>
+                  </a:lnTo>
+                  <a:lnTo>
+                    <a:pt x="3648788" y="632830"/>
+                  </a:lnTo>
+                  <a:lnTo>
+                    <a:pt x="3572155" y="603269"/>
+                  </a:lnTo>
+                  <a:lnTo>
+                    <a:pt x="3495523" y="572514"/>
+                  </a:lnTo>
+                  <a:lnTo>
+                    <a:pt x="3418890" y="540517"/>
+                  </a:lnTo>
+                  <a:lnTo>
+                    <a:pt x="3342258" y="527472"/>
+                  </a:lnTo>
+                  <a:lnTo>
+                    <a:pt x="3265625" y="518040"/>
+                  </a:lnTo>
+                  <a:lnTo>
+                    <a:pt x="3188993" y="508502"/>
+                  </a:lnTo>
+                  <a:lnTo>
+                    <a:pt x="3112360" y="498857"/>
+                  </a:lnTo>
+                  <a:lnTo>
+                    <a:pt x="3035727" y="489103"/>
+                  </a:lnTo>
+                  <a:lnTo>
+                    <a:pt x="2959095" y="479239"/>
+                  </a:lnTo>
+                  <a:lnTo>
+                    <a:pt x="2882462" y="469263"/>
+                  </a:lnTo>
+                  <a:lnTo>
+                    <a:pt x="2805830" y="459176"/>
+                  </a:lnTo>
+                  <a:lnTo>
+                    <a:pt x="2729197" y="448975"/>
+                  </a:lnTo>
+                  <a:lnTo>
+                    <a:pt x="2652565" y="438659"/>
+                  </a:lnTo>
+                  <a:lnTo>
+                    <a:pt x="2575932" y="428226"/>
+                  </a:lnTo>
+                  <a:lnTo>
+                    <a:pt x="2499300" y="417677"/>
+                  </a:lnTo>
+                  <a:lnTo>
+                    <a:pt x="2422667" y="407008"/>
+                  </a:lnTo>
+                  <a:lnTo>
+                    <a:pt x="2346034" y="396219"/>
+                  </a:lnTo>
+                  <a:lnTo>
+                    <a:pt x="2269402" y="385309"/>
+                  </a:lnTo>
+                  <a:lnTo>
+                    <a:pt x="2192769" y="374276"/>
+                  </a:lnTo>
+                  <a:lnTo>
+                    <a:pt x="2116137" y="363118"/>
+                  </a:lnTo>
+                  <a:lnTo>
+                    <a:pt x="2039504" y="351835"/>
+                  </a:lnTo>
+                  <a:lnTo>
+                    <a:pt x="1962872" y="340425"/>
+                  </a:lnTo>
+                  <a:lnTo>
+                    <a:pt x="1886239" y="328886"/>
+                  </a:lnTo>
+                  <a:lnTo>
+                    <a:pt x="1809607" y="317217"/>
+                  </a:lnTo>
+                  <a:lnTo>
+                    <a:pt x="1732974" y="305417"/>
+                  </a:lnTo>
+                  <a:lnTo>
+                    <a:pt x="1656342" y="293484"/>
+                  </a:lnTo>
+                  <a:lnTo>
+                    <a:pt x="1579709" y="281416"/>
+                  </a:lnTo>
+                  <a:lnTo>
+                    <a:pt x="1503076" y="269213"/>
+                  </a:lnTo>
+                  <a:lnTo>
+                    <a:pt x="1426444" y="256872"/>
+                  </a:lnTo>
+                  <a:lnTo>
+                    <a:pt x="1349811" y="244392"/>
+                  </a:lnTo>
+                  <a:lnTo>
+                    <a:pt x="1273179" y="231771"/>
+                  </a:lnTo>
+                  <a:lnTo>
+                    <a:pt x="1196546" y="219008"/>
+                  </a:lnTo>
+                  <a:lnTo>
+                    <a:pt x="1119914" y="206102"/>
+                  </a:lnTo>
+                  <a:lnTo>
+                    <a:pt x="1043281" y="193050"/>
+                  </a:lnTo>
+                  <a:lnTo>
+                    <a:pt x="966649" y="179851"/>
+                  </a:lnTo>
+                  <a:lnTo>
+                    <a:pt x="890016" y="166504"/>
+                  </a:lnTo>
+                  <a:lnTo>
+                    <a:pt x="813384" y="153006"/>
+                  </a:lnTo>
+                  <a:lnTo>
+                    <a:pt x="736751" y="139356"/>
+                  </a:lnTo>
+                  <a:lnTo>
+                    <a:pt x="660118" y="125552"/>
+                  </a:lnTo>
+                  <a:lnTo>
+                    <a:pt x="583486" y="111593"/>
+                  </a:lnTo>
+                  <a:lnTo>
+                    <a:pt x="506853" y="97476"/>
+                  </a:lnTo>
+                  <a:lnTo>
+                    <a:pt x="430221" y="83201"/>
+                  </a:lnTo>
+                  <a:lnTo>
+                    <a:pt x="353588" y="68765"/>
+                  </a:lnTo>
+                  <a:lnTo>
+                    <a:pt x="276956" y="54166"/>
+                  </a:lnTo>
+                  <a:lnTo>
+                    <a:pt x="200323" y="39403"/>
+                  </a:lnTo>
+                  <a:lnTo>
+                    <a:pt x="123691" y="24473"/>
+                  </a:lnTo>
+                  <a:lnTo>
+                    <a:pt x="47058" y="9375"/>
                   </a:lnTo>
                   <a:lnTo>
                     <a:pt x="0" y="0"/>
@@ -4211,306 +4211,306 @@
           </p:nvSpPr>
           <p:spPr>
             <a:xfrm>
-              <a:off x="817517" y="2859401"/>
-              <a:ext cx="7403783" cy="2458563"/>
+              <a:off x="817517" y="2991819"/>
+              <a:ext cx="7403783" cy="2344880"/>
             </a:xfrm>
             <a:custGeom>
               <a:avLst/>
               <a:pathLst>
-                <a:path w="7403783" h="2458563">
+                <a:path w="7403783" h="2344880">
                   <a:moveTo>
                     <a:pt x="0" y="0"/>
                   </a:moveTo>
                   <a:lnTo>
-                    <a:pt x="47058" y="41825"/>
-                  </a:lnTo>
-                  <a:lnTo>
-                    <a:pt x="123691" y="108229"/>
-                  </a:lnTo>
-                  <a:lnTo>
-                    <a:pt x="200323" y="172967"/>
-                  </a:lnTo>
-                  <a:lnTo>
-                    <a:pt x="276956" y="236081"/>
-                  </a:lnTo>
-                  <a:lnTo>
-                    <a:pt x="353588" y="297613"/>
-                  </a:lnTo>
-                  <a:lnTo>
-                    <a:pt x="430221" y="357602"/>
-                  </a:lnTo>
-                  <a:lnTo>
-                    <a:pt x="506853" y="416087"/>
-                  </a:lnTo>
-                  <a:lnTo>
-                    <a:pt x="583486" y="473104"/>
-                  </a:lnTo>
-                  <a:lnTo>
-                    <a:pt x="660118" y="528693"/>
-                  </a:lnTo>
-                  <a:lnTo>
-                    <a:pt x="736751" y="582887"/>
-                  </a:lnTo>
-                  <a:lnTo>
-                    <a:pt x="813384" y="635722"/>
-                  </a:lnTo>
-                  <a:lnTo>
-                    <a:pt x="890016" y="687232"/>
-                  </a:lnTo>
-                  <a:lnTo>
-                    <a:pt x="966649" y="737450"/>
-                  </a:lnTo>
-                  <a:lnTo>
-                    <a:pt x="1043281" y="786409"/>
-                  </a:lnTo>
-                  <a:lnTo>
-                    <a:pt x="1119914" y="834141"/>
-                  </a:lnTo>
-                  <a:lnTo>
-                    <a:pt x="1196546" y="880675"/>
-                  </a:lnTo>
-                  <a:lnTo>
-                    <a:pt x="1273179" y="926043"/>
-                  </a:lnTo>
-                  <a:lnTo>
-                    <a:pt x="1349811" y="970272"/>
-                  </a:lnTo>
-                  <a:lnTo>
-                    <a:pt x="1426444" y="1013393"/>
-                  </a:lnTo>
-                  <a:lnTo>
-                    <a:pt x="1503076" y="1055432"/>
-                  </a:lnTo>
-                  <a:lnTo>
-                    <a:pt x="1579709" y="1096417"/>
-                  </a:lnTo>
-                  <a:lnTo>
-                    <a:pt x="1656342" y="1136375"/>
-                  </a:lnTo>
-                  <a:lnTo>
-                    <a:pt x="1732974" y="1175330"/>
-                  </a:lnTo>
-                  <a:lnTo>
-                    <a:pt x="1809607" y="1213308"/>
-                  </a:lnTo>
-                  <a:lnTo>
-                    <a:pt x="1886239" y="1250334"/>
-                  </a:lnTo>
-                  <a:lnTo>
-                    <a:pt x="1962872" y="1286432"/>
-                  </a:lnTo>
-                  <a:lnTo>
-                    <a:pt x="2039504" y="1321624"/>
-                  </a:lnTo>
-                  <a:lnTo>
-                    <a:pt x="2116137" y="1355934"/>
-                  </a:lnTo>
-                  <a:lnTo>
-                    <a:pt x="2192769" y="1389384"/>
-                  </a:lnTo>
-                  <a:lnTo>
-                    <a:pt x="2269402" y="1421994"/>
-                  </a:lnTo>
-                  <a:lnTo>
-                    <a:pt x="2346034" y="1453787"/>
-                  </a:lnTo>
-                  <a:lnTo>
-                    <a:pt x="2422667" y="1484783"/>
-                  </a:lnTo>
-                  <a:lnTo>
-                    <a:pt x="2499300" y="1515001"/>
-                  </a:lnTo>
-                  <a:lnTo>
-                    <a:pt x="2575932" y="1544461"/>
-                  </a:lnTo>
-                  <a:lnTo>
-                    <a:pt x="2652565" y="1573183"/>
-                  </a:lnTo>
-                  <a:lnTo>
-                    <a:pt x="2729197" y="1601185"/>
-                  </a:lnTo>
-                  <a:lnTo>
-                    <a:pt x="2805830" y="1628484"/>
-                  </a:lnTo>
-                  <a:lnTo>
-                    <a:pt x="2882462" y="1655099"/>
-                  </a:lnTo>
-                  <a:lnTo>
-                    <a:pt x="2959095" y="1681046"/>
-                  </a:lnTo>
-                  <a:lnTo>
-                    <a:pt x="3035727" y="1706342"/>
-                  </a:lnTo>
-                  <a:lnTo>
-                    <a:pt x="3112360" y="1731005"/>
-                  </a:lnTo>
-                  <a:lnTo>
-                    <a:pt x="3188993" y="1755049"/>
-                  </a:lnTo>
-                  <a:lnTo>
-                    <a:pt x="3265625" y="1778489"/>
-                  </a:lnTo>
-                  <a:lnTo>
-                    <a:pt x="3342258" y="1801342"/>
-                  </a:lnTo>
-                  <a:lnTo>
-                    <a:pt x="3418890" y="1823622"/>
-                  </a:lnTo>
-                  <a:lnTo>
-                    <a:pt x="3495523" y="1845344"/>
-                  </a:lnTo>
-                  <a:lnTo>
-                    <a:pt x="3572155" y="1866520"/>
-                  </a:lnTo>
-                  <a:lnTo>
-                    <a:pt x="3648788" y="1887166"/>
-                  </a:lnTo>
-                  <a:lnTo>
-                    <a:pt x="3725420" y="1907293"/>
-                  </a:lnTo>
-                  <a:lnTo>
-                    <a:pt x="3802053" y="1926916"/>
-                  </a:lnTo>
-                  <a:lnTo>
-                    <a:pt x="3878685" y="1946047"/>
-                  </a:lnTo>
-                  <a:lnTo>
-                    <a:pt x="3955318" y="1964698"/>
-                  </a:lnTo>
-                  <a:lnTo>
-                    <a:pt x="4031951" y="1982882"/>
-                  </a:lnTo>
-                  <a:lnTo>
-                    <a:pt x="4108583" y="2000609"/>
-                  </a:lnTo>
-                  <a:lnTo>
-                    <a:pt x="4185216" y="2017892"/>
-                  </a:lnTo>
-                  <a:lnTo>
-                    <a:pt x="4261848" y="2034742"/>
-                  </a:lnTo>
-                  <a:lnTo>
-                    <a:pt x="4338481" y="2051169"/>
-                  </a:lnTo>
-                  <a:lnTo>
-                    <a:pt x="4415113" y="2067184"/>
-                  </a:lnTo>
-                  <a:lnTo>
-                    <a:pt x="4491746" y="2082797"/>
-                  </a:lnTo>
-                  <a:lnTo>
-                    <a:pt x="4568378" y="2098019"/>
-                  </a:lnTo>
-                  <a:lnTo>
-                    <a:pt x="4645011" y="2112859"/>
-                  </a:lnTo>
-                  <a:lnTo>
-                    <a:pt x="4721644" y="2127328"/>
-                  </a:lnTo>
-                  <a:lnTo>
-                    <a:pt x="4798276" y="2141433"/>
-                  </a:lnTo>
-                  <a:lnTo>
-                    <a:pt x="4874909" y="2155184"/>
-                  </a:lnTo>
-                  <a:lnTo>
-                    <a:pt x="4951541" y="2168591"/>
-                  </a:lnTo>
-                  <a:lnTo>
-                    <a:pt x="5028174" y="2181661"/>
-                  </a:lnTo>
-                  <a:lnTo>
-                    <a:pt x="5104806" y="2194404"/>
-                  </a:lnTo>
-                  <a:lnTo>
-                    <a:pt x="5181439" y="2206827"/>
-                  </a:lnTo>
-                  <a:lnTo>
-                    <a:pt x="5258071" y="2218939"/>
-                  </a:lnTo>
-                  <a:lnTo>
-                    <a:pt x="5334704" y="2230747"/>
-                  </a:lnTo>
-                  <a:lnTo>
-                    <a:pt x="5411336" y="2242259"/>
-                  </a:lnTo>
-                  <a:lnTo>
-                    <a:pt x="5487969" y="2253482"/>
-                  </a:lnTo>
-                  <a:lnTo>
-                    <a:pt x="5564602" y="2264423"/>
-                  </a:lnTo>
-                  <a:lnTo>
-                    <a:pt x="5641234" y="2275091"/>
-                  </a:lnTo>
-                  <a:lnTo>
-                    <a:pt x="5717867" y="2285490"/>
-                  </a:lnTo>
-                  <a:lnTo>
-                    <a:pt x="5794499" y="2295629"/>
-                  </a:lnTo>
-                  <a:lnTo>
-                    <a:pt x="5871132" y="2305514"/>
-                  </a:lnTo>
-                  <a:lnTo>
-                    <a:pt x="5947764" y="2315151"/>
-                  </a:lnTo>
-                  <a:lnTo>
-                    <a:pt x="6024397" y="2324546"/>
-                  </a:lnTo>
-                  <a:lnTo>
-                    <a:pt x="6101029" y="2333706"/>
-                  </a:lnTo>
-                  <a:lnTo>
-                    <a:pt x="6177662" y="2342636"/>
-                  </a:lnTo>
-                  <a:lnTo>
-                    <a:pt x="6254294" y="2351342"/>
-                  </a:lnTo>
-                  <a:lnTo>
-                    <a:pt x="6330927" y="2359829"/>
-                  </a:lnTo>
-                  <a:lnTo>
-                    <a:pt x="6407560" y="2368104"/>
-                  </a:lnTo>
-                  <a:lnTo>
-                    <a:pt x="6484192" y="2376171"/>
-                  </a:lnTo>
-                  <a:lnTo>
-                    <a:pt x="6560825" y="2384036"/>
-                  </a:lnTo>
-                  <a:lnTo>
-                    <a:pt x="6637457" y="2391704"/>
-                  </a:lnTo>
-                  <a:lnTo>
-                    <a:pt x="6714090" y="2399180"/>
-                  </a:lnTo>
-                  <a:lnTo>
-                    <a:pt x="6790722" y="2406468"/>
-                  </a:lnTo>
-                  <a:lnTo>
-                    <a:pt x="6867355" y="2413573"/>
-                  </a:lnTo>
-                  <a:lnTo>
-                    <a:pt x="6943987" y="2420500"/>
-                  </a:lnTo>
-                  <a:lnTo>
-                    <a:pt x="7020620" y="2427253"/>
-                  </a:lnTo>
-                  <a:lnTo>
-                    <a:pt x="7097253" y="2433837"/>
-                  </a:lnTo>
-                  <a:lnTo>
-                    <a:pt x="7173885" y="2440256"/>
-                  </a:lnTo>
-                  <a:lnTo>
-                    <a:pt x="7250518" y="2446514"/>
-                  </a:lnTo>
-                  <a:lnTo>
-                    <a:pt x="7327150" y="2452615"/>
-                  </a:lnTo>
-                  <a:lnTo>
-                    <a:pt x="7403783" y="2458563"/>
+                    <a:pt x="47058" y="39891"/>
+                  </a:lnTo>
+                  <a:lnTo>
+                    <a:pt x="123691" y="103224"/>
+                  </a:lnTo>
+                  <a:lnTo>
+                    <a:pt x="200323" y="164969"/>
+                  </a:lnTo>
+                  <a:lnTo>
+                    <a:pt x="276956" y="225165"/>
+                  </a:lnTo>
+                  <a:lnTo>
+                    <a:pt x="353588" y="283852"/>
+                  </a:lnTo>
+                  <a:lnTo>
+                    <a:pt x="430221" y="341067"/>
+                  </a:lnTo>
+                  <a:lnTo>
+                    <a:pt x="506853" y="396847"/>
+                  </a:lnTo>
+                  <a:lnTo>
+                    <a:pt x="583486" y="451228"/>
+                  </a:lnTo>
+                  <a:lnTo>
+                    <a:pt x="660118" y="504246"/>
+                  </a:lnTo>
+                  <a:lnTo>
+                    <a:pt x="736751" y="555934"/>
+                  </a:lnTo>
+                  <a:lnTo>
+                    <a:pt x="813384" y="606326"/>
+                  </a:lnTo>
+                  <a:lnTo>
+                    <a:pt x="890016" y="655455"/>
+                  </a:lnTo>
+                  <a:lnTo>
+                    <a:pt x="966649" y="703351"/>
+                  </a:lnTo>
+                  <a:lnTo>
+                    <a:pt x="1043281" y="750046"/>
+                  </a:lnTo>
+                  <a:lnTo>
+                    <a:pt x="1119914" y="795570"/>
+                  </a:lnTo>
+                  <a:lnTo>
+                    <a:pt x="1196546" y="839953"/>
+                  </a:lnTo>
+                  <a:lnTo>
+                    <a:pt x="1273179" y="883223"/>
+                  </a:lnTo>
+                  <a:lnTo>
+                    <a:pt x="1349811" y="925407"/>
+                  </a:lnTo>
+                  <a:lnTo>
+                    <a:pt x="1426444" y="966534"/>
+                  </a:lnTo>
+                  <a:lnTo>
+                    <a:pt x="1503076" y="1006630"/>
+                  </a:lnTo>
+                  <a:lnTo>
+                    <a:pt x="1579709" y="1045719"/>
+                  </a:lnTo>
+                  <a:lnTo>
+                    <a:pt x="1656342" y="1083829"/>
+                  </a:lnTo>
+                  <a:lnTo>
+                    <a:pt x="1732974" y="1120983"/>
+                  </a:lnTo>
+                  <a:lnTo>
+                    <a:pt x="1809607" y="1157206"/>
+                  </a:lnTo>
+                  <a:lnTo>
+                    <a:pt x="1886239" y="1192519"/>
+                  </a:lnTo>
+                  <a:lnTo>
+                    <a:pt x="1962872" y="1226948"/>
+                  </a:lnTo>
+                  <a:lnTo>
+                    <a:pt x="2039504" y="1260513"/>
+                  </a:lnTo>
+                  <a:lnTo>
+                    <a:pt x="2116137" y="1293236"/>
+                  </a:lnTo>
+                  <a:lnTo>
+                    <a:pt x="2192769" y="1325139"/>
+                  </a:lnTo>
+                  <a:lnTo>
+                    <a:pt x="2269402" y="1356242"/>
+                  </a:lnTo>
+                  <a:lnTo>
+                    <a:pt x="2346034" y="1386564"/>
+                  </a:lnTo>
+                  <a:lnTo>
+                    <a:pt x="2422667" y="1416127"/>
+                  </a:lnTo>
+                  <a:lnTo>
+                    <a:pt x="2499300" y="1444948"/>
+                  </a:lnTo>
+                  <a:lnTo>
+                    <a:pt x="2575932" y="1473046"/>
+                  </a:lnTo>
+                  <a:lnTo>
+                    <a:pt x="2652565" y="1500440"/>
+                  </a:lnTo>
+                  <a:lnTo>
+                    <a:pt x="2729197" y="1527146"/>
+                  </a:lnTo>
+                  <a:lnTo>
+                    <a:pt x="2805830" y="1553183"/>
+                  </a:lnTo>
+                  <a:lnTo>
+                    <a:pt x="2882462" y="1578567"/>
+                  </a:lnTo>
+                  <a:lnTo>
+                    <a:pt x="2959095" y="1603315"/>
+                  </a:lnTo>
+                  <a:lnTo>
+                    <a:pt x="3035727" y="1627442"/>
+                  </a:lnTo>
+                  <a:lnTo>
+                    <a:pt x="3112360" y="1650964"/>
+                  </a:lnTo>
+                  <a:lnTo>
+                    <a:pt x="3188993" y="1673896"/>
+                  </a:lnTo>
+                  <a:lnTo>
+                    <a:pt x="3265625" y="1696253"/>
+                  </a:lnTo>
+                  <a:lnTo>
+                    <a:pt x="3342258" y="1718049"/>
+                  </a:lnTo>
+                  <a:lnTo>
+                    <a:pt x="3418890" y="1739299"/>
+                  </a:lnTo>
+                  <a:lnTo>
+                    <a:pt x="3495523" y="1760016"/>
+                  </a:lnTo>
+                  <a:lnTo>
+                    <a:pt x="3572155" y="1780213"/>
+                  </a:lnTo>
+                  <a:lnTo>
+                    <a:pt x="3648788" y="1799904"/>
+                  </a:lnTo>
+                  <a:lnTo>
+                    <a:pt x="3725420" y="1819101"/>
+                  </a:lnTo>
+                  <a:lnTo>
+                    <a:pt x="3802053" y="1837816"/>
+                  </a:lnTo>
+                  <a:lnTo>
+                    <a:pt x="3878685" y="1856063"/>
+                  </a:lnTo>
+                  <a:lnTo>
+                    <a:pt x="3955318" y="1873852"/>
+                  </a:lnTo>
+                  <a:lnTo>
+                    <a:pt x="4031951" y="1891194"/>
+                  </a:lnTo>
+                  <a:lnTo>
+                    <a:pt x="4108583" y="1908102"/>
+                  </a:lnTo>
+                  <a:lnTo>
+                    <a:pt x="4185216" y="1924586"/>
+                  </a:lnTo>
+                  <a:lnTo>
+                    <a:pt x="4261848" y="1940656"/>
+                  </a:lnTo>
+                  <a:lnTo>
+                    <a:pt x="4338481" y="1956324"/>
+                  </a:lnTo>
+                  <a:lnTo>
+                    <a:pt x="4415113" y="1971598"/>
+                  </a:lnTo>
+                  <a:lnTo>
+                    <a:pt x="4491746" y="1986490"/>
+                  </a:lnTo>
+                  <a:lnTo>
+                    <a:pt x="4568378" y="2001008"/>
+                  </a:lnTo>
+                  <a:lnTo>
+                    <a:pt x="4645011" y="2015162"/>
+                  </a:lnTo>
+                  <a:lnTo>
+                    <a:pt x="4721644" y="2028961"/>
+                  </a:lnTo>
+                  <a:lnTo>
+                    <a:pt x="4798276" y="2042414"/>
+                  </a:lnTo>
+                  <a:lnTo>
+                    <a:pt x="4874909" y="2055529"/>
+                  </a:lnTo>
+                  <a:lnTo>
+                    <a:pt x="4951541" y="2068316"/>
+                  </a:lnTo>
+                  <a:lnTo>
+                    <a:pt x="5028174" y="2080782"/>
+                  </a:lnTo>
+                  <a:lnTo>
+                    <a:pt x="5104806" y="2092936"/>
+                  </a:lnTo>
+                  <a:lnTo>
+                    <a:pt x="5181439" y="2104784"/>
+                  </a:lnTo>
+                  <a:lnTo>
+                    <a:pt x="5258071" y="2116336"/>
+                  </a:lnTo>
+                  <a:lnTo>
+                    <a:pt x="5334704" y="2127598"/>
+                  </a:lnTo>
+                  <a:lnTo>
+                    <a:pt x="5411336" y="2138577"/>
+                  </a:lnTo>
+                  <a:lnTo>
+                    <a:pt x="5487969" y="2149281"/>
+                  </a:lnTo>
+                  <a:lnTo>
+                    <a:pt x="5564602" y="2159717"/>
+                  </a:lnTo>
+                  <a:lnTo>
+                    <a:pt x="5641234" y="2169891"/>
+                  </a:lnTo>
+                  <a:lnTo>
+                    <a:pt x="5717867" y="2179810"/>
+                  </a:lnTo>
+                  <a:lnTo>
+                    <a:pt x="5794499" y="2189480"/>
+                  </a:lnTo>
+                  <a:lnTo>
+                    <a:pt x="5871132" y="2198908"/>
+                  </a:lnTo>
+                  <a:lnTo>
+                    <a:pt x="5947764" y="2208099"/>
+                  </a:lnTo>
+                  <a:lnTo>
+                    <a:pt x="6024397" y="2217060"/>
+                  </a:lnTo>
+                  <a:lnTo>
+                    <a:pt x="6101029" y="2225796"/>
+                  </a:lnTo>
+                  <a:lnTo>
+                    <a:pt x="6177662" y="2234313"/>
+                  </a:lnTo>
+                  <a:lnTo>
+                    <a:pt x="6254294" y="2242616"/>
+                  </a:lnTo>
+                  <a:lnTo>
+                    <a:pt x="6330927" y="2250712"/>
+                  </a:lnTo>
+                  <a:lnTo>
+                    <a:pt x="6407560" y="2258604"/>
+                  </a:lnTo>
+                  <a:lnTo>
+                    <a:pt x="6484192" y="2266298"/>
+                  </a:lnTo>
+                  <a:lnTo>
+                    <a:pt x="6560825" y="2273799"/>
+                  </a:lnTo>
+                  <a:lnTo>
+                    <a:pt x="6637457" y="2281113"/>
+                  </a:lnTo>
+                  <a:lnTo>
+                    <a:pt x="6714090" y="2288242"/>
+                  </a:lnTo>
+                  <a:lnTo>
+                    <a:pt x="6790722" y="2295193"/>
+                  </a:lnTo>
+                  <a:lnTo>
+                    <a:pt x="6867355" y="2301970"/>
+                  </a:lnTo>
+                  <a:lnTo>
+                    <a:pt x="6943987" y="2308577"/>
+                  </a:lnTo>
+                  <a:lnTo>
+                    <a:pt x="7020620" y="2315018"/>
+                  </a:lnTo>
+                  <a:lnTo>
+                    <a:pt x="7097253" y="2321298"/>
+                  </a:lnTo>
+                  <a:lnTo>
+                    <a:pt x="7173885" y="2327420"/>
+                  </a:lnTo>
+                  <a:lnTo>
+                    <a:pt x="7250518" y="2333388"/>
+                  </a:lnTo>
+                  <a:lnTo>
+                    <a:pt x="7327150" y="2339207"/>
+                  </a:lnTo>
+                  <a:lnTo>
+                    <a:pt x="7403783" y="2344880"/>
                   </a:lnTo>
                 </a:path>
               </a:pathLst>
@@ -4539,7 +4539,7 @@
           </p:nvSpPr>
           <p:spPr>
             <a:xfrm>
-              <a:off x="817517" y="4679530"/>
+              <a:off x="817517" y="4727786"/>
               <a:ext cx="7799693" cy="0"/>
             </a:xfrm>
             <a:custGeom>
@@ -4582,15 +4582,15 @@
           </p:nvSpPr>
           <p:spPr>
             <a:xfrm>
-              <a:off x="4224261" y="1896563"/>
-              <a:ext cx="0" cy="3826579"/>
+              <a:off x="4224261" y="2073503"/>
+              <a:ext cx="0" cy="3649639"/>
             </a:xfrm>
             <a:custGeom>
               <a:avLst/>
               <a:pathLst>
-                <a:path w="0" h="3826579">
+                <a:path w="0" h="3649639">
                   <a:moveTo>
-                    <a:pt x="0" y="3826579"/>
+                    <a:pt x="0" y="3649639"/>
                   </a:moveTo>
                   <a:lnTo>
                     <a:pt x="0" y="0"/>
@@ -4625,7 +4625,7 @@
           </p:nvSpPr>
           <p:spPr>
             <a:xfrm>
-              <a:off x="692708" y="5509156"/>
+              <a:off x="692708" y="5517199"/>
               <a:ext cx="62179" cy="80101"/>
             </a:xfrm>
             <a:prstGeom prst="rect">
@@ -4671,7 +4671,7 @@
           </p:nvSpPr>
           <p:spPr>
             <a:xfrm>
-              <a:off x="692708" y="4639479"/>
+              <a:off x="692708" y="4687735"/>
               <a:ext cx="62179" cy="80101"/>
             </a:xfrm>
             <a:prstGeom prst="rect">
@@ -4717,7 +4717,7 @@
           </p:nvSpPr>
           <p:spPr>
             <a:xfrm>
-              <a:off x="692708" y="3769802"/>
+              <a:off x="692708" y="3858272"/>
               <a:ext cx="62179" cy="80101"/>
             </a:xfrm>
             <a:prstGeom prst="rect">
@@ -4763,7 +4763,7 @@
           </p:nvSpPr>
           <p:spPr>
             <a:xfrm>
-              <a:off x="692708" y="2900125"/>
+              <a:off x="692708" y="3028808"/>
               <a:ext cx="62179" cy="80101"/>
             </a:xfrm>
             <a:prstGeom prst="rect">
@@ -4809,7 +4809,7 @@
           </p:nvSpPr>
           <p:spPr>
             <a:xfrm>
-              <a:off x="692708" y="2030448"/>
+              <a:off x="692708" y="2199345"/>
               <a:ext cx="62179" cy="80101"/>
             </a:xfrm>
             <a:prstGeom prst="rect">
@@ -5085,7 +5085,7 @@
           </p:nvSpPr>
           <p:spPr>
             <a:xfrm rot="-5400000">
-              <a:off x="68446" y="3759743"/>
+              <a:off x="68446" y="3848213"/>
               <a:ext cx="1016904" cy="100218"/>
             </a:xfrm>
             <a:prstGeom prst="rect">
@@ -5126,6 +5126,52 @@
         <p:sp>
           <p:nvSpPr>
             <p:cNvPr id="38" name="tx38"/>
+            <p:cNvSpPr/>
+            <p:nvPr/>
+          </p:nvSpPr>
+          <p:spPr>
+            <a:xfrm>
+              <a:off x="817517" y="1896563"/>
+              <a:ext cx="5626211" cy="82021"/>
+            </a:xfrm>
+            <a:prstGeom prst="rect">
+              <a:avLst/>
+            </a:prstGeom>
+            <a:noFill/>
+          </p:spPr>
+          <p:txBody>
+            <a:bodyPr lIns="0" rIns="0" tIns="0" bIns="0" anchorCtr="1" anchor="ctr" wrap="none"/>
+            <a:lstStyle/>
+            <a:p>
+              <a:pPr algn="l" marL="0" marR="0" indent="0">
+                <a:lnSpc>
+                  <a:spcPts val="900"/>
+                </a:lnSpc>
+                <a:spcBef>
+                  <a:spcPts val="0"/>
+                </a:spcBef>
+                <a:spcAft>
+                  <a:spcPts val="0"/>
+                </a:spcAft>
+              </a:pPr>
+              <a:r>
+                <a:rPr sz="900">
+                  <a:solidFill>
+                    <a:srgbClr val="404040">
+                      <a:alpha val="100000"/>
+                    </a:srgbClr>
+                  </a:solidFill>
+                  <a:latin typeface="Helvetica"/>
+                  <a:cs typeface="Helvetica"/>
+                </a:rPr>
+                <a:t>subHR per 0.1 ratio decline: 1.34 (1.14-1.58)  |  per IQR decline (Δ = 0.30): 2.41 (1.47-3.94)  |  IQR: [0.85, 1.15]</a:t>
+              </a:r>
+            </a:p>
+          </p:txBody>
+        </p:sp>
+        <p:sp>
+          <p:nvSpPr>
+            <p:cNvPr id="39" name="tx39"/>
             <p:cNvSpPr/>
             <p:nvPr/>
           </p:nvSpPr>

--- a/docs/pptx/carbo/jx-carbo-linsubhr-ratio-throm2.pptx
+++ b/docs/pptx/carbo/jx-carbo-linsubhr-ratio-throm2.pptx
@@ -5132,7 +5132,7 @@
           <p:spPr>
             <a:xfrm>
               <a:off x="817517" y="1896563"/>
-              <a:ext cx="5626211" cy="82021"/>
+              <a:ext cx="6236116" cy="82021"/>
             </a:xfrm>
             <a:prstGeom prst="rect">
               <a:avLst/>
@@ -5164,7 +5164,7 @@
                   <a:latin typeface="Helvetica"/>
                   <a:cs typeface="Helvetica"/>
                 </a:rPr>
-                <a:t>subHR per 0.1 ratio decline: 1.34 (1.14-1.58)  |  per IQR decline (Δ = 0.30): 2.41 (1.47-3.94)  |  IQR: [0.85, 1.15]</a:t>
+                <a:t>subHR per 0.1 ratio decline: 1.34 (1.14-1.58), p = &lt;0.001  |  per IQR decline (Δ = 0.30): 2.41 (1.47-3.94)  |  IQR: [0.85, 1.15]</a:t>
               </a:r>
             </a:p>
           </p:txBody>

--- a/docs/pptx/carbo/jx-carbo-linsubhr-ratio-throm2.pptx
+++ b/docs/pptx/carbo/jx-carbo-linsubhr-ratio-throm2.pptx
@@ -5132,7 +5132,7 @@
           <p:spPr>
             <a:xfrm>
               <a:off x="817517" y="1896563"/>
-              <a:ext cx="6236116" cy="82021"/>
+              <a:ext cx="6833128" cy="82021"/>
             </a:xfrm>
             <a:prstGeom prst="rect">
               <a:avLst/>
@@ -5164,7 +5164,7 @@
                   <a:latin typeface="Helvetica"/>
                   <a:cs typeface="Helvetica"/>
                 </a:rPr>
-                <a:t>subHR per 0.1 ratio decline: 1.34 (1.14-1.58), p = &lt;0.001  |  per IQR decline (Δ = 0.30): 2.41 (1.47-3.94)  |  IQR: [0.85, 1.15]</a:t>
+                <a:t>subHR per 0.1 ratio decline: 1.34 (1.14-1.58), p_Bonf = 0.003 (n = 6)  |  per IQR decline (Δ = 0.30): 2.41 (1.47-3.94)  |  IQR: [0.85, 1.15]</a:t>
               </a:r>
             </a:p>
           </p:txBody>

--- a/docs/pptx/carbo/jx-carbo-linsubhr-ratio-throm2.pptx
+++ b/docs/pptx/carbo/jx-carbo-linsubhr-ratio-throm2.pptx
@@ -2443,7 +2443,7 @@
           </p:nvSpPr>
           <p:spPr>
             <a:xfrm>
-              <a:off x="1615213" y="2073503"/>
+              <a:off x="1467192" y="2073503"/>
               <a:ext cx="0" cy="3649639"/>
             </a:xfrm>
             <a:custGeom>
@@ -2486,7 +2486,7 @@
           </p:nvSpPr>
           <p:spPr>
             <a:xfrm>
-              <a:off x="3387871" y="2073503"/>
+              <a:off x="3538150" y="2073503"/>
               <a:ext cx="0" cy="3649639"/>
             </a:xfrm>
             <a:custGeom>
@@ -2529,7 +2529,7 @@
           </p:nvSpPr>
           <p:spPr>
             <a:xfrm>
-              <a:off x="5160528" y="2073503"/>
+              <a:off x="5609107" y="2073503"/>
               <a:ext cx="0" cy="3649639"/>
             </a:xfrm>
             <a:custGeom>
@@ -2572,7 +2572,7 @@
           </p:nvSpPr>
           <p:spPr>
             <a:xfrm>
-              <a:off x="6933186" y="2073503"/>
+              <a:off x="7680065" y="2073503"/>
               <a:ext cx="0" cy="3649639"/>
             </a:xfrm>
             <a:custGeom>
@@ -2830,7 +2830,7 @@
           </p:nvSpPr>
           <p:spPr>
             <a:xfrm>
-              <a:off x="2501542" y="2073503"/>
+              <a:off x="2502671" y="2073503"/>
               <a:ext cx="0" cy="3649639"/>
             </a:xfrm>
             <a:custGeom>
@@ -2873,7 +2873,7 @@
           </p:nvSpPr>
           <p:spPr>
             <a:xfrm>
-              <a:off x="4274200" y="2073503"/>
+              <a:off x="4573628" y="2073503"/>
               <a:ext cx="0" cy="3649639"/>
             </a:xfrm>
             <a:custGeom>
@@ -2916,7 +2916,7 @@
           </p:nvSpPr>
           <p:spPr>
             <a:xfrm>
-              <a:off x="6046857" y="2073503"/>
+              <a:off x="6644586" y="2073503"/>
               <a:ext cx="0" cy="3649639"/>
             </a:xfrm>
             <a:custGeom>
@@ -2953,625 +2953,588 @@
         </p:sp>
         <p:sp>
           <p:nvSpPr>
-            <p:cNvPr id="20" name="pl20"/>
+            <p:cNvPr id="20" name="pg20"/>
             <p:cNvSpPr/>
             <p:nvPr/>
           </p:nvSpPr>
           <p:spPr>
             <a:xfrm>
-              <a:off x="7819515" y="2073503"/>
-              <a:ext cx="0" cy="3649639"/>
+              <a:off x="1172049" y="2073503"/>
+              <a:ext cx="7090630" cy="3378562"/>
             </a:xfrm>
             <a:custGeom>
               <a:avLst/>
               <a:pathLst>
-                <a:path w="0" h="3649639">
+                <a:path w="7090630" h="3378562">
                   <a:moveTo>
-                    <a:pt x="0" y="3649639"/>
+                    <a:pt x="759163" y="0"/>
                   </a:moveTo>
                   <a:lnTo>
-                    <a:pt x="0" y="0"/>
-                  </a:lnTo>
-                  <a:lnTo>
-                    <a:pt x="0" y="0"/>
-                  </a:lnTo>
-                </a:path>
-              </a:pathLst>
-            </a:custGeom>
-            <a:ln w="13550" cap="flat">
-              <a:solidFill>
-                <a:srgbClr val="EBEBEB">
-                  <a:alpha val="100000"/>
-                </a:srgbClr>
-              </a:solidFill>
-              <a:prstDash val="solid"/>
-              <a:round/>
-            </a:ln>
-          </p:spPr>
-          <p:txBody>
-            <a:bodyPr/>
-            <a:lstStyle/>
-            <a:p/>
-          </p:txBody>
-        </p:sp>
-        <p:sp>
-          <p:nvSpPr>
-            <p:cNvPr id="21" name="pg21"/>
-            <p:cNvSpPr/>
-            <p:nvPr/>
-          </p:nvSpPr>
-          <p:spPr>
-            <a:xfrm>
-              <a:off x="817517" y="2073503"/>
-              <a:ext cx="7403783" cy="3378562"/>
-            </a:xfrm>
-            <a:custGeom>
-              <a:avLst/>
-              <a:pathLst>
-                <a:path w="7403783" h="3378562">
-                  <a:moveTo>
-                    <a:pt x="629428" y="0"/>
-                  </a:moveTo>
-                  <a:lnTo>
-                    <a:pt x="660118" y="55449"/>
-                  </a:lnTo>
-                  <a:lnTo>
-                    <a:pt x="736751" y="188531"/>
-                  </a:lnTo>
-                  <a:lnTo>
-                    <a:pt x="813384" y="316447"/>
-                  </a:lnTo>
-                  <a:lnTo>
-                    <a:pt x="890016" y="439397"/>
-                  </a:lnTo>
-                  <a:lnTo>
-                    <a:pt x="966649" y="557574"/>
-                  </a:lnTo>
-                  <a:lnTo>
-                    <a:pt x="1043281" y="671164"/>
-                  </a:lnTo>
-                  <a:lnTo>
-                    <a:pt x="1119914" y="780344"/>
-                  </a:lnTo>
-                  <a:lnTo>
-                    <a:pt x="1196546" y="885286"/>
-                  </a:lnTo>
-                  <a:lnTo>
-                    <a:pt x="1273179" y="986155"/>
-                  </a:lnTo>
-                  <a:lnTo>
-                    <a:pt x="1349811" y="1083108"/>
-                  </a:lnTo>
-                  <a:lnTo>
-                    <a:pt x="1426444" y="1176297"/>
-                  </a:lnTo>
-                  <a:lnTo>
-                    <a:pt x="1503076" y="1265869"/>
-                  </a:lnTo>
-                  <a:lnTo>
-                    <a:pt x="1579709" y="1351964"/>
-                  </a:lnTo>
-                  <a:lnTo>
-                    <a:pt x="1656342" y="1434717"/>
-                  </a:lnTo>
-                  <a:lnTo>
-                    <a:pt x="1732974" y="1514257"/>
-                  </a:lnTo>
-                  <a:lnTo>
-                    <a:pt x="1809607" y="1590710"/>
-                  </a:lnTo>
-                  <a:lnTo>
-                    <a:pt x="1886239" y="1664195"/>
-                  </a:lnTo>
-                  <a:lnTo>
-                    <a:pt x="1962872" y="1734827"/>
-                  </a:lnTo>
-                  <a:lnTo>
-                    <a:pt x="2039504" y="1802718"/>
-                  </a:lnTo>
-                  <a:lnTo>
-                    <a:pt x="2116137" y="1867973"/>
-                  </a:lnTo>
-                  <a:lnTo>
-                    <a:pt x="2192769" y="1930695"/>
-                  </a:lnTo>
-                  <a:lnTo>
-                    <a:pt x="2269402" y="1990982"/>
-                  </a:lnTo>
-                  <a:lnTo>
-                    <a:pt x="2346034" y="2048929"/>
-                  </a:lnTo>
-                  <a:lnTo>
-                    <a:pt x="2422667" y="2104627"/>
-                  </a:lnTo>
-                  <a:lnTo>
-                    <a:pt x="2499300" y="2158162"/>
-                  </a:lnTo>
-                  <a:lnTo>
-                    <a:pt x="2575932" y="2209619"/>
-                  </a:lnTo>
-                  <a:lnTo>
-                    <a:pt x="2652565" y="2259079"/>
-                  </a:lnTo>
-                  <a:lnTo>
-                    <a:pt x="2729197" y="2306619"/>
-                  </a:lnTo>
-                  <a:lnTo>
-                    <a:pt x="2805830" y="2352313"/>
-                  </a:lnTo>
-                  <a:lnTo>
-                    <a:pt x="2882462" y="2396234"/>
-                  </a:lnTo>
-                  <a:lnTo>
-                    <a:pt x="2959095" y="2438450"/>
-                  </a:lnTo>
-                  <a:lnTo>
-                    <a:pt x="3035727" y="2479027"/>
-                  </a:lnTo>
-                  <a:lnTo>
-                    <a:pt x="3112360" y="2518028"/>
-                  </a:lnTo>
-                  <a:lnTo>
-                    <a:pt x="3188993" y="2555516"/>
-                  </a:lnTo>
-                  <a:lnTo>
-                    <a:pt x="3265625" y="2591549"/>
-                  </a:lnTo>
-                  <a:lnTo>
-                    <a:pt x="3342258" y="2626183"/>
-                  </a:lnTo>
-                  <a:lnTo>
-                    <a:pt x="3418890" y="2655754"/>
-                  </a:lnTo>
-                  <a:lnTo>
-                    <a:pt x="3495523" y="2664977"/>
-                  </a:lnTo>
-                  <a:lnTo>
-                    <a:pt x="3572155" y="2674097"/>
-                  </a:lnTo>
-                  <a:lnTo>
-                    <a:pt x="3648788" y="2683116"/>
-                  </a:lnTo>
-                  <a:lnTo>
-                    <a:pt x="3725420" y="2692034"/>
-                  </a:lnTo>
-                  <a:lnTo>
-                    <a:pt x="3802053" y="2700853"/>
-                  </a:lnTo>
-                  <a:lnTo>
-                    <a:pt x="3878685" y="2709573"/>
-                  </a:lnTo>
-                  <a:lnTo>
-                    <a:pt x="3955318" y="2718197"/>
-                  </a:lnTo>
-                  <a:lnTo>
-                    <a:pt x="4031951" y="2726724"/>
-                  </a:lnTo>
-                  <a:lnTo>
-                    <a:pt x="4108583" y="2735156"/>
-                  </a:lnTo>
-                  <a:lnTo>
-                    <a:pt x="4185216" y="2743495"/>
-                  </a:lnTo>
-                  <a:lnTo>
-                    <a:pt x="4261848" y="2751740"/>
-                  </a:lnTo>
-                  <a:lnTo>
-                    <a:pt x="4338481" y="2759894"/>
-                  </a:lnTo>
-                  <a:lnTo>
-                    <a:pt x="4415113" y="2767957"/>
-                  </a:lnTo>
-                  <a:lnTo>
-                    <a:pt x="4491746" y="2775930"/>
-                  </a:lnTo>
-                  <a:lnTo>
-                    <a:pt x="4568378" y="2783814"/>
-                  </a:lnTo>
-                  <a:lnTo>
-                    <a:pt x="4645011" y="2791611"/>
-                  </a:lnTo>
-                  <a:lnTo>
-                    <a:pt x="4721644" y="2799320"/>
-                  </a:lnTo>
-                  <a:lnTo>
-                    <a:pt x="4798276" y="2806944"/>
-                  </a:lnTo>
-                  <a:lnTo>
-                    <a:pt x="4874909" y="2814483"/>
-                  </a:lnTo>
-                  <a:lnTo>
-                    <a:pt x="4951541" y="2821938"/>
-                  </a:lnTo>
-                  <a:lnTo>
-                    <a:pt x="5028174" y="2829310"/>
-                  </a:lnTo>
-                  <a:lnTo>
-                    <a:pt x="5104806" y="2836599"/>
-                  </a:lnTo>
-                  <a:lnTo>
-                    <a:pt x="5181439" y="2843808"/>
-                  </a:lnTo>
-                  <a:lnTo>
-                    <a:pt x="5258071" y="2850936"/>
-                  </a:lnTo>
-                  <a:lnTo>
-                    <a:pt x="5334704" y="2857985"/>
-                  </a:lnTo>
-                  <a:lnTo>
-                    <a:pt x="5411336" y="2864955"/>
-                  </a:lnTo>
-                  <a:lnTo>
-                    <a:pt x="5487969" y="2871848"/>
-                  </a:lnTo>
-                  <a:lnTo>
-                    <a:pt x="5564602" y="2878663"/>
-                  </a:lnTo>
-                  <a:lnTo>
-                    <a:pt x="5641234" y="2885403"/>
-                  </a:lnTo>
-                  <a:lnTo>
-                    <a:pt x="5717867" y="2892068"/>
-                  </a:lnTo>
-                  <a:lnTo>
-                    <a:pt x="5794499" y="2898659"/>
-                  </a:lnTo>
-                  <a:lnTo>
-                    <a:pt x="5871132" y="2905176"/>
-                  </a:lnTo>
-                  <a:lnTo>
-                    <a:pt x="5947764" y="2911621"/>
-                  </a:lnTo>
-                  <a:lnTo>
-                    <a:pt x="6024397" y="2917994"/>
-                  </a:lnTo>
-                  <a:lnTo>
-                    <a:pt x="6101029" y="2924295"/>
-                  </a:lnTo>
-                  <a:lnTo>
-                    <a:pt x="6177662" y="2930527"/>
-                  </a:lnTo>
-                  <a:lnTo>
-                    <a:pt x="6254294" y="2936689"/>
-                  </a:lnTo>
-                  <a:lnTo>
-                    <a:pt x="6330927" y="2942783"/>
-                  </a:lnTo>
-                  <a:lnTo>
-                    <a:pt x="6407560" y="2948809"/>
-                  </a:lnTo>
-                  <a:lnTo>
-                    <a:pt x="6484192" y="2954767"/>
-                  </a:lnTo>
-                  <a:lnTo>
-                    <a:pt x="6560825" y="2960659"/>
-                  </a:lnTo>
-                  <a:lnTo>
-                    <a:pt x="6637457" y="2966486"/>
-                  </a:lnTo>
-                  <a:lnTo>
-                    <a:pt x="6714090" y="2972248"/>
-                  </a:lnTo>
-                  <a:lnTo>
-                    <a:pt x="6790722" y="2977945"/>
-                  </a:lnTo>
-                  <a:lnTo>
-                    <a:pt x="6867355" y="2983579"/>
-                  </a:lnTo>
-                  <a:lnTo>
-                    <a:pt x="6943987" y="2989151"/>
-                  </a:lnTo>
-                  <a:lnTo>
-                    <a:pt x="7020620" y="2994660"/>
-                  </a:lnTo>
-                  <a:lnTo>
-                    <a:pt x="7097253" y="3000108"/>
-                  </a:lnTo>
-                  <a:lnTo>
-                    <a:pt x="7173885" y="3005495"/>
-                  </a:lnTo>
-                  <a:lnTo>
-                    <a:pt x="7250518" y="3010822"/>
-                  </a:lnTo>
-                  <a:lnTo>
-                    <a:pt x="7327150" y="3016090"/>
-                  </a:lnTo>
-                  <a:lnTo>
-                    <a:pt x="7403783" y="3021299"/>
-                  </a:lnTo>
-                  <a:lnTo>
-                    <a:pt x="7403783" y="3378562"/>
-                  </a:lnTo>
-                  <a:lnTo>
-                    <a:pt x="7327150" y="3374314"/>
-                  </a:lnTo>
-                  <a:lnTo>
-                    <a:pt x="7250518" y="3369894"/>
-                  </a:lnTo>
-                  <a:lnTo>
-                    <a:pt x="7173885" y="3365296"/>
-                  </a:lnTo>
-                  <a:lnTo>
-                    <a:pt x="7097253" y="3360513"/>
-                  </a:lnTo>
-                  <a:lnTo>
-                    <a:pt x="7020620" y="3355536"/>
-                  </a:lnTo>
-                  <a:lnTo>
-                    <a:pt x="6943987" y="3350358"/>
-                  </a:lnTo>
-                  <a:lnTo>
-                    <a:pt x="6867355" y="3344971"/>
-                  </a:lnTo>
-                  <a:lnTo>
-                    <a:pt x="6790722" y="3339366"/>
-                  </a:lnTo>
-                  <a:lnTo>
-                    <a:pt x="6714090" y="3333535"/>
-                  </a:lnTo>
-                  <a:lnTo>
-                    <a:pt x="6637457" y="3327469"/>
-                  </a:lnTo>
-                  <a:lnTo>
-                    <a:pt x="6560825" y="3321157"/>
-                  </a:lnTo>
-                  <a:lnTo>
-                    <a:pt x="6484192" y="3314591"/>
-                  </a:lnTo>
-                  <a:lnTo>
-                    <a:pt x="6407560" y="3307759"/>
-                  </a:lnTo>
-                  <a:lnTo>
-                    <a:pt x="6330927" y="3300652"/>
-                  </a:lnTo>
-                  <a:lnTo>
-                    <a:pt x="6254294" y="3293257"/>
-                  </a:lnTo>
-                  <a:lnTo>
-                    <a:pt x="6177662" y="3285564"/>
-                  </a:lnTo>
-                  <a:lnTo>
-                    <a:pt x="6101029" y="3277560"/>
-                  </a:lnTo>
-                  <a:lnTo>
-                    <a:pt x="6024397" y="3269233"/>
-                  </a:lnTo>
-                  <a:lnTo>
-                    <a:pt x="5947764" y="3260570"/>
-                  </a:lnTo>
-                  <a:lnTo>
-                    <a:pt x="5871132" y="3251556"/>
-                  </a:lnTo>
-                  <a:lnTo>
-                    <a:pt x="5794499" y="3242179"/>
-                  </a:lnTo>
-                  <a:lnTo>
-                    <a:pt x="5717867" y="3232423"/>
-                  </a:lnTo>
-                  <a:lnTo>
-                    <a:pt x="5641234" y="3222273"/>
-                  </a:lnTo>
-                  <a:lnTo>
-                    <a:pt x="5564602" y="3211713"/>
-                  </a:lnTo>
-                  <a:lnTo>
-                    <a:pt x="5487969" y="3200727"/>
-                  </a:lnTo>
-                  <a:lnTo>
-                    <a:pt x="5411336" y="3189296"/>
-                  </a:lnTo>
-                  <a:lnTo>
-                    <a:pt x="5334704" y="3177405"/>
-                  </a:lnTo>
-                  <a:lnTo>
-                    <a:pt x="5258071" y="3165033"/>
-                  </a:lnTo>
-                  <a:lnTo>
-                    <a:pt x="5181439" y="3152161"/>
-                  </a:lnTo>
-                  <a:lnTo>
-                    <a:pt x="5104806" y="3138769"/>
-                  </a:lnTo>
-                  <a:lnTo>
-                    <a:pt x="5028174" y="3124837"/>
-                  </a:lnTo>
-                  <a:lnTo>
-                    <a:pt x="4951541" y="3110342"/>
-                  </a:lnTo>
-                  <a:lnTo>
-                    <a:pt x="4874909" y="3095262"/>
-                  </a:lnTo>
-                  <a:lnTo>
-                    <a:pt x="4798276" y="3079572"/>
-                  </a:lnTo>
-                  <a:lnTo>
-                    <a:pt x="4721644" y="3063249"/>
-                  </a:lnTo>
-                  <a:lnTo>
-                    <a:pt x="4645011" y="3046267"/>
-                  </a:lnTo>
-                  <a:lnTo>
-                    <a:pt x="4568378" y="3028599"/>
-                  </a:lnTo>
-                  <a:lnTo>
-                    <a:pt x="4491746" y="3010217"/>
-                  </a:lnTo>
-                  <a:lnTo>
-                    <a:pt x="4415113" y="2991093"/>
-                  </a:lnTo>
-                  <a:lnTo>
-                    <a:pt x="4338481" y="2971196"/>
-                  </a:lnTo>
-                  <a:lnTo>
-                    <a:pt x="4261848" y="2950496"/>
-                  </a:lnTo>
-                  <a:lnTo>
-                    <a:pt x="4185216" y="2928960"/>
-                  </a:lnTo>
-                  <a:lnTo>
-                    <a:pt x="4108583" y="2906555"/>
-                  </a:lnTo>
-                  <a:lnTo>
-                    <a:pt x="4031951" y="2883244"/>
-                  </a:lnTo>
-                  <a:lnTo>
-                    <a:pt x="3955318" y="2858992"/>
-                  </a:lnTo>
-                  <a:lnTo>
-                    <a:pt x="3878685" y="2833760"/>
-                  </a:lnTo>
-                  <a:lnTo>
-                    <a:pt x="3802053" y="2807510"/>
-                  </a:lnTo>
-                  <a:lnTo>
-                    <a:pt x="3725420" y="2780199"/>
-                  </a:lnTo>
-                  <a:lnTo>
-                    <a:pt x="3648788" y="2751785"/>
-                  </a:lnTo>
-                  <a:lnTo>
-                    <a:pt x="3572155" y="2722224"/>
-                  </a:lnTo>
-                  <a:lnTo>
-                    <a:pt x="3495523" y="2691469"/>
-                  </a:lnTo>
-                  <a:lnTo>
-                    <a:pt x="3418890" y="2659472"/>
-                  </a:lnTo>
-                  <a:lnTo>
-                    <a:pt x="3342258" y="2646427"/>
-                  </a:lnTo>
-                  <a:lnTo>
-                    <a:pt x="3265625" y="2636996"/>
-                  </a:lnTo>
-                  <a:lnTo>
-                    <a:pt x="3188993" y="2627458"/>
-                  </a:lnTo>
-                  <a:lnTo>
-                    <a:pt x="3112360" y="2617812"/>
-                  </a:lnTo>
-                  <a:lnTo>
-                    <a:pt x="3035727" y="2608058"/>
-                  </a:lnTo>
-                  <a:lnTo>
-                    <a:pt x="2959095" y="2598194"/>
-                  </a:lnTo>
-                  <a:lnTo>
-                    <a:pt x="2882462" y="2588219"/>
-                  </a:lnTo>
-                  <a:lnTo>
-                    <a:pt x="2805830" y="2578131"/>
-                  </a:lnTo>
-                  <a:lnTo>
-                    <a:pt x="2729197" y="2567930"/>
-                  </a:lnTo>
-                  <a:lnTo>
-                    <a:pt x="2652565" y="2557614"/>
-                  </a:lnTo>
-                  <a:lnTo>
-                    <a:pt x="2575932" y="2547182"/>
-                  </a:lnTo>
-                  <a:lnTo>
-                    <a:pt x="2499300" y="2536632"/>
-                  </a:lnTo>
-                  <a:lnTo>
-                    <a:pt x="2422667" y="2525963"/>
-                  </a:lnTo>
-                  <a:lnTo>
-                    <a:pt x="2346034" y="2515174"/>
-                  </a:lnTo>
-                  <a:lnTo>
-                    <a:pt x="2269402" y="2504264"/>
-                  </a:lnTo>
-                  <a:lnTo>
-                    <a:pt x="2192769" y="2493231"/>
-                  </a:lnTo>
-                  <a:lnTo>
-                    <a:pt x="2116137" y="2482073"/>
-                  </a:lnTo>
-                  <a:lnTo>
-                    <a:pt x="2039504" y="2470790"/>
-                  </a:lnTo>
-                  <a:lnTo>
-                    <a:pt x="1962872" y="2459380"/>
-                  </a:lnTo>
-                  <a:lnTo>
-                    <a:pt x="1886239" y="2447841"/>
-                  </a:lnTo>
-                  <a:lnTo>
-                    <a:pt x="1809607" y="2436172"/>
-                  </a:lnTo>
-                  <a:lnTo>
-                    <a:pt x="1732974" y="2424372"/>
-                  </a:lnTo>
-                  <a:lnTo>
-                    <a:pt x="1656342" y="2412439"/>
-                  </a:lnTo>
-                  <a:lnTo>
-                    <a:pt x="1579709" y="2400371"/>
-                  </a:lnTo>
-                  <a:lnTo>
-                    <a:pt x="1503076" y="2388168"/>
-                  </a:lnTo>
-                  <a:lnTo>
-                    <a:pt x="1426444" y="2375827"/>
-                  </a:lnTo>
-                  <a:lnTo>
-                    <a:pt x="1349811" y="2363347"/>
-                  </a:lnTo>
-                  <a:lnTo>
-                    <a:pt x="1273179" y="2350726"/>
-                  </a:lnTo>
-                  <a:lnTo>
-                    <a:pt x="1196546" y="2337964"/>
-                  </a:lnTo>
-                  <a:lnTo>
-                    <a:pt x="1119914" y="2325057"/>
-                  </a:lnTo>
-                  <a:lnTo>
-                    <a:pt x="1043281" y="2312005"/>
-                  </a:lnTo>
-                  <a:lnTo>
-                    <a:pt x="966649" y="2298807"/>
-                  </a:lnTo>
-                  <a:lnTo>
-                    <a:pt x="890016" y="2285459"/>
-                  </a:lnTo>
-                  <a:lnTo>
-                    <a:pt x="813384" y="2271961"/>
-                  </a:lnTo>
-                  <a:lnTo>
-                    <a:pt x="736751" y="2258311"/>
-                  </a:lnTo>
-                  <a:lnTo>
-                    <a:pt x="660118" y="2244507"/>
-                  </a:lnTo>
-                  <a:lnTo>
-                    <a:pt x="583486" y="2230548"/>
-                  </a:lnTo>
-                  <a:lnTo>
-                    <a:pt x="506853" y="2216432"/>
-                  </a:lnTo>
-                  <a:lnTo>
-                    <a:pt x="430221" y="2202156"/>
-                  </a:lnTo>
-                  <a:lnTo>
-                    <a:pt x="353588" y="2187720"/>
-                  </a:lnTo>
-                  <a:lnTo>
-                    <a:pt x="276956" y="2173121"/>
-                  </a:lnTo>
-                  <a:lnTo>
-                    <a:pt x="200323" y="2158358"/>
-                  </a:lnTo>
-                  <a:lnTo>
-                    <a:pt x="123691" y="2143428"/>
-                  </a:lnTo>
-                  <a:lnTo>
-                    <a:pt x="47058" y="2128330"/>
-                  </a:lnTo>
-                  <a:lnTo>
-                    <a:pt x="0" y="2118955"/>
+                    <a:pt x="787847" y="55449"/>
+                  </a:lnTo>
+                  <a:lnTo>
+                    <a:pt x="859470" y="188531"/>
+                  </a:lnTo>
+                  <a:lnTo>
+                    <a:pt x="931092" y="316447"/>
+                  </a:lnTo>
+                  <a:lnTo>
+                    <a:pt x="1002715" y="439397"/>
+                  </a:lnTo>
+                  <a:lnTo>
+                    <a:pt x="1074337" y="557574"/>
+                  </a:lnTo>
+                  <a:lnTo>
+                    <a:pt x="1145960" y="671164"/>
+                  </a:lnTo>
+                  <a:lnTo>
+                    <a:pt x="1217582" y="780344"/>
+                  </a:lnTo>
+                  <a:lnTo>
+                    <a:pt x="1289205" y="885286"/>
+                  </a:lnTo>
+                  <a:lnTo>
+                    <a:pt x="1360827" y="986155"/>
+                  </a:lnTo>
+                  <a:lnTo>
+                    <a:pt x="1432450" y="1083108"/>
+                  </a:lnTo>
+                  <a:lnTo>
+                    <a:pt x="1504073" y="1176297"/>
+                  </a:lnTo>
+                  <a:lnTo>
+                    <a:pt x="1575695" y="1265869"/>
+                  </a:lnTo>
+                  <a:lnTo>
+                    <a:pt x="1647318" y="1351964"/>
+                  </a:lnTo>
+                  <a:lnTo>
+                    <a:pt x="1718940" y="1434717"/>
+                  </a:lnTo>
+                  <a:lnTo>
+                    <a:pt x="1790563" y="1514257"/>
+                  </a:lnTo>
+                  <a:lnTo>
+                    <a:pt x="1862185" y="1590710"/>
+                  </a:lnTo>
+                  <a:lnTo>
+                    <a:pt x="1933808" y="1664195"/>
+                  </a:lnTo>
+                  <a:lnTo>
+                    <a:pt x="2005430" y="1734827"/>
+                  </a:lnTo>
+                  <a:lnTo>
+                    <a:pt x="2077053" y="1802718"/>
+                  </a:lnTo>
+                  <a:lnTo>
+                    <a:pt x="2148675" y="1867973"/>
+                  </a:lnTo>
+                  <a:lnTo>
+                    <a:pt x="2220298" y="1930695"/>
+                  </a:lnTo>
+                  <a:lnTo>
+                    <a:pt x="2291920" y="1990982"/>
+                  </a:lnTo>
+                  <a:lnTo>
+                    <a:pt x="2363543" y="2048929"/>
+                  </a:lnTo>
+                  <a:lnTo>
+                    <a:pt x="2435165" y="2104627"/>
+                  </a:lnTo>
+                  <a:lnTo>
+                    <a:pt x="2506788" y="2158162"/>
+                  </a:lnTo>
+                  <a:lnTo>
+                    <a:pt x="2578410" y="2209619"/>
+                  </a:lnTo>
+                  <a:lnTo>
+                    <a:pt x="2650033" y="2259079"/>
+                  </a:lnTo>
+                  <a:lnTo>
+                    <a:pt x="2721655" y="2306619"/>
+                  </a:lnTo>
+                  <a:lnTo>
+                    <a:pt x="2793278" y="2352313"/>
+                  </a:lnTo>
+                  <a:lnTo>
+                    <a:pt x="2864901" y="2396234"/>
+                  </a:lnTo>
+                  <a:lnTo>
+                    <a:pt x="2936523" y="2438450"/>
+                  </a:lnTo>
+                  <a:lnTo>
+                    <a:pt x="3008146" y="2479027"/>
+                  </a:lnTo>
+                  <a:lnTo>
+                    <a:pt x="3079768" y="2518028"/>
+                  </a:lnTo>
+                  <a:lnTo>
+                    <a:pt x="3151391" y="2555516"/>
+                  </a:lnTo>
+                  <a:lnTo>
+                    <a:pt x="3223013" y="2591549"/>
+                  </a:lnTo>
+                  <a:lnTo>
+                    <a:pt x="3294636" y="2626183"/>
+                  </a:lnTo>
+                  <a:lnTo>
+                    <a:pt x="3366258" y="2655754"/>
+                  </a:lnTo>
+                  <a:lnTo>
+                    <a:pt x="3437881" y="2664977"/>
+                  </a:lnTo>
+                  <a:lnTo>
+                    <a:pt x="3509503" y="2674097"/>
+                  </a:lnTo>
+                  <a:lnTo>
+                    <a:pt x="3581126" y="2683116"/>
+                  </a:lnTo>
+                  <a:lnTo>
+                    <a:pt x="3652748" y="2692034"/>
+                  </a:lnTo>
+                  <a:lnTo>
+                    <a:pt x="3724371" y="2700853"/>
+                  </a:lnTo>
+                  <a:lnTo>
+                    <a:pt x="3795993" y="2709573"/>
+                  </a:lnTo>
+                  <a:lnTo>
+                    <a:pt x="3867616" y="2718197"/>
+                  </a:lnTo>
+                  <a:lnTo>
+                    <a:pt x="3939238" y="2726724"/>
+                  </a:lnTo>
+                  <a:lnTo>
+                    <a:pt x="4010861" y="2735156"/>
+                  </a:lnTo>
+                  <a:lnTo>
+                    <a:pt x="4082483" y="2743495"/>
+                  </a:lnTo>
+                  <a:lnTo>
+                    <a:pt x="4154106" y="2751740"/>
+                  </a:lnTo>
+                  <a:lnTo>
+                    <a:pt x="4225729" y="2759894"/>
+                  </a:lnTo>
+                  <a:lnTo>
+                    <a:pt x="4297351" y="2767957"/>
+                  </a:lnTo>
+                  <a:lnTo>
+                    <a:pt x="4368974" y="2775930"/>
+                  </a:lnTo>
+                  <a:lnTo>
+                    <a:pt x="4440596" y="2783814"/>
+                  </a:lnTo>
+                  <a:lnTo>
+                    <a:pt x="4512219" y="2791611"/>
+                  </a:lnTo>
+                  <a:lnTo>
+                    <a:pt x="4583841" y="2799320"/>
+                  </a:lnTo>
+                  <a:lnTo>
+                    <a:pt x="4655464" y="2806944"/>
+                  </a:lnTo>
+                  <a:lnTo>
+                    <a:pt x="4727086" y="2814483"/>
+                  </a:lnTo>
+                  <a:lnTo>
+                    <a:pt x="4798709" y="2821938"/>
+                  </a:lnTo>
+                  <a:lnTo>
+                    <a:pt x="4870331" y="2829310"/>
+                  </a:lnTo>
+                  <a:lnTo>
+                    <a:pt x="4941954" y="2836599"/>
+                  </a:lnTo>
+                  <a:lnTo>
+                    <a:pt x="5013576" y="2843808"/>
+                  </a:lnTo>
+                  <a:lnTo>
+                    <a:pt x="5085199" y="2850936"/>
+                  </a:lnTo>
+                  <a:lnTo>
+                    <a:pt x="5156821" y="2857985"/>
+                  </a:lnTo>
+                  <a:lnTo>
+                    <a:pt x="5228444" y="2864955"/>
+                  </a:lnTo>
+                  <a:lnTo>
+                    <a:pt x="5300066" y="2871848"/>
+                  </a:lnTo>
+                  <a:lnTo>
+                    <a:pt x="5371689" y="2878663"/>
+                  </a:lnTo>
+                  <a:lnTo>
+                    <a:pt x="5443311" y="2885403"/>
+                  </a:lnTo>
+                  <a:lnTo>
+                    <a:pt x="5514934" y="2892068"/>
+                  </a:lnTo>
+                  <a:lnTo>
+                    <a:pt x="5586557" y="2898659"/>
+                  </a:lnTo>
+                  <a:lnTo>
+                    <a:pt x="5658179" y="2905176"/>
+                  </a:lnTo>
+                  <a:lnTo>
+                    <a:pt x="5729802" y="2911621"/>
+                  </a:lnTo>
+                  <a:lnTo>
+                    <a:pt x="5801424" y="2917994"/>
+                  </a:lnTo>
+                  <a:lnTo>
+                    <a:pt x="5873047" y="2924295"/>
+                  </a:lnTo>
+                  <a:lnTo>
+                    <a:pt x="5944669" y="2930527"/>
+                  </a:lnTo>
+                  <a:lnTo>
+                    <a:pt x="6016292" y="2936689"/>
+                  </a:lnTo>
+                  <a:lnTo>
+                    <a:pt x="6087914" y="2942783"/>
+                  </a:lnTo>
+                  <a:lnTo>
+                    <a:pt x="6159537" y="2948809"/>
+                  </a:lnTo>
+                  <a:lnTo>
+                    <a:pt x="6231159" y="2954767"/>
+                  </a:lnTo>
+                  <a:lnTo>
+                    <a:pt x="6302782" y="2960659"/>
+                  </a:lnTo>
+                  <a:lnTo>
+                    <a:pt x="6374404" y="2966486"/>
+                  </a:lnTo>
+                  <a:lnTo>
+                    <a:pt x="6446027" y="2972248"/>
+                  </a:lnTo>
+                  <a:lnTo>
+                    <a:pt x="6517649" y="2977945"/>
+                  </a:lnTo>
+                  <a:lnTo>
+                    <a:pt x="6589272" y="2983579"/>
+                  </a:lnTo>
+                  <a:lnTo>
+                    <a:pt x="6660894" y="2989151"/>
+                  </a:lnTo>
+                  <a:lnTo>
+                    <a:pt x="6732517" y="2994660"/>
+                  </a:lnTo>
+                  <a:lnTo>
+                    <a:pt x="6804139" y="3000108"/>
+                  </a:lnTo>
+                  <a:lnTo>
+                    <a:pt x="6875762" y="3005495"/>
+                  </a:lnTo>
+                  <a:lnTo>
+                    <a:pt x="6947385" y="3010822"/>
+                  </a:lnTo>
+                  <a:lnTo>
+                    <a:pt x="7019007" y="3016090"/>
+                  </a:lnTo>
+                  <a:lnTo>
+                    <a:pt x="7090630" y="3021299"/>
+                  </a:lnTo>
+                  <a:lnTo>
+                    <a:pt x="7090630" y="3378562"/>
+                  </a:lnTo>
+                  <a:lnTo>
+                    <a:pt x="7019007" y="3374314"/>
+                  </a:lnTo>
+                  <a:lnTo>
+                    <a:pt x="6947385" y="3369894"/>
+                  </a:lnTo>
+                  <a:lnTo>
+                    <a:pt x="6875762" y="3365296"/>
+                  </a:lnTo>
+                  <a:lnTo>
+                    <a:pt x="6804139" y="3360513"/>
+                  </a:lnTo>
+                  <a:lnTo>
+                    <a:pt x="6732517" y="3355536"/>
+                  </a:lnTo>
+                  <a:lnTo>
+                    <a:pt x="6660894" y="3350358"/>
+                  </a:lnTo>
+                  <a:lnTo>
+                    <a:pt x="6589272" y="3344971"/>
+                  </a:lnTo>
+                  <a:lnTo>
+                    <a:pt x="6517649" y="3339366"/>
+                  </a:lnTo>
+                  <a:lnTo>
+                    <a:pt x="6446027" y="3333535"/>
+                  </a:lnTo>
+                  <a:lnTo>
+                    <a:pt x="6374404" y="3327469"/>
+                  </a:lnTo>
+                  <a:lnTo>
+                    <a:pt x="6302782" y="3321157"/>
+                  </a:lnTo>
+                  <a:lnTo>
+                    <a:pt x="6231159" y="3314591"/>
+                  </a:lnTo>
+                  <a:lnTo>
+                    <a:pt x="6159537" y="3307759"/>
+                  </a:lnTo>
+                  <a:lnTo>
+                    <a:pt x="6087914" y="3300652"/>
+                  </a:lnTo>
+                  <a:lnTo>
+                    <a:pt x="6016292" y="3293257"/>
+                  </a:lnTo>
+                  <a:lnTo>
+                    <a:pt x="5944669" y="3285564"/>
+                  </a:lnTo>
+                  <a:lnTo>
+                    <a:pt x="5873047" y="3277560"/>
+                  </a:lnTo>
+                  <a:lnTo>
+                    <a:pt x="5801424" y="3269233"/>
+                  </a:lnTo>
+                  <a:lnTo>
+                    <a:pt x="5729802" y="3260570"/>
+                  </a:lnTo>
+                  <a:lnTo>
+                    <a:pt x="5658179" y="3251556"/>
+                  </a:lnTo>
+                  <a:lnTo>
+                    <a:pt x="5586557" y="3242179"/>
+                  </a:lnTo>
+                  <a:lnTo>
+                    <a:pt x="5514934" y="3232423"/>
+                  </a:lnTo>
+                  <a:lnTo>
+                    <a:pt x="5443311" y="3222273"/>
+                  </a:lnTo>
+                  <a:lnTo>
+                    <a:pt x="5371689" y="3211713"/>
+                  </a:lnTo>
+                  <a:lnTo>
+                    <a:pt x="5300066" y="3200727"/>
+                  </a:lnTo>
+                  <a:lnTo>
+                    <a:pt x="5228444" y="3189296"/>
+                  </a:lnTo>
+                  <a:lnTo>
+                    <a:pt x="5156821" y="3177405"/>
+                  </a:lnTo>
+                  <a:lnTo>
+                    <a:pt x="5085199" y="3165033"/>
+                  </a:lnTo>
+                  <a:lnTo>
+                    <a:pt x="5013576" y="3152161"/>
+                  </a:lnTo>
+                  <a:lnTo>
+                    <a:pt x="4941954" y="3138769"/>
+                  </a:lnTo>
+                  <a:lnTo>
+                    <a:pt x="4870331" y="3124837"/>
+                  </a:lnTo>
+                  <a:lnTo>
+                    <a:pt x="4798709" y="3110342"/>
+                  </a:lnTo>
+                  <a:lnTo>
+                    <a:pt x="4727086" y="3095262"/>
+                  </a:lnTo>
+                  <a:lnTo>
+                    <a:pt x="4655464" y="3079572"/>
+                  </a:lnTo>
+                  <a:lnTo>
+                    <a:pt x="4583841" y="3063249"/>
+                  </a:lnTo>
+                  <a:lnTo>
+                    <a:pt x="4512219" y="3046267"/>
+                  </a:lnTo>
+                  <a:lnTo>
+                    <a:pt x="4440596" y="3028599"/>
+                  </a:lnTo>
+                  <a:lnTo>
+                    <a:pt x="4368974" y="3010217"/>
+                  </a:lnTo>
+                  <a:lnTo>
+                    <a:pt x="4297351" y="2991093"/>
+                  </a:lnTo>
+                  <a:lnTo>
+                    <a:pt x="4225729" y="2971196"/>
+                  </a:lnTo>
+                  <a:lnTo>
+                    <a:pt x="4154106" y="2950496"/>
+                  </a:lnTo>
+                  <a:lnTo>
+                    <a:pt x="4082483" y="2928960"/>
+                  </a:lnTo>
+                  <a:lnTo>
+                    <a:pt x="4010861" y="2906555"/>
+                  </a:lnTo>
+                  <a:lnTo>
+                    <a:pt x="3939238" y="2883244"/>
+                  </a:lnTo>
+                  <a:lnTo>
+                    <a:pt x="3867616" y="2858992"/>
+                  </a:lnTo>
+                  <a:lnTo>
+                    <a:pt x="3795993" y="2833760"/>
+                  </a:lnTo>
+                  <a:lnTo>
+                    <a:pt x="3724371" y="2807510"/>
+                  </a:lnTo>
+                  <a:lnTo>
+                    <a:pt x="3652748" y="2780199"/>
+                  </a:lnTo>
+                  <a:lnTo>
+                    <a:pt x="3581126" y="2751785"/>
+                  </a:lnTo>
+                  <a:lnTo>
+                    <a:pt x="3509503" y="2722224"/>
+                  </a:lnTo>
+                  <a:lnTo>
+                    <a:pt x="3437881" y="2691469"/>
+                  </a:lnTo>
+                  <a:lnTo>
+                    <a:pt x="3366258" y="2659472"/>
+                  </a:lnTo>
+                  <a:lnTo>
+                    <a:pt x="3294636" y="2646427"/>
+                  </a:lnTo>
+                  <a:lnTo>
+                    <a:pt x="3223013" y="2636996"/>
+                  </a:lnTo>
+                  <a:lnTo>
+                    <a:pt x="3151391" y="2627458"/>
+                  </a:lnTo>
+                  <a:lnTo>
+                    <a:pt x="3079768" y="2617812"/>
+                  </a:lnTo>
+                  <a:lnTo>
+                    <a:pt x="3008146" y="2608058"/>
+                  </a:lnTo>
+                  <a:lnTo>
+                    <a:pt x="2936523" y="2598194"/>
+                  </a:lnTo>
+                  <a:lnTo>
+                    <a:pt x="2864901" y="2588219"/>
+                  </a:lnTo>
+                  <a:lnTo>
+                    <a:pt x="2793278" y="2578131"/>
+                  </a:lnTo>
+                  <a:lnTo>
+                    <a:pt x="2721655" y="2567930"/>
+                  </a:lnTo>
+                  <a:lnTo>
+                    <a:pt x="2650033" y="2557614"/>
+                  </a:lnTo>
+                  <a:lnTo>
+                    <a:pt x="2578410" y="2547182"/>
+                  </a:lnTo>
+                  <a:lnTo>
+                    <a:pt x="2506788" y="2536632"/>
+                  </a:lnTo>
+                  <a:lnTo>
+                    <a:pt x="2435165" y="2525963"/>
+                  </a:lnTo>
+                  <a:lnTo>
+                    <a:pt x="2363543" y="2515174"/>
+                  </a:lnTo>
+                  <a:lnTo>
+                    <a:pt x="2291920" y="2504264"/>
+                  </a:lnTo>
+                  <a:lnTo>
+                    <a:pt x="2220298" y="2493231"/>
+                  </a:lnTo>
+                  <a:lnTo>
+                    <a:pt x="2148675" y="2482073"/>
+                  </a:lnTo>
+                  <a:lnTo>
+                    <a:pt x="2077053" y="2470790"/>
+                  </a:lnTo>
+                  <a:lnTo>
+                    <a:pt x="2005430" y="2459380"/>
+                  </a:lnTo>
+                  <a:lnTo>
+                    <a:pt x="1933808" y="2447841"/>
+                  </a:lnTo>
+                  <a:lnTo>
+                    <a:pt x="1862185" y="2436172"/>
+                  </a:lnTo>
+                  <a:lnTo>
+                    <a:pt x="1790563" y="2424372"/>
+                  </a:lnTo>
+                  <a:lnTo>
+                    <a:pt x="1718940" y="2412439"/>
+                  </a:lnTo>
+                  <a:lnTo>
+                    <a:pt x="1647318" y="2400371"/>
+                  </a:lnTo>
+                  <a:lnTo>
+                    <a:pt x="1575695" y="2388168"/>
+                  </a:lnTo>
+                  <a:lnTo>
+                    <a:pt x="1504073" y="2375827"/>
+                  </a:lnTo>
+                  <a:lnTo>
+                    <a:pt x="1432450" y="2363347"/>
+                  </a:lnTo>
+                  <a:lnTo>
+                    <a:pt x="1360827" y="2350726"/>
+                  </a:lnTo>
+                  <a:lnTo>
+                    <a:pt x="1289205" y="2337964"/>
+                  </a:lnTo>
+                  <a:lnTo>
+                    <a:pt x="1217582" y="2325057"/>
+                  </a:lnTo>
+                  <a:lnTo>
+                    <a:pt x="1145960" y="2312005"/>
+                  </a:lnTo>
+                  <a:lnTo>
+                    <a:pt x="1074337" y="2298807"/>
+                  </a:lnTo>
+                  <a:lnTo>
+                    <a:pt x="1002715" y="2285459"/>
+                  </a:lnTo>
+                  <a:lnTo>
+                    <a:pt x="931092" y="2271961"/>
+                  </a:lnTo>
+                  <a:lnTo>
+                    <a:pt x="859470" y="2258311"/>
+                  </a:lnTo>
+                  <a:lnTo>
+                    <a:pt x="787847" y="2244507"/>
+                  </a:lnTo>
+                  <a:lnTo>
+                    <a:pt x="716225" y="2230548"/>
+                  </a:lnTo>
+                  <a:lnTo>
+                    <a:pt x="644602" y="2216432"/>
+                  </a:lnTo>
+                  <a:lnTo>
+                    <a:pt x="572980" y="2202156"/>
+                  </a:lnTo>
+                  <a:lnTo>
+                    <a:pt x="501357" y="2187720"/>
+                  </a:lnTo>
+                  <a:lnTo>
+                    <a:pt x="429735" y="2173121"/>
+                  </a:lnTo>
+                  <a:lnTo>
+                    <a:pt x="358112" y="2158358"/>
+                  </a:lnTo>
+                  <a:lnTo>
+                    <a:pt x="286490" y="2143428"/>
+                  </a:lnTo>
+                  <a:lnTo>
+                    <a:pt x="214867" y="2128330"/>
+                  </a:lnTo>
+                  <a:lnTo>
+                    <a:pt x="143245" y="2113063"/>
+                  </a:lnTo>
+                  <a:lnTo>
+                    <a:pt x="71622" y="2097623"/>
+                  </a:lnTo>
+                  <a:lnTo>
+                    <a:pt x="0" y="2082009"/>
                   </a:lnTo>
                   <a:close/>
                 </a:path>
@@ -3591,288 +3554,613 @@
         </p:sp>
         <p:sp>
           <p:nvSpPr>
+            <p:cNvPr id="21" name="pl21"/>
+            <p:cNvSpPr/>
+            <p:nvPr/>
+          </p:nvSpPr>
+          <p:spPr>
+            <a:xfrm>
+              <a:off x="1931213" y="2073503"/>
+              <a:ext cx="6331466" cy="3021299"/>
+            </a:xfrm>
+            <a:custGeom>
+              <a:avLst/>
+              <a:pathLst>
+                <a:path w="6331466" h="3021299">
+                  <a:moveTo>
+                    <a:pt x="0" y="0"/>
+                  </a:moveTo>
+                  <a:lnTo>
+                    <a:pt x="28683" y="55449"/>
+                  </a:lnTo>
+                  <a:lnTo>
+                    <a:pt x="100306" y="188531"/>
+                  </a:lnTo>
+                  <a:lnTo>
+                    <a:pt x="171928" y="316447"/>
+                  </a:lnTo>
+                  <a:lnTo>
+                    <a:pt x="243551" y="439397"/>
+                  </a:lnTo>
+                  <a:lnTo>
+                    <a:pt x="315173" y="557574"/>
+                  </a:lnTo>
+                  <a:lnTo>
+                    <a:pt x="386796" y="671164"/>
+                  </a:lnTo>
+                  <a:lnTo>
+                    <a:pt x="458419" y="780344"/>
+                  </a:lnTo>
+                  <a:lnTo>
+                    <a:pt x="530041" y="885286"/>
+                  </a:lnTo>
+                  <a:lnTo>
+                    <a:pt x="601664" y="986155"/>
+                  </a:lnTo>
+                  <a:lnTo>
+                    <a:pt x="673286" y="1083108"/>
+                  </a:lnTo>
+                  <a:lnTo>
+                    <a:pt x="744909" y="1176297"/>
+                  </a:lnTo>
+                  <a:lnTo>
+                    <a:pt x="816531" y="1265869"/>
+                  </a:lnTo>
+                  <a:lnTo>
+                    <a:pt x="888154" y="1351964"/>
+                  </a:lnTo>
+                  <a:lnTo>
+                    <a:pt x="959776" y="1434717"/>
+                  </a:lnTo>
+                  <a:lnTo>
+                    <a:pt x="1031399" y="1514257"/>
+                  </a:lnTo>
+                  <a:lnTo>
+                    <a:pt x="1103021" y="1590710"/>
+                  </a:lnTo>
+                  <a:lnTo>
+                    <a:pt x="1174644" y="1664195"/>
+                  </a:lnTo>
+                  <a:lnTo>
+                    <a:pt x="1246266" y="1734827"/>
+                  </a:lnTo>
+                  <a:lnTo>
+                    <a:pt x="1317889" y="1802718"/>
+                  </a:lnTo>
+                  <a:lnTo>
+                    <a:pt x="1389511" y="1867973"/>
+                  </a:lnTo>
+                  <a:lnTo>
+                    <a:pt x="1461134" y="1930695"/>
+                  </a:lnTo>
+                  <a:lnTo>
+                    <a:pt x="1532756" y="1990982"/>
+                  </a:lnTo>
+                  <a:lnTo>
+                    <a:pt x="1604379" y="2048929"/>
+                  </a:lnTo>
+                  <a:lnTo>
+                    <a:pt x="1676001" y="2104627"/>
+                  </a:lnTo>
+                  <a:lnTo>
+                    <a:pt x="1747624" y="2158162"/>
+                  </a:lnTo>
+                  <a:lnTo>
+                    <a:pt x="1819247" y="2209619"/>
+                  </a:lnTo>
+                  <a:lnTo>
+                    <a:pt x="1890869" y="2259079"/>
+                  </a:lnTo>
+                  <a:lnTo>
+                    <a:pt x="1962492" y="2306619"/>
+                  </a:lnTo>
+                  <a:lnTo>
+                    <a:pt x="2034114" y="2352313"/>
+                  </a:lnTo>
+                  <a:lnTo>
+                    <a:pt x="2105737" y="2396234"/>
+                  </a:lnTo>
+                  <a:lnTo>
+                    <a:pt x="2177359" y="2438450"/>
+                  </a:lnTo>
+                  <a:lnTo>
+                    <a:pt x="2248982" y="2479027"/>
+                  </a:lnTo>
+                  <a:lnTo>
+                    <a:pt x="2320604" y="2518028"/>
+                  </a:lnTo>
+                  <a:lnTo>
+                    <a:pt x="2392227" y="2555516"/>
+                  </a:lnTo>
+                  <a:lnTo>
+                    <a:pt x="2463849" y="2591549"/>
+                  </a:lnTo>
+                  <a:lnTo>
+                    <a:pt x="2535472" y="2626183"/>
+                  </a:lnTo>
+                  <a:lnTo>
+                    <a:pt x="2607094" y="2655754"/>
+                  </a:lnTo>
+                  <a:lnTo>
+                    <a:pt x="2678717" y="2664977"/>
+                  </a:lnTo>
+                  <a:lnTo>
+                    <a:pt x="2750339" y="2674097"/>
+                  </a:lnTo>
+                  <a:lnTo>
+                    <a:pt x="2821962" y="2683116"/>
+                  </a:lnTo>
+                  <a:lnTo>
+                    <a:pt x="2893584" y="2692034"/>
+                  </a:lnTo>
+                  <a:lnTo>
+                    <a:pt x="2965207" y="2700853"/>
+                  </a:lnTo>
+                  <a:lnTo>
+                    <a:pt x="3036829" y="2709573"/>
+                  </a:lnTo>
+                  <a:lnTo>
+                    <a:pt x="3108452" y="2718197"/>
+                  </a:lnTo>
+                  <a:lnTo>
+                    <a:pt x="3180075" y="2726724"/>
+                  </a:lnTo>
+                  <a:lnTo>
+                    <a:pt x="3251697" y="2735156"/>
+                  </a:lnTo>
+                  <a:lnTo>
+                    <a:pt x="3323320" y="2743495"/>
+                  </a:lnTo>
+                  <a:lnTo>
+                    <a:pt x="3394942" y="2751740"/>
+                  </a:lnTo>
+                  <a:lnTo>
+                    <a:pt x="3466565" y="2759894"/>
+                  </a:lnTo>
+                  <a:lnTo>
+                    <a:pt x="3538187" y="2767957"/>
+                  </a:lnTo>
+                  <a:lnTo>
+                    <a:pt x="3609810" y="2775930"/>
+                  </a:lnTo>
+                  <a:lnTo>
+                    <a:pt x="3681432" y="2783814"/>
+                  </a:lnTo>
+                  <a:lnTo>
+                    <a:pt x="3753055" y="2791611"/>
+                  </a:lnTo>
+                  <a:lnTo>
+                    <a:pt x="3824677" y="2799320"/>
+                  </a:lnTo>
+                  <a:lnTo>
+                    <a:pt x="3896300" y="2806944"/>
+                  </a:lnTo>
+                  <a:lnTo>
+                    <a:pt x="3967922" y="2814483"/>
+                  </a:lnTo>
+                  <a:lnTo>
+                    <a:pt x="4039545" y="2821938"/>
+                  </a:lnTo>
+                  <a:lnTo>
+                    <a:pt x="4111167" y="2829310"/>
+                  </a:lnTo>
+                  <a:lnTo>
+                    <a:pt x="4182790" y="2836599"/>
+                  </a:lnTo>
+                  <a:lnTo>
+                    <a:pt x="4254412" y="2843808"/>
+                  </a:lnTo>
+                  <a:lnTo>
+                    <a:pt x="4326035" y="2850936"/>
+                  </a:lnTo>
+                  <a:lnTo>
+                    <a:pt x="4397657" y="2857985"/>
+                  </a:lnTo>
+                  <a:lnTo>
+                    <a:pt x="4469280" y="2864955"/>
+                  </a:lnTo>
+                  <a:lnTo>
+                    <a:pt x="4540903" y="2871848"/>
+                  </a:lnTo>
+                  <a:lnTo>
+                    <a:pt x="4612525" y="2878663"/>
+                  </a:lnTo>
+                  <a:lnTo>
+                    <a:pt x="4684148" y="2885403"/>
+                  </a:lnTo>
+                  <a:lnTo>
+                    <a:pt x="4755770" y="2892068"/>
+                  </a:lnTo>
+                  <a:lnTo>
+                    <a:pt x="4827393" y="2898659"/>
+                  </a:lnTo>
+                  <a:lnTo>
+                    <a:pt x="4899015" y="2905176"/>
+                  </a:lnTo>
+                  <a:lnTo>
+                    <a:pt x="4970638" y="2911621"/>
+                  </a:lnTo>
+                  <a:lnTo>
+                    <a:pt x="5042260" y="2917994"/>
+                  </a:lnTo>
+                  <a:lnTo>
+                    <a:pt x="5113883" y="2924295"/>
+                  </a:lnTo>
+                  <a:lnTo>
+                    <a:pt x="5185505" y="2930527"/>
+                  </a:lnTo>
+                  <a:lnTo>
+                    <a:pt x="5257128" y="2936689"/>
+                  </a:lnTo>
+                  <a:lnTo>
+                    <a:pt x="5328750" y="2942783"/>
+                  </a:lnTo>
+                  <a:lnTo>
+                    <a:pt x="5400373" y="2948809"/>
+                  </a:lnTo>
+                  <a:lnTo>
+                    <a:pt x="5471995" y="2954767"/>
+                  </a:lnTo>
+                  <a:lnTo>
+                    <a:pt x="5543618" y="2960659"/>
+                  </a:lnTo>
+                  <a:lnTo>
+                    <a:pt x="5615240" y="2966486"/>
+                  </a:lnTo>
+                  <a:lnTo>
+                    <a:pt x="5686863" y="2972248"/>
+                  </a:lnTo>
+                  <a:lnTo>
+                    <a:pt x="5758485" y="2977945"/>
+                  </a:lnTo>
+                  <a:lnTo>
+                    <a:pt x="5830108" y="2983579"/>
+                  </a:lnTo>
+                  <a:lnTo>
+                    <a:pt x="5901731" y="2989151"/>
+                  </a:lnTo>
+                  <a:lnTo>
+                    <a:pt x="5973353" y="2994660"/>
+                  </a:lnTo>
+                  <a:lnTo>
+                    <a:pt x="6044976" y="3000108"/>
+                  </a:lnTo>
+                  <a:lnTo>
+                    <a:pt x="6116598" y="3005495"/>
+                  </a:lnTo>
+                  <a:lnTo>
+                    <a:pt x="6188221" y="3010822"/>
+                  </a:lnTo>
+                  <a:lnTo>
+                    <a:pt x="6259843" y="3016090"/>
+                  </a:lnTo>
+                  <a:lnTo>
+                    <a:pt x="6331466" y="3021299"/>
+                  </a:lnTo>
+                </a:path>
+              </a:pathLst>
+            </a:custGeom>
+          </p:spPr>
+          <p:txBody>
+            <a:bodyPr/>
+            <a:lstStyle/>
+            <a:p/>
+          </p:txBody>
+        </p:sp>
+        <p:sp>
+          <p:nvSpPr>
             <p:cNvPr id="22" name="pl22"/>
             <p:cNvSpPr/>
             <p:nvPr/>
           </p:nvSpPr>
           <p:spPr>
             <a:xfrm>
-              <a:off x="1446946" y="2073503"/>
-              <a:ext cx="6774354" cy="3021299"/>
+              <a:off x="1172049" y="4155512"/>
+              <a:ext cx="7090630" cy="1296553"/>
             </a:xfrm>
             <a:custGeom>
               <a:avLst/>
               <a:pathLst>
-                <a:path w="6774354" h="3021299">
+                <a:path w="7090630" h="1296553">
                   <a:moveTo>
+                    <a:pt x="7090630" y="1296553"/>
+                  </a:moveTo>
+                  <a:lnTo>
+                    <a:pt x="7019007" y="1292305"/>
+                  </a:lnTo>
+                  <a:lnTo>
+                    <a:pt x="6947385" y="1287885"/>
+                  </a:lnTo>
+                  <a:lnTo>
+                    <a:pt x="6875762" y="1283287"/>
+                  </a:lnTo>
+                  <a:lnTo>
+                    <a:pt x="6804139" y="1278503"/>
+                  </a:lnTo>
+                  <a:lnTo>
+                    <a:pt x="6732517" y="1273526"/>
+                  </a:lnTo>
+                  <a:lnTo>
+                    <a:pt x="6660894" y="1268348"/>
+                  </a:lnTo>
+                  <a:lnTo>
+                    <a:pt x="6589272" y="1262961"/>
+                  </a:lnTo>
+                  <a:lnTo>
+                    <a:pt x="6517649" y="1257356"/>
+                  </a:lnTo>
+                  <a:lnTo>
+                    <a:pt x="6446027" y="1251525"/>
+                  </a:lnTo>
+                  <a:lnTo>
+                    <a:pt x="6374404" y="1245459"/>
+                  </a:lnTo>
+                  <a:lnTo>
+                    <a:pt x="6302782" y="1239148"/>
+                  </a:lnTo>
+                  <a:lnTo>
+                    <a:pt x="6231159" y="1232581"/>
+                  </a:lnTo>
+                  <a:lnTo>
+                    <a:pt x="6159537" y="1225750"/>
+                  </a:lnTo>
+                  <a:lnTo>
+                    <a:pt x="6087914" y="1218642"/>
+                  </a:lnTo>
+                  <a:lnTo>
+                    <a:pt x="6016292" y="1211248"/>
+                  </a:lnTo>
+                  <a:lnTo>
+                    <a:pt x="5944669" y="1203554"/>
+                  </a:lnTo>
+                  <a:lnTo>
+                    <a:pt x="5873047" y="1195551"/>
+                  </a:lnTo>
+                  <a:lnTo>
+                    <a:pt x="5801424" y="1187223"/>
+                  </a:lnTo>
+                  <a:lnTo>
+                    <a:pt x="5729802" y="1178560"/>
+                  </a:lnTo>
+                  <a:lnTo>
+                    <a:pt x="5658179" y="1169547"/>
+                  </a:lnTo>
+                  <a:lnTo>
+                    <a:pt x="5586557" y="1160169"/>
+                  </a:lnTo>
+                  <a:lnTo>
+                    <a:pt x="5514934" y="1150413"/>
+                  </a:lnTo>
+                  <a:lnTo>
+                    <a:pt x="5443311" y="1140263"/>
+                  </a:lnTo>
+                  <a:lnTo>
+                    <a:pt x="5371689" y="1129703"/>
+                  </a:lnTo>
+                  <a:lnTo>
+                    <a:pt x="5300066" y="1118717"/>
+                  </a:lnTo>
+                  <a:lnTo>
+                    <a:pt x="5228444" y="1107287"/>
+                  </a:lnTo>
+                  <a:lnTo>
+                    <a:pt x="5156821" y="1095395"/>
+                  </a:lnTo>
+                  <a:lnTo>
+                    <a:pt x="5085199" y="1083023"/>
+                  </a:lnTo>
+                  <a:lnTo>
+                    <a:pt x="5013576" y="1070151"/>
+                  </a:lnTo>
+                  <a:lnTo>
+                    <a:pt x="4941954" y="1056760"/>
+                  </a:lnTo>
+                  <a:lnTo>
+                    <a:pt x="4870331" y="1042828"/>
+                  </a:lnTo>
+                  <a:lnTo>
+                    <a:pt x="4798709" y="1028333"/>
+                  </a:lnTo>
+                  <a:lnTo>
+                    <a:pt x="4727086" y="1013252"/>
+                  </a:lnTo>
+                  <a:lnTo>
+                    <a:pt x="4655464" y="997563"/>
+                  </a:lnTo>
+                  <a:lnTo>
+                    <a:pt x="4583841" y="981240"/>
+                  </a:lnTo>
+                  <a:lnTo>
+                    <a:pt x="4512219" y="964257"/>
+                  </a:lnTo>
+                  <a:lnTo>
+                    <a:pt x="4440596" y="946589"/>
+                  </a:lnTo>
+                  <a:lnTo>
+                    <a:pt x="4368974" y="928207"/>
+                  </a:lnTo>
+                  <a:lnTo>
+                    <a:pt x="4297351" y="909083"/>
+                  </a:lnTo>
+                  <a:lnTo>
+                    <a:pt x="4225729" y="889187"/>
+                  </a:lnTo>
+                  <a:lnTo>
+                    <a:pt x="4154106" y="868487"/>
+                  </a:lnTo>
+                  <a:lnTo>
+                    <a:pt x="4082483" y="846951"/>
+                  </a:lnTo>
+                  <a:lnTo>
+                    <a:pt x="4010861" y="824545"/>
+                  </a:lnTo>
+                  <a:lnTo>
+                    <a:pt x="3939238" y="801234"/>
+                  </a:lnTo>
+                  <a:lnTo>
+                    <a:pt x="3867616" y="776982"/>
+                  </a:lnTo>
+                  <a:lnTo>
+                    <a:pt x="3795993" y="751751"/>
+                  </a:lnTo>
+                  <a:lnTo>
+                    <a:pt x="3724371" y="725500"/>
+                  </a:lnTo>
+                  <a:lnTo>
+                    <a:pt x="3652748" y="698190"/>
+                  </a:lnTo>
+                  <a:lnTo>
+                    <a:pt x="3581126" y="669776"/>
+                  </a:lnTo>
+                  <a:lnTo>
+                    <a:pt x="3509503" y="640215"/>
+                  </a:lnTo>
+                  <a:lnTo>
+                    <a:pt x="3437881" y="609460"/>
+                  </a:lnTo>
+                  <a:lnTo>
+                    <a:pt x="3366258" y="577462"/>
+                  </a:lnTo>
+                  <a:lnTo>
+                    <a:pt x="3294636" y="564418"/>
+                  </a:lnTo>
+                  <a:lnTo>
+                    <a:pt x="3223013" y="554986"/>
+                  </a:lnTo>
+                  <a:lnTo>
+                    <a:pt x="3151391" y="545448"/>
+                  </a:lnTo>
+                  <a:lnTo>
+                    <a:pt x="3079768" y="535803"/>
+                  </a:lnTo>
+                  <a:lnTo>
+                    <a:pt x="3008146" y="526048"/>
+                  </a:lnTo>
+                  <a:lnTo>
+                    <a:pt x="2936523" y="516184"/>
+                  </a:lnTo>
+                  <a:lnTo>
+                    <a:pt x="2864901" y="506209"/>
+                  </a:lnTo>
+                  <a:lnTo>
+                    <a:pt x="2793278" y="496122"/>
+                  </a:lnTo>
+                  <a:lnTo>
+                    <a:pt x="2721655" y="485920"/>
+                  </a:lnTo>
+                  <a:lnTo>
+                    <a:pt x="2650033" y="475604"/>
+                  </a:lnTo>
+                  <a:lnTo>
+                    <a:pt x="2578410" y="465172"/>
+                  </a:lnTo>
+                  <a:lnTo>
+                    <a:pt x="2506788" y="454622"/>
+                  </a:lnTo>
+                  <a:lnTo>
+                    <a:pt x="2435165" y="443954"/>
+                  </a:lnTo>
+                  <a:lnTo>
+                    <a:pt x="2363543" y="433165"/>
+                  </a:lnTo>
+                  <a:lnTo>
+                    <a:pt x="2291920" y="422255"/>
+                  </a:lnTo>
+                  <a:lnTo>
+                    <a:pt x="2220298" y="411221"/>
+                  </a:lnTo>
+                  <a:lnTo>
+                    <a:pt x="2148675" y="400064"/>
+                  </a:lnTo>
+                  <a:lnTo>
+                    <a:pt x="2077053" y="388781"/>
+                  </a:lnTo>
+                  <a:lnTo>
+                    <a:pt x="2005430" y="377370"/>
+                  </a:lnTo>
+                  <a:lnTo>
+                    <a:pt x="1933808" y="365832"/>
+                  </a:lnTo>
+                  <a:lnTo>
+                    <a:pt x="1862185" y="354163"/>
+                  </a:lnTo>
+                  <a:lnTo>
+                    <a:pt x="1790563" y="342363"/>
+                  </a:lnTo>
+                  <a:lnTo>
+                    <a:pt x="1718940" y="330430"/>
+                  </a:lnTo>
+                  <a:lnTo>
+                    <a:pt x="1647318" y="318362"/>
+                  </a:lnTo>
+                  <a:lnTo>
+                    <a:pt x="1575695" y="306158"/>
+                  </a:lnTo>
+                  <a:lnTo>
+                    <a:pt x="1504073" y="293817"/>
+                  </a:lnTo>
+                  <a:lnTo>
+                    <a:pt x="1432450" y="281338"/>
+                  </a:lnTo>
+                  <a:lnTo>
+                    <a:pt x="1360827" y="268717"/>
+                  </a:lnTo>
+                  <a:lnTo>
+                    <a:pt x="1289205" y="255954"/>
+                  </a:lnTo>
+                  <a:lnTo>
+                    <a:pt x="1217582" y="243048"/>
+                  </a:lnTo>
+                  <a:lnTo>
+                    <a:pt x="1145960" y="229996"/>
+                  </a:lnTo>
+                  <a:lnTo>
+                    <a:pt x="1074337" y="216797"/>
+                  </a:lnTo>
+                  <a:lnTo>
+                    <a:pt x="1002715" y="203449"/>
+                  </a:lnTo>
+                  <a:lnTo>
+                    <a:pt x="931092" y="189952"/>
+                  </a:lnTo>
+                  <a:lnTo>
+                    <a:pt x="859470" y="176302"/>
+                  </a:lnTo>
+                  <a:lnTo>
+                    <a:pt x="787847" y="162498"/>
+                  </a:lnTo>
+                  <a:lnTo>
+                    <a:pt x="716225" y="148539"/>
+                  </a:lnTo>
+                  <a:lnTo>
+                    <a:pt x="644602" y="134422"/>
+                  </a:lnTo>
+                  <a:lnTo>
+                    <a:pt x="572980" y="120147"/>
+                  </a:lnTo>
+                  <a:lnTo>
+                    <a:pt x="501357" y="105711"/>
+                  </a:lnTo>
+                  <a:lnTo>
+                    <a:pt x="429735" y="91112"/>
+                  </a:lnTo>
+                  <a:lnTo>
+                    <a:pt x="358112" y="76348"/>
+                  </a:lnTo>
+                  <a:lnTo>
+                    <a:pt x="286490" y="61419"/>
+                  </a:lnTo>
+                  <a:lnTo>
+                    <a:pt x="214867" y="46321"/>
+                  </a:lnTo>
+                  <a:lnTo>
+                    <a:pt x="143245" y="31053"/>
+                  </a:lnTo>
+                  <a:lnTo>
+                    <a:pt x="71622" y="15613"/>
+                  </a:lnTo>
+                  <a:lnTo>
                     <a:pt x="0" y="0"/>
-                  </a:moveTo>
-                  <a:lnTo>
-                    <a:pt x="30690" y="55449"/>
-                  </a:lnTo>
-                  <a:lnTo>
-                    <a:pt x="107322" y="188531"/>
-                  </a:lnTo>
-                  <a:lnTo>
-                    <a:pt x="183955" y="316447"/>
-                  </a:lnTo>
-                  <a:lnTo>
-                    <a:pt x="260587" y="439397"/>
-                  </a:lnTo>
-                  <a:lnTo>
-                    <a:pt x="337220" y="557574"/>
-                  </a:lnTo>
-                  <a:lnTo>
-                    <a:pt x="413853" y="671164"/>
-                  </a:lnTo>
-                  <a:lnTo>
-                    <a:pt x="490485" y="780344"/>
-                  </a:lnTo>
-                  <a:lnTo>
-                    <a:pt x="567118" y="885286"/>
-                  </a:lnTo>
-                  <a:lnTo>
-                    <a:pt x="643750" y="986155"/>
-                  </a:lnTo>
-                  <a:lnTo>
-                    <a:pt x="720383" y="1083108"/>
-                  </a:lnTo>
-                  <a:lnTo>
-                    <a:pt x="797015" y="1176297"/>
-                  </a:lnTo>
-                  <a:lnTo>
-                    <a:pt x="873648" y="1265869"/>
-                  </a:lnTo>
-                  <a:lnTo>
-                    <a:pt x="950280" y="1351964"/>
-                  </a:lnTo>
-                  <a:lnTo>
-                    <a:pt x="1026913" y="1434717"/>
-                  </a:lnTo>
-                  <a:lnTo>
-                    <a:pt x="1103546" y="1514257"/>
-                  </a:lnTo>
-                  <a:lnTo>
-                    <a:pt x="1180178" y="1590710"/>
-                  </a:lnTo>
-                  <a:lnTo>
-                    <a:pt x="1256811" y="1664195"/>
-                  </a:lnTo>
-                  <a:lnTo>
-                    <a:pt x="1333443" y="1734827"/>
-                  </a:lnTo>
-                  <a:lnTo>
-                    <a:pt x="1410076" y="1802718"/>
-                  </a:lnTo>
-                  <a:lnTo>
-                    <a:pt x="1486708" y="1867973"/>
-                  </a:lnTo>
-                  <a:lnTo>
-                    <a:pt x="1563341" y="1930695"/>
-                  </a:lnTo>
-                  <a:lnTo>
-                    <a:pt x="1639973" y="1990982"/>
-                  </a:lnTo>
-                  <a:lnTo>
-                    <a:pt x="1716606" y="2048929"/>
-                  </a:lnTo>
-                  <a:lnTo>
-                    <a:pt x="1793238" y="2104627"/>
-                  </a:lnTo>
-                  <a:lnTo>
-                    <a:pt x="1869871" y="2158162"/>
-                  </a:lnTo>
-                  <a:lnTo>
-                    <a:pt x="1946504" y="2209619"/>
-                  </a:lnTo>
-                  <a:lnTo>
-                    <a:pt x="2023136" y="2259079"/>
-                  </a:lnTo>
-                  <a:lnTo>
-                    <a:pt x="2099769" y="2306619"/>
-                  </a:lnTo>
-                  <a:lnTo>
-                    <a:pt x="2176401" y="2352313"/>
-                  </a:lnTo>
-                  <a:lnTo>
-                    <a:pt x="2253034" y="2396234"/>
-                  </a:lnTo>
-                  <a:lnTo>
-                    <a:pt x="2329666" y="2438450"/>
-                  </a:lnTo>
-                  <a:lnTo>
-                    <a:pt x="2406299" y="2479027"/>
-                  </a:lnTo>
-                  <a:lnTo>
-                    <a:pt x="2482931" y="2518028"/>
-                  </a:lnTo>
-                  <a:lnTo>
-                    <a:pt x="2559564" y="2555516"/>
-                  </a:lnTo>
-                  <a:lnTo>
-                    <a:pt x="2636197" y="2591549"/>
-                  </a:lnTo>
-                  <a:lnTo>
-                    <a:pt x="2712829" y="2626183"/>
-                  </a:lnTo>
-                  <a:lnTo>
-                    <a:pt x="2789462" y="2655754"/>
-                  </a:lnTo>
-                  <a:lnTo>
-                    <a:pt x="2866094" y="2664977"/>
-                  </a:lnTo>
-                  <a:lnTo>
-                    <a:pt x="2942727" y="2674097"/>
-                  </a:lnTo>
-                  <a:lnTo>
-                    <a:pt x="3019359" y="2683116"/>
-                  </a:lnTo>
-                  <a:lnTo>
-                    <a:pt x="3095992" y="2692034"/>
-                  </a:lnTo>
-                  <a:lnTo>
-                    <a:pt x="3172624" y="2700853"/>
-                  </a:lnTo>
-                  <a:lnTo>
-                    <a:pt x="3249257" y="2709573"/>
-                  </a:lnTo>
-                  <a:lnTo>
-                    <a:pt x="3325889" y="2718197"/>
-                  </a:lnTo>
-                  <a:lnTo>
-                    <a:pt x="3402522" y="2726724"/>
-                  </a:lnTo>
-                  <a:lnTo>
-                    <a:pt x="3479155" y="2735156"/>
-                  </a:lnTo>
-                  <a:lnTo>
-                    <a:pt x="3555787" y="2743495"/>
-                  </a:lnTo>
-                  <a:lnTo>
-                    <a:pt x="3632420" y="2751740"/>
-                  </a:lnTo>
-                  <a:lnTo>
-                    <a:pt x="3709052" y="2759894"/>
-                  </a:lnTo>
-                  <a:lnTo>
-                    <a:pt x="3785685" y="2767957"/>
-                  </a:lnTo>
-                  <a:lnTo>
-                    <a:pt x="3862317" y="2775930"/>
-                  </a:lnTo>
-                  <a:lnTo>
-                    <a:pt x="3938950" y="2783814"/>
-                  </a:lnTo>
-                  <a:lnTo>
-                    <a:pt x="4015582" y="2791611"/>
-                  </a:lnTo>
-                  <a:lnTo>
-                    <a:pt x="4092215" y="2799320"/>
-                  </a:lnTo>
-                  <a:lnTo>
-                    <a:pt x="4168847" y="2806944"/>
-                  </a:lnTo>
-                  <a:lnTo>
-                    <a:pt x="4245480" y="2814483"/>
-                  </a:lnTo>
-                  <a:lnTo>
-                    <a:pt x="4322113" y="2821938"/>
-                  </a:lnTo>
-                  <a:lnTo>
-                    <a:pt x="4398745" y="2829310"/>
-                  </a:lnTo>
-                  <a:lnTo>
-                    <a:pt x="4475378" y="2836599"/>
-                  </a:lnTo>
-                  <a:lnTo>
-                    <a:pt x="4552010" y="2843808"/>
-                  </a:lnTo>
-                  <a:lnTo>
-                    <a:pt x="4628643" y="2850936"/>
-                  </a:lnTo>
-                  <a:lnTo>
-                    <a:pt x="4705275" y="2857985"/>
-                  </a:lnTo>
-                  <a:lnTo>
-                    <a:pt x="4781908" y="2864955"/>
-                  </a:lnTo>
-                  <a:lnTo>
-                    <a:pt x="4858540" y="2871848"/>
-                  </a:lnTo>
-                  <a:lnTo>
-                    <a:pt x="4935173" y="2878663"/>
-                  </a:lnTo>
-                  <a:lnTo>
-                    <a:pt x="5011806" y="2885403"/>
-                  </a:lnTo>
-                  <a:lnTo>
-                    <a:pt x="5088438" y="2892068"/>
-                  </a:lnTo>
-                  <a:lnTo>
-                    <a:pt x="5165071" y="2898659"/>
-                  </a:lnTo>
-                  <a:lnTo>
-                    <a:pt x="5241703" y="2905176"/>
-                  </a:lnTo>
-                  <a:lnTo>
-                    <a:pt x="5318336" y="2911621"/>
-                  </a:lnTo>
-                  <a:lnTo>
-                    <a:pt x="5394968" y="2917994"/>
-                  </a:lnTo>
-                  <a:lnTo>
-                    <a:pt x="5471601" y="2924295"/>
-                  </a:lnTo>
-                  <a:lnTo>
-                    <a:pt x="5548233" y="2930527"/>
-                  </a:lnTo>
-                  <a:lnTo>
-                    <a:pt x="5624866" y="2936689"/>
-                  </a:lnTo>
-                  <a:lnTo>
-                    <a:pt x="5701498" y="2942783"/>
-                  </a:lnTo>
-                  <a:lnTo>
-                    <a:pt x="5778131" y="2948809"/>
-                  </a:lnTo>
-                  <a:lnTo>
-                    <a:pt x="5854764" y="2954767"/>
-                  </a:lnTo>
-                  <a:lnTo>
-                    <a:pt x="5931396" y="2960659"/>
-                  </a:lnTo>
-                  <a:lnTo>
-                    <a:pt x="6008029" y="2966486"/>
-                  </a:lnTo>
-                  <a:lnTo>
-                    <a:pt x="6084661" y="2972248"/>
-                  </a:lnTo>
-                  <a:lnTo>
-                    <a:pt x="6161294" y="2977945"/>
-                  </a:lnTo>
-                  <a:lnTo>
-                    <a:pt x="6237926" y="2983579"/>
-                  </a:lnTo>
-                  <a:lnTo>
-                    <a:pt x="6314559" y="2989151"/>
-                  </a:lnTo>
-                  <a:lnTo>
-                    <a:pt x="6391191" y="2994660"/>
-                  </a:lnTo>
-                  <a:lnTo>
-                    <a:pt x="6467824" y="3000108"/>
-                  </a:lnTo>
-                  <a:lnTo>
-                    <a:pt x="6544457" y="3005495"/>
-                  </a:lnTo>
-                  <a:lnTo>
-                    <a:pt x="6621089" y="3010822"/>
-                  </a:lnTo>
-                  <a:lnTo>
-                    <a:pt x="6697722" y="3016090"/>
-                  </a:lnTo>
-                  <a:lnTo>
-                    <a:pt x="6774354" y="3021299"/>
                   </a:lnTo>
                 </a:path>
               </a:pathLst>
@@ -3892,625 +4180,312 @@
           </p:nvSpPr>
           <p:spPr>
             <a:xfrm>
-              <a:off x="817517" y="4192458"/>
-              <a:ext cx="7403783" cy="1259607"/>
+              <a:off x="1172049" y="2831769"/>
+              <a:ext cx="7090630" cy="2504930"/>
             </a:xfrm>
             <a:custGeom>
               <a:avLst/>
               <a:pathLst>
-                <a:path w="7403783" h="1259607">
-                  <a:moveTo>
-                    <a:pt x="7403783" y="1259607"/>
-                  </a:moveTo>
-                  <a:lnTo>
-                    <a:pt x="7327150" y="1255359"/>
-                  </a:lnTo>
-                  <a:lnTo>
-                    <a:pt x="7250518" y="1250939"/>
-                  </a:lnTo>
-                  <a:lnTo>
-                    <a:pt x="7173885" y="1246341"/>
-                  </a:lnTo>
-                  <a:lnTo>
-                    <a:pt x="7097253" y="1241557"/>
-                  </a:lnTo>
-                  <a:lnTo>
-                    <a:pt x="7020620" y="1236580"/>
-                  </a:lnTo>
-                  <a:lnTo>
-                    <a:pt x="6943987" y="1231402"/>
-                  </a:lnTo>
-                  <a:lnTo>
-                    <a:pt x="6867355" y="1226015"/>
-                  </a:lnTo>
-                  <a:lnTo>
-                    <a:pt x="6790722" y="1220411"/>
-                  </a:lnTo>
-                  <a:lnTo>
-                    <a:pt x="6714090" y="1214580"/>
-                  </a:lnTo>
-                  <a:lnTo>
-                    <a:pt x="6637457" y="1208513"/>
-                  </a:lnTo>
-                  <a:lnTo>
-                    <a:pt x="6560825" y="1202202"/>
-                  </a:lnTo>
-                  <a:lnTo>
-                    <a:pt x="6484192" y="1195635"/>
-                  </a:lnTo>
-                  <a:lnTo>
-                    <a:pt x="6407560" y="1188804"/>
-                  </a:lnTo>
-                  <a:lnTo>
-                    <a:pt x="6330927" y="1181696"/>
-                  </a:lnTo>
-                  <a:lnTo>
-                    <a:pt x="6254294" y="1174302"/>
-                  </a:lnTo>
-                  <a:lnTo>
-                    <a:pt x="6177662" y="1166609"/>
-                  </a:lnTo>
-                  <a:lnTo>
-                    <a:pt x="6101029" y="1158605"/>
-                  </a:lnTo>
-                  <a:lnTo>
-                    <a:pt x="6024397" y="1150278"/>
-                  </a:lnTo>
-                  <a:lnTo>
-                    <a:pt x="5947764" y="1141614"/>
-                  </a:lnTo>
-                  <a:lnTo>
-                    <a:pt x="5871132" y="1132601"/>
-                  </a:lnTo>
-                  <a:lnTo>
-                    <a:pt x="5794499" y="1123224"/>
-                  </a:lnTo>
-                  <a:lnTo>
-                    <a:pt x="5717867" y="1113468"/>
-                  </a:lnTo>
-                  <a:lnTo>
-                    <a:pt x="5641234" y="1103318"/>
-                  </a:lnTo>
-                  <a:lnTo>
-                    <a:pt x="5564602" y="1092758"/>
-                  </a:lnTo>
-                  <a:lnTo>
-                    <a:pt x="5487969" y="1081771"/>
-                  </a:lnTo>
-                  <a:lnTo>
-                    <a:pt x="5411336" y="1070341"/>
-                  </a:lnTo>
-                  <a:lnTo>
-                    <a:pt x="5334704" y="1058449"/>
-                  </a:lnTo>
-                  <a:lnTo>
-                    <a:pt x="5258071" y="1046077"/>
-                  </a:lnTo>
-                  <a:lnTo>
-                    <a:pt x="5181439" y="1033206"/>
-                  </a:lnTo>
-                  <a:lnTo>
-                    <a:pt x="5104806" y="1019814"/>
-                  </a:lnTo>
-                  <a:lnTo>
-                    <a:pt x="5028174" y="1005882"/>
-                  </a:lnTo>
-                  <a:lnTo>
-                    <a:pt x="4951541" y="991387"/>
-                  </a:lnTo>
-                  <a:lnTo>
-                    <a:pt x="4874909" y="976306"/>
-                  </a:lnTo>
-                  <a:lnTo>
-                    <a:pt x="4798276" y="960617"/>
-                  </a:lnTo>
-                  <a:lnTo>
-                    <a:pt x="4721644" y="944294"/>
-                  </a:lnTo>
-                  <a:lnTo>
-                    <a:pt x="4645011" y="927312"/>
-                  </a:lnTo>
-                  <a:lnTo>
-                    <a:pt x="4568378" y="909643"/>
-                  </a:lnTo>
-                  <a:lnTo>
-                    <a:pt x="4491746" y="891262"/>
-                  </a:lnTo>
-                  <a:lnTo>
-                    <a:pt x="4415113" y="872137"/>
-                  </a:lnTo>
-                  <a:lnTo>
-                    <a:pt x="4338481" y="852241"/>
-                  </a:lnTo>
-                  <a:lnTo>
-                    <a:pt x="4261848" y="831541"/>
-                  </a:lnTo>
-                  <a:lnTo>
-                    <a:pt x="4185216" y="810005"/>
-                  </a:lnTo>
-                  <a:lnTo>
-                    <a:pt x="4108583" y="787599"/>
-                  </a:lnTo>
-                  <a:lnTo>
-                    <a:pt x="4031951" y="764289"/>
-                  </a:lnTo>
-                  <a:lnTo>
-                    <a:pt x="3955318" y="740037"/>
-                  </a:lnTo>
-                  <a:lnTo>
-                    <a:pt x="3878685" y="714805"/>
-                  </a:lnTo>
-                  <a:lnTo>
-                    <a:pt x="3802053" y="688554"/>
-                  </a:lnTo>
-                  <a:lnTo>
-                    <a:pt x="3725420" y="661244"/>
-                  </a:lnTo>
-                  <a:lnTo>
-                    <a:pt x="3648788" y="632830"/>
-                  </a:lnTo>
-                  <a:lnTo>
-                    <a:pt x="3572155" y="603269"/>
-                  </a:lnTo>
-                  <a:lnTo>
-                    <a:pt x="3495523" y="572514"/>
-                  </a:lnTo>
-                  <a:lnTo>
-                    <a:pt x="3418890" y="540517"/>
-                  </a:lnTo>
-                  <a:lnTo>
-                    <a:pt x="3342258" y="527472"/>
-                  </a:lnTo>
-                  <a:lnTo>
-                    <a:pt x="3265625" y="518040"/>
-                  </a:lnTo>
-                  <a:lnTo>
-                    <a:pt x="3188993" y="508502"/>
-                  </a:lnTo>
-                  <a:lnTo>
-                    <a:pt x="3112360" y="498857"/>
-                  </a:lnTo>
-                  <a:lnTo>
-                    <a:pt x="3035727" y="489103"/>
-                  </a:lnTo>
-                  <a:lnTo>
-                    <a:pt x="2959095" y="479239"/>
-                  </a:lnTo>
-                  <a:lnTo>
-                    <a:pt x="2882462" y="469263"/>
-                  </a:lnTo>
-                  <a:lnTo>
-                    <a:pt x="2805830" y="459176"/>
-                  </a:lnTo>
-                  <a:lnTo>
-                    <a:pt x="2729197" y="448975"/>
-                  </a:lnTo>
-                  <a:lnTo>
-                    <a:pt x="2652565" y="438659"/>
-                  </a:lnTo>
-                  <a:lnTo>
-                    <a:pt x="2575932" y="428226"/>
-                  </a:lnTo>
-                  <a:lnTo>
-                    <a:pt x="2499300" y="417677"/>
-                  </a:lnTo>
-                  <a:lnTo>
-                    <a:pt x="2422667" y="407008"/>
-                  </a:lnTo>
-                  <a:lnTo>
-                    <a:pt x="2346034" y="396219"/>
-                  </a:lnTo>
-                  <a:lnTo>
-                    <a:pt x="2269402" y="385309"/>
-                  </a:lnTo>
-                  <a:lnTo>
-                    <a:pt x="2192769" y="374276"/>
-                  </a:lnTo>
-                  <a:lnTo>
-                    <a:pt x="2116137" y="363118"/>
-                  </a:lnTo>
-                  <a:lnTo>
-                    <a:pt x="2039504" y="351835"/>
-                  </a:lnTo>
-                  <a:lnTo>
-                    <a:pt x="1962872" y="340425"/>
-                  </a:lnTo>
-                  <a:lnTo>
-                    <a:pt x="1886239" y="328886"/>
-                  </a:lnTo>
-                  <a:lnTo>
-                    <a:pt x="1809607" y="317217"/>
-                  </a:lnTo>
-                  <a:lnTo>
-                    <a:pt x="1732974" y="305417"/>
-                  </a:lnTo>
-                  <a:lnTo>
-                    <a:pt x="1656342" y="293484"/>
-                  </a:lnTo>
-                  <a:lnTo>
-                    <a:pt x="1579709" y="281416"/>
-                  </a:lnTo>
-                  <a:lnTo>
-                    <a:pt x="1503076" y="269213"/>
-                  </a:lnTo>
-                  <a:lnTo>
-                    <a:pt x="1426444" y="256872"/>
-                  </a:lnTo>
-                  <a:lnTo>
-                    <a:pt x="1349811" y="244392"/>
-                  </a:lnTo>
-                  <a:lnTo>
-                    <a:pt x="1273179" y="231771"/>
-                  </a:lnTo>
-                  <a:lnTo>
-                    <a:pt x="1196546" y="219008"/>
-                  </a:lnTo>
-                  <a:lnTo>
-                    <a:pt x="1119914" y="206102"/>
-                  </a:lnTo>
-                  <a:lnTo>
-                    <a:pt x="1043281" y="193050"/>
-                  </a:lnTo>
-                  <a:lnTo>
-                    <a:pt x="966649" y="179851"/>
-                  </a:lnTo>
-                  <a:lnTo>
-                    <a:pt x="890016" y="166504"/>
-                  </a:lnTo>
-                  <a:lnTo>
-                    <a:pt x="813384" y="153006"/>
-                  </a:lnTo>
-                  <a:lnTo>
-                    <a:pt x="736751" y="139356"/>
-                  </a:lnTo>
-                  <a:lnTo>
-                    <a:pt x="660118" y="125552"/>
-                  </a:lnTo>
-                  <a:lnTo>
-                    <a:pt x="583486" y="111593"/>
-                  </a:lnTo>
-                  <a:lnTo>
-                    <a:pt x="506853" y="97476"/>
-                  </a:lnTo>
-                  <a:lnTo>
-                    <a:pt x="430221" y="83201"/>
-                  </a:lnTo>
-                  <a:lnTo>
-                    <a:pt x="353588" y="68765"/>
-                  </a:lnTo>
-                  <a:lnTo>
-                    <a:pt x="276956" y="54166"/>
-                  </a:lnTo>
-                  <a:lnTo>
-                    <a:pt x="200323" y="39403"/>
-                  </a:lnTo>
-                  <a:lnTo>
-                    <a:pt x="123691" y="24473"/>
-                  </a:lnTo>
-                  <a:lnTo>
-                    <a:pt x="47058" y="9375"/>
-                  </a:lnTo>
-                  <a:lnTo>
-                    <a:pt x="0" y="0"/>
-                  </a:lnTo>
-                </a:path>
-              </a:pathLst>
-            </a:custGeom>
-          </p:spPr>
-          <p:txBody>
-            <a:bodyPr/>
-            <a:lstStyle/>
-            <a:p/>
-          </p:txBody>
-        </p:sp>
-        <p:sp>
-          <p:nvSpPr>
-            <p:cNvPr id="24" name="pl24"/>
-            <p:cNvSpPr/>
-            <p:nvPr/>
-          </p:nvSpPr>
-          <p:spPr>
-            <a:xfrm>
-              <a:off x="817517" y="2991819"/>
-              <a:ext cx="7403783" cy="2344880"/>
-            </a:xfrm>
-            <a:custGeom>
-              <a:avLst/>
-              <a:pathLst>
-                <a:path w="7403783" h="2344880">
+                <a:path w="7090630" h="2504930">
                   <a:moveTo>
                     <a:pt x="0" y="0"/>
                   </a:moveTo>
                   <a:lnTo>
-                    <a:pt x="47058" y="39891"/>
-                  </a:lnTo>
-                  <a:lnTo>
-                    <a:pt x="123691" y="103224"/>
-                  </a:lnTo>
-                  <a:lnTo>
-                    <a:pt x="200323" y="164969"/>
-                  </a:lnTo>
-                  <a:lnTo>
-                    <a:pt x="276956" y="225165"/>
-                  </a:lnTo>
-                  <a:lnTo>
-                    <a:pt x="353588" y="283852"/>
-                  </a:lnTo>
-                  <a:lnTo>
-                    <a:pt x="430221" y="341067"/>
-                  </a:lnTo>
-                  <a:lnTo>
-                    <a:pt x="506853" y="396847"/>
-                  </a:lnTo>
-                  <a:lnTo>
-                    <a:pt x="583486" y="451228"/>
-                  </a:lnTo>
-                  <a:lnTo>
-                    <a:pt x="660118" y="504246"/>
-                  </a:lnTo>
-                  <a:lnTo>
-                    <a:pt x="736751" y="555934"/>
-                  </a:lnTo>
-                  <a:lnTo>
-                    <a:pt x="813384" y="606326"/>
-                  </a:lnTo>
-                  <a:lnTo>
-                    <a:pt x="890016" y="655455"/>
-                  </a:lnTo>
-                  <a:lnTo>
-                    <a:pt x="966649" y="703351"/>
-                  </a:lnTo>
-                  <a:lnTo>
-                    <a:pt x="1043281" y="750046"/>
-                  </a:lnTo>
-                  <a:lnTo>
-                    <a:pt x="1119914" y="795570"/>
-                  </a:lnTo>
-                  <a:lnTo>
-                    <a:pt x="1196546" y="839953"/>
-                  </a:lnTo>
-                  <a:lnTo>
-                    <a:pt x="1273179" y="883223"/>
-                  </a:lnTo>
-                  <a:lnTo>
-                    <a:pt x="1349811" y="925407"/>
-                  </a:lnTo>
-                  <a:lnTo>
-                    <a:pt x="1426444" y="966534"/>
-                  </a:lnTo>
-                  <a:lnTo>
-                    <a:pt x="1503076" y="1006630"/>
-                  </a:lnTo>
-                  <a:lnTo>
-                    <a:pt x="1579709" y="1045719"/>
-                  </a:lnTo>
-                  <a:lnTo>
-                    <a:pt x="1656342" y="1083829"/>
-                  </a:lnTo>
-                  <a:lnTo>
-                    <a:pt x="1732974" y="1120983"/>
-                  </a:lnTo>
-                  <a:lnTo>
-                    <a:pt x="1809607" y="1157206"/>
-                  </a:lnTo>
-                  <a:lnTo>
-                    <a:pt x="1886239" y="1192519"/>
-                  </a:lnTo>
-                  <a:lnTo>
-                    <a:pt x="1962872" y="1226948"/>
-                  </a:lnTo>
-                  <a:lnTo>
-                    <a:pt x="2039504" y="1260513"/>
-                  </a:lnTo>
-                  <a:lnTo>
-                    <a:pt x="2116137" y="1293236"/>
-                  </a:lnTo>
-                  <a:lnTo>
-                    <a:pt x="2192769" y="1325139"/>
-                  </a:lnTo>
-                  <a:lnTo>
-                    <a:pt x="2269402" y="1356242"/>
-                  </a:lnTo>
-                  <a:lnTo>
-                    <a:pt x="2346034" y="1386564"/>
-                  </a:lnTo>
-                  <a:lnTo>
-                    <a:pt x="2422667" y="1416127"/>
-                  </a:lnTo>
-                  <a:lnTo>
-                    <a:pt x="2499300" y="1444948"/>
-                  </a:lnTo>
-                  <a:lnTo>
-                    <a:pt x="2575932" y="1473046"/>
-                  </a:lnTo>
-                  <a:lnTo>
-                    <a:pt x="2652565" y="1500440"/>
-                  </a:lnTo>
-                  <a:lnTo>
-                    <a:pt x="2729197" y="1527146"/>
-                  </a:lnTo>
-                  <a:lnTo>
-                    <a:pt x="2805830" y="1553183"/>
-                  </a:lnTo>
-                  <a:lnTo>
-                    <a:pt x="2882462" y="1578567"/>
-                  </a:lnTo>
-                  <a:lnTo>
-                    <a:pt x="2959095" y="1603315"/>
-                  </a:lnTo>
-                  <a:lnTo>
-                    <a:pt x="3035727" y="1627442"/>
-                  </a:lnTo>
-                  <a:lnTo>
-                    <a:pt x="3112360" y="1650964"/>
-                  </a:lnTo>
-                  <a:lnTo>
-                    <a:pt x="3188993" y="1673896"/>
-                  </a:lnTo>
-                  <a:lnTo>
-                    <a:pt x="3265625" y="1696253"/>
-                  </a:lnTo>
-                  <a:lnTo>
-                    <a:pt x="3342258" y="1718049"/>
-                  </a:lnTo>
-                  <a:lnTo>
-                    <a:pt x="3418890" y="1739299"/>
-                  </a:lnTo>
-                  <a:lnTo>
-                    <a:pt x="3495523" y="1760016"/>
-                  </a:lnTo>
-                  <a:lnTo>
-                    <a:pt x="3572155" y="1780213"/>
-                  </a:lnTo>
-                  <a:lnTo>
-                    <a:pt x="3648788" y="1799904"/>
-                  </a:lnTo>
-                  <a:lnTo>
-                    <a:pt x="3725420" y="1819101"/>
-                  </a:lnTo>
-                  <a:lnTo>
-                    <a:pt x="3802053" y="1837816"/>
-                  </a:lnTo>
-                  <a:lnTo>
-                    <a:pt x="3878685" y="1856063"/>
-                  </a:lnTo>
-                  <a:lnTo>
-                    <a:pt x="3955318" y="1873852"/>
-                  </a:lnTo>
-                  <a:lnTo>
-                    <a:pt x="4031951" y="1891194"/>
-                  </a:lnTo>
-                  <a:lnTo>
-                    <a:pt x="4108583" y="1908102"/>
-                  </a:lnTo>
-                  <a:lnTo>
-                    <a:pt x="4185216" y="1924586"/>
-                  </a:lnTo>
-                  <a:lnTo>
-                    <a:pt x="4261848" y="1940656"/>
-                  </a:lnTo>
-                  <a:lnTo>
-                    <a:pt x="4338481" y="1956324"/>
-                  </a:lnTo>
-                  <a:lnTo>
-                    <a:pt x="4415113" y="1971598"/>
-                  </a:lnTo>
-                  <a:lnTo>
-                    <a:pt x="4491746" y="1986490"/>
-                  </a:lnTo>
-                  <a:lnTo>
-                    <a:pt x="4568378" y="2001008"/>
-                  </a:lnTo>
-                  <a:lnTo>
-                    <a:pt x="4645011" y="2015162"/>
-                  </a:lnTo>
-                  <a:lnTo>
-                    <a:pt x="4721644" y="2028961"/>
-                  </a:lnTo>
-                  <a:lnTo>
-                    <a:pt x="4798276" y="2042414"/>
-                  </a:lnTo>
-                  <a:lnTo>
-                    <a:pt x="4874909" y="2055529"/>
-                  </a:lnTo>
-                  <a:lnTo>
-                    <a:pt x="4951541" y="2068316"/>
-                  </a:lnTo>
-                  <a:lnTo>
-                    <a:pt x="5028174" y="2080782"/>
-                  </a:lnTo>
-                  <a:lnTo>
-                    <a:pt x="5104806" y="2092936"/>
-                  </a:lnTo>
-                  <a:lnTo>
-                    <a:pt x="5181439" y="2104784"/>
-                  </a:lnTo>
-                  <a:lnTo>
-                    <a:pt x="5258071" y="2116336"/>
-                  </a:lnTo>
-                  <a:lnTo>
-                    <a:pt x="5334704" y="2127598"/>
-                  </a:lnTo>
-                  <a:lnTo>
-                    <a:pt x="5411336" y="2138577"/>
-                  </a:lnTo>
-                  <a:lnTo>
-                    <a:pt x="5487969" y="2149281"/>
-                  </a:lnTo>
-                  <a:lnTo>
-                    <a:pt x="5564602" y="2159717"/>
-                  </a:lnTo>
-                  <a:lnTo>
-                    <a:pt x="5641234" y="2169891"/>
-                  </a:lnTo>
-                  <a:lnTo>
-                    <a:pt x="5717867" y="2179810"/>
-                  </a:lnTo>
-                  <a:lnTo>
-                    <a:pt x="5794499" y="2189480"/>
-                  </a:lnTo>
-                  <a:lnTo>
-                    <a:pt x="5871132" y="2198908"/>
-                  </a:lnTo>
-                  <a:lnTo>
-                    <a:pt x="5947764" y="2208099"/>
-                  </a:lnTo>
-                  <a:lnTo>
-                    <a:pt x="6024397" y="2217060"/>
-                  </a:lnTo>
-                  <a:lnTo>
-                    <a:pt x="6101029" y="2225796"/>
-                  </a:lnTo>
-                  <a:lnTo>
-                    <a:pt x="6177662" y="2234313"/>
-                  </a:lnTo>
-                  <a:lnTo>
-                    <a:pt x="6254294" y="2242616"/>
-                  </a:lnTo>
-                  <a:lnTo>
-                    <a:pt x="6330927" y="2250712"/>
-                  </a:lnTo>
-                  <a:lnTo>
-                    <a:pt x="6407560" y="2258604"/>
-                  </a:lnTo>
-                  <a:lnTo>
-                    <a:pt x="6484192" y="2266298"/>
-                  </a:lnTo>
-                  <a:lnTo>
-                    <a:pt x="6560825" y="2273799"/>
-                  </a:lnTo>
-                  <a:lnTo>
-                    <a:pt x="6637457" y="2281113"/>
-                  </a:lnTo>
-                  <a:lnTo>
-                    <a:pt x="6714090" y="2288242"/>
-                  </a:lnTo>
-                  <a:lnTo>
-                    <a:pt x="6790722" y="2295193"/>
-                  </a:lnTo>
-                  <a:lnTo>
-                    <a:pt x="6867355" y="2301970"/>
-                  </a:lnTo>
-                  <a:lnTo>
-                    <a:pt x="6943987" y="2308577"/>
-                  </a:lnTo>
-                  <a:lnTo>
-                    <a:pt x="7020620" y="2315018"/>
-                  </a:lnTo>
-                  <a:lnTo>
-                    <a:pt x="7097253" y="2321298"/>
-                  </a:lnTo>
-                  <a:lnTo>
-                    <a:pt x="7173885" y="2327420"/>
-                  </a:lnTo>
-                  <a:lnTo>
-                    <a:pt x="7250518" y="2333388"/>
-                  </a:lnTo>
-                  <a:lnTo>
-                    <a:pt x="7327150" y="2339207"/>
-                  </a:lnTo>
-                  <a:lnTo>
-                    <a:pt x="7403783" y="2344880"/>
+                    <a:pt x="71622" y="68346"/>
+                  </a:lnTo>
+                  <a:lnTo>
+                    <a:pt x="143245" y="134979"/>
+                  </a:lnTo>
+                  <a:lnTo>
+                    <a:pt x="214867" y="199941"/>
+                  </a:lnTo>
+                  <a:lnTo>
+                    <a:pt x="286490" y="263274"/>
+                  </a:lnTo>
+                  <a:lnTo>
+                    <a:pt x="358112" y="325018"/>
+                  </a:lnTo>
+                  <a:lnTo>
+                    <a:pt x="429735" y="385214"/>
+                  </a:lnTo>
+                  <a:lnTo>
+                    <a:pt x="501357" y="443901"/>
+                  </a:lnTo>
+                  <a:lnTo>
+                    <a:pt x="572980" y="501116"/>
+                  </a:lnTo>
+                  <a:lnTo>
+                    <a:pt x="644602" y="556896"/>
+                  </a:lnTo>
+                  <a:lnTo>
+                    <a:pt x="716225" y="611278"/>
+                  </a:lnTo>
+                  <a:lnTo>
+                    <a:pt x="787847" y="664296"/>
+                  </a:lnTo>
+                  <a:lnTo>
+                    <a:pt x="859470" y="715984"/>
+                  </a:lnTo>
+                  <a:lnTo>
+                    <a:pt x="931092" y="766376"/>
+                  </a:lnTo>
+                  <a:lnTo>
+                    <a:pt x="1002715" y="815504"/>
+                  </a:lnTo>
+                  <a:lnTo>
+                    <a:pt x="1074337" y="863400"/>
+                  </a:lnTo>
+                  <a:lnTo>
+                    <a:pt x="1145960" y="910096"/>
+                  </a:lnTo>
+                  <a:lnTo>
+                    <a:pt x="1217582" y="955620"/>
+                  </a:lnTo>
+                  <a:lnTo>
+                    <a:pt x="1289205" y="1000003"/>
+                  </a:lnTo>
+                  <a:lnTo>
+                    <a:pt x="1360827" y="1043272"/>
+                  </a:lnTo>
+                  <a:lnTo>
+                    <a:pt x="1432450" y="1085457"/>
+                  </a:lnTo>
+                  <a:lnTo>
+                    <a:pt x="1504073" y="1126584"/>
+                  </a:lnTo>
+                  <a:lnTo>
+                    <a:pt x="1575695" y="1166679"/>
+                  </a:lnTo>
+                  <a:lnTo>
+                    <a:pt x="1647318" y="1205769"/>
+                  </a:lnTo>
+                  <a:lnTo>
+                    <a:pt x="1718940" y="1243879"/>
+                  </a:lnTo>
+                  <a:lnTo>
+                    <a:pt x="1790563" y="1281033"/>
+                  </a:lnTo>
+                  <a:lnTo>
+                    <a:pt x="1862185" y="1317255"/>
+                  </a:lnTo>
+                  <a:lnTo>
+                    <a:pt x="1933808" y="1352569"/>
+                  </a:lnTo>
+                  <a:lnTo>
+                    <a:pt x="2005430" y="1386997"/>
+                  </a:lnTo>
+                  <a:lnTo>
+                    <a:pt x="2077053" y="1420562"/>
+                  </a:lnTo>
+                  <a:lnTo>
+                    <a:pt x="2148675" y="1453286"/>
+                  </a:lnTo>
+                  <a:lnTo>
+                    <a:pt x="2220298" y="1485189"/>
+                  </a:lnTo>
+                  <a:lnTo>
+                    <a:pt x="2291920" y="1516291"/>
+                  </a:lnTo>
+                  <a:lnTo>
+                    <a:pt x="2363543" y="1546614"/>
+                  </a:lnTo>
+                  <a:lnTo>
+                    <a:pt x="2435165" y="1576176"/>
+                  </a:lnTo>
+                  <a:lnTo>
+                    <a:pt x="2506788" y="1604997"/>
+                  </a:lnTo>
+                  <a:lnTo>
+                    <a:pt x="2578410" y="1633096"/>
+                  </a:lnTo>
+                  <a:lnTo>
+                    <a:pt x="2650033" y="1660489"/>
+                  </a:lnTo>
+                  <a:lnTo>
+                    <a:pt x="2721655" y="1687196"/>
+                  </a:lnTo>
+                  <a:lnTo>
+                    <a:pt x="2793278" y="1713233"/>
+                  </a:lnTo>
+                  <a:lnTo>
+                    <a:pt x="2864901" y="1738617"/>
+                  </a:lnTo>
+                  <a:lnTo>
+                    <a:pt x="2936523" y="1763364"/>
+                  </a:lnTo>
+                  <a:lnTo>
+                    <a:pt x="3008146" y="1787491"/>
+                  </a:lnTo>
+                  <a:lnTo>
+                    <a:pt x="3079768" y="1811013"/>
+                  </a:lnTo>
+                  <a:lnTo>
+                    <a:pt x="3151391" y="1833945"/>
+                  </a:lnTo>
+                  <a:lnTo>
+                    <a:pt x="3223013" y="1856302"/>
+                  </a:lnTo>
+                  <a:lnTo>
+                    <a:pt x="3294636" y="1878099"/>
+                  </a:lnTo>
+                  <a:lnTo>
+                    <a:pt x="3366258" y="1899348"/>
+                  </a:lnTo>
+                  <a:lnTo>
+                    <a:pt x="3437881" y="1920065"/>
+                  </a:lnTo>
+                  <a:lnTo>
+                    <a:pt x="3509503" y="1940262"/>
+                  </a:lnTo>
+                  <a:lnTo>
+                    <a:pt x="3581126" y="1959953"/>
+                  </a:lnTo>
+                  <a:lnTo>
+                    <a:pt x="3652748" y="1979150"/>
+                  </a:lnTo>
+                  <a:lnTo>
+                    <a:pt x="3724371" y="1997866"/>
+                  </a:lnTo>
+                  <a:lnTo>
+                    <a:pt x="3795993" y="2016112"/>
+                  </a:lnTo>
+                  <a:lnTo>
+                    <a:pt x="3867616" y="2033901"/>
+                  </a:lnTo>
+                  <a:lnTo>
+                    <a:pt x="3939238" y="2051244"/>
+                  </a:lnTo>
+                  <a:lnTo>
+                    <a:pt x="4010861" y="2068152"/>
+                  </a:lnTo>
+                  <a:lnTo>
+                    <a:pt x="4082483" y="2084635"/>
+                  </a:lnTo>
+                  <a:lnTo>
+                    <a:pt x="4154106" y="2100706"/>
+                  </a:lnTo>
+                  <a:lnTo>
+                    <a:pt x="4225729" y="2116373"/>
+                  </a:lnTo>
+                  <a:lnTo>
+                    <a:pt x="4297351" y="2131648"/>
+                  </a:lnTo>
+                  <a:lnTo>
+                    <a:pt x="4368974" y="2146539"/>
+                  </a:lnTo>
+                  <a:lnTo>
+                    <a:pt x="4440596" y="2161057"/>
+                  </a:lnTo>
+                  <a:lnTo>
+                    <a:pt x="4512219" y="2175211"/>
+                  </a:lnTo>
+                  <a:lnTo>
+                    <a:pt x="4583841" y="2189010"/>
+                  </a:lnTo>
+                  <a:lnTo>
+                    <a:pt x="4655464" y="2202463"/>
+                  </a:lnTo>
+                  <a:lnTo>
+                    <a:pt x="4727086" y="2215579"/>
+                  </a:lnTo>
+                  <a:lnTo>
+                    <a:pt x="4798709" y="2228366"/>
+                  </a:lnTo>
+                  <a:lnTo>
+                    <a:pt x="4870331" y="2240832"/>
+                  </a:lnTo>
+                  <a:lnTo>
+                    <a:pt x="4941954" y="2252985"/>
+                  </a:lnTo>
+                  <a:lnTo>
+                    <a:pt x="5013576" y="2264834"/>
+                  </a:lnTo>
+                  <a:lnTo>
+                    <a:pt x="5085199" y="2276386"/>
+                  </a:lnTo>
+                  <a:lnTo>
+                    <a:pt x="5156821" y="2287647"/>
+                  </a:lnTo>
+                  <a:lnTo>
+                    <a:pt x="5228444" y="2298627"/>
+                  </a:lnTo>
+                  <a:lnTo>
+                    <a:pt x="5300066" y="2309331"/>
+                  </a:lnTo>
+                  <a:lnTo>
+                    <a:pt x="5371689" y="2319767"/>
+                  </a:lnTo>
+                  <a:lnTo>
+                    <a:pt x="5443311" y="2329941"/>
+                  </a:lnTo>
+                  <a:lnTo>
+                    <a:pt x="5514934" y="2339860"/>
+                  </a:lnTo>
+                  <a:lnTo>
+                    <a:pt x="5586557" y="2349530"/>
+                  </a:lnTo>
+                  <a:lnTo>
+                    <a:pt x="5658179" y="2358958"/>
+                  </a:lnTo>
+                  <a:lnTo>
+                    <a:pt x="5729802" y="2368149"/>
+                  </a:lnTo>
+                  <a:lnTo>
+                    <a:pt x="5801424" y="2377110"/>
+                  </a:lnTo>
+                  <a:lnTo>
+                    <a:pt x="5873047" y="2385846"/>
+                  </a:lnTo>
+                  <a:lnTo>
+                    <a:pt x="5944669" y="2394363"/>
+                  </a:lnTo>
+                  <a:lnTo>
+                    <a:pt x="6016292" y="2402666"/>
+                  </a:lnTo>
+                  <a:lnTo>
+                    <a:pt x="6087914" y="2410761"/>
+                  </a:lnTo>
+                  <a:lnTo>
+                    <a:pt x="6159537" y="2418653"/>
+                  </a:lnTo>
+                  <a:lnTo>
+                    <a:pt x="6231159" y="2426348"/>
+                  </a:lnTo>
+                  <a:lnTo>
+                    <a:pt x="6302782" y="2433849"/>
+                  </a:lnTo>
+                  <a:lnTo>
+                    <a:pt x="6374404" y="2441162"/>
+                  </a:lnTo>
+                  <a:lnTo>
+                    <a:pt x="6446027" y="2448292"/>
+                  </a:lnTo>
+                  <a:lnTo>
+                    <a:pt x="6517649" y="2455243"/>
+                  </a:lnTo>
+                  <a:lnTo>
+                    <a:pt x="6589272" y="2462020"/>
+                  </a:lnTo>
+                  <a:lnTo>
+                    <a:pt x="6660894" y="2468626"/>
+                  </a:lnTo>
+                  <a:lnTo>
+                    <a:pt x="6732517" y="2475068"/>
+                  </a:lnTo>
+                  <a:lnTo>
+                    <a:pt x="6804139" y="2481347"/>
+                  </a:lnTo>
+                  <a:lnTo>
+                    <a:pt x="6875762" y="2487469"/>
+                  </a:lnTo>
+                  <a:lnTo>
+                    <a:pt x="6947385" y="2493438"/>
+                  </a:lnTo>
+                  <a:lnTo>
+                    <a:pt x="7019007" y="2499257"/>
+                  </a:lnTo>
+                  <a:lnTo>
+                    <a:pt x="7090630" y="2504930"/>
                   </a:lnTo>
                 </a:path>
               </a:pathLst>
@@ -4533,7 +4508,7 @@
         </p:sp>
         <p:sp>
           <p:nvSpPr>
-            <p:cNvPr id="25" name="pl25"/>
+            <p:cNvPr id="24" name="pl24"/>
             <p:cNvSpPr/>
             <p:nvPr/>
           </p:nvSpPr>
@@ -4576,13 +4551,13 @@
         </p:sp>
         <p:sp>
           <p:nvSpPr>
-            <p:cNvPr id="26" name="pl26"/>
+            <p:cNvPr id="25" name="pl25"/>
             <p:cNvSpPr/>
             <p:nvPr/>
           </p:nvSpPr>
           <p:spPr>
             <a:xfrm>
-              <a:off x="4224261" y="2073503"/>
+              <a:off x="4526955" y="2073503"/>
               <a:ext cx="0" cy="3649639"/>
             </a:xfrm>
             <a:custGeom>
@@ -4619,7 +4594,7 @@
         </p:sp>
         <p:sp>
           <p:nvSpPr>
-            <p:cNvPr id="27" name="tx27"/>
+            <p:cNvPr id="26" name="tx26"/>
             <p:cNvSpPr/>
             <p:nvPr/>
           </p:nvSpPr>
@@ -4665,7 +4640,7 @@
         </p:sp>
         <p:sp>
           <p:nvSpPr>
-            <p:cNvPr id="28" name="tx28"/>
+            <p:cNvPr id="27" name="tx27"/>
             <p:cNvSpPr/>
             <p:nvPr/>
           </p:nvSpPr>
@@ -4711,7 +4686,7 @@
         </p:sp>
         <p:sp>
           <p:nvSpPr>
-            <p:cNvPr id="29" name="tx29"/>
+            <p:cNvPr id="28" name="tx28"/>
             <p:cNvSpPr/>
             <p:nvPr/>
           </p:nvSpPr>
@@ -4757,7 +4732,7 @@
         </p:sp>
         <p:sp>
           <p:nvSpPr>
-            <p:cNvPr id="30" name="tx30"/>
+            <p:cNvPr id="29" name="tx29"/>
             <p:cNvSpPr/>
             <p:nvPr/>
           </p:nvSpPr>
@@ -4803,7 +4778,7 @@
         </p:sp>
         <p:sp>
           <p:nvSpPr>
-            <p:cNvPr id="31" name="tx31"/>
+            <p:cNvPr id="30" name="tx30"/>
             <p:cNvSpPr/>
             <p:nvPr/>
           </p:nvSpPr>
@@ -4849,14 +4824,14 @@
         </p:sp>
         <p:sp>
           <p:nvSpPr>
-            <p:cNvPr id="32" name="tx32"/>
+            <p:cNvPr id="31" name="tx31"/>
             <p:cNvSpPr/>
             <p:nvPr/>
           </p:nvSpPr>
           <p:spPr>
             <a:xfrm>
-              <a:off x="2423864" y="5785772"/>
-              <a:ext cx="155356" cy="80101"/>
+              <a:off x="2421884" y="5785772"/>
+              <a:ext cx="161574" cy="80101"/>
             </a:xfrm>
             <a:prstGeom prst="rect">
               <a:avLst/>
@@ -4888,21 +4863,21 @@
                   <a:latin typeface="Helvetica"/>
                   <a:cs typeface="Helvetica"/>
                 </a:rPr>
-                <a:t>0.8</a:t>
+                <a:t>-25</a:t>
               </a:r>
             </a:p>
           </p:txBody>
         </p:sp>
         <p:sp>
           <p:nvSpPr>
-            <p:cNvPr id="33" name="tx33"/>
+            <p:cNvPr id="32" name="tx32"/>
             <p:cNvSpPr/>
             <p:nvPr/>
           </p:nvSpPr>
           <p:spPr>
             <a:xfrm>
-              <a:off x="4196521" y="5785772"/>
-              <a:ext cx="155356" cy="80101"/>
+              <a:off x="4542539" y="5785772"/>
+              <a:ext cx="62179" cy="80101"/>
             </a:xfrm>
             <a:prstGeom prst="rect">
               <a:avLst/>
@@ -4934,21 +4909,21 @@
                   <a:latin typeface="Helvetica"/>
                   <a:cs typeface="Helvetica"/>
                 </a:rPr>
-                <a:t>1.0</a:t>
+                <a:t>0</a:t>
               </a:r>
             </a:p>
           </p:txBody>
         </p:sp>
         <p:sp>
           <p:nvSpPr>
-            <p:cNvPr id="34" name="tx34"/>
+            <p:cNvPr id="33" name="tx33"/>
             <p:cNvSpPr/>
             <p:nvPr/>
           </p:nvSpPr>
           <p:spPr>
             <a:xfrm>
-              <a:off x="5969179" y="5785772"/>
-              <a:ext cx="155356" cy="80101"/>
+              <a:off x="6582407" y="5785772"/>
+              <a:ext cx="124358" cy="80101"/>
             </a:xfrm>
             <a:prstGeom prst="rect">
               <a:avLst/>
@@ -4980,67 +4955,21 @@
                   <a:latin typeface="Helvetica"/>
                   <a:cs typeface="Helvetica"/>
                 </a:rPr>
-                <a:t>1.2</a:t>
+                <a:t>25</a:t>
               </a:r>
             </a:p>
           </p:txBody>
         </p:sp>
         <p:sp>
           <p:nvSpPr>
-            <p:cNvPr id="35" name="tx35"/>
+            <p:cNvPr id="34" name="tx34"/>
             <p:cNvSpPr/>
             <p:nvPr/>
           </p:nvSpPr>
           <p:spPr>
             <a:xfrm>
-              <a:off x="7741836" y="5785772"/>
-              <a:ext cx="155356" cy="80101"/>
-            </a:xfrm>
-            <a:prstGeom prst="rect">
-              <a:avLst/>
-            </a:prstGeom>
-            <a:noFill/>
-          </p:spPr>
-          <p:txBody>
-            <a:bodyPr lIns="0" rIns="0" tIns="0" bIns="0" anchorCtr="1" anchor="ctr" wrap="none"/>
-            <a:lstStyle/>
-            <a:p>
-              <a:pPr algn="l" marL="0" marR="0" indent="0">
-                <a:lnSpc>
-                  <a:spcPts val="880"/>
-                </a:lnSpc>
-                <a:spcBef>
-                  <a:spcPts val="0"/>
-                </a:spcBef>
-                <a:spcAft>
-                  <a:spcPts val="0"/>
-                </a:spcAft>
-              </a:pPr>
-              <a:r>
-                <a:rPr sz="880">
-                  <a:solidFill>
-                    <a:srgbClr val="4D4D4D">
-                      <a:alpha val="100000"/>
-                    </a:srgbClr>
-                  </a:solidFill>
-                  <a:latin typeface="Helvetica"/>
-                  <a:cs typeface="Helvetica"/>
-                </a:rPr>
-                <a:t>1.4</a:t>
-              </a:r>
-            </a:p>
-          </p:txBody>
-        </p:sp>
-        <p:sp>
-          <p:nvSpPr>
-            <p:cNvPr id="36" name="tx36"/>
-            <p:cNvSpPr/>
-            <p:nvPr/>
-          </p:nvSpPr>
-          <p:spPr>
-            <a:xfrm>
-              <a:off x="3879271" y="5925448"/>
-              <a:ext cx="1676186" cy="100218"/>
+              <a:off x="2928340" y="5925448"/>
+              <a:ext cx="3578047" cy="100218"/>
             </a:xfrm>
             <a:prstGeom prst="rect">
               <a:avLst/>
@@ -5072,14 +5001,14 @@
                   <a:latin typeface="Helvetica"/>
                   <a:cs typeface="Helvetica"/>
                 </a:rPr>
-                <a:t>CKD-EPI Cr-Cys / CG ratio</a:t>
+                <a:t>eGFR difference (%): 100 × (CKD-EPI Cr-Cys − CG) / CG</a:t>
               </a:r>
             </a:p>
           </p:txBody>
         </p:sp>
         <p:sp>
           <p:nvSpPr>
-            <p:cNvPr id="37" name="tx37"/>
+            <p:cNvPr id="35" name="tx35"/>
             <p:cNvSpPr/>
             <p:nvPr/>
           </p:nvSpPr>
@@ -5125,14 +5054,14 @@
         </p:sp>
         <p:sp>
           <p:nvSpPr>
-            <p:cNvPr id="38" name="tx38"/>
+            <p:cNvPr id="36" name="tx36"/>
             <p:cNvSpPr/>
             <p:nvPr/>
           </p:nvSpPr>
           <p:spPr>
             <a:xfrm>
               <a:off x="817517" y="1896563"/>
-              <a:ext cx="6833128" cy="82021"/>
+              <a:ext cx="6985375" cy="82021"/>
             </a:xfrm>
             <a:prstGeom prst="rect">
               <a:avLst/>
@@ -5164,14 +5093,14 @@
                   <a:latin typeface="Helvetica"/>
                   <a:cs typeface="Helvetica"/>
                 </a:rPr>
-                <a:t>subHR per 0.1 ratio decline: 1.34 (1.14-1.58), p_Bonf = 0.003 (n = 6)  |  per IQR decline (Δ = 0.30): 2.41 (1.47-3.94)  |  IQR: [0.85, 1.15]</a:t>
+                <a:t>subHR per 10 % decline: 1.34 (1.14-1.58), p_Bonf = 0.003 (n = 6)  |  per IQR decline (Δ = 29.9 %): 2.41 (1.47-3.94)  |  IQR: [-15.0, 14.9] %</a:t>
               </a:r>
             </a:p>
           </p:txBody>
         </p:sp>
         <p:sp>
           <p:nvSpPr>
-            <p:cNvPr id="39" name="tx39"/>
+            <p:cNvPr id="37" name="tx37"/>
             <p:cNvSpPr/>
             <p:nvPr/>
           </p:nvSpPr>

--- a/docs/pptx/carbo/jx-carbo-linsubhr-ratio-throm2.pptx
+++ b/docs/pptx/carbo/jx-carbo-linsubhr-ratio-throm2.pptx
@@ -2265,34 +2265,26 @@
         </p:sp>
         <p:sp>
           <p:nvSpPr>
-            <p:cNvPr id="4" name="pl4"/>
+            <p:cNvPr id="4" name="rc4"/>
             <p:cNvSpPr/>
             <p:nvPr/>
           </p:nvSpPr>
           <p:spPr>
             <a:xfrm>
-              <a:off x="817517" y="5142518"/>
-              <a:ext cx="7799693" cy="0"/>
+              <a:off x="457200" y="1600200"/>
+              <a:ext cx="8229600" cy="4525962"/>
             </a:xfrm>
-            <a:custGeom>
+            <a:prstGeom prst="rect">
               <a:avLst/>
-              <a:pathLst>
-                <a:path w="7799693" h="0">
-                  <a:moveTo>
-                    <a:pt x="0" y="0"/>
-                  </a:moveTo>
-                  <a:lnTo>
-                    <a:pt x="7799693" y="0"/>
-                  </a:lnTo>
-                  <a:lnTo>
-                    <a:pt x="7799693" y="0"/>
-                  </a:lnTo>
-                </a:path>
-              </a:pathLst>
-            </a:custGeom>
-            <a:ln w="6775" cap="flat">
+            </a:prstGeom>
+            <a:solidFill>
+              <a:srgbClr val="FFFFFF">
+                <a:alpha val="100000"/>
+              </a:srgbClr>
+            </a:solidFill>
+            <a:ln w="13550" cap="rnd">
               <a:solidFill>
-                <a:srgbClr val="EBEBEB">
+                <a:srgbClr val="FFFFFF">
                   <a:alpha val="100000"/>
                 </a:srgbClr>
               </a:solidFill>
@@ -2314,21 +2306,21 @@
           </p:nvSpPr>
           <p:spPr>
             <a:xfrm>
-              <a:off x="817517" y="4313054"/>
-              <a:ext cx="7799693" cy="0"/>
+              <a:off x="887106" y="3250627"/>
+              <a:ext cx="7660515" cy="0"/>
             </a:xfrm>
             <a:custGeom>
               <a:avLst/>
               <a:pathLst>
-                <a:path w="7799693" h="0">
+                <a:path w="7660515" h="0">
                   <a:moveTo>
                     <a:pt x="0" y="0"/>
                   </a:moveTo>
                   <a:lnTo>
-                    <a:pt x="7799693" y="0"/>
-                  </a:lnTo>
-                  <a:lnTo>
-                    <a:pt x="7799693" y="0"/>
+                    <a:pt x="7660515" y="0"/>
+                  </a:lnTo>
+                  <a:lnTo>
+                    <a:pt x="7660515" y="0"/>
                   </a:lnTo>
                 </a:path>
               </a:pathLst>
@@ -2357,21 +2349,21 @@
           </p:nvSpPr>
           <p:spPr>
             <a:xfrm>
-              <a:off x="817517" y="3483591"/>
-              <a:ext cx="7799693" cy="0"/>
+              <a:off x="887106" y="2951293"/>
+              <a:ext cx="7660515" cy="0"/>
             </a:xfrm>
             <a:custGeom>
               <a:avLst/>
               <a:pathLst>
-                <a:path w="7799693" h="0">
+                <a:path w="7660515" h="0">
                   <a:moveTo>
                     <a:pt x="0" y="0"/>
                   </a:moveTo>
                   <a:lnTo>
-                    <a:pt x="7799693" y="0"/>
-                  </a:lnTo>
-                  <a:lnTo>
-                    <a:pt x="7799693" y="0"/>
+                    <a:pt x="7660515" y="0"/>
+                  </a:lnTo>
+                  <a:lnTo>
+                    <a:pt x="7660515" y="0"/>
                   </a:lnTo>
                 </a:path>
               </a:pathLst>
@@ -2400,21 +2392,21 @@
           </p:nvSpPr>
           <p:spPr>
             <a:xfrm>
-              <a:off x="817517" y="2654127"/>
-              <a:ext cx="7799693" cy="0"/>
+              <a:off x="887106" y="2651959"/>
+              <a:ext cx="7660515" cy="0"/>
             </a:xfrm>
             <a:custGeom>
               <a:avLst/>
               <a:pathLst>
-                <a:path w="7799693" h="0">
+                <a:path w="7660515" h="0">
                   <a:moveTo>
                     <a:pt x="0" y="0"/>
                   </a:moveTo>
                   <a:lnTo>
-                    <a:pt x="7799693" y="0"/>
-                  </a:lnTo>
-                  <a:lnTo>
-                    <a:pt x="7799693" y="0"/>
+                    <a:pt x="7660515" y="0"/>
+                  </a:lnTo>
+                  <a:lnTo>
+                    <a:pt x="7660515" y="0"/>
                   </a:lnTo>
                 </a:path>
               </a:pathLst>
@@ -2443,21 +2435,21 @@
           </p:nvSpPr>
           <p:spPr>
             <a:xfrm>
-              <a:off x="1467192" y="2073503"/>
-              <a:ext cx="0" cy="3649639"/>
+              <a:off x="887106" y="2352625"/>
+              <a:ext cx="7660515" cy="0"/>
             </a:xfrm>
             <a:custGeom>
               <a:avLst/>
               <a:pathLst>
-                <a:path w="0" h="3649639">
+                <a:path w="7660515" h="0">
                   <a:moveTo>
-                    <a:pt x="0" y="3649639"/>
+                    <a:pt x="0" y="0"/>
                   </a:moveTo>
                   <a:lnTo>
-                    <a:pt x="0" y="0"/>
-                  </a:lnTo>
-                  <a:lnTo>
-                    <a:pt x="0" y="0"/>
+                    <a:pt x="7660515" y="0"/>
+                  </a:lnTo>
+                  <a:lnTo>
+                    <a:pt x="7660515" y="0"/>
                   </a:lnTo>
                 </a:path>
               </a:pathLst>
@@ -2486,15 +2478,15 @@
           </p:nvSpPr>
           <p:spPr>
             <a:xfrm>
-              <a:off x="3538150" y="2073503"/>
-              <a:ext cx="0" cy="3649639"/>
+              <a:off x="1525188" y="2143092"/>
+              <a:ext cx="0" cy="1317069"/>
             </a:xfrm>
             <a:custGeom>
               <a:avLst/>
               <a:pathLst>
-                <a:path w="0" h="3649639">
+                <a:path w="0" h="1317069">
                   <a:moveTo>
-                    <a:pt x="0" y="3649639"/>
+                    <a:pt x="0" y="1317069"/>
                   </a:moveTo>
                   <a:lnTo>
                     <a:pt x="0" y="0"/>
@@ -2529,15 +2521,15 @@
           </p:nvSpPr>
           <p:spPr>
             <a:xfrm>
-              <a:off x="5609107" y="2073503"/>
-              <a:ext cx="0" cy="3649639"/>
+              <a:off x="3559192" y="2143092"/>
+              <a:ext cx="0" cy="1317069"/>
             </a:xfrm>
             <a:custGeom>
               <a:avLst/>
               <a:pathLst>
-                <a:path w="0" h="3649639">
+                <a:path w="0" h="1317069">
                   <a:moveTo>
-                    <a:pt x="0" y="3649639"/>
+                    <a:pt x="0" y="1317069"/>
                   </a:moveTo>
                   <a:lnTo>
                     <a:pt x="0" y="0"/>
@@ -2572,15 +2564,15 @@
           </p:nvSpPr>
           <p:spPr>
             <a:xfrm>
-              <a:off x="7680065" y="2073503"/>
-              <a:ext cx="0" cy="3649639"/>
+              <a:off x="5593195" y="2143092"/>
+              <a:ext cx="0" cy="1317069"/>
             </a:xfrm>
             <a:custGeom>
               <a:avLst/>
               <a:pathLst>
-                <a:path w="0" h="3649639">
+                <a:path w="0" h="1317069">
                   <a:moveTo>
-                    <a:pt x="0" y="3649639"/>
+                    <a:pt x="0" y="1317069"/>
                   </a:moveTo>
                   <a:lnTo>
                     <a:pt x="0" y="0"/>
@@ -2615,26 +2607,26 @@
           </p:nvSpPr>
           <p:spPr>
             <a:xfrm>
-              <a:off x="817517" y="5557249"/>
-              <a:ext cx="7799693" cy="0"/>
+              <a:off x="7627198" y="2143092"/>
+              <a:ext cx="0" cy="1317069"/>
             </a:xfrm>
             <a:custGeom>
               <a:avLst/>
               <a:pathLst>
-                <a:path w="7799693" h="0">
+                <a:path w="0" h="1317069">
                   <a:moveTo>
+                    <a:pt x="0" y="1317069"/>
+                  </a:moveTo>
+                  <a:lnTo>
                     <a:pt x="0" y="0"/>
-                  </a:moveTo>
-                  <a:lnTo>
-                    <a:pt x="7799693" y="0"/>
-                  </a:lnTo>
-                  <a:lnTo>
-                    <a:pt x="7799693" y="0"/>
+                  </a:lnTo>
+                  <a:lnTo>
+                    <a:pt x="0" y="0"/>
                   </a:lnTo>
                 </a:path>
               </a:pathLst>
             </a:custGeom>
-            <a:ln w="13550" cap="flat">
+            <a:ln w="6775" cap="flat">
               <a:solidFill>
                 <a:srgbClr val="EBEBEB">
                   <a:alpha val="100000"/>
@@ -2658,21 +2650,21 @@
           </p:nvSpPr>
           <p:spPr>
             <a:xfrm>
-              <a:off x="817517" y="4727786"/>
-              <a:ext cx="7799693" cy="0"/>
+              <a:off x="887106" y="3400294"/>
+              <a:ext cx="7660515" cy="0"/>
             </a:xfrm>
             <a:custGeom>
               <a:avLst/>
               <a:pathLst>
-                <a:path w="7799693" h="0">
+                <a:path w="7660515" h="0">
                   <a:moveTo>
                     <a:pt x="0" y="0"/>
                   </a:moveTo>
                   <a:lnTo>
-                    <a:pt x="7799693" y="0"/>
-                  </a:lnTo>
-                  <a:lnTo>
-                    <a:pt x="7799693" y="0"/>
+                    <a:pt x="7660515" y="0"/>
+                  </a:lnTo>
+                  <a:lnTo>
+                    <a:pt x="7660515" y="0"/>
                   </a:lnTo>
                 </a:path>
               </a:pathLst>
@@ -2701,21 +2693,21 @@
           </p:nvSpPr>
           <p:spPr>
             <a:xfrm>
-              <a:off x="817517" y="3898322"/>
-              <a:ext cx="7799693" cy="0"/>
+              <a:off x="887106" y="3100960"/>
+              <a:ext cx="7660515" cy="0"/>
             </a:xfrm>
             <a:custGeom>
               <a:avLst/>
               <a:pathLst>
-                <a:path w="7799693" h="0">
+                <a:path w="7660515" h="0">
                   <a:moveTo>
                     <a:pt x="0" y="0"/>
                   </a:moveTo>
                   <a:lnTo>
-                    <a:pt x="7799693" y="0"/>
-                  </a:lnTo>
-                  <a:lnTo>
-                    <a:pt x="7799693" y="0"/>
+                    <a:pt x="7660515" y="0"/>
+                  </a:lnTo>
+                  <a:lnTo>
+                    <a:pt x="7660515" y="0"/>
                   </a:lnTo>
                 </a:path>
               </a:pathLst>
@@ -2744,21 +2736,21 @@
           </p:nvSpPr>
           <p:spPr>
             <a:xfrm>
-              <a:off x="817517" y="3068859"/>
-              <a:ext cx="7799693" cy="0"/>
+              <a:off x="887106" y="2801626"/>
+              <a:ext cx="7660515" cy="0"/>
             </a:xfrm>
             <a:custGeom>
               <a:avLst/>
               <a:pathLst>
-                <a:path w="7799693" h="0">
+                <a:path w="7660515" h="0">
                   <a:moveTo>
                     <a:pt x="0" y="0"/>
                   </a:moveTo>
                   <a:lnTo>
-                    <a:pt x="7799693" y="0"/>
-                  </a:lnTo>
-                  <a:lnTo>
-                    <a:pt x="7799693" y="0"/>
+                    <a:pt x="7660515" y="0"/>
+                  </a:lnTo>
+                  <a:lnTo>
+                    <a:pt x="7660515" y="0"/>
                   </a:lnTo>
                 </a:path>
               </a:pathLst>
@@ -2787,21 +2779,21 @@
           </p:nvSpPr>
           <p:spPr>
             <a:xfrm>
-              <a:off x="817517" y="2239395"/>
-              <a:ext cx="7799693" cy="0"/>
+              <a:off x="887106" y="2502292"/>
+              <a:ext cx="7660515" cy="0"/>
             </a:xfrm>
             <a:custGeom>
               <a:avLst/>
               <a:pathLst>
-                <a:path w="7799693" h="0">
+                <a:path w="7660515" h="0">
                   <a:moveTo>
                     <a:pt x="0" y="0"/>
                   </a:moveTo>
                   <a:lnTo>
-                    <a:pt x="7799693" y="0"/>
-                  </a:lnTo>
-                  <a:lnTo>
-                    <a:pt x="7799693" y="0"/>
+                    <a:pt x="7660515" y="0"/>
+                  </a:lnTo>
+                  <a:lnTo>
+                    <a:pt x="7660515" y="0"/>
                   </a:lnTo>
                 </a:path>
               </a:pathLst>
@@ -2830,21 +2822,21 @@
           </p:nvSpPr>
           <p:spPr>
             <a:xfrm>
-              <a:off x="2502671" y="2073503"/>
-              <a:ext cx="0" cy="3649639"/>
+              <a:off x="887106" y="2202958"/>
+              <a:ext cx="7660515" cy="0"/>
             </a:xfrm>
             <a:custGeom>
               <a:avLst/>
               <a:pathLst>
-                <a:path w="0" h="3649639">
+                <a:path w="7660515" h="0">
                   <a:moveTo>
-                    <a:pt x="0" y="3649639"/>
+                    <a:pt x="0" y="0"/>
                   </a:moveTo>
                   <a:lnTo>
-                    <a:pt x="0" y="0"/>
-                  </a:lnTo>
-                  <a:lnTo>
-                    <a:pt x="0" y="0"/>
+                    <a:pt x="7660515" y="0"/>
+                  </a:lnTo>
+                  <a:lnTo>
+                    <a:pt x="7660515" y="0"/>
                   </a:lnTo>
                 </a:path>
               </a:pathLst>
@@ -2873,15 +2865,15 @@
           </p:nvSpPr>
           <p:spPr>
             <a:xfrm>
-              <a:off x="4573628" y="2073503"/>
-              <a:ext cx="0" cy="3649639"/>
+              <a:off x="2542190" y="2143092"/>
+              <a:ext cx="0" cy="1317069"/>
             </a:xfrm>
             <a:custGeom>
               <a:avLst/>
               <a:pathLst>
-                <a:path w="0" h="3649639">
+                <a:path w="0" h="1317069">
                   <a:moveTo>
-                    <a:pt x="0" y="3649639"/>
+                    <a:pt x="0" y="1317069"/>
                   </a:moveTo>
                   <a:lnTo>
                     <a:pt x="0" y="0"/>
@@ -2916,15 +2908,15 @@
           </p:nvSpPr>
           <p:spPr>
             <a:xfrm>
-              <a:off x="6644586" y="2073503"/>
-              <a:ext cx="0" cy="3649639"/>
+              <a:off x="4576193" y="2143092"/>
+              <a:ext cx="0" cy="1317069"/>
             </a:xfrm>
             <a:custGeom>
               <a:avLst/>
               <a:pathLst>
-                <a:path w="0" h="3649639">
+                <a:path w="0" h="1317069">
                   <a:moveTo>
-                    <a:pt x="0" y="3649639"/>
+                    <a:pt x="0" y="1317069"/>
                   </a:moveTo>
                   <a:lnTo>
                     <a:pt x="0" y="0"/>
@@ -2953,588 +2945,631 @@
         </p:sp>
         <p:sp>
           <p:nvSpPr>
-            <p:cNvPr id="20" name="pg20"/>
+            <p:cNvPr id="20" name="pl20"/>
             <p:cNvSpPr/>
             <p:nvPr/>
           </p:nvSpPr>
           <p:spPr>
             <a:xfrm>
-              <a:off x="1172049" y="2073503"/>
-              <a:ext cx="7090630" cy="3378562"/>
+              <a:off x="6610197" y="2143092"/>
+              <a:ext cx="0" cy="1317069"/>
             </a:xfrm>
             <a:custGeom>
               <a:avLst/>
               <a:pathLst>
-                <a:path w="7090630" h="3378562">
+                <a:path w="0" h="1317069">
                   <a:moveTo>
-                    <a:pt x="759163" y="0"/>
+                    <a:pt x="0" y="1317069"/>
                   </a:moveTo>
                   <a:lnTo>
-                    <a:pt x="787847" y="55449"/>
-                  </a:lnTo>
-                  <a:lnTo>
-                    <a:pt x="859470" y="188531"/>
-                  </a:lnTo>
-                  <a:lnTo>
-                    <a:pt x="931092" y="316447"/>
-                  </a:lnTo>
-                  <a:lnTo>
-                    <a:pt x="1002715" y="439397"/>
-                  </a:lnTo>
-                  <a:lnTo>
-                    <a:pt x="1074337" y="557574"/>
-                  </a:lnTo>
-                  <a:lnTo>
-                    <a:pt x="1145960" y="671164"/>
-                  </a:lnTo>
-                  <a:lnTo>
-                    <a:pt x="1217582" y="780344"/>
-                  </a:lnTo>
-                  <a:lnTo>
-                    <a:pt x="1289205" y="885286"/>
-                  </a:lnTo>
-                  <a:lnTo>
-                    <a:pt x="1360827" y="986155"/>
-                  </a:lnTo>
-                  <a:lnTo>
-                    <a:pt x="1432450" y="1083108"/>
-                  </a:lnTo>
-                  <a:lnTo>
-                    <a:pt x="1504073" y="1176297"/>
-                  </a:lnTo>
-                  <a:lnTo>
-                    <a:pt x="1575695" y="1265869"/>
-                  </a:lnTo>
-                  <a:lnTo>
-                    <a:pt x="1647318" y="1351964"/>
-                  </a:lnTo>
-                  <a:lnTo>
-                    <a:pt x="1718940" y="1434717"/>
-                  </a:lnTo>
-                  <a:lnTo>
-                    <a:pt x="1790563" y="1514257"/>
-                  </a:lnTo>
-                  <a:lnTo>
-                    <a:pt x="1862185" y="1590710"/>
-                  </a:lnTo>
-                  <a:lnTo>
-                    <a:pt x="1933808" y="1664195"/>
-                  </a:lnTo>
-                  <a:lnTo>
-                    <a:pt x="2005430" y="1734827"/>
-                  </a:lnTo>
-                  <a:lnTo>
-                    <a:pt x="2077053" y="1802718"/>
-                  </a:lnTo>
-                  <a:lnTo>
-                    <a:pt x="2148675" y="1867973"/>
-                  </a:lnTo>
-                  <a:lnTo>
-                    <a:pt x="2220298" y="1930695"/>
-                  </a:lnTo>
-                  <a:lnTo>
-                    <a:pt x="2291920" y="1990982"/>
-                  </a:lnTo>
-                  <a:lnTo>
-                    <a:pt x="2363543" y="2048929"/>
-                  </a:lnTo>
-                  <a:lnTo>
-                    <a:pt x="2435165" y="2104627"/>
-                  </a:lnTo>
-                  <a:lnTo>
-                    <a:pt x="2506788" y="2158162"/>
-                  </a:lnTo>
-                  <a:lnTo>
-                    <a:pt x="2578410" y="2209619"/>
-                  </a:lnTo>
-                  <a:lnTo>
-                    <a:pt x="2650033" y="2259079"/>
-                  </a:lnTo>
-                  <a:lnTo>
-                    <a:pt x="2721655" y="2306619"/>
-                  </a:lnTo>
-                  <a:lnTo>
-                    <a:pt x="2793278" y="2352313"/>
-                  </a:lnTo>
-                  <a:lnTo>
-                    <a:pt x="2864901" y="2396234"/>
-                  </a:lnTo>
-                  <a:lnTo>
-                    <a:pt x="2936523" y="2438450"/>
-                  </a:lnTo>
-                  <a:lnTo>
-                    <a:pt x="3008146" y="2479027"/>
-                  </a:lnTo>
-                  <a:lnTo>
-                    <a:pt x="3079768" y="2518028"/>
-                  </a:lnTo>
-                  <a:lnTo>
-                    <a:pt x="3151391" y="2555516"/>
-                  </a:lnTo>
-                  <a:lnTo>
-                    <a:pt x="3223013" y="2591549"/>
-                  </a:lnTo>
-                  <a:lnTo>
-                    <a:pt x="3294636" y="2626183"/>
-                  </a:lnTo>
-                  <a:lnTo>
-                    <a:pt x="3366258" y="2655754"/>
-                  </a:lnTo>
-                  <a:lnTo>
-                    <a:pt x="3437881" y="2664977"/>
-                  </a:lnTo>
-                  <a:lnTo>
-                    <a:pt x="3509503" y="2674097"/>
-                  </a:lnTo>
-                  <a:lnTo>
-                    <a:pt x="3581126" y="2683116"/>
-                  </a:lnTo>
-                  <a:lnTo>
-                    <a:pt x="3652748" y="2692034"/>
-                  </a:lnTo>
-                  <a:lnTo>
-                    <a:pt x="3724371" y="2700853"/>
-                  </a:lnTo>
-                  <a:lnTo>
-                    <a:pt x="3795993" y="2709573"/>
-                  </a:lnTo>
-                  <a:lnTo>
-                    <a:pt x="3867616" y="2718197"/>
-                  </a:lnTo>
-                  <a:lnTo>
-                    <a:pt x="3939238" y="2726724"/>
-                  </a:lnTo>
-                  <a:lnTo>
-                    <a:pt x="4010861" y="2735156"/>
-                  </a:lnTo>
-                  <a:lnTo>
-                    <a:pt x="4082483" y="2743495"/>
-                  </a:lnTo>
-                  <a:lnTo>
-                    <a:pt x="4154106" y="2751740"/>
-                  </a:lnTo>
-                  <a:lnTo>
-                    <a:pt x="4225729" y="2759894"/>
-                  </a:lnTo>
-                  <a:lnTo>
-                    <a:pt x="4297351" y="2767957"/>
-                  </a:lnTo>
-                  <a:lnTo>
-                    <a:pt x="4368974" y="2775930"/>
-                  </a:lnTo>
-                  <a:lnTo>
-                    <a:pt x="4440596" y="2783814"/>
-                  </a:lnTo>
-                  <a:lnTo>
-                    <a:pt x="4512219" y="2791611"/>
-                  </a:lnTo>
-                  <a:lnTo>
-                    <a:pt x="4583841" y="2799320"/>
-                  </a:lnTo>
-                  <a:lnTo>
-                    <a:pt x="4655464" y="2806944"/>
-                  </a:lnTo>
-                  <a:lnTo>
-                    <a:pt x="4727086" y="2814483"/>
-                  </a:lnTo>
-                  <a:lnTo>
-                    <a:pt x="4798709" y="2821938"/>
-                  </a:lnTo>
-                  <a:lnTo>
-                    <a:pt x="4870331" y="2829310"/>
-                  </a:lnTo>
-                  <a:lnTo>
-                    <a:pt x="4941954" y="2836599"/>
-                  </a:lnTo>
-                  <a:lnTo>
-                    <a:pt x="5013576" y="2843808"/>
-                  </a:lnTo>
-                  <a:lnTo>
-                    <a:pt x="5085199" y="2850936"/>
-                  </a:lnTo>
-                  <a:lnTo>
-                    <a:pt x="5156821" y="2857985"/>
-                  </a:lnTo>
-                  <a:lnTo>
-                    <a:pt x="5228444" y="2864955"/>
-                  </a:lnTo>
-                  <a:lnTo>
-                    <a:pt x="5300066" y="2871848"/>
-                  </a:lnTo>
-                  <a:lnTo>
-                    <a:pt x="5371689" y="2878663"/>
-                  </a:lnTo>
-                  <a:lnTo>
-                    <a:pt x="5443311" y="2885403"/>
-                  </a:lnTo>
-                  <a:lnTo>
-                    <a:pt x="5514934" y="2892068"/>
-                  </a:lnTo>
-                  <a:lnTo>
-                    <a:pt x="5586557" y="2898659"/>
-                  </a:lnTo>
-                  <a:lnTo>
-                    <a:pt x="5658179" y="2905176"/>
-                  </a:lnTo>
-                  <a:lnTo>
-                    <a:pt x="5729802" y="2911621"/>
-                  </a:lnTo>
-                  <a:lnTo>
-                    <a:pt x="5801424" y="2917994"/>
-                  </a:lnTo>
-                  <a:lnTo>
-                    <a:pt x="5873047" y="2924295"/>
-                  </a:lnTo>
-                  <a:lnTo>
-                    <a:pt x="5944669" y="2930527"/>
-                  </a:lnTo>
-                  <a:lnTo>
-                    <a:pt x="6016292" y="2936689"/>
-                  </a:lnTo>
-                  <a:lnTo>
-                    <a:pt x="6087914" y="2942783"/>
-                  </a:lnTo>
-                  <a:lnTo>
-                    <a:pt x="6159537" y="2948809"/>
-                  </a:lnTo>
-                  <a:lnTo>
-                    <a:pt x="6231159" y="2954767"/>
-                  </a:lnTo>
-                  <a:lnTo>
-                    <a:pt x="6302782" y="2960659"/>
-                  </a:lnTo>
-                  <a:lnTo>
-                    <a:pt x="6374404" y="2966486"/>
-                  </a:lnTo>
-                  <a:lnTo>
-                    <a:pt x="6446027" y="2972248"/>
-                  </a:lnTo>
-                  <a:lnTo>
-                    <a:pt x="6517649" y="2977945"/>
-                  </a:lnTo>
-                  <a:lnTo>
-                    <a:pt x="6589272" y="2983579"/>
-                  </a:lnTo>
-                  <a:lnTo>
-                    <a:pt x="6660894" y="2989151"/>
-                  </a:lnTo>
-                  <a:lnTo>
-                    <a:pt x="6732517" y="2994660"/>
-                  </a:lnTo>
-                  <a:lnTo>
-                    <a:pt x="6804139" y="3000108"/>
-                  </a:lnTo>
-                  <a:lnTo>
-                    <a:pt x="6875762" y="3005495"/>
-                  </a:lnTo>
-                  <a:lnTo>
-                    <a:pt x="6947385" y="3010822"/>
-                  </a:lnTo>
-                  <a:lnTo>
-                    <a:pt x="7019007" y="3016090"/>
-                  </a:lnTo>
-                  <a:lnTo>
-                    <a:pt x="7090630" y="3021299"/>
-                  </a:lnTo>
-                  <a:lnTo>
-                    <a:pt x="7090630" y="3378562"/>
-                  </a:lnTo>
-                  <a:lnTo>
-                    <a:pt x="7019007" y="3374314"/>
-                  </a:lnTo>
-                  <a:lnTo>
-                    <a:pt x="6947385" y="3369894"/>
-                  </a:lnTo>
-                  <a:lnTo>
-                    <a:pt x="6875762" y="3365296"/>
-                  </a:lnTo>
-                  <a:lnTo>
-                    <a:pt x="6804139" y="3360513"/>
-                  </a:lnTo>
-                  <a:lnTo>
-                    <a:pt x="6732517" y="3355536"/>
-                  </a:lnTo>
-                  <a:lnTo>
-                    <a:pt x="6660894" y="3350358"/>
-                  </a:lnTo>
-                  <a:lnTo>
-                    <a:pt x="6589272" y="3344971"/>
-                  </a:lnTo>
-                  <a:lnTo>
-                    <a:pt x="6517649" y="3339366"/>
-                  </a:lnTo>
-                  <a:lnTo>
-                    <a:pt x="6446027" y="3333535"/>
-                  </a:lnTo>
-                  <a:lnTo>
-                    <a:pt x="6374404" y="3327469"/>
-                  </a:lnTo>
-                  <a:lnTo>
-                    <a:pt x="6302782" y="3321157"/>
-                  </a:lnTo>
-                  <a:lnTo>
-                    <a:pt x="6231159" y="3314591"/>
-                  </a:lnTo>
-                  <a:lnTo>
-                    <a:pt x="6159537" y="3307759"/>
-                  </a:lnTo>
-                  <a:lnTo>
-                    <a:pt x="6087914" y="3300652"/>
-                  </a:lnTo>
-                  <a:lnTo>
-                    <a:pt x="6016292" y="3293257"/>
-                  </a:lnTo>
-                  <a:lnTo>
-                    <a:pt x="5944669" y="3285564"/>
-                  </a:lnTo>
-                  <a:lnTo>
-                    <a:pt x="5873047" y="3277560"/>
-                  </a:lnTo>
-                  <a:lnTo>
-                    <a:pt x="5801424" y="3269233"/>
-                  </a:lnTo>
-                  <a:lnTo>
-                    <a:pt x="5729802" y="3260570"/>
-                  </a:lnTo>
-                  <a:lnTo>
-                    <a:pt x="5658179" y="3251556"/>
-                  </a:lnTo>
-                  <a:lnTo>
-                    <a:pt x="5586557" y="3242179"/>
-                  </a:lnTo>
-                  <a:lnTo>
-                    <a:pt x="5514934" y="3232423"/>
-                  </a:lnTo>
-                  <a:lnTo>
-                    <a:pt x="5443311" y="3222273"/>
-                  </a:lnTo>
-                  <a:lnTo>
-                    <a:pt x="5371689" y="3211713"/>
-                  </a:lnTo>
-                  <a:lnTo>
-                    <a:pt x="5300066" y="3200727"/>
-                  </a:lnTo>
-                  <a:lnTo>
-                    <a:pt x="5228444" y="3189296"/>
-                  </a:lnTo>
-                  <a:lnTo>
-                    <a:pt x="5156821" y="3177405"/>
-                  </a:lnTo>
-                  <a:lnTo>
-                    <a:pt x="5085199" y="3165033"/>
-                  </a:lnTo>
-                  <a:lnTo>
-                    <a:pt x="5013576" y="3152161"/>
-                  </a:lnTo>
-                  <a:lnTo>
-                    <a:pt x="4941954" y="3138769"/>
-                  </a:lnTo>
-                  <a:lnTo>
-                    <a:pt x="4870331" y="3124837"/>
-                  </a:lnTo>
-                  <a:lnTo>
-                    <a:pt x="4798709" y="3110342"/>
-                  </a:lnTo>
-                  <a:lnTo>
-                    <a:pt x="4727086" y="3095262"/>
-                  </a:lnTo>
-                  <a:lnTo>
-                    <a:pt x="4655464" y="3079572"/>
-                  </a:lnTo>
-                  <a:lnTo>
-                    <a:pt x="4583841" y="3063249"/>
-                  </a:lnTo>
-                  <a:lnTo>
-                    <a:pt x="4512219" y="3046267"/>
-                  </a:lnTo>
-                  <a:lnTo>
-                    <a:pt x="4440596" y="3028599"/>
-                  </a:lnTo>
-                  <a:lnTo>
-                    <a:pt x="4368974" y="3010217"/>
-                  </a:lnTo>
-                  <a:lnTo>
-                    <a:pt x="4297351" y="2991093"/>
-                  </a:lnTo>
-                  <a:lnTo>
-                    <a:pt x="4225729" y="2971196"/>
-                  </a:lnTo>
-                  <a:lnTo>
-                    <a:pt x="4154106" y="2950496"/>
-                  </a:lnTo>
-                  <a:lnTo>
-                    <a:pt x="4082483" y="2928960"/>
-                  </a:lnTo>
-                  <a:lnTo>
-                    <a:pt x="4010861" y="2906555"/>
-                  </a:lnTo>
-                  <a:lnTo>
-                    <a:pt x="3939238" y="2883244"/>
-                  </a:lnTo>
-                  <a:lnTo>
-                    <a:pt x="3867616" y="2858992"/>
-                  </a:lnTo>
-                  <a:lnTo>
-                    <a:pt x="3795993" y="2833760"/>
-                  </a:lnTo>
-                  <a:lnTo>
-                    <a:pt x="3724371" y="2807510"/>
-                  </a:lnTo>
-                  <a:lnTo>
-                    <a:pt x="3652748" y="2780199"/>
-                  </a:lnTo>
-                  <a:lnTo>
-                    <a:pt x="3581126" y="2751785"/>
-                  </a:lnTo>
-                  <a:lnTo>
-                    <a:pt x="3509503" y="2722224"/>
-                  </a:lnTo>
-                  <a:lnTo>
-                    <a:pt x="3437881" y="2691469"/>
-                  </a:lnTo>
-                  <a:lnTo>
-                    <a:pt x="3366258" y="2659472"/>
-                  </a:lnTo>
-                  <a:lnTo>
-                    <a:pt x="3294636" y="2646427"/>
-                  </a:lnTo>
-                  <a:lnTo>
-                    <a:pt x="3223013" y="2636996"/>
-                  </a:lnTo>
-                  <a:lnTo>
-                    <a:pt x="3151391" y="2627458"/>
-                  </a:lnTo>
-                  <a:lnTo>
-                    <a:pt x="3079768" y="2617812"/>
-                  </a:lnTo>
-                  <a:lnTo>
-                    <a:pt x="3008146" y="2608058"/>
-                  </a:lnTo>
-                  <a:lnTo>
-                    <a:pt x="2936523" y="2598194"/>
-                  </a:lnTo>
-                  <a:lnTo>
-                    <a:pt x="2864901" y="2588219"/>
-                  </a:lnTo>
-                  <a:lnTo>
-                    <a:pt x="2793278" y="2578131"/>
-                  </a:lnTo>
-                  <a:lnTo>
-                    <a:pt x="2721655" y="2567930"/>
-                  </a:lnTo>
-                  <a:lnTo>
-                    <a:pt x="2650033" y="2557614"/>
-                  </a:lnTo>
-                  <a:lnTo>
-                    <a:pt x="2578410" y="2547182"/>
-                  </a:lnTo>
-                  <a:lnTo>
-                    <a:pt x="2506788" y="2536632"/>
-                  </a:lnTo>
-                  <a:lnTo>
-                    <a:pt x="2435165" y="2525963"/>
-                  </a:lnTo>
-                  <a:lnTo>
-                    <a:pt x="2363543" y="2515174"/>
-                  </a:lnTo>
-                  <a:lnTo>
-                    <a:pt x="2291920" y="2504264"/>
-                  </a:lnTo>
-                  <a:lnTo>
-                    <a:pt x="2220298" y="2493231"/>
-                  </a:lnTo>
-                  <a:lnTo>
-                    <a:pt x="2148675" y="2482073"/>
-                  </a:lnTo>
-                  <a:lnTo>
-                    <a:pt x="2077053" y="2470790"/>
-                  </a:lnTo>
-                  <a:lnTo>
-                    <a:pt x="2005430" y="2459380"/>
-                  </a:lnTo>
-                  <a:lnTo>
-                    <a:pt x="1933808" y="2447841"/>
-                  </a:lnTo>
-                  <a:lnTo>
-                    <a:pt x="1862185" y="2436172"/>
-                  </a:lnTo>
-                  <a:lnTo>
-                    <a:pt x="1790563" y="2424372"/>
-                  </a:lnTo>
-                  <a:lnTo>
-                    <a:pt x="1718940" y="2412439"/>
-                  </a:lnTo>
-                  <a:lnTo>
-                    <a:pt x="1647318" y="2400371"/>
-                  </a:lnTo>
-                  <a:lnTo>
-                    <a:pt x="1575695" y="2388168"/>
-                  </a:lnTo>
-                  <a:lnTo>
-                    <a:pt x="1504073" y="2375827"/>
-                  </a:lnTo>
-                  <a:lnTo>
-                    <a:pt x="1432450" y="2363347"/>
-                  </a:lnTo>
-                  <a:lnTo>
-                    <a:pt x="1360827" y="2350726"/>
-                  </a:lnTo>
-                  <a:lnTo>
-                    <a:pt x="1289205" y="2337964"/>
-                  </a:lnTo>
-                  <a:lnTo>
-                    <a:pt x="1217582" y="2325057"/>
-                  </a:lnTo>
-                  <a:lnTo>
-                    <a:pt x="1145960" y="2312005"/>
-                  </a:lnTo>
-                  <a:lnTo>
-                    <a:pt x="1074337" y="2298807"/>
-                  </a:lnTo>
-                  <a:lnTo>
-                    <a:pt x="1002715" y="2285459"/>
-                  </a:lnTo>
-                  <a:lnTo>
-                    <a:pt x="931092" y="2271961"/>
-                  </a:lnTo>
-                  <a:lnTo>
-                    <a:pt x="859470" y="2258311"/>
-                  </a:lnTo>
-                  <a:lnTo>
-                    <a:pt x="787847" y="2244507"/>
-                  </a:lnTo>
-                  <a:lnTo>
-                    <a:pt x="716225" y="2230548"/>
-                  </a:lnTo>
-                  <a:lnTo>
-                    <a:pt x="644602" y="2216432"/>
-                  </a:lnTo>
-                  <a:lnTo>
-                    <a:pt x="572980" y="2202156"/>
-                  </a:lnTo>
-                  <a:lnTo>
-                    <a:pt x="501357" y="2187720"/>
-                  </a:lnTo>
-                  <a:lnTo>
-                    <a:pt x="429735" y="2173121"/>
-                  </a:lnTo>
-                  <a:lnTo>
-                    <a:pt x="358112" y="2158358"/>
-                  </a:lnTo>
-                  <a:lnTo>
-                    <a:pt x="286490" y="2143428"/>
-                  </a:lnTo>
-                  <a:lnTo>
-                    <a:pt x="214867" y="2128330"/>
-                  </a:lnTo>
-                  <a:lnTo>
-                    <a:pt x="143245" y="2113063"/>
-                  </a:lnTo>
-                  <a:lnTo>
-                    <a:pt x="71622" y="2097623"/>
-                  </a:lnTo>
-                  <a:lnTo>
-                    <a:pt x="0" y="2082009"/>
+                    <a:pt x="0" y="0"/>
+                  </a:lnTo>
+                  <a:lnTo>
+                    <a:pt x="0" y="0"/>
+                  </a:lnTo>
+                </a:path>
+              </a:pathLst>
+            </a:custGeom>
+            <a:ln w="13550" cap="flat">
+              <a:solidFill>
+                <a:srgbClr val="EBEBEB">
+                  <a:alpha val="100000"/>
+                </a:srgbClr>
+              </a:solidFill>
+              <a:prstDash val="solid"/>
+              <a:round/>
+            </a:ln>
+          </p:spPr>
+          <p:txBody>
+            <a:bodyPr/>
+            <a:lstStyle/>
+            <a:p/>
+          </p:txBody>
+        </p:sp>
+        <p:sp>
+          <p:nvSpPr>
+            <p:cNvPr id="21" name="pg21"/>
+            <p:cNvSpPr/>
+            <p:nvPr/>
+          </p:nvSpPr>
+          <p:spPr>
+            <a:xfrm>
+              <a:off x="1235312" y="2143092"/>
+              <a:ext cx="6964104" cy="1219243"/>
+            </a:xfrm>
+            <a:custGeom>
+              <a:avLst/>
+              <a:pathLst>
+                <a:path w="6964104" h="1219243">
+                  <a:moveTo>
+                    <a:pt x="745617" y="0"/>
+                  </a:moveTo>
+                  <a:lnTo>
+                    <a:pt x="773789" y="20010"/>
+                  </a:lnTo>
+                  <a:lnTo>
+                    <a:pt x="844133" y="68036"/>
+                  </a:lnTo>
+                  <a:lnTo>
+                    <a:pt x="914478" y="114198"/>
+                  </a:lnTo>
+                  <a:lnTo>
+                    <a:pt x="984822" y="158568"/>
+                  </a:lnTo>
+                  <a:lnTo>
+                    <a:pt x="1055167" y="201215"/>
+                  </a:lnTo>
+                  <a:lnTo>
+                    <a:pt x="1125511" y="242207"/>
+                  </a:lnTo>
+                  <a:lnTo>
+                    <a:pt x="1195856" y="281608"/>
+                  </a:lnTo>
+                  <a:lnTo>
+                    <a:pt x="1266200" y="319479"/>
+                  </a:lnTo>
+                  <a:lnTo>
+                    <a:pt x="1336545" y="355880"/>
+                  </a:lnTo>
+                  <a:lnTo>
+                    <a:pt x="1406889" y="390868"/>
+                  </a:lnTo>
+                  <a:lnTo>
+                    <a:pt x="1477234" y="424498"/>
+                  </a:lnTo>
+                  <a:lnTo>
+                    <a:pt x="1547578" y="456822"/>
+                  </a:lnTo>
+                  <a:lnTo>
+                    <a:pt x="1617923" y="487892"/>
+                  </a:lnTo>
+                  <a:lnTo>
+                    <a:pt x="1688267" y="517755"/>
+                  </a:lnTo>
+                  <a:lnTo>
+                    <a:pt x="1758612" y="546459"/>
+                  </a:lnTo>
+                  <a:lnTo>
+                    <a:pt x="1828956" y="574049"/>
+                  </a:lnTo>
+                  <a:lnTo>
+                    <a:pt x="1899301" y="600568"/>
+                  </a:lnTo>
+                  <a:lnTo>
+                    <a:pt x="1969645" y="626058"/>
+                  </a:lnTo>
+                  <a:lnTo>
+                    <a:pt x="2039990" y="650558"/>
+                  </a:lnTo>
+                  <a:lnTo>
+                    <a:pt x="2110334" y="674107"/>
+                  </a:lnTo>
+                  <a:lnTo>
+                    <a:pt x="2180679" y="696742"/>
+                  </a:lnTo>
+                  <a:lnTo>
+                    <a:pt x="2251023" y="718498"/>
+                  </a:lnTo>
+                  <a:lnTo>
+                    <a:pt x="2321368" y="739410"/>
+                  </a:lnTo>
+                  <a:lnTo>
+                    <a:pt x="2391712" y="759510"/>
+                  </a:lnTo>
+                  <a:lnTo>
+                    <a:pt x="2462057" y="778830"/>
+                  </a:lnTo>
+                  <a:lnTo>
+                    <a:pt x="2532401" y="797399"/>
+                  </a:lnTo>
+                  <a:lnTo>
+                    <a:pt x="2602746" y="815248"/>
+                  </a:lnTo>
+                  <a:lnTo>
+                    <a:pt x="2673090" y="832404"/>
+                  </a:lnTo>
+                  <a:lnTo>
+                    <a:pt x="2743435" y="848894"/>
+                  </a:lnTo>
+                  <a:lnTo>
+                    <a:pt x="2813779" y="864744"/>
+                  </a:lnTo>
+                  <a:lnTo>
+                    <a:pt x="2884124" y="879979"/>
+                  </a:lnTo>
+                  <a:lnTo>
+                    <a:pt x="2954468" y="894622"/>
+                  </a:lnTo>
+                  <a:lnTo>
+                    <a:pt x="3024813" y="908697"/>
+                  </a:lnTo>
+                  <a:lnTo>
+                    <a:pt x="3095157" y="922225"/>
+                  </a:lnTo>
+                  <a:lnTo>
+                    <a:pt x="3165502" y="935229"/>
+                  </a:lnTo>
+                  <a:lnTo>
+                    <a:pt x="3235846" y="947727"/>
+                  </a:lnTo>
+                  <a:lnTo>
+                    <a:pt x="3306191" y="958399"/>
+                  </a:lnTo>
+                  <a:lnTo>
+                    <a:pt x="3376535" y="961727"/>
+                  </a:lnTo>
+                  <a:lnTo>
+                    <a:pt x="3446880" y="965018"/>
+                  </a:lnTo>
+                  <a:lnTo>
+                    <a:pt x="3517224" y="968273"/>
+                  </a:lnTo>
+                  <a:lnTo>
+                    <a:pt x="3587569" y="971491"/>
+                  </a:lnTo>
+                  <a:lnTo>
+                    <a:pt x="3657913" y="974674"/>
+                  </a:lnTo>
+                  <a:lnTo>
+                    <a:pt x="3728257" y="977821"/>
+                  </a:lnTo>
+                  <a:lnTo>
+                    <a:pt x="3798602" y="980933"/>
+                  </a:lnTo>
+                  <a:lnTo>
+                    <a:pt x="3868946" y="984010"/>
+                  </a:lnTo>
+                  <a:lnTo>
+                    <a:pt x="3939291" y="987053"/>
+                  </a:lnTo>
+                  <a:lnTo>
+                    <a:pt x="4009635" y="990062"/>
+                  </a:lnTo>
+                  <a:lnTo>
+                    <a:pt x="4079980" y="993038"/>
+                  </a:lnTo>
+                  <a:lnTo>
+                    <a:pt x="4150324" y="995981"/>
+                  </a:lnTo>
+                  <a:lnTo>
+                    <a:pt x="4220669" y="998890"/>
+                  </a:lnTo>
+                  <a:lnTo>
+                    <a:pt x="4291013" y="1001768"/>
+                  </a:lnTo>
+                  <a:lnTo>
+                    <a:pt x="4361358" y="1004613"/>
+                  </a:lnTo>
+                  <a:lnTo>
+                    <a:pt x="4431702" y="1007426"/>
+                  </a:lnTo>
+                  <a:lnTo>
+                    <a:pt x="4502047" y="1010209"/>
+                  </a:lnTo>
+                  <a:lnTo>
+                    <a:pt x="4572391" y="1012960"/>
+                  </a:lnTo>
+                  <a:lnTo>
+                    <a:pt x="4642736" y="1015680"/>
+                  </a:lnTo>
+                  <a:lnTo>
+                    <a:pt x="4713080" y="1018371"/>
+                  </a:lnTo>
+                  <a:lnTo>
+                    <a:pt x="4783425" y="1021031"/>
+                  </a:lnTo>
+                  <a:lnTo>
+                    <a:pt x="4853769" y="1023662"/>
+                  </a:lnTo>
+                  <a:lnTo>
+                    <a:pt x="4924114" y="1026263"/>
+                  </a:lnTo>
+                  <a:lnTo>
+                    <a:pt x="4994458" y="1028835"/>
+                  </a:lnTo>
+                  <a:lnTo>
+                    <a:pt x="5064803" y="1031379"/>
+                  </a:lnTo>
+                  <a:lnTo>
+                    <a:pt x="5135147" y="1033895"/>
+                  </a:lnTo>
+                  <a:lnTo>
+                    <a:pt x="5205492" y="1036382"/>
+                  </a:lnTo>
+                  <a:lnTo>
+                    <a:pt x="5275836" y="1038842"/>
+                  </a:lnTo>
+                  <a:lnTo>
+                    <a:pt x="5346181" y="1041274"/>
+                  </a:lnTo>
+                  <a:lnTo>
+                    <a:pt x="5416525" y="1043679"/>
+                  </a:lnTo>
+                  <a:lnTo>
+                    <a:pt x="5486870" y="1046057"/>
+                  </a:lnTo>
+                  <a:lnTo>
+                    <a:pt x="5557214" y="1048409"/>
+                  </a:lnTo>
+                  <a:lnTo>
+                    <a:pt x="5627559" y="1050735"/>
+                  </a:lnTo>
+                  <a:lnTo>
+                    <a:pt x="5697903" y="1053035"/>
+                  </a:lnTo>
+                  <a:lnTo>
+                    <a:pt x="5768248" y="1055309"/>
+                  </a:lnTo>
+                  <a:lnTo>
+                    <a:pt x="5838592" y="1057558"/>
+                  </a:lnTo>
+                  <a:lnTo>
+                    <a:pt x="5908937" y="1059782"/>
+                  </a:lnTo>
+                  <a:lnTo>
+                    <a:pt x="5979281" y="1061981"/>
+                  </a:lnTo>
+                  <a:lnTo>
+                    <a:pt x="6049626" y="1064155"/>
+                  </a:lnTo>
+                  <a:lnTo>
+                    <a:pt x="6119970" y="1066306"/>
+                  </a:lnTo>
+                  <a:lnTo>
+                    <a:pt x="6190315" y="1068432"/>
+                  </a:lnTo>
+                  <a:lnTo>
+                    <a:pt x="6260659" y="1070535"/>
+                  </a:lnTo>
+                  <a:lnTo>
+                    <a:pt x="6331004" y="1072614"/>
+                  </a:lnTo>
+                  <a:lnTo>
+                    <a:pt x="6401348" y="1074670"/>
+                  </a:lnTo>
+                  <a:lnTo>
+                    <a:pt x="6471693" y="1076703"/>
+                  </a:lnTo>
+                  <a:lnTo>
+                    <a:pt x="6542037" y="1078714"/>
+                  </a:lnTo>
+                  <a:lnTo>
+                    <a:pt x="6612382" y="1080702"/>
+                  </a:lnTo>
+                  <a:lnTo>
+                    <a:pt x="6682726" y="1082668"/>
+                  </a:lnTo>
+                  <a:lnTo>
+                    <a:pt x="6753071" y="1084612"/>
+                  </a:lnTo>
+                  <a:lnTo>
+                    <a:pt x="6823415" y="1086535"/>
+                  </a:lnTo>
+                  <a:lnTo>
+                    <a:pt x="6893760" y="1088436"/>
+                  </a:lnTo>
+                  <a:lnTo>
+                    <a:pt x="6964104" y="1090315"/>
+                  </a:lnTo>
+                  <a:lnTo>
+                    <a:pt x="6964104" y="1219243"/>
+                  </a:lnTo>
+                  <a:lnTo>
+                    <a:pt x="6893760" y="1217710"/>
+                  </a:lnTo>
+                  <a:lnTo>
+                    <a:pt x="6823415" y="1216115"/>
+                  </a:lnTo>
+                  <a:lnTo>
+                    <a:pt x="6753071" y="1214456"/>
+                  </a:lnTo>
+                  <a:lnTo>
+                    <a:pt x="6682726" y="1212730"/>
+                  </a:lnTo>
+                  <a:lnTo>
+                    <a:pt x="6612382" y="1210934"/>
+                  </a:lnTo>
+                  <a:lnTo>
+                    <a:pt x="6542037" y="1209065"/>
+                  </a:lnTo>
+                  <a:lnTo>
+                    <a:pt x="6471693" y="1207121"/>
+                  </a:lnTo>
+                  <a:lnTo>
+                    <a:pt x="6401348" y="1205098"/>
+                  </a:lnTo>
+                  <a:lnTo>
+                    <a:pt x="6331004" y="1202994"/>
+                  </a:lnTo>
+                  <a:lnTo>
+                    <a:pt x="6260659" y="1200805"/>
+                  </a:lnTo>
+                  <a:lnTo>
+                    <a:pt x="6190315" y="1198527"/>
+                  </a:lnTo>
+                  <a:lnTo>
+                    <a:pt x="6119970" y="1196157"/>
+                  </a:lnTo>
+                  <a:lnTo>
+                    <a:pt x="6049626" y="1193692"/>
+                  </a:lnTo>
+                  <a:lnTo>
+                    <a:pt x="5979281" y="1191127"/>
+                  </a:lnTo>
+                  <a:lnTo>
+                    <a:pt x="5908937" y="1188459"/>
+                  </a:lnTo>
+                  <a:lnTo>
+                    <a:pt x="5838592" y="1185682"/>
+                  </a:lnTo>
+                  <a:lnTo>
+                    <a:pt x="5768248" y="1182794"/>
+                  </a:lnTo>
+                  <a:lnTo>
+                    <a:pt x="5697903" y="1179789"/>
+                  </a:lnTo>
+                  <a:lnTo>
+                    <a:pt x="5627559" y="1176663"/>
+                  </a:lnTo>
+                  <a:lnTo>
+                    <a:pt x="5557214" y="1173410"/>
+                  </a:lnTo>
+                  <a:lnTo>
+                    <a:pt x="5486870" y="1170026"/>
+                  </a:lnTo>
+                  <a:lnTo>
+                    <a:pt x="5416525" y="1166505"/>
+                  </a:lnTo>
+                  <a:lnTo>
+                    <a:pt x="5346181" y="1162842"/>
+                  </a:lnTo>
+                  <a:lnTo>
+                    <a:pt x="5275836" y="1159031"/>
+                  </a:lnTo>
+                  <a:lnTo>
+                    <a:pt x="5205492" y="1155067"/>
+                  </a:lnTo>
+                  <a:lnTo>
+                    <a:pt x="5135147" y="1150942"/>
+                  </a:lnTo>
+                  <a:lnTo>
+                    <a:pt x="5064803" y="1146650"/>
+                  </a:lnTo>
+                  <a:lnTo>
+                    <a:pt x="4994458" y="1142186"/>
+                  </a:lnTo>
+                  <a:lnTo>
+                    <a:pt x="4924114" y="1137540"/>
+                  </a:lnTo>
+                  <a:lnTo>
+                    <a:pt x="4853769" y="1132708"/>
+                  </a:lnTo>
+                  <a:lnTo>
+                    <a:pt x="4783425" y="1127680"/>
+                  </a:lnTo>
+                  <a:lnTo>
+                    <a:pt x="4713080" y="1122449"/>
+                  </a:lnTo>
+                  <a:lnTo>
+                    <a:pt x="4642736" y="1117007"/>
+                  </a:lnTo>
+                  <a:lnTo>
+                    <a:pt x="4572391" y="1111345"/>
+                  </a:lnTo>
+                  <a:lnTo>
+                    <a:pt x="4502047" y="1105454"/>
+                  </a:lnTo>
+                  <a:lnTo>
+                    <a:pt x="4431702" y="1099326"/>
+                  </a:lnTo>
+                  <a:lnTo>
+                    <a:pt x="4361358" y="1092950"/>
+                  </a:lnTo>
+                  <a:lnTo>
+                    <a:pt x="4291013" y="1086316"/>
+                  </a:lnTo>
+                  <a:lnTo>
+                    <a:pt x="4220669" y="1079415"/>
+                  </a:lnTo>
+                  <a:lnTo>
+                    <a:pt x="4150324" y="1072235"/>
+                  </a:lnTo>
+                  <a:lnTo>
+                    <a:pt x="4079980" y="1064764"/>
+                  </a:lnTo>
+                  <a:lnTo>
+                    <a:pt x="4009635" y="1056993"/>
+                  </a:lnTo>
+                  <a:lnTo>
+                    <a:pt x="3939291" y="1048907"/>
+                  </a:lnTo>
+                  <a:lnTo>
+                    <a:pt x="3868946" y="1040495"/>
+                  </a:lnTo>
+                  <a:lnTo>
+                    <a:pt x="3798602" y="1031743"/>
+                  </a:lnTo>
+                  <a:lnTo>
+                    <a:pt x="3728257" y="1022637"/>
+                  </a:lnTo>
+                  <a:lnTo>
+                    <a:pt x="3657913" y="1013164"/>
+                  </a:lnTo>
+                  <a:lnTo>
+                    <a:pt x="3587569" y="1003308"/>
+                  </a:lnTo>
+                  <a:lnTo>
+                    <a:pt x="3517224" y="993054"/>
+                  </a:lnTo>
+                  <a:lnTo>
+                    <a:pt x="3446880" y="982386"/>
+                  </a:lnTo>
+                  <a:lnTo>
+                    <a:pt x="3376535" y="971288"/>
+                  </a:lnTo>
+                  <a:lnTo>
+                    <a:pt x="3306191" y="959741"/>
+                  </a:lnTo>
+                  <a:lnTo>
+                    <a:pt x="3235846" y="955033"/>
+                  </a:lnTo>
+                  <a:lnTo>
+                    <a:pt x="3165502" y="951629"/>
+                  </a:lnTo>
+                  <a:lnTo>
+                    <a:pt x="3095157" y="948187"/>
+                  </a:lnTo>
+                  <a:lnTo>
+                    <a:pt x="3024813" y="944706"/>
+                  </a:lnTo>
+                  <a:lnTo>
+                    <a:pt x="2954468" y="941186"/>
+                  </a:lnTo>
+                  <a:lnTo>
+                    <a:pt x="2884124" y="937627"/>
+                  </a:lnTo>
+                  <a:lnTo>
+                    <a:pt x="2813779" y="934027"/>
+                  </a:lnTo>
+                  <a:lnTo>
+                    <a:pt x="2743435" y="930387"/>
+                  </a:lnTo>
+                  <a:lnTo>
+                    <a:pt x="2673090" y="926705"/>
+                  </a:lnTo>
+                  <a:lnTo>
+                    <a:pt x="2602746" y="922982"/>
+                  </a:lnTo>
+                  <a:lnTo>
+                    <a:pt x="2532401" y="919218"/>
+                  </a:lnTo>
+                  <a:lnTo>
+                    <a:pt x="2462057" y="915410"/>
+                  </a:lnTo>
+                  <a:lnTo>
+                    <a:pt x="2391712" y="911560"/>
+                  </a:lnTo>
+                  <a:lnTo>
+                    <a:pt x="2321368" y="907667"/>
+                  </a:lnTo>
+                  <a:lnTo>
+                    <a:pt x="2251023" y="903730"/>
+                  </a:lnTo>
+                  <a:lnTo>
+                    <a:pt x="2180679" y="899748"/>
+                  </a:lnTo>
+                  <a:lnTo>
+                    <a:pt x="2110334" y="895722"/>
+                  </a:lnTo>
+                  <a:lnTo>
+                    <a:pt x="2039990" y="891650"/>
+                  </a:lnTo>
+                  <a:lnTo>
+                    <a:pt x="1969645" y="887532"/>
+                  </a:lnTo>
+                  <a:lnTo>
+                    <a:pt x="1899301" y="883368"/>
+                  </a:lnTo>
+                  <a:lnTo>
+                    <a:pt x="1828956" y="879157"/>
+                  </a:lnTo>
+                  <a:lnTo>
+                    <a:pt x="1758612" y="874899"/>
+                  </a:lnTo>
+                  <a:lnTo>
+                    <a:pt x="1688267" y="870592"/>
+                  </a:lnTo>
+                  <a:lnTo>
+                    <a:pt x="1617923" y="866237"/>
+                  </a:lnTo>
+                  <a:lnTo>
+                    <a:pt x="1547578" y="861833"/>
+                  </a:lnTo>
+                  <a:lnTo>
+                    <a:pt x="1477234" y="857380"/>
+                  </a:lnTo>
+                  <a:lnTo>
+                    <a:pt x="1406889" y="852876"/>
+                  </a:lnTo>
+                  <a:lnTo>
+                    <a:pt x="1336545" y="848322"/>
+                  </a:lnTo>
+                  <a:lnTo>
+                    <a:pt x="1266200" y="843716"/>
+                  </a:lnTo>
+                  <a:lnTo>
+                    <a:pt x="1195856" y="839058"/>
+                  </a:lnTo>
+                  <a:lnTo>
+                    <a:pt x="1125511" y="834348"/>
+                  </a:lnTo>
+                  <a:lnTo>
+                    <a:pt x="1055167" y="829585"/>
+                  </a:lnTo>
+                  <a:lnTo>
+                    <a:pt x="984822" y="824768"/>
+                  </a:lnTo>
+                  <a:lnTo>
+                    <a:pt x="914478" y="819897"/>
+                  </a:lnTo>
+                  <a:lnTo>
+                    <a:pt x="844133" y="814971"/>
+                  </a:lnTo>
+                  <a:lnTo>
+                    <a:pt x="773789" y="809990"/>
+                  </a:lnTo>
+                  <a:lnTo>
+                    <a:pt x="703444" y="804952"/>
+                  </a:lnTo>
+                  <a:lnTo>
+                    <a:pt x="633100" y="799858"/>
+                  </a:lnTo>
+                  <a:lnTo>
+                    <a:pt x="562755" y="794706"/>
+                  </a:lnTo>
+                  <a:lnTo>
+                    <a:pt x="492411" y="789496"/>
+                  </a:lnTo>
+                  <a:lnTo>
+                    <a:pt x="422066" y="784228"/>
+                  </a:lnTo>
+                  <a:lnTo>
+                    <a:pt x="351722" y="778900"/>
+                  </a:lnTo>
+                  <a:lnTo>
+                    <a:pt x="281377" y="773513"/>
+                  </a:lnTo>
+                  <a:lnTo>
+                    <a:pt x="211033" y="768064"/>
+                  </a:lnTo>
+                  <a:lnTo>
+                    <a:pt x="140688" y="762554"/>
+                  </a:lnTo>
+                  <a:lnTo>
+                    <a:pt x="70344" y="756982"/>
+                  </a:lnTo>
+                  <a:lnTo>
+                    <a:pt x="0" y="751348"/>
                   </a:lnTo>
                   <a:close/>
                 </a:path>
@@ -3554,613 +3589,288 @@
         </p:sp>
         <p:sp>
           <p:nvSpPr>
-            <p:cNvPr id="21" name="pl21"/>
-            <p:cNvSpPr/>
-            <p:nvPr/>
-          </p:nvSpPr>
-          <p:spPr>
-            <a:xfrm>
-              <a:off x="1931213" y="2073503"/>
-              <a:ext cx="6331466" cy="3021299"/>
-            </a:xfrm>
-            <a:custGeom>
-              <a:avLst/>
-              <a:pathLst>
-                <a:path w="6331466" h="3021299">
-                  <a:moveTo>
-                    <a:pt x="0" y="0"/>
-                  </a:moveTo>
-                  <a:lnTo>
-                    <a:pt x="28683" y="55449"/>
-                  </a:lnTo>
-                  <a:lnTo>
-                    <a:pt x="100306" y="188531"/>
-                  </a:lnTo>
-                  <a:lnTo>
-                    <a:pt x="171928" y="316447"/>
-                  </a:lnTo>
-                  <a:lnTo>
-                    <a:pt x="243551" y="439397"/>
-                  </a:lnTo>
-                  <a:lnTo>
-                    <a:pt x="315173" y="557574"/>
-                  </a:lnTo>
-                  <a:lnTo>
-                    <a:pt x="386796" y="671164"/>
-                  </a:lnTo>
-                  <a:lnTo>
-                    <a:pt x="458419" y="780344"/>
-                  </a:lnTo>
-                  <a:lnTo>
-                    <a:pt x="530041" y="885286"/>
-                  </a:lnTo>
-                  <a:lnTo>
-                    <a:pt x="601664" y="986155"/>
-                  </a:lnTo>
-                  <a:lnTo>
-                    <a:pt x="673286" y="1083108"/>
-                  </a:lnTo>
-                  <a:lnTo>
-                    <a:pt x="744909" y="1176297"/>
-                  </a:lnTo>
-                  <a:lnTo>
-                    <a:pt x="816531" y="1265869"/>
-                  </a:lnTo>
-                  <a:lnTo>
-                    <a:pt x="888154" y="1351964"/>
-                  </a:lnTo>
-                  <a:lnTo>
-                    <a:pt x="959776" y="1434717"/>
-                  </a:lnTo>
-                  <a:lnTo>
-                    <a:pt x="1031399" y="1514257"/>
-                  </a:lnTo>
-                  <a:lnTo>
-                    <a:pt x="1103021" y="1590710"/>
-                  </a:lnTo>
-                  <a:lnTo>
-                    <a:pt x="1174644" y="1664195"/>
-                  </a:lnTo>
-                  <a:lnTo>
-                    <a:pt x="1246266" y="1734827"/>
-                  </a:lnTo>
-                  <a:lnTo>
-                    <a:pt x="1317889" y="1802718"/>
-                  </a:lnTo>
-                  <a:lnTo>
-                    <a:pt x="1389511" y="1867973"/>
-                  </a:lnTo>
-                  <a:lnTo>
-                    <a:pt x="1461134" y="1930695"/>
-                  </a:lnTo>
-                  <a:lnTo>
-                    <a:pt x="1532756" y="1990982"/>
-                  </a:lnTo>
-                  <a:lnTo>
-                    <a:pt x="1604379" y="2048929"/>
-                  </a:lnTo>
-                  <a:lnTo>
-                    <a:pt x="1676001" y="2104627"/>
-                  </a:lnTo>
-                  <a:lnTo>
-                    <a:pt x="1747624" y="2158162"/>
-                  </a:lnTo>
-                  <a:lnTo>
-                    <a:pt x="1819247" y="2209619"/>
-                  </a:lnTo>
-                  <a:lnTo>
-                    <a:pt x="1890869" y="2259079"/>
-                  </a:lnTo>
-                  <a:lnTo>
-                    <a:pt x="1962492" y="2306619"/>
-                  </a:lnTo>
-                  <a:lnTo>
-                    <a:pt x="2034114" y="2352313"/>
-                  </a:lnTo>
-                  <a:lnTo>
-                    <a:pt x="2105737" y="2396234"/>
-                  </a:lnTo>
-                  <a:lnTo>
-                    <a:pt x="2177359" y="2438450"/>
-                  </a:lnTo>
-                  <a:lnTo>
-                    <a:pt x="2248982" y="2479027"/>
-                  </a:lnTo>
-                  <a:lnTo>
-                    <a:pt x="2320604" y="2518028"/>
-                  </a:lnTo>
-                  <a:lnTo>
-                    <a:pt x="2392227" y="2555516"/>
-                  </a:lnTo>
-                  <a:lnTo>
-                    <a:pt x="2463849" y="2591549"/>
-                  </a:lnTo>
-                  <a:lnTo>
-                    <a:pt x="2535472" y="2626183"/>
-                  </a:lnTo>
-                  <a:lnTo>
-                    <a:pt x="2607094" y="2655754"/>
-                  </a:lnTo>
-                  <a:lnTo>
-                    <a:pt x="2678717" y="2664977"/>
-                  </a:lnTo>
-                  <a:lnTo>
-                    <a:pt x="2750339" y="2674097"/>
-                  </a:lnTo>
-                  <a:lnTo>
-                    <a:pt x="2821962" y="2683116"/>
-                  </a:lnTo>
-                  <a:lnTo>
-                    <a:pt x="2893584" y="2692034"/>
-                  </a:lnTo>
-                  <a:lnTo>
-                    <a:pt x="2965207" y="2700853"/>
-                  </a:lnTo>
-                  <a:lnTo>
-                    <a:pt x="3036829" y="2709573"/>
-                  </a:lnTo>
-                  <a:lnTo>
-                    <a:pt x="3108452" y="2718197"/>
-                  </a:lnTo>
-                  <a:lnTo>
-                    <a:pt x="3180075" y="2726724"/>
-                  </a:lnTo>
-                  <a:lnTo>
-                    <a:pt x="3251697" y="2735156"/>
-                  </a:lnTo>
-                  <a:lnTo>
-                    <a:pt x="3323320" y="2743495"/>
-                  </a:lnTo>
-                  <a:lnTo>
-                    <a:pt x="3394942" y="2751740"/>
-                  </a:lnTo>
-                  <a:lnTo>
-                    <a:pt x="3466565" y="2759894"/>
-                  </a:lnTo>
-                  <a:lnTo>
-                    <a:pt x="3538187" y="2767957"/>
-                  </a:lnTo>
-                  <a:lnTo>
-                    <a:pt x="3609810" y="2775930"/>
-                  </a:lnTo>
-                  <a:lnTo>
-                    <a:pt x="3681432" y="2783814"/>
-                  </a:lnTo>
-                  <a:lnTo>
-                    <a:pt x="3753055" y="2791611"/>
-                  </a:lnTo>
-                  <a:lnTo>
-                    <a:pt x="3824677" y="2799320"/>
-                  </a:lnTo>
-                  <a:lnTo>
-                    <a:pt x="3896300" y="2806944"/>
-                  </a:lnTo>
-                  <a:lnTo>
-                    <a:pt x="3967922" y="2814483"/>
-                  </a:lnTo>
-                  <a:lnTo>
-                    <a:pt x="4039545" y="2821938"/>
-                  </a:lnTo>
-                  <a:lnTo>
-                    <a:pt x="4111167" y="2829310"/>
-                  </a:lnTo>
-                  <a:lnTo>
-                    <a:pt x="4182790" y="2836599"/>
-                  </a:lnTo>
-                  <a:lnTo>
-                    <a:pt x="4254412" y="2843808"/>
-                  </a:lnTo>
-                  <a:lnTo>
-                    <a:pt x="4326035" y="2850936"/>
-                  </a:lnTo>
-                  <a:lnTo>
-                    <a:pt x="4397657" y="2857985"/>
-                  </a:lnTo>
-                  <a:lnTo>
-                    <a:pt x="4469280" y="2864955"/>
-                  </a:lnTo>
-                  <a:lnTo>
-                    <a:pt x="4540903" y="2871848"/>
-                  </a:lnTo>
-                  <a:lnTo>
-                    <a:pt x="4612525" y="2878663"/>
-                  </a:lnTo>
-                  <a:lnTo>
-                    <a:pt x="4684148" y="2885403"/>
-                  </a:lnTo>
-                  <a:lnTo>
-                    <a:pt x="4755770" y="2892068"/>
-                  </a:lnTo>
-                  <a:lnTo>
-                    <a:pt x="4827393" y="2898659"/>
-                  </a:lnTo>
-                  <a:lnTo>
-                    <a:pt x="4899015" y="2905176"/>
-                  </a:lnTo>
-                  <a:lnTo>
-                    <a:pt x="4970638" y="2911621"/>
-                  </a:lnTo>
-                  <a:lnTo>
-                    <a:pt x="5042260" y="2917994"/>
-                  </a:lnTo>
-                  <a:lnTo>
-                    <a:pt x="5113883" y="2924295"/>
-                  </a:lnTo>
-                  <a:lnTo>
-                    <a:pt x="5185505" y="2930527"/>
-                  </a:lnTo>
-                  <a:lnTo>
-                    <a:pt x="5257128" y="2936689"/>
-                  </a:lnTo>
-                  <a:lnTo>
-                    <a:pt x="5328750" y="2942783"/>
-                  </a:lnTo>
-                  <a:lnTo>
-                    <a:pt x="5400373" y="2948809"/>
-                  </a:lnTo>
-                  <a:lnTo>
-                    <a:pt x="5471995" y="2954767"/>
-                  </a:lnTo>
-                  <a:lnTo>
-                    <a:pt x="5543618" y="2960659"/>
-                  </a:lnTo>
-                  <a:lnTo>
-                    <a:pt x="5615240" y="2966486"/>
-                  </a:lnTo>
-                  <a:lnTo>
-                    <a:pt x="5686863" y="2972248"/>
-                  </a:lnTo>
-                  <a:lnTo>
-                    <a:pt x="5758485" y="2977945"/>
-                  </a:lnTo>
-                  <a:lnTo>
-                    <a:pt x="5830108" y="2983579"/>
-                  </a:lnTo>
-                  <a:lnTo>
-                    <a:pt x="5901731" y="2989151"/>
-                  </a:lnTo>
-                  <a:lnTo>
-                    <a:pt x="5973353" y="2994660"/>
-                  </a:lnTo>
-                  <a:lnTo>
-                    <a:pt x="6044976" y="3000108"/>
-                  </a:lnTo>
-                  <a:lnTo>
-                    <a:pt x="6116598" y="3005495"/>
-                  </a:lnTo>
-                  <a:lnTo>
-                    <a:pt x="6188221" y="3010822"/>
-                  </a:lnTo>
-                  <a:lnTo>
-                    <a:pt x="6259843" y="3016090"/>
-                  </a:lnTo>
-                  <a:lnTo>
-                    <a:pt x="6331466" y="3021299"/>
-                  </a:lnTo>
-                </a:path>
-              </a:pathLst>
-            </a:custGeom>
-          </p:spPr>
-          <p:txBody>
-            <a:bodyPr/>
-            <a:lstStyle/>
-            <a:p/>
-          </p:txBody>
-        </p:sp>
-        <p:sp>
-          <p:nvSpPr>
             <p:cNvPr id="22" name="pl22"/>
             <p:cNvSpPr/>
             <p:nvPr/>
           </p:nvSpPr>
           <p:spPr>
             <a:xfrm>
-              <a:off x="1172049" y="4155512"/>
-              <a:ext cx="7090630" cy="1296553"/>
+              <a:off x="1980929" y="2143092"/>
+              <a:ext cx="6218487" cy="1090315"/>
             </a:xfrm>
             <a:custGeom>
               <a:avLst/>
               <a:pathLst>
-                <a:path w="7090630" h="1296553">
+                <a:path w="6218487" h="1090315">
                   <a:moveTo>
-                    <a:pt x="7090630" y="1296553"/>
+                    <a:pt x="0" y="0"/>
                   </a:moveTo>
                   <a:lnTo>
-                    <a:pt x="7019007" y="1292305"/>
-                  </a:lnTo>
-                  <a:lnTo>
-                    <a:pt x="6947385" y="1287885"/>
-                  </a:lnTo>
-                  <a:lnTo>
-                    <a:pt x="6875762" y="1283287"/>
-                  </a:lnTo>
-                  <a:lnTo>
-                    <a:pt x="6804139" y="1278503"/>
-                  </a:lnTo>
-                  <a:lnTo>
-                    <a:pt x="6732517" y="1273526"/>
-                  </a:lnTo>
-                  <a:lnTo>
-                    <a:pt x="6660894" y="1268348"/>
-                  </a:lnTo>
-                  <a:lnTo>
-                    <a:pt x="6589272" y="1262961"/>
-                  </a:lnTo>
-                  <a:lnTo>
-                    <a:pt x="6517649" y="1257356"/>
-                  </a:lnTo>
-                  <a:lnTo>
-                    <a:pt x="6446027" y="1251525"/>
-                  </a:lnTo>
-                  <a:lnTo>
-                    <a:pt x="6374404" y="1245459"/>
-                  </a:lnTo>
-                  <a:lnTo>
-                    <a:pt x="6302782" y="1239148"/>
-                  </a:lnTo>
-                  <a:lnTo>
-                    <a:pt x="6231159" y="1232581"/>
-                  </a:lnTo>
-                  <a:lnTo>
-                    <a:pt x="6159537" y="1225750"/>
-                  </a:lnTo>
-                  <a:lnTo>
-                    <a:pt x="6087914" y="1218642"/>
-                  </a:lnTo>
-                  <a:lnTo>
-                    <a:pt x="6016292" y="1211248"/>
-                  </a:lnTo>
-                  <a:lnTo>
-                    <a:pt x="5944669" y="1203554"/>
-                  </a:lnTo>
-                  <a:lnTo>
-                    <a:pt x="5873047" y="1195551"/>
-                  </a:lnTo>
-                  <a:lnTo>
-                    <a:pt x="5801424" y="1187223"/>
-                  </a:lnTo>
-                  <a:lnTo>
-                    <a:pt x="5729802" y="1178560"/>
-                  </a:lnTo>
-                  <a:lnTo>
-                    <a:pt x="5658179" y="1169547"/>
-                  </a:lnTo>
-                  <a:lnTo>
-                    <a:pt x="5586557" y="1160169"/>
-                  </a:lnTo>
-                  <a:lnTo>
-                    <a:pt x="5514934" y="1150413"/>
-                  </a:lnTo>
-                  <a:lnTo>
-                    <a:pt x="5443311" y="1140263"/>
-                  </a:lnTo>
-                  <a:lnTo>
-                    <a:pt x="5371689" y="1129703"/>
-                  </a:lnTo>
-                  <a:lnTo>
-                    <a:pt x="5300066" y="1118717"/>
-                  </a:lnTo>
-                  <a:lnTo>
-                    <a:pt x="5228444" y="1107287"/>
-                  </a:lnTo>
-                  <a:lnTo>
-                    <a:pt x="5156821" y="1095395"/>
-                  </a:lnTo>
-                  <a:lnTo>
-                    <a:pt x="5085199" y="1083023"/>
-                  </a:lnTo>
-                  <a:lnTo>
-                    <a:pt x="5013576" y="1070151"/>
-                  </a:lnTo>
-                  <a:lnTo>
-                    <a:pt x="4941954" y="1056760"/>
-                  </a:lnTo>
-                  <a:lnTo>
-                    <a:pt x="4870331" y="1042828"/>
-                  </a:lnTo>
-                  <a:lnTo>
-                    <a:pt x="4798709" y="1028333"/>
-                  </a:lnTo>
-                  <a:lnTo>
-                    <a:pt x="4727086" y="1013252"/>
-                  </a:lnTo>
-                  <a:lnTo>
-                    <a:pt x="4655464" y="997563"/>
-                  </a:lnTo>
-                  <a:lnTo>
-                    <a:pt x="4583841" y="981240"/>
-                  </a:lnTo>
-                  <a:lnTo>
-                    <a:pt x="4512219" y="964257"/>
-                  </a:lnTo>
-                  <a:lnTo>
-                    <a:pt x="4440596" y="946589"/>
-                  </a:lnTo>
-                  <a:lnTo>
-                    <a:pt x="4368974" y="928207"/>
-                  </a:lnTo>
-                  <a:lnTo>
-                    <a:pt x="4297351" y="909083"/>
-                  </a:lnTo>
-                  <a:lnTo>
-                    <a:pt x="4225729" y="889187"/>
-                  </a:lnTo>
-                  <a:lnTo>
-                    <a:pt x="4154106" y="868487"/>
-                  </a:lnTo>
-                  <a:lnTo>
-                    <a:pt x="4082483" y="846951"/>
-                  </a:lnTo>
-                  <a:lnTo>
-                    <a:pt x="4010861" y="824545"/>
-                  </a:lnTo>
-                  <a:lnTo>
-                    <a:pt x="3939238" y="801234"/>
-                  </a:lnTo>
-                  <a:lnTo>
-                    <a:pt x="3867616" y="776982"/>
-                  </a:lnTo>
-                  <a:lnTo>
-                    <a:pt x="3795993" y="751751"/>
-                  </a:lnTo>
-                  <a:lnTo>
-                    <a:pt x="3724371" y="725500"/>
-                  </a:lnTo>
-                  <a:lnTo>
-                    <a:pt x="3652748" y="698190"/>
-                  </a:lnTo>
-                  <a:lnTo>
-                    <a:pt x="3581126" y="669776"/>
-                  </a:lnTo>
-                  <a:lnTo>
-                    <a:pt x="3509503" y="640215"/>
-                  </a:lnTo>
-                  <a:lnTo>
-                    <a:pt x="3437881" y="609460"/>
-                  </a:lnTo>
-                  <a:lnTo>
-                    <a:pt x="3366258" y="577462"/>
-                  </a:lnTo>
-                  <a:lnTo>
-                    <a:pt x="3294636" y="564418"/>
-                  </a:lnTo>
-                  <a:lnTo>
-                    <a:pt x="3223013" y="554986"/>
-                  </a:lnTo>
-                  <a:lnTo>
-                    <a:pt x="3151391" y="545448"/>
-                  </a:lnTo>
-                  <a:lnTo>
-                    <a:pt x="3079768" y="535803"/>
-                  </a:lnTo>
-                  <a:lnTo>
-                    <a:pt x="3008146" y="526048"/>
-                  </a:lnTo>
-                  <a:lnTo>
-                    <a:pt x="2936523" y="516184"/>
-                  </a:lnTo>
-                  <a:lnTo>
-                    <a:pt x="2864901" y="506209"/>
-                  </a:lnTo>
-                  <a:lnTo>
-                    <a:pt x="2793278" y="496122"/>
-                  </a:lnTo>
-                  <a:lnTo>
-                    <a:pt x="2721655" y="485920"/>
-                  </a:lnTo>
-                  <a:lnTo>
-                    <a:pt x="2650033" y="475604"/>
-                  </a:lnTo>
-                  <a:lnTo>
-                    <a:pt x="2578410" y="465172"/>
-                  </a:lnTo>
-                  <a:lnTo>
-                    <a:pt x="2506788" y="454622"/>
-                  </a:lnTo>
-                  <a:lnTo>
-                    <a:pt x="2435165" y="443954"/>
-                  </a:lnTo>
-                  <a:lnTo>
-                    <a:pt x="2363543" y="433165"/>
-                  </a:lnTo>
-                  <a:lnTo>
-                    <a:pt x="2291920" y="422255"/>
-                  </a:lnTo>
-                  <a:lnTo>
-                    <a:pt x="2220298" y="411221"/>
-                  </a:lnTo>
-                  <a:lnTo>
-                    <a:pt x="2148675" y="400064"/>
-                  </a:lnTo>
-                  <a:lnTo>
-                    <a:pt x="2077053" y="388781"/>
-                  </a:lnTo>
-                  <a:lnTo>
-                    <a:pt x="2005430" y="377370"/>
-                  </a:lnTo>
-                  <a:lnTo>
-                    <a:pt x="1933808" y="365832"/>
-                  </a:lnTo>
-                  <a:lnTo>
-                    <a:pt x="1862185" y="354163"/>
-                  </a:lnTo>
-                  <a:lnTo>
-                    <a:pt x="1790563" y="342363"/>
-                  </a:lnTo>
-                  <a:lnTo>
-                    <a:pt x="1718940" y="330430"/>
-                  </a:lnTo>
-                  <a:lnTo>
-                    <a:pt x="1647318" y="318362"/>
-                  </a:lnTo>
-                  <a:lnTo>
-                    <a:pt x="1575695" y="306158"/>
-                  </a:lnTo>
-                  <a:lnTo>
-                    <a:pt x="1504073" y="293817"/>
-                  </a:lnTo>
-                  <a:lnTo>
-                    <a:pt x="1432450" y="281338"/>
-                  </a:lnTo>
-                  <a:lnTo>
-                    <a:pt x="1360827" y="268717"/>
-                  </a:lnTo>
-                  <a:lnTo>
-                    <a:pt x="1289205" y="255954"/>
-                  </a:lnTo>
-                  <a:lnTo>
-                    <a:pt x="1217582" y="243048"/>
-                  </a:lnTo>
-                  <a:lnTo>
-                    <a:pt x="1145960" y="229996"/>
-                  </a:lnTo>
-                  <a:lnTo>
-                    <a:pt x="1074337" y="216797"/>
-                  </a:lnTo>
-                  <a:lnTo>
-                    <a:pt x="1002715" y="203449"/>
-                  </a:lnTo>
-                  <a:lnTo>
-                    <a:pt x="931092" y="189952"/>
-                  </a:lnTo>
-                  <a:lnTo>
-                    <a:pt x="859470" y="176302"/>
-                  </a:lnTo>
-                  <a:lnTo>
-                    <a:pt x="787847" y="162498"/>
-                  </a:lnTo>
-                  <a:lnTo>
-                    <a:pt x="716225" y="148539"/>
-                  </a:lnTo>
-                  <a:lnTo>
-                    <a:pt x="644602" y="134422"/>
-                  </a:lnTo>
-                  <a:lnTo>
-                    <a:pt x="572980" y="120147"/>
-                  </a:lnTo>
-                  <a:lnTo>
-                    <a:pt x="501357" y="105711"/>
-                  </a:lnTo>
-                  <a:lnTo>
-                    <a:pt x="429735" y="91112"/>
-                  </a:lnTo>
-                  <a:lnTo>
-                    <a:pt x="358112" y="76348"/>
-                  </a:lnTo>
-                  <a:lnTo>
-                    <a:pt x="286490" y="61419"/>
-                  </a:lnTo>
-                  <a:lnTo>
-                    <a:pt x="214867" y="46321"/>
-                  </a:lnTo>
-                  <a:lnTo>
-                    <a:pt x="143245" y="31053"/>
-                  </a:lnTo>
-                  <a:lnTo>
-                    <a:pt x="71622" y="15613"/>
-                  </a:lnTo>
-                  <a:lnTo>
-                    <a:pt x="0" y="0"/>
+                    <a:pt x="28172" y="20010"/>
+                  </a:lnTo>
+                  <a:lnTo>
+                    <a:pt x="98516" y="68036"/>
+                  </a:lnTo>
+                  <a:lnTo>
+                    <a:pt x="168861" y="114198"/>
+                  </a:lnTo>
+                  <a:lnTo>
+                    <a:pt x="239205" y="158568"/>
+                  </a:lnTo>
+                  <a:lnTo>
+                    <a:pt x="309550" y="201215"/>
+                  </a:lnTo>
+                  <a:lnTo>
+                    <a:pt x="379894" y="242207"/>
+                  </a:lnTo>
+                  <a:lnTo>
+                    <a:pt x="450238" y="281608"/>
+                  </a:lnTo>
+                  <a:lnTo>
+                    <a:pt x="520583" y="319479"/>
+                  </a:lnTo>
+                  <a:lnTo>
+                    <a:pt x="590927" y="355880"/>
+                  </a:lnTo>
+                  <a:lnTo>
+                    <a:pt x="661272" y="390868"/>
+                  </a:lnTo>
+                  <a:lnTo>
+                    <a:pt x="731616" y="424498"/>
+                  </a:lnTo>
+                  <a:lnTo>
+                    <a:pt x="801961" y="456822"/>
+                  </a:lnTo>
+                  <a:lnTo>
+                    <a:pt x="872305" y="487892"/>
+                  </a:lnTo>
+                  <a:lnTo>
+                    <a:pt x="942650" y="517755"/>
+                  </a:lnTo>
+                  <a:lnTo>
+                    <a:pt x="1012994" y="546459"/>
+                  </a:lnTo>
+                  <a:lnTo>
+                    <a:pt x="1083339" y="574049"/>
+                  </a:lnTo>
+                  <a:lnTo>
+                    <a:pt x="1153683" y="600568"/>
+                  </a:lnTo>
+                  <a:lnTo>
+                    <a:pt x="1224028" y="626058"/>
+                  </a:lnTo>
+                  <a:lnTo>
+                    <a:pt x="1294372" y="650558"/>
+                  </a:lnTo>
+                  <a:lnTo>
+                    <a:pt x="1364717" y="674107"/>
+                  </a:lnTo>
+                  <a:lnTo>
+                    <a:pt x="1435061" y="696742"/>
+                  </a:lnTo>
+                  <a:lnTo>
+                    <a:pt x="1505406" y="718498"/>
+                  </a:lnTo>
+                  <a:lnTo>
+                    <a:pt x="1575750" y="739410"/>
+                  </a:lnTo>
+                  <a:lnTo>
+                    <a:pt x="1646095" y="759510"/>
+                  </a:lnTo>
+                  <a:lnTo>
+                    <a:pt x="1716439" y="778830"/>
+                  </a:lnTo>
+                  <a:lnTo>
+                    <a:pt x="1786784" y="797399"/>
+                  </a:lnTo>
+                  <a:lnTo>
+                    <a:pt x="1857128" y="815248"/>
+                  </a:lnTo>
+                  <a:lnTo>
+                    <a:pt x="1927473" y="832404"/>
+                  </a:lnTo>
+                  <a:lnTo>
+                    <a:pt x="1997817" y="848894"/>
+                  </a:lnTo>
+                  <a:lnTo>
+                    <a:pt x="2068162" y="864744"/>
+                  </a:lnTo>
+                  <a:lnTo>
+                    <a:pt x="2138506" y="879979"/>
+                  </a:lnTo>
+                  <a:lnTo>
+                    <a:pt x="2208851" y="894622"/>
+                  </a:lnTo>
+                  <a:lnTo>
+                    <a:pt x="2279195" y="908697"/>
+                  </a:lnTo>
+                  <a:lnTo>
+                    <a:pt x="2349540" y="922225"/>
+                  </a:lnTo>
+                  <a:lnTo>
+                    <a:pt x="2419884" y="935229"/>
+                  </a:lnTo>
+                  <a:lnTo>
+                    <a:pt x="2490229" y="947727"/>
+                  </a:lnTo>
+                  <a:lnTo>
+                    <a:pt x="2560573" y="958399"/>
+                  </a:lnTo>
+                  <a:lnTo>
+                    <a:pt x="2630918" y="961727"/>
+                  </a:lnTo>
+                  <a:lnTo>
+                    <a:pt x="2701262" y="965018"/>
+                  </a:lnTo>
+                  <a:lnTo>
+                    <a:pt x="2771607" y="968273"/>
+                  </a:lnTo>
+                  <a:lnTo>
+                    <a:pt x="2841951" y="971491"/>
+                  </a:lnTo>
+                  <a:lnTo>
+                    <a:pt x="2912296" y="974674"/>
+                  </a:lnTo>
+                  <a:lnTo>
+                    <a:pt x="2982640" y="977821"/>
+                  </a:lnTo>
+                  <a:lnTo>
+                    <a:pt x="3052985" y="980933"/>
+                  </a:lnTo>
+                  <a:lnTo>
+                    <a:pt x="3123329" y="984010"/>
+                  </a:lnTo>
+                  <a:lnTo>
+                    <a:pt x="3193674" y="987053"/>
+                  </a:lnTo>
+                  <a:lnTo>
+                    <a:pt x="3264018" y="990062"/>
+                  </a:lnTo>
+                  <a:lnTo>
+                    <a:pt x="3334363" y="993038"/>
+                  </a:lnTo>
+                  <a:lnTo>
+                    <a:pt x="3404707" y="995981"/>
+                  </a:lnTo>
+                  <a:lnTo>
+                    <a:pt x="3475052" y="998890"/>
+                  </a:lnTo>
+                  <a:lnTo>
+                    <a:pt x="3545396" y="1001768"/>
+                  </a:lnTo>
+                  <a:lnTo>
+                    <a:pt x="3615741" y="1004613"/>
+                  </a:lnTo>
+                  <a:lnTo>
+                    <a:pt x="3686085" y="1007426"/>
+                  </a:lnTo>
+                  <a:lnTo>
+                    <a:pt x="3756430" y="1010209"/>
+                  </a:lnTo>
+                  <a:lnTo>
+                    <a:pt x="3826774" y="1012960"/>
+                  </a:lnTo>
+                  <a:lnTo>
+                    <a:pt x="3897119" y="1015680"/>
+                  </a:lnTo>
+                  <a:lnTo>
+                    <a:pt x="3967463" y="1018371"/>
+                  </a:lnTo>
+                  <a:lnTo>
+                    <a:pt x="4037808" y="1021031"/>
+                  </a:lnTo>
+                  <a:lnTo>
+                    <a:pt x="4108152" y="1023662"/>
+                  </a:lnTo>
+                  <a:lnTo>
+                    <a:pt x="4178496" y="1026263"/>
+                  </a:lnTo>
+                  <a:lnTo>
+                    <a:pt x="4248841" y="1028835"/>
+                  </a:lnTo>
+                  <a:lnTo>
+                    <a:pt x="4319185" y="1031379"/>
+                  </a:lnTo>
+                  <a:lnTo>
+                    <a:pt x="4389530" y="1033895"/>
+                  </a:lnTo>
+                  <a:lnTo>
+                    <a:pt x="4459874" y="1036382"/>
+                  </a:lnTo>
+                  <a:lnTo>
+                    <a:pt x="4530219" y="1038842"/>
+                  </a:lnTo>
+                  <a:lnTo>
+                    <a:pt x="4600563" y="1041274"/>
+                  </a:lnTo>
+                  <a:lnTo>
+                    <a:pt x="4670908" y="1043679"/>
+                  </a:lnTo>
+                  <a:lnTo>
+                    <a:pt x="4741252" y="1046057"/>
+                  </a:lnTo>
+                  <a:lnTo>
+                    <a:pt x="4811597" y="1048409"/>
+                  </a:lnTo>
+                  <a:lnTo>
+                    <a:pt x="4881941" y="1050735"/>
+                  </a:lnTo>
+                  <a:lnTo>
+                    <a:pt x="4952286" y="1053035"/>
+                  </a:lnTo>
+                  <a:lnTo>
+                    <a:pt x="5022630" y="1055309"/>
+                  </a:lnTo>
+                  <a:lnTo>
+                    <a:pt x="5092975" y="1057558"/>
+                  </a:lnTo>
+                  <a:lnTo>
+                    <a:pt x="5163319" y="1059782"/>
+                  </a:lnTo>
+                  <a:lnTo>
+                    <a:pt x="5233664" y="1061981"/>
+                  </a:lnTo>
+                  <a:lnTo>
+                    <a:pt x="5304008" y="1064155"/>
+                  </a:lnTo>
+                  <a:lnTo>
+                    <a:pt x="5374353" y="1066306"/>
+                  </a:lnTo>
+                  <a:lnTo>
+                    <a:pt x="5444697" y="1068432"/>
+                  </a:lnTo>
+                  <a:lnTo>
+                    <a:pt x="5515042" y="1070535"/>
+                  </a:lnTo>
+                  <a:lnTo>
+                    <a:pt x="5585386" y="1072614"/>
+                  </a:lnTo>
+                  <a:lnTo>
+                    <a:pt x="5655731" y="1074670"/>
+                  </a:lnTo>
+                  <a:lnTo>
+                    <a:pt x="5726075" y="1076703"/>
+                  </a:lnTo>
+                  <a:lnTo>
+                    <a:pt x="5796420" y="1078714"/>
+                  </a:lnTo>
+                  <a:lnTo>
+                    <a:pt x="5866764" y="1080702"/>
+                  </a:lnTo>
+                  <a:lnTo>
+                    <a:pt x="5937109" y="1082668"/>
+                  </a:lnTo>
+                  <a:lnTo>
+                    <a:pt x="6007453" y="1084612"/>
+                  </a:lnTo>
+                  <a:lnTo>
+                    <a:pt x="6077798" y="1086535"/>
+                  </a:lnTo>
+                  <a:lnTo>
+                    <a:pt x="6148142" y="1088436"/>
+                  </a:lnTo>
+                  <a:lnTo>
+                    <a:pt x="6218487" y="1090315"/>
                   </a:lnTo>
                 </a:path>
               </a:pathLst>
@@ -4180,312 +3890,637 @@
           </p:nvSpPr>
           <p:spPr>
             <a:xfrm>
-              <a:off x="1172049" y="2831769"/>
-              <a:ext cx="7090630" cy="2504930"/>
+              <a:off x="1235312" y="2894440"/>
+              <a:ext cx="6964104" cy="467895"/>
             </a:xfrm>
             <a:custGeom>
               <a:avLst/>
               <a:pathLst>
-                <a:path w="7090630" h="2504930">
+                <a:path w="6964104" h="467895">
+                  <a:moveTo>
+                    <a:pt x="6964104" y="467895"/>
+                  </a:moveTo>
+                  <a:lnTo>
+                    <a:pt x="6893760" y="466362"/>
+                  </a:lnTo>
+                  <a:lnTo>
+                    <a:pt x="6823415" y="464767"/>
+                  </a:lnTo>
+                  <a:lnTo>
+                    <a:pt x="6753071" y="463108"/>
+                  </a:lnTo>
+                  <a:lnTo>
+                    <a:pt x="6682726" y="461381"/>
+                  </a:lnTo>
+                  <a:lnTo>
+                    <a:pt x="6612382" y="459585"/>
+                  </a:lnTo>
+                  <a:lnTo>
+                    <a:pt x="6542037" y="457717"/>
+                  </a:lnTo>
+                  <a:lnTo>
+                    <a:pt x="6471693" y="455773"/>
+                  </a:lnTo>
+                  <a:lnTo>
+                    <a:pt x="6401348" y="453750"/>
+                  </a:lnTo>
+                  <a:lnTo>
+                    <a:pt x="6331004" y="451646"/>
+                  </a:lnTo>
+                  <a:lnTo>
+                    <a:pt x="6260659" y="449457"/>
+                  </a:lnTo>
+                  <a:lnTo>
+                    <a:pt x="6190315" y="447179"/>
+                  </a:lnTo>
+                  <a:lnTo>
+                    <a:pt x="6119970" y="444809"/>
+                  </a:lnTo>
+                  <a:lnTo>
+                    <a:pt x="6049626" y="442344"/>
+                  </a:lnTo>
+                  <a:lnTo>
+                    <a:pt x="5979281" y="439779"/>
+                  </a:lnTo>
+                  <a:lnTo>
+                    <a:pt x="5908937" y="437110"/>
+                  </a:lnTo>
+                  <a:lnTo>
+                    <a:pt x="5838592" y="434334"/>
+                  </a:lnTo>
+                  <a:lnTo>
+                    <a:pt x="5768248" y="431446"/>
+                  </a:lnTo>
+                  <a:lnTo>
+                    <a:pt x="5697903" y="428441"/>
+                  </a:lnTo>
+                  <a:lnTo>
+                    <a:pt x="5627559" y="425314"/>
+                  </a:lnTo>
+                  <a:lnTo>
+                    <a:pt x="5557214" y="422062"/>
+                  </a:lnTo>
+                  <a:lnTo>
+                    <a:pt x="5486870" y="418678"/>
+                  </a:lnTo>
+                  <a:lnTo>
+                    <a:pt x="5416525" y="415157"/>
+                  </a:lnTo>
+                  <a:lnTo>
+                    <a:pt x="5346181" y="411494"/>
+                  </a:lnTo>
+                  <a:lnTo>
+                    <a:pt x="5275836" y="407683"/>
+                  </a:lnTo>
+                  <a:lnTo>
+                    <a:pt x="5205492" y="403718"/>
+                  </a:lnTo>
+                  <a:lnTo>
+                    <a:pt x="5135147" y="399593"/>
+                  </a:lnTo>
+                  <a:lnTo>
+                    <a:pt x="5064803" y="395302"/>
+                  </a:lnTo>
+                  <a:lnTo>
+                    <a:pt x="4994458" y="390837"/>
+                  </a:lnTo>
+                  <a:lnTo>
+                    <a:pt x="4924114" y="386192"/>
+                  </a:lnTo>
+                  <a:lnTo>
+                    <a:pt x="4853769" y="381359"/>
+                  </a:lnTo>
+                  <a:lnTo>
+                    <a:pt x="4783425" y="376332"/>
+                  </a:lnTo>
+                  <a:lnTo>
+                    <a:pt x="4713080" y="371101"/>
+                  </a:lnTo>
+                  <a:lnTo>
+                    <a:pt x="4642736" y="365659"/>
+                  </a:lnTo>
+                  <a:lnTo>
+                    <a:pt x="4572391" y="359997"/>
+                  </a:lnTo>
+                  <a:lnTo>
+                    <a:pt x="4502047" y="354106"/>
+                  </a:lnTo>
+                  <a:lnTo>
+                    <a:pt x="4431702" y="347977"/>
+                  </a:lnTo>
+                  <a:lnTo>
+                    <a:pt x="4361358" y="341601"/>
+                  </a:lnTo>
+                  <a:lnTo>
+                    <a:pt x="4291013" y="334968"/>
+                  </a:lnTo>
+                  <a:lnTo>
+                    <a:pt x="4220669" y="328066"/>
+                  </a:lnTo>
+                  <a:lnTo>
+                    <a:pt x="4150324" y="320886"/>
+                  </a:lnTo>
+                  <a:lnTo>
+                    <a:pt x="4079980" y="313416"/>
+                  </a:lnTo>
+                  <a:lnTo>
+                    <a:pt x="4009635" y="305644"/>
+                  </a:lnTo>
+                  <a:lnTo>
+                    <a:pt x="3939291" y="297559"/>
+                  </a:lnTo>
+                  <a:lnTo>
+                    <a:pt x="3868946" y="289146"/>
+                  </a:lnTo>
+                  <a:lnTo>
+                    <a:pt x="3798602" y="280394"/>
+                  </a:lnTo>
+                  <a:lnTo>
+                    <a:pt x="3728257" y="271289"/>
+                  </a:lnTo>
+                  <a:lnTo>
+                    <a:pt x="3657913" y="261816"/>
+                  </a:lnTo>
+                  <a:lnTo>
+                    <a:pt x="3587569" y="251960"/>
+                  </a:lnTo>
+                  <a:lnTo>
+                    <a:pt x="3517224" y="241706"/>
+                  </a:lnTo>
+                  <a:lnTo>
+                    <a:pt x="3446880" y="231038"/>
+                  </a:lnTo>
+                  <a:lnTo>
+                    <a:pt x="3376535" y="219939"/>
+                  </a:lnTo>
+                  <a:lnTo>
+                    <a:pt x="3306191" y="208392"/>
+                  </a:lnTo>
+                  <a:lnTo>
+                    <a:pt x="3235846" y="203685"/>
+                  </a:lnTo>
+                  <a:lnTo>
+                    <a:pt x="3165502" y="200281"/>
+                  </a:lnTo>
+                  <a:lnTo>
+                    <a:pt x="3095157" y="196839"/>
+                  </a:lnTo>
+                  <a:lnTo>
+                    <a:pt x="3024813" y="193358"/>
+                  </a:lnTo>
+                  <a:lnTo>
+                    <a:pt x="2954468" y="189838"/>
+                  </a:lnTo>
+                  <a:lnTo>
+                    <a:pt x="2884124" y="186278"/>
+                  </a:lnTo>
+                  <a:lnTo>
+                    <a:pt x="2813779" y="182679"/>
+                  </a:lnTo>
+                  <a:lnTo>
+                    <a:pt x="2743435" y="179038"/>
+                  </a:lnTo>
+                  <a:lnTo>
+                    <a:pt x="2673090" y="175357"/>
+                  </a:lnTo>
+                  <a:lnTo>
+                    <a:pt x="2602746" y="171634"/>
+                  </a:lnTo>
+                  <a:lnTo>
+                    <a:pt x="2532401" y="167869"/>
+                  </a:lnTo>
+                  <a:lnTo>
+                    <a:pt x="2462057" y="164062"/>
+                  </a:lnTo>
+                  <a:lnTo>
+                    <a:pt x="2391712" y="160212"/>
+                  </a:lnTo>
+                  <a:lnTo>
+                    <a:pt x="2321368" y="156319"/>
+                  </a:lnTo>
+                  <a:lnTo>
+                    <a:pt x="2251023" y="152381"/>
+                  </a:lnTo>
+                  <a:lnTo>
+                    <a:pt x="2180679" y="148400"/>
+                  </a:lnTo>
+                  <a:lnTo>
+                    <a:pt x="2110334" y="144373"/>
+                  </a:lnTo>
+                  <a:lnTo>
+                    <a:pt x="2039990" y="140302"/>
+                  </a:lnTo>
+                  <a:lnTo>
+                    <a:pt x="1969645" y="136184"/>
+                  </a:lnTo>
+                  <a:lnTo>
+                    <a:pt x="1899301" y="132020"/>
+                  </a:lnTo>
+                  <a:lnTo>
+                    <a:pt x="1828956" y="127809"/>
+                  </a:lnTo>
+                  <a:lnTo>
+                    <a:pt x="1758612" y="123550"/>
+                  </a:lnTo>
+                  <a:lnTo>
+                    <a:pt x="1688267" y="119244"/>
+                  </a:lnTo>
+                  <a:lnTo>
+                    <a:pt x="1617923" y="114889"/>
+                  </a:lnTo>
+                  <a:lnTo>
+                    <a:pt x="1547578" y="110485"/>
+                  </a:lnTo>
+                  <a:lnTo>
+                    <a:pt x="1477234" y="106032"/>
+                  </a:lnTo>
+                  <a:lnTo>
+                    <a:pt x="1406889" y="101528"/>
+                  </a:lnTo>
+                  <a:lnTo>
+                    <a:pt x="1336545" y="96973"/>
+                  </a:lnTo>
+                  <a:lnTo>
+                    <a:pt x="1266200" y="92368"/>
+                  </a:lnTo>
+                  <a:lnTo>
+                    <a:pt x="1195856" y="87710"/>
+                  </a:lnTo>
+                  <a:lnTo>
+                    <a:pt x="1125511" y="83000"/>
+                  </a:lnTo>
+                  <a:lnTo>
+                    <a:pt x="1055167" y="78237"/>
+                  </a:lnTo>
+                  <a:lnTo>
+                    <a:pt x="984822" y="73420"/>
+                  </a:lnTo>
+                  <a:lnTo>
+                    <a:pt x="914478" y="68549"/>
+                  </a:lnTo>
+                  <a:lnTo>
+                    <a:pt x="844133" y="63623"/>
+                  </a:lnTo>
+                  <a:lnTo>
+                    <a:pt x="773789" y="58641"/>
+                  </a:lnTo>
+                  <a:lnTo>
+                    <a:pt x="703444" y="53604"/>
+                  </a:lnTo>
+                  <a:lnTo>
+                    <a:pt x="633100" y="48510"/>
+                  </a:lnTo>
+                  <a:lnTo>
+                    <a:pt x="562755" y="43358"/>
+                  </a:lnTo>
+                  <a:lnTo>
+                    <a:pt x="492411" y="38148"/>
+                  </a:lnTo>
+                  <a:lnTo>
+                    <a:pt x="422066" y="32880"/>
+                  </a:lnTo>
+                  <a:lnTo>
+                    <a:pt x="351722" y="27552"/>
+                  </a:lnTo>
+                  <a:lnTo>
+                    <a:pt x="281377" y="22164"/>
+                  </a:lnTo>
+                  <a:lnTo>
+                    <a:pt x="211033" y="16716"/>
+                  </a:lnTo>
+                  <a:lnTo>
+                    <a:pt x="140688" y="11206"/>
+                  </a:lnTo>
+                  <a:lnTo>
+                    <a:pt x="70344" y="5634"/>
+                  </a:lnTo>
+                  <a:lnTo>
+                    <a:pt x="0" y="0"/>
+                  </a:lnTo>
+                </a:path>
+              </a:pathLst>
+            </a:custGeom>
+          </p:spPr>
+          <p:txBody>
+            <a:bodyPr/>
+            <a:lstStyle/>
+            <a:p/>
+          </p:txBody>
+        </p:sp>
+        <p:sp>
+          <p:nvSpPr>
+            <p:cNvPr id="24" name="pl24"/>
+            <p:cNvSpPr/>
+            <p:nvPr/>
+          </p:nvSpPr>
+          <p:spPr>
+            <a:xfrm>
+              <a:off x="1235312" y="2416732"/>
+              <a:ext cx="6964104" cy="903970"/>
+            </a:xfrm>
+            <a:custGeom>
+              <a:avLst/>
+              <a:pathLst>
+                <a:path w="6964104" h="903970">
                   <a:moveTo>
                     <a:pt x="0" y="0"/>
                   </a:moveTo>
                   <a:lnTo>
-                    <a:pt x="71622" y="68346"/>
-                  </a:lnTo>
-                  <a:lnTo>
-                    <a:pt x="143245" y="134979"/>
-                  </a:lnTo>
-                  <a:lnTo>
-                    <a:pt x="214867" y="199941"/>
-                  </a:lnTo>
-                  <a:lnTo>
-                    <a:pt x="286490" y="263274"/>
-                  </a:lnTo>
-                  <a:lnTo>
-                    <a:pt x="358112" y="325018"/>
-                  </a:lnTo>
-                  <a:lnTo>
-                    <a:pt x="429735" y="385214"/>
-                  </a:lnTo>
-                  <a:lnTo>
-                    <a:pt x="501357" y="443901"/>
-                  </a:lnTo>
-                  <a:lnTo>
-                    <a:pt x="572980" y="501116"/>
-                  </a:lnTo>
-                  <a:lnTo>
-                    <a:pt x="644602" y="556896"/>
-                  </a:lnTo>
-                  <a:lnTo>
-                    <a:pt x="716225" y="611278"/>
-                  </a:lnTo>
-                  <a:lnTo>
-                    <a:pt x="787847" y="664296"/>
-                  </a:lnTo>
-                  <a:lnTo>
-                    <a:pt x="859470" y="715984"/>
-                  </a:lnTo>
-                  <a:lnTo>
-                    <a:pt x="931092" y="766376"/>
-                  </a:lnTo>
-                  <a:lnTo>
-                    <a:pt x="1002715" y="815504"/>
-                  </a:lnTo>
-                  <a:lnTo>
-                    <a:pt x="1074337" y="863400"/>
-                  </a:lnTo>
-                  <a:lnTo>
-                    <a:pt x="1145960" y="910096"/>
-                  </a:lnTo>
-                  <a:lnTo>
-                    <a:pt x="1217582" y="955620"/>
-                  </a:lnTo>
-                  <a:lnTo>
-                    <a:pt x="1289205" y="1000003"/>
-                  </a:lnTo>
-                  <a:lnTo>
-                    <a:pt x="1360827" y="1043272"/>
-                  </a:lnTo>
-                  <a:lnTo>
-                    <a:pt x="1432450" y="1085457"/>
-                  </a:lnTo>
-                  <a:lnTo>
-                    <a:pt x="1504073" y="1126584"/>
-                  </a:lnTo>
-                  <a:lnTo>
-                    <a:pt x="1575695" y="1166679"/>
-                  </a:lnTo>
-                  <a:lnTo>
-                    <a:pt x="1647318" y="1205769"/>
-                  </a:lnTo>
-                  <a:lnTo>
-                    <a:pt x="1718940" y="1243879"/>
-                  </a:lnTo>
-                  <a:lnTo>
-                    <a:pt x="1790563" y="1281033"/>
-                  </a:lnTo>
-                  <a:lnTo>
-                    <a:pt x="1862185" y="1317255"/>
-                  </a:lnTo>
-                  <a:lnTo>
-                    <a:pt x="1933808" y="1352569"/>
-                  </a:lnTo>
-                  <a:lnTo>
-                    <a:pt x="2005430" y="1386997"/>
-                  </a:lnTo>
-                  <a:lnTo>
-                    <a:pt x="2077053" y="1420562"/>
-                  </a:lnTo>
-                  <a:lnTo>
-                    <a:pt x="2148675" y="1453286"/>
-                  </a:lnTo>
-                  <a:lnTo>
-                    <a:pt x="2220298" y="1485189"/>
-                  </a:lnTo>
-                  <a:lnTo>
-                    <a:pt x="2291920" y="1516291"/>
-                  </a:lnTo>
-                  <a:lnTo>
-                    <a:pt x="2363543" y="1546614"/>
-                  </a:lnTo>
-                  <a:lnTo>
-                    <a:pt x="2435165" y="1576176"/>
-                  </a:lnTo>
-                  <a:lnTo>
-                    <a:pt x="2506788" y="1604997"/>
-                  </a:lnTo>
-                  <a:lnTo>
-                    <a:pt x="2578410" y="1633096"/>
-                  </a:lnTo>
-                  <a:lnTo>
-                    <a:pt x="2650033" y="1660489"/>
-                  </a:lnTo>
-                  <a:lnTo>
-                    <a:pt x="2721655" y="1687196"/>
-                  </a:lnTo>
-                  <a:lnTo>
-                    <a:pt x="2793278" y="1713233"/>
-                  </a:lnTo>
-                  <a:lnTo>
-                    <a:pt x="2864901" y="1738617"/>
-                  </a:lnTo>
-                  <a:lnTo>
-                    <a:pt x="2936523" y="1763364"/>
-                  </a:lnTo>
-                  <a:lnTo>
-                    <a:pt x="3008146" y="1787491"/>
-                  </a:lnTo>
-                  <a:lnTo>
-                    <a:pt x="3079768" y="1811013"/>
-                  </a:lnTo>
-                  <a:lnTo>
-                    <a:pt x="3151391" y="1833945"/>
-                  </a:lnTo>
-                  <a:lnTo>
-                    <a:pt x="3223013" y="1856302"/>
-                  </a:lnTo>
-                  <a:lnTo>
-                    <a:pt x="3294636" y="1878099"/>
-                  </a:lnTo>
-                  <a:lnTo>
-                    <a:pt x="3366258" y="1899348"/>
-                  </a:lnTo>
-                  <a:lnTo>
-                    <a:pt x="3437881" y="1920065"/>
-                  </a:lnTo>
-                  <a:lnTo>
-                    <a:pt x="3509503" y="1940262"/>
-                  </a:lnTo>
-                  <a:lnTo>
-                    <a:pt x="3581126" y="1959953"/>
-                  </a:lnTo>
-                  <a:lnTo>
-                    <a:pt x="3652748" y="1979150"/>
-                  </a:lnTo>
-                  <a:lnTo>
-                    <a:pt x="3724371" y="1997866"/>
-                  </a:lnTo>
-                  <a:lnTo>
-                    <a:pt x="3795993" y="2016112"/>
-                  </a:lnTo>
-                  <a:lnTo>
-                    <a:pt x="3867616" y="2033901"/>
-                  </a:lnTo>
-                  <a:lnTo>
-                    <a:pt x="3939238" y="2051244"/>
-                  </a:lnTo>
-                  <a:lnTo>
-                    <a:pt x="4010861" y="2068152"/>
-                  </a:lnTo>
-                  <a:lnTo>
-                    <a:pt x="4082483" y="2084635"/>
-                  </a:lnTo>
-                  <a:lnTo>
-                    <a:pt x="4154106" y="2100706"/>
-                  </a:lnTo>
-                  <a:lnTo>
-                    <a:pt x="4225729" y="2116373"/>
-                  </a:lnTo>
-                  <a:lnTo>
-                    <a:pt x="4297351" y="2131648"/>
-                  </a:lnTo>
-                  <a:lnTo>
-                    <a:pt x="4368974" y="2146539"/>
-                  </a:lnTo>
-                  <a:lnTo>
-                    <a:pt x="4440596" y="2161057"/>
-                  </a:lnTo>
-                  <a:lnTo>
-                    <a:pt x="4512219" y="2175211"/>
-                  </a:lnTo>
-                  <a:lnTo>
-                    <a:pt x="4583841" y="2189010"/>
-                  </a:lnTo>
-                  <a:lnTo>
-                    <a:pt x="4655464" y="2202463"/>
-                  </a:lnTo>
-                  <a:lnTo>
-                    <a:pt x="4727086" y="2215579"/>
-                  </a:lnTo>
-                  <a:lnTo>
-                    <a:pt x="4798709" y="2228366"/>
-                  </a:lnTo>
-                  <a:lnTo>
-                    <a:pt x="4870331" y="2240832"/>
-                  </a:lnTo>
-                  <a:lnTo>
-                    <a:pt x="4941954" y="2252985"/>
-                  </a:lnTo>
-                  <a:lnTo>
-                    <a:pt x="5013576" y="2264834"/>
-                  </a:lnTo>
-                  <a:lnTo>
-                    <a:pt x="5085199" y="2276386"/>
-                  </a:lnTo>
-                  <a:lnTo>
-                    <a:pt x="5156821" y="2287647"/>
-                  </a:lnTo>
-                  <a:lnTo>
-                    <a:pt x="5228444" y="2298627"/>
-                  </a:lnTo>
-                  <a:lnTo>
-                    <a:pt x="5300066" y="2309331"/>
-                  </a:lnTo>
-                  <a:lnTo>
-                    <a:pt x="5371689" y="2319767"/>
-                  </a:lnTo>
-                  <a:lnTo>
-                    <a:pt x="5443311" y="2329941"/>
-                  </a:lnTo>
-                  <a:lnTo>
-                    <a:pt x="5514934" y="2339860"/>
-                  </a:lnTo>
-                  <a:lnTo>
-                    <a:pt x="5586557" y="2349530"/>
-                  </a:lnTo>
-                  <a:lnTo>
-                    <a:pt x="5658179" y="2358958"/>
-                  </a:lnTo>
-                  <a:lnTo>
-                    <a:pt x="5729802" y="2368149"/>
-                  </a:lnTo>
-                  <a:lnTo>
-                    <a:pt x="5801424" y="2377110"/>
-                  </a:lnTo>
-                  <a:lnTo>
-                    <a:pt x="5873047" y="2385846"/>
-                  </a:lnTo>
-                  <a:lnTo>
-                    <a:pt x="5944669" y="2394363"/>
-                  </a:lnTo>
-                  <a:lnTo>
-                    <a:pt x="6016292" y="2402666"/>
-                  </a:lnTo>
-                  <a:lnTo>
-                    <a:pt x="6087914" y="2410761"/>
-                  </a:lnTo>
-                  <a:lnTo>
-                    <a:pt x="6159537" y="2418653"/>
-                  </a:lnTo>
-                  <a:lnTo>
-                    <a:pt x="6231159" y="2426348"/>
-                  </a:lnTo>
-                  <a:lnTo>
-                    <a:pt x="6302782" y="2433849"/>
-                  </a:lnTo>
-                  <a:lnTo>
-                    <a:pt x="6374404" y="2441162"/>
-                  </a:lnTo>
-                  <a:lnTo>
-                    <a:pt x="6446027" y="2448292"/>
-                  </a:lnTo>
-                  <a:lnTo>
-                    <a:pt x="6517649" y="2455243"/>
-                  </a:lnTo>
-                  <a:lnTo>
-                    <a:pt x="6589272" y="2462020"/>
-                  </a:lnTo>
-                  <a:lnTo>
-                    <a:pt x="6660894" y="2468626"/>
-                  </a:lnTo>
-                  <a:lnTo>
-                    <a:pt x="6732517" y="2475068"/>
-                  </a:lnTo>
-                  <a:lnTo>
-                    <a:pt x="6804139" y="2481347"/>
-                  </a:lnTo>
-                  <a:lnTo>
-                    <a:pt x="6875762" y="2487469"/>
-                  </a:lnTo>
-                  <a:lnTo>
-                    <a:pt x="6947385" y="2493438"/>
-                  </a:lnTo>
-                  <a:lnTo>
-                    <a:pt x="7019007" y="2499257"/>
-                  </a:lnTo>
-                  <a:lnTo>
-                    <a:pt x="7090630" y="2504930"/>
+                    <a:pt x="70344" y="24664"/>
+                  </a:lnTo>
+                  <a:lnTo>
+                    <a:pt x="140688" y="48710"/>
+                  </a:lnTo>
+                  <a:lnTo>
+                    <a:pt x="211033" y="72154"/>
+                  </a:lnTo>
+                  <a:lnTo>
+                    <a:pt x="281377" y="95009"/>
+                  </a:lnTo>
+                  <a:lnTo>
+                    <a:pt x="351722" y="117291"/>
+                  </a:lnTo>
+                  <a:lnTo>
+                    <a:pt x="422066" y="139015"/>
+                  </a:lnTo>
+                  <a:lnTo>
+                    <a:pt x="492411" y="160193"/>
+                  </a:lnTo>
+                  <a:lnTo>
+                    <a:pt x="562755" y="180841"/>
+                  </a:lnTo>
+                  <a:lnTo>
+                    <a:pt x="633100" y="200970"/>
+                  </a:lnTo>
+                  <a:lnTo>
+                    <a:pt x="703444" y="220595"/>
+                  </a:lnTo>
+                  <a:lnTo>
+                    <a:pt x="773789" y="239728"/>
+                  </a:lnTo>
+                  <a:lnTo>
+                    <a:pt x="844133" y="258381"/>
+                  </a:lnTo>
+                  <a:lnTo>
+                    <a:pt x="914478" y="276567"/>
+                  </a:lnTo>
+                  <a:lnTo>
+                    <a:pt x="984822" y="294296"/>
+                  </a:lnTo>
+                  <a:lnTo>
+                    <a:pt x="1055167" y="311581"/>
+                  </a:lnTo>
+                  <a:lnTo>
+                    <a:pt x="1125511" y="328432"/>
+                  </a:lnTo>
+                  <a:lnTo>
+                    <a:pt x="1195856" y="344860"/>
+                  </a:lnTo>
+                  <a:lnTo>
+                    <a:pt x="1266200" y="360877"/>
+                  </a:lnTo>
+                  <a:lnTo>
+                    <a:pt x="1336545" y="376492"/>
+                  </a:lnTo>
+                  <a:lnTo>
+                    <a:pt x="1406889" y="391716"/>
+                  </a:lnTo>
+                  <a:lnTo>
+                    <a:pt x="1477234" y="406557"/>
+                  </a:lnTo>
+                  <a:lnTo>
+                    <a:pt x="1547578" y="421027"/>
+                  </a:lnTo>
+                  <a:lnTo>
+                    <a:pt x="1617923" y="435133"/>
+                  </a:lnTo>
+                  <a:lnTo>
+                    <a:pt x="1688267" y="448886"/>
+                  </a:lnTo>
+                  <a:lnTo>
+                    <a:pt x="1758612" y="462294"/>
+                  </a:lnTo>
+                  <a:lnTo>
+                    <a:pt x="1828956" y="475366"/>
+                  </a:lnTo>
+                  <a:lnTo>
+                    <a:pt x="1899301" y="488110"/>
+                  </a:lnTo>
+                  <a:lnTo>
+                    <a:pt x="1969645" y="500534"/>
+                  </a:lnTo>
+                  <a:lnTo>
+                    <a:pt x="2039990" y="512647"/>
+                  </a:lnTo>
+                  <a:lnTo>
+                    <a:pt x="2110334" y="524456"/>
+                  </a:lnTo>
+                  <a:lnTo>
+                    <a:pt x="2180679" y="535969"/>
+                  </a:lnTo>
+                  <a:lnTo>
+                    <a:pt x="2251023" y="547194"/>
+                  </a:lnTo>
+                  <a:lnTo>
+                    <a:pt x="2321368" y="558136"/>
+                  </a:lnTo>
+                  <a:lnTo>
+                    <a:pt x="2391712" y="568805"/>
+                  </a:lnTo>
+                  <a:lnTo>
+                    <a:pt x="2462057" y="579205"/>
+                  </a:lnTo>
+                  <a:lnTo>
+                    <a:pt x="2532401" y="589345"/>
+                  </a:lnTo>
+                  <a:lnTo>
+                    <a:pt x="2602746" y="599231"/>
+                  </a:lnTo>
+                  <a:lnTo>
+                    <a:pt x="2673090" y="608869"/>
+                  </a:lnTo>
+                  <a:lnTo>
+                    <a:pt x="2743435" y="618265"/>
+                  </a:lnTo>
+                  <a:lnTo>
+                    <a:pt x="2813779" y="627426"/>
+                  </a:lnTo>
+                  <a:lnTo>
+                    <a:pt x="2884124" y="636356"/>
+                  </a:lnTo>
+                  <a:lnTo>
+                    <a:pt x="2954468" y="645063"/>
+                  </a:lnTo>
+                  <a:lnTo>
+                    <a:pt x="3024813" y="653552"/>
+                  </a:lnTo>
+                  <a:lnTo>
+                    <a:pt x="3095157" y="661827"/>
+                  </a:lnTo>
+                  <a:lnTo>
+                    <a:pt x="3165502" y="669895"/>
+                  </a:lnTo>
+                  <a:lnTo>
+                    <a:pt x="3235846" y="677761"/>
+                  </a:lnTo>
+                  <a:lnTo>
+                    <a:pt x="3306191" y="685430"/>
+                  </a:lnTo>
+                  <a:lnTo>
+                    <a:pt x="3376535" y="692906"/>
+                  </a:lnTo>
+                  <a:lnTo>
+                    <a:pt x="3446880" y="700195"/>
+                  </a:lnTo>
+                  <a:lnTo>
+                    <a:pt x="3517224" y="707301"/>
+                  </a:lnTo>
+                  <a:lnTo>
+                    <a:pt x="3587569" y="714228"/>
+                  </a:lnTo>
+                  <a:lnTo>
+                    <a:pt x="3657913" y="720983"/>
+                  </a:lnTo>
+                  <a:lnTo>
+                    <a:pt x="3728257" y="727567"/>
+                  </a:lnTo>
+                  <a:lnTo>
+                    <a:pt x="3798602" y="733987"/>
+                  </a:lnTo>
+                  <a:lnTo>
+                    <a:pt x="3868946" y="740245"/>
+                  </a:lnTo>
+                  <a:lnTo>
+                    <a:pt x="3939291" y="746347"/>
+                  </a:lnTo>
+                  <a:lnTo>
+                    <a:pt x="4009635" y="752296"/>
+                  </a:lnTo>
+                  <a:lnTo>
+                    <a:pt x="4079980" y="758095"/>
+                  </a:lnTo>
+                  <a:lnTo>
+                    <a:pt x="4150324" y="763749"/>
+                  </a:lnTo>
+                  <a:lnTo>
+                    <a:pt x="4220669" y="769261"/>
+                  </a:lnTo>
+                  <a:lnTo>
+                    <a:pt x="4291013" y="774635"/>
+                  </a:lnTo>
+                  <a:lnTo>
+                    <a:pt x="4361358" y="779874"/>
+                  </a:lnTo>
+                  <a:lnTo>
+                    <a:pt x="4431702" y="784982"/>
+                  </a:lnTo>
+                  <a:lnTo>
+                    <a:pt x="4502047" y="789962"/>
+                  </a:lnTo>
+                  <a:lnTo>
+                    <a:pt x="4572391" y="794817"/>
+                  </a:lnTo>
+                  <a:lnTo>
+                    <a:pt x="4642736" y="799550"/>
+                  </a:lnTo>
+                  <a:lnTo>
+                    <a:pt x="4713080" y="804164"/>
+                  </a:lnTo>
+                  <a:lnTo>
+                    <a:pt x="4783425" y="808663"/>
+                  </a:lnTo>
+                  <a:lnTo>
+                    <a:pt x="4853769" y="813049"/>
+                  </a:lnTo>
+                  <a:lnTo>
+                    <a:pt x="4924114" y="817325"/>
+                  </a:lnTo>
+                  <a:lnTo>
+                    <a:pt x="4994458" y="821494"/>
+                  </a:lnTo>
+                  <a:lnTo>
+                    <a:pt x="5064803" y="825558"/>
+                  </a:lnTo>
+                  <a:lnTo>
+                    <a:pt x="5135147" y="829520"/>
+                  </a:lnTo>
+                  <a:lnTo>
+                    <a:pt x="5205492" y="833383"/>
+                  </a:lnTo>
+                  <a:lnTo>
+                    <a:pt x="5275836" y="837149"/>
+                  </a:lnTo>
+                  <a:lnTo>
+                    <a:pt x="5346181" y="840821"/>
+                  </a:lnTo>
+                  <a:lnTo>
+                    <a:pt x="5416525" y="844400"/>
+                  </a:lnTo>
+                  <a:lnTo>
+                    <a:pt x="5486870" y="847890"/>
+                  </a:lnTo>
+                  <a:lnTo>
+                    <a:pt x="5557214" y="851292"/>
+                  </a:lnTo>
+                  <a:lnTo>
+                    <a:pt x="5627559" y="854609"/>
+                  </a:lnTo>
+                  <a:lnTo>
+                    <a:pt x="5697903" y="857843"/>
+                  </a:lnTo>
+                  <a:lnTo>
+                    <a:pt x="5768248" y="860995"/>
+                  </a:lnTo>
+                  <a:lnTo>
+                    <a:pt x="5838592" y="864069"/>
+                  </a:lnTo>
+                  <a:lnTo>
+                    <a:pt x="5908937" y="867065"/>
+                  </a:lnTo>
+                  <a:lnTo>
+                    <a:pt x="5979281" y="869987"/>
+                  </a:lnTo>
+                  <a:lnTo>
+                    <a:pt x="6049626" y="872835"/>
+                  </a:lnTo>
+                  <a:lnTo>
+                    <a:pt x="6119970" y="875611"/>
+                  </a:lnTo>
+                  <a:lnTo>
+                    <a:pt x="6190315" y="878318"/>
+                  </a:lnTo>
+                  <a:lnTo>
+                    <a:pt x="6260659" y="880958"/>
+                  </a:lnTo>
+                  <a:lnTo>
+                    <a:pt x="6331004" y="883531"/>
+                  </a:lnTo>
+                  <a:lnTo>
+                    <a:pt x="6401348" y="886039"/>
+                  </a:lnTo>
+                  <a:lnTo>
+                    <a:pt x="6471693" y="888485"/>
+                  </a:lnTo>
+                  <a:lnTo>
+                    <a:pt x="6542037" y="890869"/>
+                  </a:lnTo>
+                  <a:lnTo>
+                    <a:pt x="6612382" y="893193"/>
+                  </a:lnTo>
+                  <a:lnTo>
+                    <a:pt x="6682726" y="895459"/>
+                  </a:lnTo>
+                  <a:lnTo>
+                    <a:pt x="6753071" y="897669"/>
+                  </a:lnTo>
+                  <a:lnTo>
+                    <a:pt x="6823415" y="899823"/>
+                  </a:lnTo>
+                  <a:lnTo>
+                    <a:pt x="6893760" y="901923"/>
+                  </a:lnTo>
+                  <a:lnTo>
+                    <a:pt x="6964104" y="903970"/>
                   </a:lnTo>
                 </a:path>
               </a:pathLst>
@@ -4508,27 +4543,27 @@
         </p:sp>
         <p:sp>
           <p:nvSpPr>
-            <p:cNvPr id="24" name="pl24"/>
+            <p:cNvPr id="25" name="pl25"/>
             <p:cNvSpPr/>
             <p:nvPr/>
           </p:nvSpPr>
           <p:spPr>
             <a:xfrm>
-              <a:off x="817517" y="4727786"/>
-              <a:ext cx="7799693" cy="0"/>
+              <a:off x="887106" y="3100960"/>
+              <a:ext cx="7660515" cy="0"/>
             </a:xfrm>
             <a:custGeom>
               <a:avLst/>
               <a:pathLst>
-                <a:path w="7799693" h="0">
+                <a:path w="7660515" h="0">
                   <a:moveTo>
                     <a:pt x="0" y="0"/>
                   </a:moveTo>
                   <a:lnTo>
-                    <a:pt x="7799693" y="0"/>
-                  </a:lnTo>
-                  <a:lnTo>
-                    <a:pt x="7799693" y="0"/>
+                    <a:pt x="7660515" y="0"/>
+                  </a:lnTo>
+                  <a:lnTo>
+                    <a:pt x="7660515" y="0"/>
                   </a:lnTo>
                 </a:path>
               </a:pathLst>
@@ -4551,21 +4586,21 @@
         </p:sp>
         <p:sp>
           <p:nvSpPr>
-            <p:cNvPr id="25" name="pl25"/>
+            <p:cNvPr id="26" name="pl26"/>
             <p:cNvSpPr/>
             <p:nvPr/>
           </p:nvSpPr>
           <p:spPr>
             <a:xfrm>
-              <a:off x="4526955" y="2073503"/>
-              <a:ext cx="0" cy="3649639"/>
+              <a:off x="4530353" y="2143092"/>
+              <a:ext cx="0" cy="1317069"/>
             </a:xfrm>
             <a:custGeom>
               <a:avLst/>
               <a:pathLst>
-                <a:path w="0" h="3649639">
+                <a:path w="0" h="1317069">
                   <a:moveTo>
-                    <a:pt x="0" y="3649639"/>
+                    <a:pt x="0" y="1317069"/>
                   </a:moveTo>
                   <a:lnTo>
                     <a:pt x="0" y="0"/>
@@ -4594,13 +4629,13 @@
         </p:sp>
         <p:sp>
           <p:nvSpPr>
-            <p:cNvPr id="26" name="tx26"/>
+            <p:cNvPr id="27" name="tx27"/>
             <p:cNvSpPr/>
             <p:nvPr/>
           </p:nvSpPr>
           <p:spPr>
             <a:xfrm>
-              <a:off x="692708" y="5517199"/>
+              <a:off x="762297" y="3360243"/>
               <a:ext cx="62179" cy="80101"/>
             </a:xfrm>
             <a:prstGeom prst="rect">
@@ -4640,13 +4675,13 @@
         </p:sp>
         <p:sp>
           <p:nvSpPr>
-            <p:cNvPr id="27" name="tx27"/>
+            <p:cNvPr id="28" name="tx28"/>
             <p:cNvSpPr/>
             <p:nvPr/>
           </p:nvSpPr>
           <p:spPr>
             <a:xfrm>
-              <a:off x="692708" y="4687735"/>
+              <a:off x="762297" y="3060909"/>
               <a:ext cx="62179" cy="80101"/>
             </a:xfrm>
             <a:prstGeom prst="rect">
@@ -4686,13 +4721,13 @@
         </p:sp>
         <p:sp>
           <p:nvSpPr>
-            <p:cNvPr id="28" name="tx28"/>
+            <p:cNvPr id="29" name="tx29"/>
             <p:cNvSpPr/>
             <p:nvPr/>
           </p:nvSpPr>
           <p:spPr>
             <a:xfrm>
-              <a:off x="692708" y="3858272"/>
+              <a:off x="762297" y="2761575"/>
               <a:ext cx="62179" cy="80101"/>
             </a:xfrm>
             <a:prstGeom prst="rect">
@@ -4732,13 +4767,13 @@
         </p:sp>
         <p:sp>
           <p:nvSpPr>
-            <p:cNvPr id="29" name="tx29"/>
+            <p:cNvPr id="30" name="tx30"/>
             <p:cNvSpPr/>
             <p:nvPr/>
           </p:nvSpPr>
           <p:spPr>
             <a:xfrm>
-              <a:off x="692708" y="3028808"/>
+              <a:off x="762297" y="2462242"/>
               <a:ext cx="62179" cy="80101"/>
             </a:xfrm>
             <a:prstGeom prst="rect">
@@ -4778,13 +4813,13 @@
         </p:sp>
         <p:sp>
           <p:nvSpPr>
-            <p:cNvPr id="30" name="tx30"/>
+            <p:cNvPr id="31" name="tx31"/>
             <p:cNvSpPr/>
             <p:nvPr/>
           </p:nvSpPr>
           <p:spPr>
             <a:xfrm>
-              <a:off x="692708" y="2199345"/>
+              <a:off x="762297" y="2162908"/>
               <a:ext cx="62179" cy="80101"/>
             </a:xfrm>
             <a:prstGeom prst="rect">
@@ -4824,13 +4859,13 @@
         </p:sp>
         <p:sp>
           <p:nvSpPr>
-            <p:cNvPr id="31" name="tx31"/>
+            <p:cNvPr id="32" name="tx32"/>
             <p:cNvSpPr/>
             <p:nvPr/>
           </p:nvSpPr>
           <p:spPr>
             <a:xfrm>
-              <a:off x="2421884" y="5785772"/>
+              <a:off x="2461403" y="3522791"/>
               <a:ext cx="161574" cy="80101"/>
             </a:xfrm>
             <a:prstGeom prst="rect">
@@ -4870,13 +4905,13 @@
         </p:sp>
         <p:sp>
           <p:nvSpPr>
-            <p:cNvPr id="32" name="tx32"/>
+            <p:cNvPr id="33" name="tx33"/>
             <p:cNvSpPr/>
             <p:nvPr/>
           </p:nvSpPr>
           <p:spPr>
             <a:xfrm>
-              <a:off x="4542539" y="5785772"/>
+              <a:off x="4545104" y="3522791"/>
               <a:ext cx="62179" cy="80101"/>
             </a:xfrm>
             <a:prstGeom prst="rect">
@@ -4916,13 +4951,13 @@
         </p:sp>
         <p:sp>
           <p:nvSpPr>
-            <p:cNvPr id="33" name="tx33"/>
+            <p:cNvPr id="34" name="tx34"/>
             <p:cNvSpPr/>
             <p:nvPr/>
           </p:nvSpPr>
           <p:spPr>
             <a:xfrm>
-              <a:off x="6582407" y="5785772"/>
+              <a:off x="6548017" y="3522791"/>
               <a:ext cx="124358" cy="80101"/>
             </a:xfrm>
             <a:prstGeom prst="rect">
@@ -4962,13 +4997,13 @@
         </p:sp>
         <p:sp>
           <p:nvSpPr>
-            <p:cNvPr id="34" name="tx34"/>
+            <p:cNvPr id="35" name="tx35"/>
             <p:cNvSpPr/>
             <p:nvPr/>
           </p:nvSpPr>
           <p:spPr>
             <a:xfrm>
-              <a:off x="2928340" y="5925448"/>
+              <a:off x="2928340" y="3662467"/>
               <a:ext cx="3578047" cy="100218"/>
             </a:xfrm>
             <a:prstGeom prst="rect">
@@ -5008,13 +5043,13 @@
         </p:sp>
         <p:sp>
           <p:nvSpPr>
-            <p:cNvPr id="35" name="tx35"/>
+            <p:cNvPr id="36" name="tx36"/>
             <p:cNvSpPr/>
             <p:nvPr/>
           </p:nvSpPr>
           <p:spPr>
             <a:xfrm rot="-5400000">
-              <a:off x="68446" y="3848213"/>
+              <a:off x="138035" y="2751517"/>
               <a:ext cx="1016904" cy="100218"/>
             </a:xfrm>
             <a:prstGeom prst="rect">
@@ -5054,13 +5089,13 @@
         </p:sp>
         <p:sp>
           <p:nvSpPr>
-            <p:cNvPr id="36" name="tx36"/>
+            <p:cNvPr id="37" name="tx37"/>
             <p:cNvSpPr/>
             <p:nvPr/>
           </p:nvSpPr>
           <p:spPr>
             <a:xfrm>
-              <a:off x="817517" y="1896563"/>
+              <a:off x="887106" y="1966152"/>
               <a:ext cx="6985375" cy="82021"/>
             </a:xfrm>
             <a:prstGeom prst="rect">
@@ -5100,13 +5135,3686 @@
         </p:sp>
         <p:sp>
           <p:nvSpPr>
-            <p:cNvPr id="37" name="tx37"/>
+            <p:cNvPr id="38" name="tx38"/>
             <p:cNvSpPr/>
             <p:nvPr/>
           </p:nvSpPr>
           <p:spPr>
             <a:xfrm>
-              <a:off x="817517" y="1669789"/>
+              <a:off x="887106" y="1739378"/>
+              <a:ext cx="3054278" cy="120152"/>
+            </a:xfrm>
+            <a:prstGeom prst="rect">
+              <a:avLst/>
+            </a:prstGeom>
+            <a:noFill/>
+          </p:spPr>
+          <p:txBody>
+            <a:bodyPr lIns="0" rIns="0" tIns="0" bIns="0" anchorCtr="1" anchor="ctr" wrap="none"/>
+            <a:lstStyle/>
+            <a:p>
+              <a:pPr algn="l" marL="0" marR="0" indent="0">
+                <a:lnSpc>
+                  <a:spcPts val="1320"/>
+                </a:lnSpc>
+                <a:spcBef>
+                  <a:spcPts val="0"/>
+                </a:spcBef>
+                <a:spcAft>
+                  <a:spcPts val="0"/>
+                </a:spcAft>
+              </a:pPr>
+              <a:r>
+                <a:rPr sz="1320">
+                  <a:solidFill>
+                    <a:srgbClr val="000000">
+                      <a:alpha val="100000"/>
+                    </a:srgbClr>
+                  </a:solidFill>
+                  <a:latin typeface="Helvetica"/>
+                  <a:cs typeface="Helvetica"/>
+                </a:rPr>
+                <a:t>Thrombocytopenia Grade 2 (Carboplatin)</a:t>
+              </a:r>
+            </a:p>
+          </p:txBody>
+        </p:sp>
+        <p:sp>
+          <p:nvSpPr>
+            <p:cNvPr id="39" name="pl39"/>
+            <p:cNvSpPr/>
+            <p:nvPr/>
+          </p:nvSpPr>
+          <p:spPr>
+            <a:xfrm>
+              <a:off x="887106" y="5444019"/>
+              <a:ext cx="7660515" cy="0"/>
+            </a:xfrm>
+            <a:custGeom>
+              <a:avLst/>
+              <a:pathLst>
+                <a:path w="7660515" h="0">
+                  <a:moveTo>
+                    <a:pt x="0" y="0"/>
+                  </a:moveTo>
+                  <a:lnTo>
+                    <a:pt x="7660515" y="0"/>
+                  </a:lnTo>
+                  <a:lnTo>
+                    <a:pt x="7660515" y="0"/>
+                  </a:lnTo>
+                </a:path>
+              </a:pathLst>
+            </a:custGeom>
+            <a:ln w="6775" cap="flat">
+              <a:solidFill>
+                <a:srgbClr val="EBEBEB">
+                  <a:alpha val="100000"/>
+                </a:srgbClr>
+              </a:solidFill>
+              <a:prstDash val="solid"/>
+              <a:round/>
+            </a:ln>
+          </p:spPr>
+          <p:txBody>
+            <a:bodyPr/>
+            <a:lstStyle/>
+            <a:p/>
+          </p:txBody>
+        </p:sp>
+        <p:sp>
+          <p:nvSpPr>
+            <p:cNvPr id="40" name="pl40"/>
+            <p:cNvSpPr/>
+            <p:nvPr/>
+          </p:nvSpPr>
+          <p:spPr>
+            <a:xfrm>
+              <a:off x="887106" y="5144686"/>
+              <a:ext cx="7660515" cy="0"/>
+            </a:xfrm>
+            <a:custGeom>
+              <a:avLst/>
+              <a:pathLst>
+                <a:path w="7660515" h="0">
+                  <a:moveTo>
+                    <a:pt x="0" y="0"/>
+                  </a:moveTo>
+                  <a:lnTo>
+                    <a:pt x="7660515" y="0"/>
+                  </a:lnTo>
+                  <a:lnTo>
+                    <a:pt x="7660515" y="0"/>
+                  </a:lnTo>
+                </a:path>
+              </a:pathLst>
+            </a:custGeom>
+            <a:ln w="6775" cap="flat">
+              <a:solidFill>
+                <a:srgbClr val="EBEBEB">
+                  <a:alpha val="100000"/>
+                </a:srgbClr>
+              </a:solidFill>
+              <a:prstDash val="solid"/>
+              <a:round/>
+            </a:ln>
+          </p:spPr>
+          <p:txBody>
+            <a:bodyPr/>
+            <a:lstStyle/>
+            <a:p/>
+          </p:txBody>
+        </p:sp>
+        <p:sp>
+          <p:nvSpPr>
+            <p:cNvPr id="41" name="pl41"/>
+            <p:cNvSpPr/>
+            <p:nvPr/>
+          </p:nvSpPr>
+          <p:spPr>
+            <a:xfrm>
+              <a:off x="887106" y="4845352"/>
+              <a:ext cx="7660515" cy="0"/>
+            </a:xfrm>
+            <a:custGeom>
+              <a:avLst/>
+              <a:pathLst>
+                <a:path w="7660515" h="0">
+                  <a:moveTo>
+                    <a:pt x="0" y="0"/>
+                  </a:moveTo>
+                  <a:lnTo>
+                    <a:pt x="7660515" y="0"/>
+                  </a:lnTo>
+                  <a:lnTo>
+                    <a:pt x="7660515" y="0"/>
+                  </a:lnTo>
+                </a:path>
+              </a:pathLst>
+            </a:custGeom>
+            <a:ln w="6775" cap="flat">
+              <a:solidFill>
+                <a:srgbClr val="EBEBEB">
+                  <a:alpha val="100000"/>
+                </a:srgbClr>
+              </a:solidFill>
+              <a:prstDash val="solid"/>
+              <a:round/>
+            </a:ln>
+          </p:spPr>
+          <p:txBody>
+            <a:bodyPr/>
+            <a:lstStyle/>
+            <a:p/>
+          </p:txBody>
+        </p:sp>
+        <p:sp>
+          <p:nvSpPr>
+            <p:cNvPr id="42" name="pl42"/>
+            <p:cNvSpPr/>
+            <p:nvPr/>
+          </p:nvSpPr>
+          <p:spPr>
+            <a:xfrm>
+              <a:off x="887106" y="4546018"/>
+              <a:ext cx="7660515" cy="0"/>
+            </a:xfrm>
+            <a:custGeom>
+              <a:avLst/>
+              <a:pathLst>
+                <a:path w="7660515" h="0">
+                  <a:moveTo>
+                    <a:pt x="0" y="0"/>
+                  </a:moveTo>
+                  <a:lnTo>
+                    <a:pt x="7660515" y="0"/>
+                  </a:lnTo>
+                  <a:lnTo>
+                    <a:pt x="7660515" y="0"/>
+                  </a:lnTo>
+                </a:path>
+              </a:pathLst>
+            </a:custGeom>
+            <a:ln w="6775" cap="flat">
+              <a:solidFill>
+                <a:srgbClr val="EBEBEB">
+                  <a:alpha val="100000"/>
+                </a:srgbClr>
+              </a:solidFill>
+              <a:prstDash val="solid"/>
+              <a:round/>
+            </a:ln>
+          </p:spPr>
+          <p:txBody>
+            <a:bodyPr/>
+            <a:lstStyle/>
+            <a:p/>
+          </p:txBody>
+        </p:sp>
+        <p:sp>
+          <p:nvSpPr>
+            <p:cNvPr id="43" name="pl43"/>
+            <p:cNvSpPr/>
+            <p:nvPr/>
+          </p:nvSpPr>
+          <p:spPr>
+            <a:xfrm>
+              <a:off x="914987" y="4336484"/>
+              <a:ext cx="0" cy="1317069"/>
+            </a:xfrm>
+            <a:custGeom>
+              <a:avLst/>
+              <a:pathLst>
+                <a:path w="0" h="1317069">
+                  <a:moveTo>
+                    <a:pt x="0" y="1317069"/>
+                  </a:moveTo>
+                  <a:lnTo>
+                    <a:pt x="0" y="0"/>
+                  </a:lnTo>
+                  <a:lnTo>
+                    <a:pt x="0" y="0"/>
+                  </a:lnTo>
+                </a:path>
+              </a:pathLst>
+            </a:custGeom>
+            <a:ln w="6775" cap="flat">
+              <a:solidFill>
+                <a:srgbClr val="EBEBEB">
+                  <a:alpha val="100000"/>
+                </a:srgbClr>
+              </a:solidFill>
+              <a:prstDash val="solid"/>
+              <a:round/>
+            </a:ln>
+          </p:spPr>
+          <p:txBody>
+            <a:bodyPr/>
+            <a:lstStyle/>
+            <a:p/>
+          </p:txBody>
+        </p:sp>
+        <p:sp>
+          <p:nvSpPr>
+            <p:cNvPr id="44" name="pl44"/>
+            <p:cNvSpPr/>
+            <p:nvPr/>
+          </p:nvSpPr>
+          <p:spPr>
+            <a:xfrm>
+              <a:off x="1728588" y="4336484"/>
+              <a:ext cx="0" cy="1317069"/>
+            </a:xfrm>
+            <a:custGeom>
+              <a:avLst/>
+              <a:pathLst>
+                <a:path w="0" h="1317069">
+                  <a:moveTo>
+                    <a:pt x="0" y="1317069"/>
+                  </a:moveTo>
+                  <a:lnTo>
+                    <a:pt x="0" y="0"/>
+                  </a:lnTo>
+                  <a:lnTo>
+                    <a:pt x="0" y="0"/>
+                  </a:lnTo>
+                </a:path>
+              </a:pathLst>
+            </a:custGeom>
+            <a:ln w="6775" cap="flat">
+              <a:solidFill>
+                <a:srgbClr val="EBEBEB">
+                  <a:alpha val="100000"/>
+                </a:srgbClr>
+              </a:solidFill>
+              <a:prstDash val="solid"/>
+              <a:round/>
+            </a:ln>
+          </p:spPr>
+          <p:txBody>
+            <a:bodyPr/>
+            <a:lstStyle/>
+            <a:p/>
+          </p:txBody>
+        </p:sp>
+        <p:sp>
+          <p:nvSpPr>
+            <p:cNvPr id="45" name="pl45"/>
+            <p:cNvSpPr/>
+            <p:nvPr/>
+          </p:nvSpPr>
+          <p:spPr>
+            <a:xfrm>
+              <a:off x="2542190" y="4336484"/>
+              <a:ext cx="0" cy="1317069"/>
+            </a:xfrm>
+            <a:custGeom>
+              <a:avLst/>
+              <a:pathLst>
+                <a:path w="0" h="1317069">
+                  <a:moveTo>
+                    <a:pt x="0" y="1317069"/>
+                  </a:moveTo>
+                  <a:lnTo>
+                    <a:pt x="0" y="0"/>
+                  </a:lnTo>
+                  <a:lnTo>
+                    <a:pt x="0" y="0"/>
+                  </a:lnTo>
+                </a:path>
+              </a:pathLst>
+            </a:custGeom>
+            <a:ln w="6775" cap="flat">
+              <a:solidFill>
+                <a:srgbClr val="EBEBEB">
+                  <a:alpha val="100000"/>
+                </a:srgbClr>
+              </a:solidFill>
+              <a:prstDash val="solid"/>
+              <a:round/>
+            </a:ln>
+          </p:spPr>
+          <p:txBody>
+            <a:bodyPr/>
+            <a:lstStyle/>
+            <a:p/>
+          </p:txBody>
+        </p:sp>
+        <p:sp>
+          <p:nvSpPr>
+            <p:cNvPr id="46" name="pl46"/>
+            <p:cNvSpPr/>
+            <p:nvPr/>
+          </p:nvSpPr>
+          <p:spPr>
+            <a:xfrm>
+              <a:off x="3355791" y="4336484"/>
+              <a:ext cx="0" cy="1317069"/>
+            </a:xfrm>
+            <a:custGeom>
+              <a:avLst/>
+              <a:pathLst>
+                <a:path w="0" h="1317069">
+                  <a:moveTo>
+                    <a:pt x="0" y="1317069"/>
+                  </a:moveTo>
+                  <a:lnTo>
+                    <a:pt x="0" y="0"/>
+                  </a:lnTo>
+                  <a:lnTo>
+                    <a:pt x="0" y="0"/>
+                  </a:lnTo>
+                </a:path>
+              </a:pathLst>
+            </a:custGeom>
+            <a:ln w="6775" cap="flat">
+              <a:solidFill>
+                <a:srgbClr val="EBEBEB">
+                  <a:alpha val="100000"/>
+                </a:srgbClr>
+              </a:solidFill>
+              <a:prstDash val="solid"/>
+              <a:round/>
+            </a:ln>
+          </p:spPr>
+          <p:txBody>
+            <a:bodyPr/>
+            <a:lstStyle/>
+            <a:p/>
+          </p:txBody>
+        </p:sp>
+        <p:sp>
+          <p:nvSpPr>
+            <p:cNvPr id="47" name="pl47"/>
+            <p:cNvSpPr/>
+            <p:nvPr/>
+          </p:nvSpPr>
+          <p:spPr>
+            <a:xfrm>
+              <a:off x="4169393" y="4336484"/>
+              <a:ext cx="0" cy="1317069"/>
+            </a:xfrm>
+            <a:custGeom>
+              <a:avLst/>
+              <a:pathLst>
+                <a:path w="0" h="1317069">
+                  <a:moveTo>
+                    <a:pt x="0" y="1317069"/>
+                  </a:moveTo>
+                  <a:lnTo>
+                    <a:pt x="0" y="0"/>
+                  </a:lnTo>
+                  <a:lnTo>
+                    <a:pt x="0" y="0"/>
+                  </a:lnTo>
+                </a:path>
+              </a:pathLst>
+            </a:custGeom>
+            <a:ln w="6775" cap="flat">
+              <a:solidFill>
+                <a:srgbClr val="EBEBEB">
+                  <a:alpha val="100000"/>
+                </a:srgbClr>
+              </a:solidFill>
+              <a:prstDash val="solid"/>
+              <a:round/>
+            </a:ln>
+          </p:spPr>
+          <p:txBody>
+            <a:bodyPr/>
+            <a:lstStyle/>
+            <a:p/>
+          </p:txBody>
+        </p:sp>
+        <p:sp>
+          <p:nvSpPr>
+            <p:cNvPr id="48" name="pl48"/>
+            <p:cNvSpPr/>
+            <p:nvPr/>
+          </p:nvSpPr>
+          <p:spPr>
+            <a:xfrm>
+              <a:off x="4982994" y="4336484"/>
+              <a:ext cx="0" cy="1317069"/>
+            </a:xfrm>
+            <a:custGeom>
+              <a:avLst/>
+              <a:pathLst>
+                <a:path w="0" h="1317069">
+                  <a:moveTo>
+                    <a:pt x="0" y="1317069"/>
+                  </a:moveTo>
+                  <a:lnTo>
+                    <a:pt x="0" y="0"/>
+                  </a:lnTo>
+                  <a:lnTo>
+                    <a:pt x="0" y="0"/>
+                  </a:lnTo>
+                </a:path>
+              </a:pathLst>
+            </a:custGeom>
+            <a:ln w="6775" cap="flat">
+              <a:solidFill>
+                <a:srgbClr val="EBEBEB">
+                  <a:alpha val="100000"/>
+                </a:srgbClr>
+              </a:solidFill>
+              <a:prstDash val="solid"/>
+              <a:round/>
+            </a:ln>
+          </p:spPr>
+          <p:txBody>
+            <a:bodyPr/>
+            <a:lstStyle/>
+            <a:p/>
+          </p:txBody>
+        </p:sp>
+        <p:sp>
+          <p:nvSpPr>
+            <p:cNvPr id="49" name="pl49"/>
+            <p:cNvSpPr/>
+            <p:nvPr/>
+          </p:nvSpPr>
+          <p:spPr>
+            <a:xfrm>
+              <a:off x="5796595" y="4336484"/>
+              <a:ext cx="0" cy="1317069"/>
+            </a:xfrm>
+            <a:custGeom>
+              <a:avLst/>
+              <a:pathLst>
+                <a:path w="0" h="1317069">
+                  <a:moveTo>
+                    <a:pt x="0" y="1317069"/>
+                  </a:moveTo>
+                  <a:lnTo>
+                    <a:pt x="0" y="0"/>
+                  </a:lnTo>
+                  <a:lnTo>
+                    <a:pt x="0" y="0"/>
+                  </a:lnTo>
+                </a:path>
+              </a:pathLst>
+            </a:custGeom>
+            <a:ln w="6775" cap="flat">
+              <a:solidFill>
+                <a:srgbClr val="EBEBEB">
+                  <a:alpha val="100000"/>
+                </a:srgbClr>
+              </a:solidFill>
+              <a:prstDash val="solid"/>
+              <a:round/>
+            </a:ln>
+          </p:spPr>
+          <p:txBody>
+            <a:bodyPr/>
+            <a:lstStyle/>
+            <a:p/>
+          </p:txBody>
+        </p:sp>
+        <p:sp>
+          <p:nvSpPr>
+            <p:cNvPr id="50" name="pl50"/>
+            <p:cNvSpPr/>
+            <p:nvPr/>
+          </p:nvSpPr>
+          <p:spPr>
+            <a:xfrm>
+              <a:off x="6610197" y="4336484"/>
+              <a:ext cx="0" cy="1317069"/>
+            </a:xfrm>
+            <a:custGeom>
+              <a:avLst/>
+              <a:pathLst>
+                <a:path w="0" h="1317069">
+                  <a:moveTo>
+                    <a:pt x="0" y="1317069"/>
+                  </a:moveTo>
+                  <a:lnTo>
+                    <a:pt x="0" y="0"/>
+                  </a:lnTo>
+                  <a:lnTo>
+                    <a:pt x="0" y="0"/>
+                  </a:lnTo>
+                </a:path>
+              </a:pathLst>
+            </a:custGeom>
+            <a:ln w="6775" cap="flat">
+              <a:solidFill>
+                <a:srgbClr val="EBEBEB">
+                  <a:alpha val="100000"/>
+                </a:srgbClr>
+              </a:solidFill>
+              <a:prstDash val="solid"/>
+              <a:round/>
+            </a:ln>
+          </p:spPr>
+          <p:txBody>
+            <a:bodyPr/>
+            <a:lstStyle/>
+            <a:p/>
+          </p:txBody>
+        </p:sp>
+        <p:sp>
+          <p:nvSpPr>
+            <p:cNvPr id="51" name="pl51"/>
+            <p:cNvSpPr/>
+            <p:nvPr/>
+          </p:nvSpPr>
+          <p:spPr>
+            <a:xfrm>
+              <a:off x="7423798" y="4336484"/>
+              <a:ext cx="0" cy="1317069"/>
+            </a:xfrm>
+            <a:custGeom>
+              <a:avLst/>
+              <a:pathLst>
+                <a:path w="0" h="1317069">
+                  <a:moveTo>
+                    <a:pt x="0" y="1317069"/>
+                  </a:moveTo>
+                  <a:lnTo>
+                    <a:pt x="0" y="0"/>
+                  </a:lnTo>
+                  <a:lnTo>
+                    <a:pt x="0" y="0"/>
+                  </a:lnTo>
+                </a:path>
+              </a:pathLst>
+            </a:custGeom>
+            <a:ln w="6775" cap="flat">
+              <a:solidFill>
+                <a:srgbClr val="EBEBEB">
+                  <a:alpha val="100000"/>
+                </a:srgbClr>
+              </a:solidFill>
+              <a:prstDash val="solid"/>
+              <a:round/>
+            </a:ln>
+          </p:spPr>
+          <p:txBody>
+            <a:bodyPr/>
+            <a:lstStyle/>
+            <a:p/>
+          </p:txBody>
+        </p:sp>
+        <p:sp>
+          <p:nvSpPr>
+            <p:cNvPr id="52" name="pl52"/>
+            <p:cNvSpPr/>
+            <p:nvPr/>
+          </p:nvSpPr>
+          <p:spPr>
+            <a:xfrm>
+              <a:off x="8237399" y="4336484"/>
+              <a:ext cx="0" cy="1317069"/>
+            </a:xfrm>
+            <a:custGeom>
+              <a:avLst/>
+              <a:pathLst>
+                <a:path w="0" h="1317069">
+                  <a:moveTo>
+                    <a:pt x="0" y="1317069"/>
+                  </a:moveTo>
+                  <a:lnTo>
+                    <a:pt x="0" y="0"/>
+                  </a:lnTo>
+                  <a:lnTo>
+                    <a:pt x="0" y="0"/>
+                  </a:lnTo>
+                </a:path>
+              </a:pathLst>
+            </a:custGeom>
+            <a:ln w="6775" cap="flat">
+              <a:solidFill>
+                <a:srgbClr val="EBEBEB">
+                  <a:alpha val="100000"/>
+                </a:srgbClr>
+              </a:solidFill>
+              <a:prstDash val="solid"/>
+              <a:round/>
+            </a:ln>
+          </p:spPr>
+          <p:txBody>
+            <a:bodyPr/>
+            <a:lstStyle/>
+            <a:p/>
+          </p:txBody>
+        </p:sp>
+        <p:sp>
+          <p:nvSpPr>
+            <p:cNvPr id="53" name="pl53"/>
+            <p:cNvSpPr/>
+            <p:nvPr/>
+          </p:nvSpPr>
+          <p:spPr>
+            <a:xfrm>
+              <a:off x="887106" y="5593686"/>
+              <a:ext cx="7660515" cy="0"/>
+            </a:xfrm>
+            <a:custGeom>
+              <a:avLst/>
+              <a:pathLst>
+                <a:path w="7660515" h="0">
+                  <a:moveTo>
+                    <a:pt x="0" y="0"/>
+                  </a:moveTo>
+                  <a:lnTo>
+                    <a:pt x="7660515" y="0"/>
+                  </a:lnTo>
+                  <a:lnTo>
+                    <a:pt x="7660515" y="0"/>
+                  </a:lnTo>
+                </a:path>
+              </a:pathLst>
+            </a:custGeom>
+            <a:ln w="13550" cap="flat">
+              <a:solidFill>
+                <a:srgbClr val="EBEBEB">
+                  <a:alpha val="100000"/>
+                </a:srgbClr>
+              </a:solidFill>
+              <a:prstDash val="solid"/>
+              <a:round/>
+            </a:ln>
+          </p:spPr>
+          <p:txBody>
+            <a:bodyPr/>
+            <a:lstStyle/>
+            <a:p/>
+          </p:txBody>
+        </p:sp>
+        <p:sp>
+          <p:nvSpPr>
+            <p:cNvPr id="54" name="pl54"/>
+            <p:cNvSpPr/>
+            <p:nvPr/>
+          </p:nvSpPr>
+          <p:spPr>
+            <a:xfrm>
+              <a:off x="887106" y="5294352"/>
+              <a:ext cx="7660515" cy="0"/>
+            </a:xfrm>
+            <a:custGeom>
+              <a:avLst/>
+              <a:pathLst>
+                <a:path w="7660515" h="0">
+                  <a:moveTo>
+                    <a:pt x="0" y="0"/>
+                  </a:moveTo>
+                  <a:lnTo>
+                    <a:pt x="7660515" y="0"/>
+                  </a:lnTo>
+                  <a:lnTo>
+                    <a:pt x="7660515" y="0"/>
+                  </a:lnTo>
+                </a:path>
+              </a:pathLst>
+            </a:custGeom>
+            <a:ln w="13550" cap="flat">
+              <a:solidFill>
+                <a:srgbClr val="EBEBEB">
+                  <a:alpha val="100000"/>
+                </a:srgbClr>
+              </a:solidFill>
+              <a:prstDash val="solid"/>
+              <a:round/>
+            </a:ln>
+          </p:spPr>
+          <p:txBody>
+            <a:bodyPr/>
+            <a:lstStyle/>
+            <a:p/>
+          </p:txBody>
+        </p:sp>
+        <p:sp>
+          <p:nvSpPr>
+            <p:cNvPr id="55" name="pl55"/>
+            <p:cNvSpPr/>
+            <p:nvPr/>
+          </p:nvSpPr>
+          <p:spPr>
+            <a:xfrm>
+              <a:off x="887106" y="4995019"/>
+              <a:ext cx="7660515" cy="0"/>
+            </a:xfrm>
+            <a:custGeom>
+              <a:avLst/>
+              <a:pathLst>
+                <a:path w="7660515" h="0">
+                  <a:moveTo>
+                    <a:pt x="0" y="0"/>
+                  </a:moveTo>
+                  <a:lnTo>
+                    <a:pt x="7660515" y="0"/>
+                  </a:lnTo>
+                  <a:lnTo>
+                    <a:pt x="7660515" y="0"/>
+                  </a:lnTo>
+                </a:path>
+              </a:pathLst>
+            </a:custGeom>
+            <a:ln w="13550" cap="flat">
+              <a:solidFill>
+                <a:srgbClr val="EBEBEB">
+                  <a:alpha val="100000"/>
+                </a:srgbClr>
+              </a:solidFill>
+              <a:prstDash val="solid"/>
+              <a:round/>
+            </a:ln>
+          </p:spPr>
+          <p:txBody>
+            <a:bodyPr/>
+            <a:lstStyle/>
+            <a:p/>
+          </p:txBody>
+        </p:sp>
+        <p:sp>
+          <p:nvSpPr>
+            <p:cNvPr id="56" name="pl56"/>
+            <p:cNvSpPr/>
+            <p:nvPr/>
+          </p:nvSpPr>
+          <p:spPr>
+            <a:xfrm>
+              <a:off x="887106" y="4695685"/>
+              <a:ext cx="7660515" cy="0"/>
+            </a:xfrm>
+            <a:custGeom>
+              <a:avLst/>
+              <a:pathLst>
+                <a:path w="7660515" h="0">
+                  <a:moveTo>
+                    <a:pt x="0" y="0"/>
+                  </a:moveTo>
+                  <a:lnTo>
+                    <a:pt x="7660515" y="0"/>
+                  </a:lnTo>
+                  <a:lnTo>
+                    <a:pt x="7660515" y="0"/>
+                  </a:lnTo>
+                </a:path>
+              </a:pathLst>
+            </a:custGeom>
+            <a:ln w="13550" cap="flat">
+              <a:solidFill>
+                <a:srgbClr val="EBEBEB">
+                  <a:alpha val="100000"/>
+                </a:srgbClr>
+              </a:solidFill>
+              <a:prstDash val="solid"/>
+              <a:round/>
+            </a:ln>
+          </p:spPr>
+          <p:txBody>
+            <a:bodyPr/>
+            <a:lstStyle/>
+            <a:p/>
+          </p:txBody>
+        </p:sp>
+        <p:sp>
+          <p:nvSpPr>
+            <p:cNvPr id="57" name="pl57"/>
+            <p:cNvSpPr/>
+            <p:nvPr/>
+          </p:nvSpPr>
+          <p:spPr>
+            <a:xfrm>
+              <a:off x="887106" y="4396351"/>
+              <a:ext cx="7660515" cy="0"/>
+            </a:xfrm>
+            <a:custGeom>
+              <a:avLst/>
+              <a:pathLst>
+                <a:path w="7660515" h="0">
+                  <a:moveTo>
+                    <a:pt x="0" y="0"/>
+                  </a:moveTo>
+                  <a:lnTo>
+                    <a:pt x="7660515" y="0"/>
+                  </a:lnTo>
+                  <a:lnTo>
+                    <a:pt x="7660515" y="0"/>
+                  </a:lnTo>
+                </a:path>
+              </a:pathLst>
+            </a:custGeom>
+            <a:ln w="13550" cap="flat">
+              <a:solidFill>
+                <a:srgbClr val="EBEBEB">
+                  <a:alpha val="100000"/>
+                </a:srgbClr>
+              </a:solidFill>
+              <a:prstDash val="solid"/>
+              <a:round/>
+            </a:ln>
+          </p:spPr>
+          <p:txBody>
+            <a:bodyPr/>
+            <a:lstStyle/>
+            <a:p/>
+          </p:txBody>
+        </p:sp>
+        <p:sp>
+          <p:nvSpPr>
+            <p:cNvPr id="58" name="pl58"/>
+            <p:cNvSpPr/>
+            <p:nvPr/>
+          </p:nvSpPr>
+          <p:spPr>
+            <a:xfrm>
+              <a:off x="1321788" y="4336484"/>
+              <a:ext cx="0" cy="1317069"/>
+            </a:xfrm>
+            <a:custGeom>
+              <a:avLst/>
+              <a:pathLst>
+                <a:path w="0" h="1317069">
+                  <a:moveTo>
+                    <a:pt x="0" y="1317069"/>
+                  </a:moveTo>
+                  <a:lnTo>
+                    <a:pt x="0" y="0"/>
+                  </a:lnTo>
+                  <a:lnTo>
+                    <a:pt x="0" y="0"/>
+                  </a:lnTo>
+                </a:path>
+              </a:pathLst>
+            </a:custGeom>
+            <a:ln w="13550" cap="flat">
+              <a:solidFill>
+                <a:srgbClr val="EBEBEB">
+                  <a:alpha val="100000"/>
+                </a:srgbClr>
+              </a:solidFill>
+              <a:prstDash val="solid"/>
+              <a:round/>
+            </a:ln>
+          </p:spPr>
+          <p:txBody>
+            <a:bodyPr/>
+            <a:lstStyle/>
+            <a:p/>
+          </p:txBody>
+        </p:sp>
+        <p:sp>
+          <p:nvSpPr>
+            <p:cNvPr id="59" name="pl59"/>
+            <p:cNvSpPr/>
+            <p:nvPr/>
+          </p:nvSpPr>
+          <p:spPr>
+            <a:xfrm>
+              <a:off x="2135389" y="4336484"/>
+              <a:ext cx="0" cy="1317069"/>
+            </a:xfrm>
+            <a:custGeom>
+              <a:avLst/>
+              <a:pathLst>
+                <a:path w="0" h="1317069">
+                  <a:moveTo>
+                    <a:pt x="0" y="1317069"/>
+                  </a:moveTo>
+                  <a:lnTo>
+                    <a:pt x="0" y="0"/>
+                  </a:lnTo>
+                  <a:lnTo>
+                    <a:pt x="0" y="0"/>
+                  </a:lnTo>
+                </a:path>
+              </a:pathLst>
+            </a:custGeom>
+            <a:ln w="13550" cap="flat">
+              <a:solidFill>
+                <a:srgbClr val="EBEBEB">
+                  <a:alpha val="100000"/>
+                </a:srgbClr>
+              </a:solidFill>
+              <a:prstDash val="solid"/>
+              <a:round/>
+            </a:ln>
+          </p:spPr>
+          <p:txBody>
+            <a:bodyPr/>
+            <a:lstStyle/>
+            <a:p/>
+          </p:txBody>
+        </p:sp>
+        <p:sp>
+          <p:nvSpPr>
+            <p:cNvPr id="60" name="pl60"/>
+            <p:cNvSpPr/>
+            <p:nvPr/>
+          </p:nvSpPr>
+          <p:spPr>
+            <a:xfrm>
+              <a:off x="2948991" y="4336484"/>
+              <a:ext cx="0" cy="1317069"/>
+            </a:xfrm>
+            <a:custGeom>
+              <a:avLst/>
+              <a:pathLst>
+                <a:path w="0" h="1317069">
+                  <a:moveTo>
+                    <a:pt x="0" y="1317069"/>
+                  </a:moveTo>
+                  <a:lnTo>
+                    <a:pt x="0" y="0"/>
+                  </a:lnTo>
+                  <a:lnTo>
+                    <a:pt x="0" y="0"/>
+                  </a:lnTo>
+                </a:path>
+              </a:pathLst>
+            </a:custGeom>
+            <a:ln w="13550" cap="flat">
+              <a:solidFill>
+                <a:srgbClr val="EBEBEB">
+                  <a:alpha val="100000"/>
+                </a:srgbClr>
+              </a:solidFill>
+              <a:prstDash val="solid"/>
+              <a:round/>
+            </a:ln>
+          </p:spPr>
+          <p:txBody>
+            <a:bodyPr/>
+            <a:lstStyle/>
+            <a:p/>
+          </p:txBody>
+        </p:sp>
+        <p:sp>
+          <p:nvSpPr>
+            <p:cNvPr id="61" name="pl61"/>
+            <p:cNvSpPr/>
+            <p:nvPr/>
+          </p:nvSpPr>
+          <p:spPr>
+            <a:xfrm>
+              <a:off x="3762592" y="4336484"/>
+              <a:ext cx="0" cy="1317069"/>
+            </a:xfrm>
+            <a:custGeom>
+              <a:avLst/>
+              <a:pathLst>
+                <a:path w="0" h="1317069">
+                  <a:moveTo>
+                    <a:pt x="0" y="1317069"/>
+                  </a:moveTo>
+                  <a:lnTo>
+                    <a:pt x="0" y="0"/>
+                  </a:lnTo>
+                  <a:lnTo>
+                    <a:pt x="0" y="0"/>
+                  </a:lnTo>
+                </a:path>
+              </a:pathLst>
+            </a:custGeom>
+            <a:ln w="13550" cap="flat">
+              <a:solidFill>
+                <a:srgbClr val="EBEBEB">
+                  <a:alpha val="100000"/>
+                </a:srgbClr>
+              </a:solidFill>
+              <a:prstDash val="solid"/>
+              <a:round/>
+            </a:ln>
+          </p:spPr>
+          <p:txBody>
+            <a:bodyPr/>
+            <a:lstStyle/>
+            <a:p/>
+          </p:txBody>
+        </p:sp>
+        <p:sp>
+          <p:nvSpPr>
+            <p:cNvPr id="62" name="pl62"/>
+            <p:cNvSpPr/>
+            <p:nvPr/>
+          </p:nvSpPr>
+          <p:spPr>
+            <a:xfrm>
+              <a:off x="4576193" y="4336484"/>
+              <a:ext cx="0" cy="1317069"/>
+            </a:xfrm>
+            <a:custGeom>
+              <a:avLst/>
+              <a:pathLst>
+                <a:path w="0" h="1317069">
+                  <a:moveTo>
+                    <a:pt x="0" y="1317069"/>
+                  </a:moveTo>
+                  <a:lnTo>
+                    <a:pt x="0" y="0"/>
+                  </a:lnTo>
+                  <a:lnTo>
+                    <a:pt x="0" y="0"/>
+                  </a:lnTo>
+                </a:path>
+              </a:pathLst>
+            </a:custGeom>
+            <a:ln w="13550" cap="flat">
+              <a:solidFill>
+                <a:srgbClr val="EBEBEB">
+                  <a:alpha val="100000"/>
+                </a:srgbClr>
+              </a:solidFill>
+              <a:prstDash val="solid"/>
+              <a:round/>
+            </a:ln>
+          </p:spPr>
+          <p:txBody>
+            <a:bodyPr/>
+            <a:lstStyle/>
+            <a:p/>
+          </p:txBody>
+        </p:sp>
+        <p:sp>
+          <p:nvSpPr>
+            <p:cNvPr id="63" name="pl63"/>
+            <p:cNvSpPr/>
+            <p:nvPr/>
+          </p:nvSpPr>
+          <p:spPr>
+            <a:xfrm>
+              <a:off x="5389795" y="4336484"/>
+              <a:ext cx="0" cy="1317069"/>
+            </a:xfrm>
+            <a:custGeom>
+              <a:avLst/>
+              <a:pathLst>
+                <a:path w="0" h="1317069">
+                  <a:moveTo>
+                    <a:pt x="0" y="1317069"/>
+                  </a:moveTo>
+                  <a:lnTo>
+                    <a:pt x="0" y="0"/>
+                  </a:lnTo>
+                  <a:lnTo>
+                    <a:pt x="0" y="0"/>
+                  </a:lnTo>
+                </a:path>
+              </a:pathLst>
+            </a:custGeom>
+            <a:ln w="13550" cap="flat">
+              <a:solidFill>
+                <a:srgbClr val="EBEBEB">
+                  <a:alpha val="100000"/>
+                </a:srgbClr>
+              </a:solidFill>
+              <a:prstDash val="solid"/>
+              <a:round/>
+            </a:ln>
+          </p:spPr>
+          <p:txBody>
+            <a:bodyPr/>
+            <a:lstStyle/>
+            <a:p/>
+          </p:txBody>
+        </p:sp>
+        <p:sp>
+          <p:nvSpPr>
+            <p:cNvPr id="64" name="pl64"/>
+            <p:cNvSpPr/>
+            <p:nvPr/>
+          </p:nvSpPr>
+          <p:spPr>
+            <a:xfrm>
+              <a:off x="6203396" y="4336484"/>
+              <a:ext cx="0" cy="1317069"/>
+            </a:xfrm>
+            <a:custGeom>
+              <a:avLst/>
+              <a:pathLst>
+                <a:path w="0" h="1317069">
+                  <a:moveTo>
+                    <a:pt x="0" y="1317069"/>
+                  </a:moveTo>
+                  <a:lnTo>
+                    <a:pt x="0" y="0"/>
+                  </a:lnTo>
+                  <a:lnTo>
+                    <a:pt x="0" y="0"/>
+                  </a:lnTo>
+                </a:path>
+              </a:pathLst>
+            </a:custGeom>
+            <a:ln w="13550" cap="flat">
+              <a:solidFill>
+                <a:srgbClr val="EBEBEB">
+                  <a:alpha val="100000"/>
+                </a:srgbClr>
+              </a:solidFill>
+              <a:prstDash val="solid"/>
+              <a:round/>
+            </a:ln>
+          </p:spPr>
+          <p:txBody>
+            <a:bodyPr/>
+            <a:lstStyle/>
+            <a:p/>
+          </p:txBody>
+        </p:sp>
+        <p:sp>
+          <p:nvSpPr>
+            <p:cNvPr id="65" name="pl65"/>
+            <p:cNvSpPr/>
+            <p:nvPr/>
+          </p:nvSpPr>
+          <p:spPr>
+            <a:xfrm>
+              <a:off x="7016997" y="4336484"/>
+              <a:ext cx="0" cy="1317069"/>
+            </a:xfrm>
+            <a:custGeom>
+              <a:avLst/>
+              <a:pathLst>
+                <a:path w="0" h="1317069">
+                  <a:moveTo>
+                    <a:pt x="0" y="1317069"/>
+                  </a:moveTo>
+                  <a:lnTo>
+                    <a:pt x="0" y="0"/>
+                  </a:lnTo>
+                  <a:lnTo>
+                    <a:pt x="0" y="0"/>
+                  </a:lnTo>
+                </a:path>
+              </a:pathLst>
+            </a:custGeom>
+            <a:ln w="13550" cap="flat">
+              <a:solidFill>
+                <a:srgbClr val="EBEBEB">
+                  <a:alpha val="100000"/>
+                </a:srgbClr>
+              </a:solidFill>
+              <a:prstDash val="solid"/>
+              <a:round/>
+            </a:ln>
+          </p:spPr>
+          <p:txBody>
+            <a:bodyPr/>
+            <a:lstStyle/>
+            <a:p/>
+          </p:txBody>
+        </p:sp>
+        <p:sp>
+          <p:nvSpPr>
+            <p:cNvPr id="66" name="pl66"/>
+            <p:cNvSpPr/>
+            <p:nvPr/>
+          </p:nvSpPr>
+          <p:spPr>
+            <a:xfrm>
+              <a:off x="7830599" y="4336484"/>
+              <a:ext cx="0" cy="1317069"/>
+            </a:xfrm>
+            <a:custGeom>
+              <a:avLst/>
+              <a:pathLst>
+                <a:path w="0" h="1317069">
+                  <a:moveTo>
+                    <a:pt x="0" y="1317069"/>
+                  </a:moveTo>
+                  <a:lnTo>
+                    <a:pt x="0" y="0"/>
+                  </a:lnTo>
+                  <a:lnTo>
+                    <a:pt x="0" y="0"/>
+                  </a:lnTo>
+                </a:path>
+              </a:pathLst>
+            </a:custGeom>
+            <a:ln w="13550" cap="flat">
+              <a:solidFill>
+                <a:srgbClr val="EBEBEB">
+                  <a:alpha val="100000"/>
+                </a:srgbClr>
+              </a:solidFill>
+              <a:prstDash val="solid"/>
+              <a:round/>
+            </a:ln>
+          </p:spPr>
+          <p:txBody>
+            <a:bodyPr/>
+            <a:lstStyle/>
+            <a:p/>
+          </p:txBody>
+        </p:sp>
+        <p:sp>
+          <p:nvSpPr>
+            <p:cNvPr id="67" name="pg67"/>
+            <p:cNvSpPr/>
+            <p:nvPr/>
+          </p:nvSpPr>
+          <p:spPr>
+            <a:xfrm>
+              <a:off x="1235312" y="4336484"/>
+              <a:ext cx="6964104" cy="1219243"/>
+            </a:xfrm>
+            <a:custGeom>
+              <a:avLst/>
+              <a:pathLst>
+                <a:path w="6964104" h="1219243">
+                  <a:moveTo>
+                    <a:pt x="745617" y="0"/>
+                  </a:moveTo>
+                  <a:lnTo>
+                    <a:pt x="773789" y="20010"/>
+                  </a:lnTo>
+                  <a:lnTo>
+                    <a:pt x="844133" y="68036"/>
+                  </a:lnTo>
+                  <a:lnTo>
+                    <a:pt x="914478" y="114198"/>
+                  </a:lnTo>
+                  <a:lnTo>
+                    <a:pt x="984822" y="158568"/>
+                  </a:lnTo>
+                  <a:lnTo>
+                    <a:pt x="1055167" y="201215"/>
+                  </a:lnTo>
+                  <a:lnTo>
+                    <a:pt x="1125511" y="242207"/>
+                  </a:lnTo>
+                  <a:lnTo>
+                    <a:pt x="1195856" y="281608"/>
+                  </a:lnTo>
+                  <a:lnTo>
+                    <a:pt x="1266200" y="319479"/>
+                  </a:lnTo>
+                  <a:lnTo>
+                    <a:pt x="1336545" y="355880"/>
+                  </a:lnTo>
+                  <a:lnTo>
+                    <a:pt x="1406889" y="390868"/>
+                  </a:lnTo>
+                  <a:lnTo>
+                    <a:pt x="1477234" y="424498"/>
+                  </a:lnTo>
+                  <a:lnTo>
+                    <a:pt x="1547578" y="456822"/>
+                  </a:lnTo>
+                  <a:lnTo>
+                    <a:pt x="1617923" y="487892"/>
+                  </a:lnTo>
+                  <a:lnTo>
+                    <a:pt x="1688267" y="517755"/>
+                  </a:lnTo>
+                  <a:lnTo>
+                    <a:pt x="1758612" y="546459"/>
+                  </a:lnTo>
+                  <a:lnTo>
+                    <a:pt x="1828956" y="574049"/>
+                  </a:lnTo>
+                  <a:lnTo>
+                    <a:pt x="1899301" y="600568"/>
+                  </a:lnTo>
+                  <a:lnTo>
+                    <a:pt x="1969645" y="626058"/>
+                  </a:lnTo>
+                  <a:lnTo>
+                    <a:pt x="2039990" y="650558"/>
+                  </a:lnTo>
+                  <a:lnTo>
+                    <a:pt x="2110334" y="674107"/>
+                  </a:lnTo>
+                  <a:lnTo>
+                    <a:pt x="2180679" y="696742"/>
+                  </a:lnTo>
+                  <a:lnTo>
+                    <a:pt x="2251023" y="718498"/>
+                  </a:lnTo>
+                  <a:lnTo>
+                    <a:pt x="2321368" y="739410"/>
+                  </a:lnTo>
+                  <a:lnTo>
+                    <a:pt x="2391712" y="759510"/>
+                  </a:lnTo>
+                  <a:lnTo>
+                    <a:pt x="2462057" y="778830"/>
+                  </a:lnTo>
+                  <a:lnTo>
+                    <a:pt x="2532401" y="797399"/>
+                  </a:lnTo>
+                  <a:lnTo>
+                    <a:pt x="2602746" y="815248"/>
+                  </a:lnTo>
+                  <a:lnTo>
+                    <a:pt x="2673090" y="832404"/>
+                  </a:lnTo>
+                  <a:lnTo>
+                    <a:pt x="2743435" y="848894"/>
+                  </a:lnTo>
+                  <a:lnTo>
+                    <a:pt x="2813779" y="864744"/>
+                  </a:lnTo>
+                  <a:lnTo>
+                    <a:pt x="2884124" y="879979"/>
+                  </a:lnTo>
+                  <a:lnTo>
+                    <a:pt x="2954468" y="894622"/>
+                  </a:lnTo>
+                  <a:lnTo>
+                    <a:pt x="3024813" y="908697"/>
+                  </a:lnTo>
+                  <a:lnTo>
+                    <a:pt x="3095157" y="922225"/>
+                  </a:lnTo>
+                  <a:lnTo>
+                    <a:pt x="3165502" y="935229"/>
+                  </a:lnTo>
+                  <a:lnTo>
+                    <a:pt x="3235846" y="947727"/>
+                  </a:lnTo>
+                  <a:lnTo>
+                    <a:pt x="3306191" y="958399"/>
+                  </a:lnTo>
+                  <a:lnTo>
+                    <a:pt x="3376535" y="961727"/>
+                  </a:lnTo>
+                  <a:lnTo>
+                    <a:pt x="3446880" y="965018"/>
+                  </a:lnTo>
+                  <a:lnTo>
+                    <a:pt x="3517224" y="968273"/>
+                  </a:lnTo>
+                  <a:lnTo>
+                    <a:pt x="3587569" y="971491"/>
+                  </a:lnTo>
+                  <a:lnTo>
+                    <a:pt x="3657913" y="974674"/>
+                  </a:lnTo>
+                  <a:lnTo>
+                    <a:pt x="3728257" y="977821"/>
+                  </a:lnTo>
+                  <a:lnTo>
+                    <a:pt x="3798602" y="980933"/>
+                  </a:lnTo>
+                  <a:lnTo>
+                    <a:pt x="3868946" y="984010"/>
+                  </a:lnTo>
+                  <a:lnTo>
+                    <a:pt x="3939291" y="987053"/>
+                  </a:lnTo>
+                  <a:lnTo>
+                    <a:pt x="4009635" y="990062"/>
+                  </a:lnTo>
+                  <a:lnTo>
+                    <a:pt x="4079980" y="993038"/>
+                  </a:lnTo>
+                  <a:lnTo>
+                    <a:pt x="4150324" y="995981"/>
+                  </a:lnTo>
+                  <a:lnTo>
+                    <a:pt x="4220669" y="998890"/>
+                  </a:lnTo>
+                  <a:lnTo>
+                    <a:pt x="4291013" y="1001768"/>
+                  </a:lnTo>
+                  <a:lnTo>
+                    <a:pt x="4361358" y="1004613"/>
+                  </a:lnTo>
+                  <a:lnTo>
+                    <a:pt x="4431702" y="1007426"/>
+                  </a:lnTo>
+                  <a:lnTo>
+                    <a:pt x="4502047" y="1010209"/>
+                  </a:lnTo>
+                  <a:lnTo>
+                    <a:pt x="4572391" y="1012960"/>
+                  </a:lnTo>
+                  <a:lnTo>
+                    <a:pt x="4642736" y="1015680"/>
+                  </a:lnTo>
+                  <a:lnTo>
+                    <a:pt x="4713080" y="1018371"/>
+                  </a:lnTo>
+                  <a:lnTo>
+                    <a:pt x="4783425" y="1021031"/>
+                  </a:lnTo>
+                  <a:lnTo>
+                    <a:pt x="4853769" y="1023662"/>
+                  </a:lnTo>
+                  <a:lnTo>
+                    <a:pt x="4924114" y="1026263"/>
+                  </a:lnTo>
+                  <a:lnTo>
+                    <a:pt x="4994458" y="1028835"/>
+                  </a:lnTo>
+                  <a:lnTo>
+                    <a:pt x="5064803" y="1031379"/>
+                  </a:lnTo>
+                  <a:lnTo>
+                    <a:pt x="5135147" y="1033895"/>
+                  </a:lnTo>
+                  <a:lnTo>
+                    <a:pt x="5205492" y="1036382"/>
+                  </a:lnTo>
+                  <a:lnTo>
+                    <a:pt x="5275836" y="1038842"/>
+                  </a:lnTo>
+                  <a:lnTo>
+                    <a:pt x="5346181" y="1041274"/>
+                  </a:lnTo>
+                  <a:lnTo>
+                    <a:pt x="5416525" y="1043679"/>
+                  </a:lnTo>
+                  <a:lnTo>
+                    <a:pt x="5486870" y="1046057"/>
+                  </a:lnTo>
+                  <a:lnTo>
+                    <a:pt x="5557214" y="1048409"/>
+                  </a:lnTo>
+                  <a:lnTo>
+                    <a:pt x="5627559" y="1050735"/>
+                  </a:lnTo>
+                  <a:lnTo>
+                    <a:pt x="5697903" y="1053035"/>
+                  </a:lnTo>
+                  <a:lnTo>
+                    <a:pt x="5768248" y="1055309"/>
+                  </a:lnTo>
+                  <a:lnTo>
+                    <a:pt x="5838592" y="1057558"/>
+                  </a:lnTo>
+                  <a:lnTo>
+                    <a:pt x="5908937" y="1059782"/>
+                  </a:lnTo>
+                  <a:lnTo>
+                    <a:pt x="5979281" y="1061981"/>
+                  </a:lnTo>
+                  <a:lnTo>
+                    <a:pt x="6049626" y="1064155"/>
+                  </a:lnTo>
+                  <a:lnTo>
+                    <a:pt x="6119970" y="1066306"/>
+                  </a:lnTo>
+                  <a:lnTo>
+                    <a:pt x="6190315" y="1068432"/>
+                  </a:lnTo>
+                  <a:lnTo>
+                    <a:pt x="6260659" y="1070535"/>
+                  </a:lnTo>
+                  <a:lnTo>
+                    <a:pt x="6331004" y="1072614"/>
+                  </a:lnTo>
+                  <a:lnTo>
+                    <a:pt x="6401348" y="1074670"/>
+                  </a:lnTo>
+                  <a:lnTo>
+                    <a:pt x="6471693" y="1076703"/>
+                  </a:lnTo>
+                  <a:lnTo>
+                    <a:pt x="6542037" y="1078714"/>
+                  </a:lnTo>
+                  <a:lnTo>
+                    <a:pt x="6612382" y="1080702"/>
+                  </a:lnTo>
+                  <a:lnTo>
+                    <a:pt x="6682726" y="1082668"/>
+                  </a:lnTo>
+                  <a:lnTo>
+                    <a:pt x="6753071" y="1084612"/>
+                  </a:lnTo>
+                  <a:lnTo>
+                    <a:pt x="6823415" y="1086535"/>
+                  </a:lnTo>
+                  <a:lnTo>
+                    <a:pt x="6893760" y="1088436"/>
+                  </a:lnTo>
+                  <a:lnTo>
+                    <a:pt x="6964104" y="1090315"/>
+                  </a:lnTo>
+                  <a:lnTo>
+                    <a:pt x="6964104" y="1219243"/>
+                  </a:lnTo>
+                  <a:lnTo>
+                    <a:pt x="6893760" y="1217710"/>
+                  </a:lnTo>
+                  <a:lnTo>
+                    <a:pt x="6823415" y="1216115"/>
+                  </a:lnTo>
+                  <a:lnTo>
+                    <a:pt x="6753071" y="1214456"/>
+                  </a:lnTo>
+                  <a:lnTo>
+                    <a:pt x="6682726" y="1212730"/>
+                  </a:lnTo>
+                  <a:lnTo>
+                    <a:pt x="6612382" y="1210934"/>
+                  </a:lnTo>
+                  <a:lnTo>
+                    <a:pt x="6542037" y="1209065"/>
+                  </a:lnTo>
+                  <a:lnTo>
+                    <a:pt x="6471693" y="1207121"/>
+                  </a:lnTo>
+                  <a:lnTo>
+                    <a:pt x="6401348" y="1205098"/>
+                  </a:lnTo>
+                  <a:lnTo>
+                    <a:pt x="6331004" y="1202994"/>
+                  </a:lnTo>
+                  <a:lnTo>
+                    <a:pt x="6260659" y="1200805"/>
+                  </a:lnTo>
+                  <a:lnTo>
+                    <a:pt x="6190315" y="1198527"/>
+                  </a:lnTo>
+                  <a:lnTo>
+                    <a:pt x="6119970" y="1196157"/>
+                  </a:lnTo>
+                  <a:lnTo>
+                    <a:pt x="6049626" y="1193692"/>
+                  </a:lnTo>
+                  <a:lnTo>
+                    <a:pt x="5979281" y="1191127"/>
+                  </a:lnTo>
+                  <a:lnTo>
+                    <a:pt x="5908937" y="1188459"/>
+                  </a:lnTo>
+                  <a:lnTo>
+                    <a:pt x="5838592" y="1185682"/>
+                  </a:lnTo>
+                  <a:lnTo>
+                    <a:pt x="5768248" y="1182794"/>
+                  </a:lnTo>
+                  <a:lnTo>
+                    <a:pt x="5697903" y="1179789"/>
+                  </a:lnTo>
+                  <a:lnTo>
+                    <a:pt x="5627559" y="1176663"/>
+                  </a:lnTo>
+                  <a:lnTo>
+                    <a:pt x="5557214" y="1173410"/>
+                  </a:lnTo>
+                  <a:lnTo>
+                    <a:pt x="5486870" y="1170026"/>
+                  </a:lnTo>
+                  <a:lnTo>
+                    <a:pt x="5416525" y="1166505"/>
+                  </a:lnTo>
+                  <a:lnTo>
+                    <a:pt x="5346181" y="1162842"/>
+                  </a:lnTo>
+                  <a:lnTo>
+                    <a:pt x="5275836" y="1159031"/>
+                  </a:lnTo>
+                  <a:lnTo>
+                    <a:pt x="5205492" y="1155067"/>
+                  </a:lnTo>
+                  <a:lnTo>
+                    <a:pt x="5135147" y="1150942"/>
+                  </a:lnTo>
+                  <a:lnTo>
+                    <a:pt x="5064803" y="1146650"/>
+                  </a:lnTo>
+                  <a:lnTo>
+                    <a:pt x="4994458" y="1142186"/>
+                  </a:lnTo>
+                  <a:lnTo>
+                    <a:pt x="4924114" y="1137540"/>
+                  </a:lnTo>
+                  <a:lnTo>
+                    <a:pt x="4853769" y="1132708"/>
+                  </a:lnTo>
+                  <a:lnTo>
+                    <a:pt x="4783425" y="1127680"/>
+                  </a:lnTo>
+                  <a:lnTo>
+                    <a:pt x="4713080" y="1122449"/>
+                  </a:lnTo>
+                  <a:lnTo>
+                    <a:pt x="4642736" y="1117007"/>
+                  </a:lnTo>
+                  <a:lnTo>
+                    <a:pt x="4572391" y="1111345"/>
+                  </a:lnTo>
+                  <a:lnTo>
+                    <a:pt x="4502047" y="1105454"/>
+                  </a:lnTo>
+                  <a:lnTo>
+                    <a:pt x="4431702" y="1099326"/>
+                  </a:lnTo>
+                  <a:lnTo>
+                    <a:pt x="4361358" y="1092950"/>
+                  </a:lnTo>
+                  <a:lnTo>
+                    <a:pt x="4291013" y="1086316"/>
+                  </a:lnTo>
+                  <a:lnTo>
+                    <a:pt x="4220669" y="1079415"/>
+                  </a:lnTo>
+                  <a:lnTo>
+                    <a:pt x="4150324" y="1072235"/>
+                  </a:lnTo>
+                  <a:lnTo>
+                    <a:pt x="4079980" y="1064764"/>
+                  </a:lnTo>
+                  <a:lnTo>
+                    <a:pt x="4009635" y="1056993"/>
+                  </a:lnTo>
+                  <a:lnTo>
+                    <a:pt x="3939291" y="1048907"/>
+                  </a:lnTo>
+                  <a:lnTo>
+                    <a:pt x="3868946" y="1040495"/>
+                  </a:lnTo>
+                  <a:lnTo>
+                    <a:pt x="3798602" y="1031743"/>
+                  </a:lnTo>
+                  <a:lnTo>
+                    <a:pt x="3728257" y="1022637"/>
+                  </a:lnTo>
+                  <a:lnTo>
+                    <a:pt x="3657913" y="1013164"/>
+                  </a:lnTo>
+                  <a:lnTo>
+                    <a:pt x="3587569" y="1003308"/>
+                  </a:lnTo>
+                  <a:lnTo>
+                    <a:pt x="3517224" y="993054"/>
+                  </a:lnTo>
+                  <a:lnTo>
+                    <a:pt x="3446880" y="982386"/>
+                  </a:lnTo>
+                  <a:lnTo>
+                    <a:pt x="3376535" y="971288"/>
+                  </a:lnTo>
+                  <a:lnTo>
+                    <a:pt x="3306191" y="959741"/>
+                  </a:lnTo>
+                  <a:lnTo>
+                    <a:pt x="3235846" y="955033"/>
+                  </a:lnTo>
+                  <a:lnTo>
+                    <a:pt x="3165502" y="951629"/>
+                  </a:lnTo>
+                  <a:lnTo>
+                    <a:pt x="3095157" y="948187"/>
+                  </a:lnTo>
+                  <a:lnTo>
+                    <a:pt x="3024813" y="944706"/>
+                  </a:lnTo>
+                  <a:lnTo>
+                    <a:pt x="2954468" y="941186"/>
+                  </a:lnTo>
+                  <a:lnTo>
+                    <a:pt x="2884124" y="937627"/>
+                  </a:lnTo>
+                  <a:lnTo>
+                    <a:pt x="2813779" y="934027"/>
+                  </a:lnTo>
+                  <a:lnTo>
+                    <a:pt x="2743435" y="930387"/>
+                  </a:lnTo>
+                  <a:lnTo>
+                    <a:pt x="2673090" y="926705"/>
+                  </a:lnTo>
+                  <a:lnTo>
+                    <a:pt x="2602746" y="922982"/>
+                  </a:lnTo>
+                  <a:lnTo>
+                    <a:pt x="2532401" y="919218"/>
+                  </a:lnTo>
+                  <a:lnTo>
+                    <a:pt x="2462057" y="915410"/>
+                  </a:lnTo>
+                  <a:lnTo>
+                    <a:pt x="2391712" y="911560"/>
+                  </a:lnTo>
+                  <a:lnTo>
+                    <a:pt x="2321368" y="907667"/>
+                  </a:lnTo>
+                  <a:lnTo>
+                    <a:pt x="2251023" y="903730"/>
+                  </a:lnTo>
+                  <a:lnTo>
+                    <a:pt x="2180679" y="899748"/>
+                  </a:lnTo>
+                  <a:lnTo>
+                    <a:pt x="2110334" y="895722"/>
+                  </a:lnTo>
+                  <a:lnTo>
+                    <a:pt x="2039990" y="891650"/>
+                  </a:lnTo>
+                  <a:lnTo>
+                    <a:pt x="1969645" y="887532"/>
+                  </a:lnTo>
+                  <a:lnTo>
+                    <a:pt x="1899301" y="883368"/>
+                  </a:lnTo>
+                  <a:lnTo>
+                    <a:pt x="1828956" y="879157"/>
+                  </a:lnTo>
+                  <a:lnTo>
+                    <a:pt x="1758612" y="874899"/>
+                  </a:lnTo>
+                  <a:lnTo>
+                    <a:pt x="1688267" y="870592"/>
+                  </a:lnTo>
+                  <a:lnTo>
+                    <a:pt x="1617923" y="866237"/>
+                  </a:lnTo>
+                  <a:lnTo>
+                    <a:pt x="1547578" y="861833"/>
+                  </a:lnTo>
+                  <a:lnTo>
+                    <a:pt x="1477234" y="857380"/>
+                  </a:lnTo>
+                  <a:lnTo>
+                    <a:pt x="1406889" y="852876"/>
+                  </a:lnTo>
+                  <a:lnTo>
+                    <a:pt x="1336545" y="848322"/>
+                  </a:lnTo>
+                  <a:lnTo>
+                    <a:pt x="1266200" y="843716"/>
+                  </a:lnTo>
+                  <a:lnTo>
+                    <a:pt x="1195856" y="839058"/>
+                  </a:lnTo>
+                  <a:lnTo>
+                    <a:pt x="1125511" y="834348"/>
+                  </a:lnTo>
+                  <a:lnTo>
+                    <a:pt x="1055167" y="829585"/>
+                  </a:lnTo>
+                  <a:lnTo>
+                    <a:pt x="984822" y="824768"/>
+                  </a:lnTo>
+                  <a:lnTo>
+                    <a:pt x="914478" y="819897"/>
+                  </a:lnTo>
+                  <a:lnTo>
+                    <a:pt x="844133" y="814971"/>
+                  </a:lnTo>
+                  <a:lnTo>
+                    <a:pt x="773789" y="809990"/>
+                  </a:lnTo>
+                  <a:lnTo>
+                    <a:pt x="703444" y="804952"/>
+                  </a:lnTo>
+                  <a:lnTo>
+                    <a:pt x="633100" y="799858"/>
+                  </a:lnTo>
+                  <a:lnTo>
+                    <a:pt x="562755" y="794706"/>
+                  </a:lnTo>
+                  <a:lnTo>
+                    <a:pt x="492411" y="789496"/>
+                  </a:lnTo>
+                  <a:lnTo>
+                    <a:pt x="422066" y="784228"/>
+                  </a:lnTo>
+                  <a:lnTo>
+                    <a:pt x="351722" y="778900"/>
+                  </a:lnTo>
+                  <a:lnTo>
+                    <a:pt x="281377" y="773513"/>
+                  </a:lnTo>
+                  <a:lnTo>
+                    <a:pt x="211033" y="768064"/>
+                  </a:lnTo>
+                  <a:lnTo>
+                    <a:pt x="140688" y="762554"/>
+                  </a:lnTo>
+                  <a:lnTo>
+                    <a:pt x="70344" y="756982"/>
+                  </a:lnTo>
+                  <a:lnTo>
+                    <a:pt x="0" y="751348"/>
+                  </a:lnTo>
+                  <a:close/>
+                </a:path>
+              </a:pathLst>
+            </a:custGeom>
+            <a:solidFill>
+              <a:srgbClr val="FF8C00">
+                <a:alpha val="20000"/>
+              </a:srgbClr>
+            </a:solidFill>
+          </p:spPr>
+          <p:txBody>
+            <a:bodyPr/>
+            <a:lstStyle/>
+            <a:p/>
+          </p:txBody>
+        </p:sp>
+        <p:sp>
+          <p:nvSpPr>
+            <p:cNvPr id="68" name="pl68"/>
+            <p:cNvSpPr/>
+            <p:nvPr/>
+          </p:nvSpPr>
+          <p:spPr>
+            <a:xfrm>
+              <a:off x="1980929" y="4336484"/>
+              <a:ext cx="6218487" cy="1090315"/>
+            </a:xfrm>
+            <a:custGeom>
+              <a:avLst/>
+              <a:pathLst>
+                <a:path w="6218487" h="1090315">
+                  <a:moveTo>
+                    <a:pt x="0" y="0"/>
+                  </a:moveTo>
+                  <a:lnTo>
+                    <a:pt x="28172" y="20010"/>
+                  </a:lnTo>
+                  <a:lnTo>
+                    <a:pt x="98516" y="68036"/>
+                  </a:lnTo>
+                  <a:lnTo>
+                    <a:pt x="168861" y="114198"/>
+                  </a:lnTo>
+                  <a:lnTo>
+                    <a:pt x="239205" y="158568"/>
+                  </a:lnTo>
+                  <a:lnTo>
+                    <a:pt x="309550" y="201215"/>
+                  </a:lnTo>
+                  <a:lnTo>
+                    <a:pt x="379894" y="242207"/>
+                  </a:lnTo>
+                  <a:lnTo>
+                    <a:pt x="450238" y="281608"/>
+                  </a:lnTo>
+                  <a:lnTo>
+                    <a:pt x="520583" y="319479"/>
+                  </a:lnTo>
+                  <a:lnTo>
+                    <a:pt x="590927" y="355880"/>
+                  </a:lnTo>
+                  <a:lnTo>
+                    <a:pt x="661272" y="390868"/>
+                  </a:lnTo>
+                  <a:lnTo>
+                    <a:pt x="731616" y="424498"/>
+                  </a:lnTo>
+                  <a:lnTo>
+                    <a:pt x="801961" y="456822"/>
+                  </a:lnTo>
+                  <a:lnTo>
+                    <a:pt x="872305" y="487892"/>
+                  </a:lnTo>
+                  <a:lnTo>
+                    <a:pt x="942650" y="517755"/>
+                  </a:lnTo>
+                  <a:lnTo>
+                    <a:pt x="1012994" y="546459"/>
+                  </a:lnTo>
+                  <a:lnTo>
+                    <a:pt x="1083339" y="574049"/>
+                  </a:lnTo>
+                  <a:lnTo>
+                    <a:pt x="1153683" y="600568"/>
+                  </a:lnTo>
+                  <a:lnTo>
+                    <a:pt x="1224028" y="626058"/>
+                  </a:lnTo>
+                  <a:lnTo>
+                    <a:pt x="1294372" y="650558"/>
+                  </a:lnTo>
+                  <a:lnTo>
+                    <a:pt x="1364717" y="674107"/>
+                  </a:lnTo>
+                  <a:lnTo>
+                    <a:pt x="1435061" y="696742"/>
+                  </a:lnTo>
+                  <a:lnTo>
+                    <a:pt x="1505406" y="718498"/>
+                  </a:lnTo>
+                  <a:lnTo>
+                    <a:pt x="1575750" y="739410"/>
+                  </a:lnTo>
+                  <a:lnTo>
+                    <a:pt x="1646095" y="759510"/>
+                  </a:lnTo>
+                  <a:lnTo>
+                    <a:pt x="1716439" y="778830"/>
+                  </a:lnTo>
+                  <a:lnTo>
+                    <a:pt x="1786784" y="797399"/>
+                  </a:lnTo>
+                  <a:lnTo>
+                    <a:pt x="1857128" y="815248"/>
+                  </a:lnTo>
+                  <a:lnTo>
+                    <a:pt x="1927473" y="832404"/>
+                  </a:lnTo>
+                  <a:lnTo>
+                    <a:pt x="1997817" y="848894"/>
+                  </a:lnTo>
+                  <a:lnTo>
+                    <a:pt x="2068162" y="864744"/>
+                  </a:lnTo>
+                  <a:lnTo>
+                    <a:pt x="2138506" y="879979"/>
+                  </a:lnTo>
+                  <a:lnTo>
+                    <a:pt x="2208851" y="894622"/>
+                  </a:lnTo>
+                  <a:lnTo>
+                    <a:pt x="2279195" y="908697"/>
+                  </a:lnTo>
+                  <a:lnTo>
+                    <a:pt x="2349540" y="922225"/>
+                  </a:lnTo>
+                  <a:lnTo>
+                    <a:pt x="2419884" y="935229"/>
+                  </a:lnTo>
+                  <a:lnTo>
+                    <a:pt x="2490229" y="947727"/>
+                  </a:lnTo>
+                  <a:lnTo>
+                    <a:pt x="2560573" y="958399"/>
+                  </a:lnTo>
+                  <a:lnTo>
+                    <a:pt x="2630918" y="961727"/>
+                  </a:lnTo>
+                  <a:lnTo>
+                    <a:pt x="2701262" y="965018"/>
+                  </a:lnTo>
+                  <a:lnTo>
+                    <a:pt x="2771607" y="968273"/>
+                  </a:lnTo>
+                  <a:lnTo>
+                    <a:pt x="2841951" y="971491"/>
+                  </a:lnTo>
+                  <a:lnTo>
+                    <a:pt x="2912296" y="974674"/>
+                  </a:lnTo>
+                  <a:lnTo>
+                    <a:pt x="2982640" y="977821"/>
+                  </a:lnTo>
+                  <a:lnTo>
+                    <a:pt x="3052985" y="980933"/>
+                  </a:lnTo>
+                  <a:lnTo>
+                    <a:pt x="3123329" y="984010"/>
+                  </a:lnTo>
+                  <a:lnTo>
+                    <a:pt x="3193674" y="987053"/>
+                  </a:lnTo>
+                  <a:lnTo>
+                    <a:pt x="3264018" y="990062"/>
+                  </a:lnTo>
+                  <a:lnTo>
+                    <a:pt x="3334363" y="993038"/>
+                  </a:lnTo>
+                  <a:lnTo>
+                    <a:pt x="3404707" y="995981"/>
+                  </a:lnTo>
+                  <a:lnTo>
+                    <a:pt x="3475052" y="998890"/>
+                  </a:lnTo>
+                  <a:lnTo>
+                    <a:pt x="3545396" y="1001768"/>
+                  </a:lnTo>
+                  <a:lnTo>
+                    <a:pt x="3615741" y="1004613"/>
+                  </a:lnTo>
+                  <a:lnTo>
+                    <a:pt x="3686085" y="1007426"/>
+                  </a:lnTo>
+                  <a:lnTo>
+                    <a:pt x="3756430" y="1010209"/>
+                  </a:lnTo>
+                  <a:lnTo>
+                    <a:pt x="3826774" y="1012960"/>
+                  </a:lnTo>
+                  <a:lnTo>
+                    <a:pt x="3897119" y="1015680"/>
+                  </a:lnTo>
+                  <a:lnTo>
+                    <a:pt x="3967463" y="1018371"/>
+                  </a:lnTo>
+                  <a:lnTo>
+                    <a:pt x="4037808" y="1021031"/>
+                  </a:lnTo>
+                  <a:lnTo>
+                    <a:pt x="4108152" y="1023662"/>
+                  </a:lnTo>
+                  <a:lnTo>
+                    <a:pt x="4178496" y="1026263"/>
+                  </a:lnTo>
+                  <a:lnTo>
+                    <a:pt x="4248841" y="1028835"/>
+                  </a:lnTo>
+                  <a:lnTo>
+                    <a:pt x="4319185" y="1031379"/>
+                  </a:lnTo>
+                  <a:lnTo>
+                    <a:pt x="4389530" y="1033895"/>
+                  </a:lnTo>
+                  <a:lnTo>
+                    <a:pt x="4459874" y="1036382"/>
+                  </a:lnTo>
+                  <a:lnTo>
+                    <a:pt x="4530219" y="1038842"/>
+                  </a:lnTo>
+                  <a:lnTo>
+                    <a:pt x="4600563" y="1041274"/>
+                  </a:lnTo>
+                  <a:lnTo>
+                    <a:pt x="4670908" y="1043679"/>
+                  </a:lnTo>
+                  <a:lnTo>
+                    <a:pt x="4741252" y="1046057"/>
+                  </a:lnTo>
+                  <a:lnTo>
+                    <a:pt x="4811597" y="1048409"/>
+                  </a:lnTo>
+                  <a:lnTo>
+                    <a:pt x="4881941" y="1050735"/>
+                  </a:lnTo>
+                  <a:lnTo>
+                    <a:pt x="4952286" y="1053035"/>
+                  </a:lnTo>
+                  <a:lnTo>
+                    <a:pt x="5022630" y="1055309"/>
+                  </a:lnTo>
+                  <a:lnTo>
+                    <a:pt x="5092975" y="1057558"/>
+                  </a:lnTo>
+                  <a:lnTo>
+                    <a:pt x="5163319" y="1059782"/>
+                  </a:lnTo>
+                  <a:lnTo>
+                    <a:pt x="5233664" y="1061981"/>
+                  </a:lnTo>
+                  <a:lnTo>
+                    <a:pt x="5304008" y="1064155"/>
+                  </a:lnTo>
+                  <a:lnTo>
+                    <a:pt x="5374353" y="1066306"/>
+                  </a:lnTo>
+                  <a:lnTo>
+                    <a:pt x="5444697" y="1068432"/>
+                  </a:lnTo>
+                  <a:lnTo>
+                    <a:pt x="5515042" y="1070535"/>
+                  </a:lnTo>
+                  <a:lnTo>
+                    <a:pt x="5585386" y="1072614"/>
+                  </a:lnTo>
+                  <a:lnTo>
+                    <a:pt x="5655731" y="1074670"/>
+                  </a:lnTo>
+                  <a:lnTo>
+                    <a:pt x="5726075" y="1076703"/>
+                  </a:lnTo>
+                  <a:lnTo>
+                    <a:pt x="5796420" y="1078714"/>
+                  </a:lnTo>
+                  <a:lnTo>
+                    <a:pt x="5866764" y="1080702"/>
+                  </a:lnTo>
+                  <a:lnTo>
+                    <a:pt x="5937109" y="1082668"/>
+                  </a:lnTo>
+                  <a:lnTo>
+                    <a:pt x="6007453" y="1084612"/>
+                  </a:lnTo>
+                  <a:lnTo>
+                    <a:pt x="6077798" y="1086535"/>
+                  </a:lnTo>
+                  <a:lnTo>
+                    <a:pt x="6148142" y="1088436"/>
+                  </a:lnTo>
+                  <a:lnTo>
+                    <a:pt x="6218487" y="1090315"/>
+                  </a:lnTo>
+                </a:path>
+              </a:pathLst>
+            </a:custGeom>
+          </p:spPr>
+          <p:txBody>
+            <a:bodyPr/>
+            <a:lstStyle/>
+            <a:p/>
+          </p:txBody>
+        </p:sp>
+        <p:sp>
+          <p:nvSpPr>
+            <p:cNvPr id="69" name="pl69"/>
+            <p:cNvSpPr/>
+            <p:nvPr/>
+          </p:nvSpPr>
+          <p:spPr>
+            <a:xfrm>
+              <a:off x="1235312" y="5087832"/>
+              <a:ext cx="6964104" cy="467895"/>
+            </a:xfrm>
+            <a:custGeom>
+              <a:avLst/>
+              <a:pathLst>
+                <a:path w="6964104" h="467895">
+                  <a:moveTo>
+                    <a:pt x="6964104" y="467895"/>
+                  </a:moveTo>
+                  <a:lnTo>
+                    <a:pt x="6893760" y="466362"/>
+                  </a:lnTo>
+                  <a:lnTo>
+                    <a:pt x="6823415" y="464767"/>
+                  </a:lnTo>
+                  <a:lnTo>
+                    <a:pt x="6753071" y="463108"/>
+                  </a:lnTo>
+                  <a:lnTo>
+                    <a:pt x="6682726" y="461381"/>
+                  </a:lnTo>
+                  <a:lnTo>
+                    <a:pt x="6612382" y="459585"/>
+                  </a:lnTo>
+                  <a:lnTo>
+                    <a:pt x="6542037" y="457717"/>
+                  </a:lnTo>
+                  <a:lnTo>
+                    <a:pt x="6471693" y="455773"/>
+                  </a:lnTo>
+                  <a:lnTo>
+                    <a:pt x="6401348" y="453750"/>
+                  </a:lnTo>
+                  <a:lnTo>
+                    <a:pt x="6331004" y="451646"/>
+                  </a:lnTo>
+                  <a:lnTo>
+                    <a:pt x="6260659" y="449457"/>
+                  </a:lnTo>
+                  <a:lnTo>
+                    <a:pt x="6190315" y="447179"/>
+                  </a:lnTo>
+                  <a:lnTo>
+                    <a:pt x="6119970" y="444809"/>
+                  </a:lnTo>
+                  <a:lnTo>
+                    <a:pt x="6049626" y="442344"/>
+                  </a:lnTo>
+                  <a:lnTo>
+                    <a:pt x="5979281" y="439779"/>
+                  </a:lnTo>
+                  <a:lnTo>
+                    <a:pt x="5908937" y="437110"/>
+                  </a:lnTo>
+                  <a:lnTo>
+                    <a:pt x="5838592" y="434334"/>
+                  </a:lnTo>
+                  <a:lnTo>
+                    <a:pt x="5768248" y="431446"/>
+                  </a:lnTo>
+                  <a:lnTo>
+                    <a:pt x="5697903" y="428441"/>
+                  </a:lnTo>
+                  <a:lnTo>
+                    <a:pt x="5627559" y="425314"/>
+                  </a:lnTo>
+                  <a:lnTo>
+                    <a:pt x="5557214" y="422062"/>
+                  </a:lnTo>
+                  <a:lnTo>
+                    <a:pt x="5486870" y="418678"/>
+                  </a:lnTo>
+                  <a:lnTo>
+                    <a:pt x="5416525" y="415157"/>
+                  </a:lnTo>
+                  <a:lnTo>
+                    <a:pt x="5346181" y="411494"/>
+                  </a:lnTo>
+                  <a:lnTo>
+                    <a:pt x="5275836" y="407683"/>
+                  </a:lnTo>
+                  <a:lnTo>
+                    <a:pt x="5205492" y="403718"/>
+                  </a:lnTo>
+                  <a:lnTo>
+                    <a:pt x="5135147" y="399593"/>
+                  </a:lnTo>
+                  <a:lnTo>
+                    <a:pt x="5064803" y="395302"/>
+                  </a:lnTo>
+                  <a:lnTo>
+                    <a:pt x="4994458" y="390837"/>
+                  </a:lnTo>
+                  <a:lnTo>
+                    <a:pt x="4924114" y="386192"/>
+                  </a:lnTo>
+                  <a:lnTo>
+                    <a:pt x="4853769" y="381359"/>
+                  </a:lnTo>
+                  <a:lnTo>
+                    <a:pt x="4783425" y="376332"/>
+                  </a:lnTo>
+                  <a:lnTo>
+                    <a:pt x="4713080" y="371101"/>
+                  </a:lnTo>
+                  <a:lnTo>
+                    <a:pt x="4642736" y="365659"/>
+                  </a:lnTo>
+                  <a:lnTo>
+                    <a:pt x="4572391" y="359997"/>
+                  </a:lnTo>
+                  <a:lnTo>
+                    <a:pt x="4502047" y="354106"/>
+                  </a:lnTo>
+                  <a:lnTo>
+                    <a:pt x="4431702" y="347977"/>
+                  </a:lnTo>
+                  <a:lnTo>
+                    <a:pt x="4361358" y="341601"/>
+                  </a:lnTo>
+                  <a:lnTo>
+                    <a:pt x="4291013" y="334968"/>
+                  </a:lnTo>
+                  <a:lnTo>
+                    <a:pt x="4220669" y="328066"/>
+                  </a:lnTo>
+                  <a:lnTo>
+                    <a:pt x="4150324" y="320886"/>
+                  </a:lnTo>
+                  <a:lnTo>
+                    <a:pt x="4079980" y="313416"/>
+                  </a:lnTo>
+                  <a:lnTo>
+                    <a:pt x="4009635" y="305644"/>
+                  </a:lnTo>
+                  <a:lnTo>
+                    <a:pt x="3939291" y="297559"/>
+                  </a:lnTo>
+                  <a:lnTo>
+                    <a:pt x="3868946" y="289146"/>
+                  </a:lnTo>
+                  <a:lnTo>
+                    <a:pt x="3798602" y="280394"/>
+                  </a:lnTo>
+                  <a:lnTo>
+                    <a:pt x="3728257" y="271289"/>
+                  </a:lnTo>
+                  <a:lnTo>
+                    <a:pt x="3657913" y="261816"/>
+                  </a:lnTo>
+                  <a:lnTo>
+                    <a:pt x="3587569" y="251960"/>
+                  </a:lnTo>
+                  <a:lnTo>
+                    <a:pt x="3517224" y="241706"/>
+                  </a:lnTo>
+                  <a:lnTo>
+                    <a:pt x="3446880" y="231038"/>
+                  </a:lnTo>
+                  <a:lnTo>
+                    <a:pt x="3376535" y="219939"/>
+                  </a:lnTo>
+                  <a:lnTo>
+                    <a:pt x="3306191" y="208392"/>
+                  </a:lnTo>
+                  <a:lnTo>
+                    <a:pt x="3235846" y="203685"/>
+                  </a:lnTo>
+                  <a:lnTo>
+                    <a:pt x="3165502" y="200281"/>
+                  </a:lnTo>
+                  <a:lnTo>
+                    <a:pt x="3095157" y="196839"/>
+                  </a:lnTo>
+                  <a:lnTo>
+                    <a:pt x="3024813" y="193358"/>
+                  </a:lnTo>
+                  <a:lnTo>
+                    <a:pt x="2954468" y="189838"/>
+                  </a:lnTo>
+                  <a:lnTo>
+                    <a:pt x="2884124" y="186278"/>
+                  </a:lnTo>
+                  <a:lnTo>
+                    <a:pt x="2813779" y="182679"/>
+                  </a:lnTo>
+                  <a:lnTo>
+                    <a:pt x="2743435" y="179038"/>
+                  </a:lnTo>
+                  <a:lnTo>
+                    <a:pt x="2673090" y="175357"/>
+                  </a:lnTo>
+                  <a:lnTo>
+                    <a:pt x="2602746" y="171634"/>
+                  </a:lnTo>
+                  <a:lnTo>
+                    <a:pt x="2532401" y="167869"/>
+                  </a:lnTo>
+                  <a:lnTo>
+                    <a:pt x="2462057" y="164062"/>
+                  </a:lnTo>
+                  <a:lnTo>
+                    <a:pt x="2391712" y="160212"/>
+                  </a:lnTo>
+                  <a:lnTo>
+                    <a:pt x="2321368" y="156319"/>
+                  </a:lnTo>
+                  <a:lnTo>
+                    <a:pt x="2251023" y="152381"/>
+                  </a:lnTo>
+                  <a:lnTo>
+                    <a:pt x="2180679" y="148400"/>
+                  </a:lnTo>
+                  <a:lnTo>
+                    <a:pt x="2110334" y="144373"/>
+                  </a:lnTo>
+                  <a:lnTo>
+                    <a:pt x="2039990" y="140302"/>
+                  </a:lnTo>
+                  <a:lnTo>
+                    <a:pt x="1969645" y="136184"/>
+                  </a:lnTo>
+                  <a:lnTo>
+                    <a:pt x="1899301" y="132020"/>
+                  </a:lnTo>
+                  <a:lnTo>
+                    <a:pt x="1828956" y="127809"/>
+                  </a:lnTo>
+                  <a:lnTo>
+                    <a:pt x="1758612" y="123550"/>
+                  </a:lnTo>
+                  <a:lnTo>
+                    <a:pt x="1688267" y="119244"/>
+                  </a:lnTo>
+                  <a:lnTo>
+                    <a:pt x="1617923" y="114889"/>
+                  </a:lnTo>
+                  <a:lnTo>
+                    <a:pt x="1547578" y="110485"/>
+                  </a:lnTo>
+                  <a:lnTo>
+                    <a:pt x="1477234" y="106032"/>
+                  </a:lnTo>
+                  <a:lnTo>
+                    <a:pt x="1406889" y="101528"/>
+                  </a:lnTo>
+                  <a:lnTo>
+                    <a:pt x="1336545" y="96973"/>
+                  </a:lnTo>
+                  <a:lnTo>
+                    <a:pt x="1266200" y="92368"/>
+                  </a:lnTo>
+                  <a:lnTo>
+                    <a:pt x="1195856" y="87710"/>
+                  </a:lnTo>
+                  <a:lnTo>
+                    <a:pt x="1125511" y="83000"/>
+                  </a:lnTo>
+                  <a:lnTo>
+                    <a:pt x="1055167" y="78237"/>
+                  </a:lnTo>
+                  <a:lnTo>
+                    <a:pt x="984822" y="73420"/>
+                  </a:lnTo>
+                  <a:lnTo>
+                    <a:pt x="914478" y="68549"/>
+                  </a:lnTo>
+                  <a:lnTo>
+                    <a:pt x="844133" y="63623"/>
+                  </a:lnTo>
+                  <a:lnTo>
+                    <a:pt x="773789" y="58641"/>
+                  </a:lnTo>
+                  <a:lnTo>
+                    <a:pt x="703444" y="53604"/>
+                  </a:lnTo>
+                  <a:lnTo>
+                    <a:pt x="633100" y="48510"/>
+                  </a:lnTo>
+                  <a:lnTo>
+                    <a:pt x="562755" y="43358"/>
+                  </a:lnTo>
+                  <a:lnTo>
+                    <a:pt x="492411" y="38148"/>
+                  </a:lnTo>
+                  <a:lnTo>
+                    <a:pt x="422066" y="32880"/>
+                  </a:lnTo>
+                  <a:lnTo>
+                    <a:pt x="351722" y="27552"/>
+                  </a:lnTo>
+                  <a:lnTo>
+                    <a:pt x="281377" y="22164"/>
+                  </a:lnTo>
+                  <a:lnTo>
+                    <a:pt x="211033" y="16716"/>
+                  </a:lnTo>
+                  <a:lnTo>
+                    <a:pt x="140688" y="11206"/>
+                  </a:lnTo>
+                  <a:lnTo>
+                    <a:pt x="70344" y="5634"/>
+                  </a:lnTo>
+                  <a:lnTo>
+                    <a:pt x="0" y="0"/>
+                  </a:lnTo>
+                </a:path>
+              </a:pathLst>
+            </a:custGeom>
+          </p:spPr>
+          <p:txBody>
+            <a:bodyPr/>
+            <a:lstStyle/>
+            <a:p/>
+          </p:txBody>
+        </p:sp>
+        <p:sp>
+          <p:nvSpPr>
+            <p:cNvPr id="70" name="pl70"/>
+            <p:cNvSpPr/>
+            <p:nvPr/>
+          </p:nvSpPr>
+          <p:spPr>
+            <a:xfrm>
+              <a:off x="1235312" y="4610125"/>
+              <a:ext cx="6964104" cy="903970"/>
+            </a:xfrm>
+            <a:custGeom>
+              <a:avLst/>
+              <a:pathLst>
+                <a:path w="6964104" h="903970">
+                  <a:moveTo>
+                    <a:pt x="0" y="0"/>
+                  </a:moveTo>
+                  <a:lnTo>
+                    <a:pt x="70344" y="24664"/>
+                  </a:lnTo>
+                  <a:lnTo>
+                    <a:pt x="140688" y="48710"/>
+                  </a:lnTo>
+                  <a:lnTo>
+                    <a:pt x="211033" y="72154"/>
+                  </a:lnTo>
+                  <a:lnTo>
+                    <a:pt x="281377" y="95009"/>
+                  </a:lnTo>
+                  <a:lnTo>
+                    <a:pt x="351722" y="117291"/>
+                  </a:lnTo>
+                  <a:lnTo>
+                    <a:pt x="422066" y="139015"/>
+                  </a:lnTo>
+                  <a:lnTo>
+                    <a:pt x="492411" y="160193"/>
+                  </a:lnTo>
+                  <a:lnTo>
+                    <a:pt x="562755" y="180841"/>
+                  </a:lnTo>
+                  <a:lnTo>
+                    <a:pt x="633100" y="200970"/>
+                  </a:lnTo>
+                  <a:lnTo>
+                    <a:pt x="703444" y="220595"/>
+                  </a:lnTo>
+                  <a:lnTo>
+                    <a:pt x="773789" y="239728"/>
+                  </a:lnTo>
+                  <a:lnTo>
+                    <a:pt x="844133" y="258381"/>
+                  </a:lnTo>
+                  <a:lnTo>
+                    <a:pt x="914478" y="276567"/>
+                  </a:lnTo>
+                  <a:lnTo>
+                    <a:pt x="984822" y="294296"/>
+                  </a:lnTo>
+                  <a:lnTo>
+                    <a:pt x="1055167" y="311581"/>
+                  </a:lnTo>
+                  <a:lnTo>
+                    <a:pt x="1125511" y="328432"/>
+                  </a:lnTo>
+                  <a:lnTo>
+                    <a:pt x="1195856" y="344860"/>
+                  </a:lnTo>
+                  <a:lnTo>
+                    <a:pt x="1266200" y="360877"/>
+                  </a:lnTo>
+                  <a:lnTo>
+                    <a:pt x="1336545" y="376492"/>
+                  </a:lnTo>
+                  <a:lnTo>
+                    <a:pt x="1406889" y="391716"/>
+                  </a:lnTo>
+                  <a:lnTo>
+                    <a:pt x="1477234" y="406557"/>
+                  </a:lnTo>
+                  <a:lnTo>
+                    <a:pt x="1547578" y="421027"/>
+                  </a:lnTo>
+                  <a:lnTo>
+                    <a:pt x="1617923" y="435133"/>
+                  </a:lnTo>
+                  <a:lnTo>
+                    <a:pt x="1688267" y="448886"/>
+                  </a:lnTo>
+                  <a:lnTo>
+                    <a:pt x="1758612" y="462294"/>
+                  </a:lnTo>
+                  <a:lnTo>
+                    <a:pt x="1828956" y="475366"/>
+                  </a:lnTo>
+                  <a:lnTo>
+                    <a:pt x="1899301" y="488110"/>
+                  </a:lnTo>
+                  <a:lnTo>
+                    <a:pt x="1969645" y="500534"/>
+                  </a:lnTo>
+                  <a:lnTo>
+                    <a:pt x="2039990" y="512647"/>
+                  </a:lnTo>
+                  <a:lnTo>
+                    <a:pt x="2110334" y="524456"/>
+                  </a:lnTo>
+                  <a:lnTo>
+                    <a:pt x="2180679" y="535969"/>
+                  </a:lnTo>
+                  <a:lnTo>
+                    <a:pt x="2251023" y="547194"/>
+                  </a:lnTo>
+                  <a:lnTo>
+                    <a:pt x="2321368" y="558136"/>
+                  </a:lnTo>
+                  <a:lnTo>
+                    <a:pt x="2391712" y="568805"/>
+                  </a:lnTo>
+                  <a:lnTo>
+                    <a:pt x="2462057" y="579205"/>
+                  </a:lnTo>
+                  <a:lnTo>
+                    <a:pt x="2532401" y="589345"/>
+                  </a:lnTo>
+                  <a:lnTo>
+                    <a:pt x="2602746" y="599231"/>
+                  </a:lnTo>
+                  <a:lnTo>
+                    <a:pt x="2673090" y="608869"/>
+                  </a:lnTo>
+                  <a:lnTo>
+                    <a:pt x="2743435" y="618265"/>
+                  </a:lnTo>
+                  <a:lnTo>
+                    <a:pt x="2813779" y="627426"/>
+                  </a:lnTo>
+                  <a:lnTo>
+                    <a:pt x="2884124" y="636356"/>
+                  </a:lnTo>
+                  <a:lnTo>
+                    <a:pt x="2954468" y="645063"/>
+                  </a:lnTo>
+                  <a:lnTo>
+                    <a:pt x="3024813" y="653552"/>
+                  </a:lnTo>
+                  <a:lnTo>
+                    <a:pt x="3095157" y="661827"/>
+                  </a:lnTo>
+                  <a:lnTo>
+                    <a:pt x="3165502" y="669895"/>
+                  </a:lnTo>
+                  <a:lnTo>
+                    <a:pt x="3235846" y="677761"/>
+                  </a:lnTo>
+                  <a:lnTo>
+                    <a:pt x="3306191" y="685430"/>
+                  </a:lnTo>
+                  <a:lnTo>
+                    <a:pt x="3376535" y="692906"/>
+                  </a:lnTo>
+                  <a:lnTo>
+                    <a:pt x="3446880" y="700195"/>
+                  </a:lnTo>
+                  <a:lnTo>
+                    <a:pt x="3517224" y="707301"/>
+                  </a:lnTo>
+                  <a:lnTo>
+                    <a:pt x="3587569" y="714228"/>
+                  </a:lnTo>
+                  <a:lnTo>
+                    <a:pt x="3657913" y="720983"/>
+                  </a:lnTo>
+                  <a:lnTo>
+                    <a:pt x="3728257" y="727567"/>
+                  </a:lnTo>
+                  <a:lnTo>
+                    <a:pt x="3798602" y="733987"/>
+                  </a:lnTo>
+                  <a:lnTo>
+                    <a:pt x="3868946" y="740245"/>
+                  </a:lnTo>
+                  <a:lnTo>
+                    <a:pt x="3939291" y="746347"/>
+                  </a:lnTo>
+                  <a:lnTo>
+                    <a:pt x="4009635" y="752296"/>
+                  </a:lnTo>
+                  <a:lnTo>
+                    <a:pt x="4079980" y="758095"/>
+                  </a:lnTo>
+                  <a:lnTo>
+                    <a:pt x="4150324" y="763749"/>
+                  </a:lnTo>
+                  <a:lnTo>
+                    <a:pt x="4220669" y="769261"/>
+                  </a:lnTo>
+                  <a:lnTo>
+                    <a:pt x="4291013" y="774635"/>
+                  </a:lnTo>
+                  <a:lnTo>
+                    <a:pt x="4361358" y="779874"/>
+                  </a:lnTo>
+                  <a:lnTo>
+                    <a:pt x="4431702" y="784982"/>
+                  </a:lnTo>
+                  <a:lnTo>
+                    <a:pt x="4502047" y="789962"/>
+                  </a:lnTo>
+                  <a:lnTo>
+                    <a:pt x="4572391" y="794817"/>
+                  </a:lnTo>
+                  <a:lnTo>
+                    <a:pt x="4642736" y="799550"/>
+                  </a:lnTo>
+                  <a:lnTo>
+                    <a:pt x="4713080" y="804164"/>
+                  </a:lnTo>
+                  <a:lnTo>
+                    <a:pt x="4783425" y="808663"/>
+                  </a:lnTo>
+                  <a:lnTo>
+                    <a:pt x="4853769" y="813049"/>
+                  </a:lnTo>
+                  <a:lnTo>
+                    <a:pt x="4924114" y="817325"/>
+                  </a:lnTo>
+                  <a:lnTo>
+                    <a:pt x="4994458" y="821494"/>
+                  </a:lnTo>
+                  <a:lnTo>
+                    <a:pt x="5064803" y="825558"/>
+                  </a:lnTo>
+                  <a:lnTo>
+                    <a:pt x="5135147" y="829520"/>
+                  </a:lnTo>
+                  <a:lnTo>
+                    <a:pt x="5205492" y="833383"/>
+                  </a:lnTo>
+                  <a:lnTo>
+                    <a:pt x="5275836" y="837149"/>
+                  </a:lnTo>
+                  <a:lnTo>
+                    <a:pt x="5346181" y="840821"/>
+                  </a:lnTo>
+                  <a:lnTo>
+                    <a:pt x="5416525" y="844400"/>
+                  </a:lnTo>
+                  <a:lnTo>
+                    <a:pt x="5486870" y="847890"/>
+                  </a:lnTo>
+                  <a:lnTo>
+                    <a:pt x="5557214" y="851292"/>
+                  </a:lnTo>
+                  <a:lnTo>
+                    <a:pt x="5627559" y="854609"/>
+                  </a:lnTo>
+                  <a:lnTo>
+                    <a:pt x="5697903" y="857843"/>
+                  </a:lnTo>
+                  <a:lnTo>
+                    <a:pt x="5768248" y="860995"/>
+                  </a:lnTo>
+                  <a:lnTo>
+                    <a:pt x="5838592" y="864069"/>
+                  </a:lnTo>
+                  <a:lnTo>
+                    <a:pt x="5908937" y="867065"/>
+                  </a:lnTo>
+                  <a:lnTo>
+                    <a:pt x="5979281" y="869987"/>
+                  </a:lnTo>
+                  <a:lnTo>
+                    <a:pt x="6049626" y="872835"/>
+                  </a:lnTo>
+                  <a:lnTo>
+                    <a:pt x="6119970" y="875611"/>
+                  </a:lnTo>
+                  <a:lnTo>
+                    <a:pt x="6190315" y="878318"/>
+                  </a:lnTo>
+                  <a:lnTo>
+                    <a:pt x="6260659" y="880958"/>
+                  </a:lnTo>
+                  <a:lnTo>
+                    <a:pt x="6331004" y="883531"/>
+                  </a:lnTo>
+                  <a:lnTo>
+                    <a:pt x="6401348" y="886039"/>
+                  </a:lnTo>
+                  <a:lnTo>
+                    <a:pt x="6471693" y="888485"/>
+                  </a:lnTo>
+                  <a:lnTo>
+                    <a:pt x="6542037" y="890869"/>
+                  </a:lnTo>
+                  <a:lnTo>
+                    <a:pt x="6612382" y="893193"/>
+                  </a:lnTo>
+                  <a:lnTo>
+                    <a:pt x="6682726" y="895459"/>
+                  </a:lnTo>
+                  <a:lnTo>
+                    <a:pt x="6753071" y="897669"/>
+                  </a:lnTo>
+                  <a:lnTo>
+                    <a:pt x="6823415" y="899823"/>
+                  </a:lnTo>
+                  <a:lnTo>
+                    <a:pt x="6893760" y="901923"/>
+                  </a:lnTo>
+                  <a:lnTo>
+                    <a:pt x="6964104" y="903970"/>
+                  </a:lnTo>
+                </a:path>
+              </a:pathLst>
+            </a:custGeom>
+            <a:ln w="27101" cap="flat">
+              <a:solidFill>
+                <a:srgbClr val="FF8C00">
+                  <a:alpha val="100000"/>
+                </a:srgbClr>
+              </a:solidFill>
+              <a:prstDash val="solid"/>
+              <a:round/>
+            </a:ln>
+          </p:spPr>
+          <p:txBody>
+            <a:bodyPr/>
+            <a:lstStyle/>
+            <a:p/>
+          </p:txBody>
+        </p:sp>
+        <p:sp>
+          <p:nvSpPr>
+            <p:cNvPr id="71" name="pl71"/>
+            <p:cNvSpPr/>
+            <p:nvPr/>
+          </p:nvSpPr>
+          <p:spPr>
+            <a:xfrm>
+              <a:off x="887106" y="5294352"/>
+              <a:ext cx="7660515" cy="0"/>
+            </a:xfrm>
+            <a:custGeom>
+              <a:avLst/>
+              <a:pathLst>
+                <a:path w="7660515" h="0">
+                  <a:moveTo>
+                    <a:pt x="0" y="0"/>
+                  </a:moveTo>
+                  <a:lnTo>
+                    <a:pt x="7660515" y="0"/>
+                  </a:lnTo>
+                  <a:lnTo>
+                    <a:pt x="7660515" y="0"/>
+                  </a:lnTo>
+                </a:path>
+              </a:pathLst>
+            </a:custGeom>
+            <a:ln w="13550" cap="flat">
+              <a:solidFill>
+                <a:srgbClr val="7F7F7F">
+                  <a:alpha val="100000"/>
+                </a:srgbClr>
+              </a:solidFill>
+              <a:prstDash val="dash"/>
+              <a:round/>
+            </a:ln>
+          </p:spPr>
+          <p:txBody>
+            <a:bodyPr/>
+            <a:lstStyle/>
+            <a:p/>
+          </p:txBody>
+        </p:sp>
+        <p:sp>
+          <p:nvSpPr>
+            <p:cNvPr id="72" name="pl72"/>
+            <p:cNvSpPr/>
+            <p:nvPr/>
+          </p:nvSpPr>
+          <p:spPr>
+            <a:xfrm>
+              <a:off x="4530353" y="4336484"/>
+              <a:ext cx="0" cy="1317069"/>
+            </a:xfrm>
+            <a:custGeom>
+              <a:avLst/>
+              <a:pathLst>
+                <a:path w="0" h="1317069">
+                  <a:moveTo>
+                    <a:pt x="0" y="1317069"/>
+                  </a:moveTo>
+                  <a:lnTo>
+                    <a:pt x="0" y="0"/>
+                  </a:lnTo>
+                  <a:lnTo>
+                    <a:pt x="0" y="0"/>
+                  </a:lnTo>
+                </a:path>
+              </a:pathLst>
+            </a:custGeom>
+            <a:ln w="13550" cap="flat">
+              <a:solidFill>
+                <a:srgbClr val="666666">
+                  <a:alpha val="100000"/>
+                </a:srgbClr>
+              </a:solidFill>
+              <a:prstDash val="dot"/>
+              <a:round/>
+            </a:ln>
+          </p:spPr>
+          <p:txBody>
+            <a:bodyPr/>
+            <a:lstStyle/>
+            <a:p/>
+          </p:txBody>
+        </p:sp>
+        <p:sp>
+          <p:nvSpPr>
+            <p:cNvPr id="73" name="tx73"/>
+            <p:cNvSpPr/>
+            <p:nvPr/>
+          </p:nvSpPr>
+          <p:spPr>
+            <a:xfrm>
+              <a:off x="762297" y="5553636"/>
+              <a:ext cx="62179" cy="80101"/>
+            </a:xfrm>
+            <a:prstGeom prst="rect">
+              <a:avLst/>
+            </a:prstGeom>
+            <a:noFill/>
+          </p:spPr>
+          <p:txBody>
+            <a:bodyPr lIns="0" rIns="0" tIns="0" bIns="0" anchorCtr="1" anchor="ctr" wrap="none"/>
+            <a:lstStyle/>
+            <a:p>
+              <a:pPr algn="l" marL="0" marR="0" indent="0">
+                <a:lnSpc>
+                  <a:spcPts val="880"/>
+                </a:lnSpc>
+                <a:spcBef>
+                  <a:spcPts val="0"/>
+                </a:spcBef>
+                <a:spcAft>
+                  <a:spcPts val="0"/>
+                </a:spcAft>
+              </a:pPr>
+              <a:r>
+                <a:rPr sz="880">
+                  <a:solidFill>
+                    <a:srgbClr val="4D4D4D">
+                      <a:alpha val="100000"/>
+                    </a:srgbClr>
+                  </a:solidFill>
+                  <a:latin typeface="Helvetica"/>
+                  <a:cs typeface="Helvetica"/>
+                </a:rPr>
+                <a:t>0</a:t>
+              </a:r>
+            </a:p>
+          </p:txBody>
+        </p:sp>
+        <p:sp>
+          <p:nvSpPr>
+            <p:cNvPr id="74" name="tx74"/>
+            <p:cNvSpPr/>
+            <p:nvPr/>
+          </p:nvSpPr>
+          <p:spPr>
+            <a:xfrm>
+              <a:off x="762297" y="5254302"/>
+              <a:ext cx="62179" cy="80101"/>
+            </a:xfrm>
+            <a:prstGeom prst="rect">
+              <a:avLst/>
+            </a:prstGeom>
+            <a:noFill/>
+          </p:spPr>
+          <p:txBody>
+            <a:bodyPr lIns="0" rIns="0" tIns="0" bIns="0" anchorCtr="1" anchor="ctr" wrap="none"/>
+            <a:lstStyle/>
+            <a:p>
+              <a:pPr algn="l" marL="0" marR="0" indent="0">
+                <a:lnSpc>
+                  <a:spcPts val="880"/>
+                </a:lnSpc>
+                <a:spcBef>
+                  <a:spcPts val="0"/>
+                </a:spcBef>
+                <a:spcAft>
+                  <a:spcPts val="0"/>
+                </a:spcAft>
+              </a:pPr>
+              <a:r>
+                <a:rPr sz="880">
+                  <a:solidFill>
+                    <a:srgbClr val="4D4D4D">
+                      <a:alpha val="100000"/>
+                    </a:srgbClr>
+                  </a:solidFill>
+                  <a:latin typeface="Helvetica"/>
+                  <a:cs typeface="Helvetica"/>
+                </a:rPr>
+                <a:t>1</a:t>
+              </a:r>
+            </a:p>
+          </p:txBody>
+        </p:sp>
+        <p:sp>
+          <p:nvSpPr>
+            <p:cNvPr id="75" name="tx75"/>
+            <p:cNvSpPr/>
+            <p:nvPr/>
+          </p:nvSpPr>
+          <p:spPr>
+            <a:xfrm>
+              <a:off x="762297" y="4954968"/>
+              <a:ext cx="62179" cy="80101"/>
+            </a:xfrm>
+            <a:prstGeom prst="rect">
+              <a:avLst/>
+            </a:prstGeom>
+            <a:noFill/>
+          </p:spPr>
+          <p:txBody>
+            <a:bodyPr lIns="0" rIns="0" tIns="0" bIns="0" anchorCtr="1" anchor="ctr" wrap="none"/>
+            <a:lstStyle/>
+            <a:p>
+              <a:pPr algn="l" marL="0" marR="0" indent="0">
+                <a:lnSpc>
+                  <a:spcPts val="880"/>
+                </a:lnSpc>
+                <a:spcBef>
+                  <a:spcPts val="0"/>
+                </a:spcBef>
+                <a:spcAft>
+                  <a:spcPts val="0"/>
+                </a:spcAft>
+              </a:pPr>
+              <a:r>
+                <a:rPr sz="880">
+                  <a:solidFill>
+                    <a:srgbClr val="4D4D4D">
+                      <a:alpha val="100000"/>
+                    </a:srgbClr>
+                  </a:solidFill>
+                  <a:latin typeface="Helvetica"/>
+                  <a:cs typeface="Helvetica"/>
+                </a:rPr>
+                <a:t>2</a:t>
+              </a:r>
+            </a:p>
+          </p:txBody>
+        </p:sp>
+        <p:sp>
+          <p:nvSpPr>
+            <p:cNvPr id="76" name="tx76"/>
+            <p:cNvSpPr/>
+            <p:nvPr/>
+          </p:nvSpPr>
+          <p:spPr>
+            <a:xfrm>
+              <a:off x="762297" y="4655634"/>
+              <a:ext cx="62179" cy="80101"/>
+            </a:xfrm>
+            <a:prstGeom prst="rect">
+              <a:avLst/>
+            </a:prstGeom>
+            <a:noFill/>
+          </p:spPr>
+          <p:txBody>
+            <a:bodyPr lIns="0" rIns="0" tIns="0" bIns="0" anchorCtr="1" anchor="ctr" wrap="none"/>
+            <a:lstStyle/>
+            <a:p>
+              <a:pPr algn="l" marL="0" marR="0" indent="0">
+                <a:lnSpc>
+                  <a:spcPts val="880"/>
+                </a:lnSpc>
+                <a:spcBef>
+                  <a:spcPts val="0"/>
+                </a:spcBef>
+                <a:spcAft>
+                  <a:spcPts val="0"/>
+                </a:spcAft>
+              </a:pPr>
+              <a:r>
+                <a:rPr sz="880">
+                  <a:solidFill>
+                    <a:srgbClr val="4D4D4D">
+                      <a:alpha val="100000"/>
+                    </a:srgbClr>
+                  </a:solidFill>
+                  <a:latin typeface="Helvetica"/>
+                  <a:cs typeface="Helvetica"/>
+                </a:rPr>
+                <a:t>3</a:t>
+              </a:r>
+            </a:p>
+          </p:txBody>
+        </p:sp>
+        <p:sp>
+          <p:nvSpPr>
+            <p:cNvPr id="77" name="tx77"/>
+            <p:cNvSpPr/>
+            <p:nvPr/>
+          </p:nvSpPr>
+          <p:spPr>
+            <a:xfrm>
+              <a:off x="762297" y="4356300"/>
+              <a:ext cx="62179" cy="80101"/>
+            </a:xfrm>
+            <a:prstGeom prst="rect">
+              <a:avLst/>
+            </a:prstGeom>
+            <a:noFill/>
+          </p:spPr>
+          <p:txBody>
+            <a:bodyPr lIns="0" rIns="0" tIns="0" bIns="0" anchorCtr="1" anchor="ctr" wrap="none"/>
+            <a:lstStyle/>
+            <a:p>
+              <a:pPr algn="l" marL="0" marR="0" indent="0">
+                <a:lnSpc>
+                  <a:spcPts val="880"/>
+                </a:lnSpc>
+                <a:spcBef>
+                  <a:spcPts val="0"/>
+                </a:spcBef>
+                <a:spcAft>
+                  <a:spcPts val="0"/>
+                </a:spcAft>
+              </a:pPr>
+              <a:r>
+                <a:rPr sz="880">
+                  <a:solidFill>
+                    <a:srgbClr val="4D4D4D">
+                      <a:alpha val="100000"/>
+                    </a:srgbClr>
+                  </a:solidFill>
+                  <a:latin typeface="Helvetica"/>
+                  <a:cs typeface="Helvetica"/>
+                </a:rPr>
+                <a:t>4</a:t>
+              </a:r>
+            </a:p>
+          </p:txBody>
+        </p:sp>
+        <p:sp>
+          <p:nvSpPr>
+            <p:cNvPr id="78" name="tx78"/>
+            <p:cNvSpPr/>
+            <p:nvPr/>
+          </p:nvSpPr>
+          <p:spPr>
+            <a:xfrm>
+              <a:off x="1241001" y="5716183"/>
+              <a:ext cx="161574" cy="80101"/>
+            </a:xfrm>
+            <a:prstGeom prst="rect">
+              <a:avLst/>
+            </a:prstGeom>
+            <a:noFill/>
+          </p:spPr>
+          <p:txBody>
+            <a:bodyPr lIns="0" rIns="0" tIns="0" bIns="0" anchorCtr="1" anchor="ctr" wrap="none"/>
+            <a:lstStyle/>
+            <a:p>
+              <a:pPr algn="l" marL="0" marR="0" indent="0">
+                <a:lnSpc>
+                  <a:spcPts val="880"/>
+                </a:lnSpc>
+                <a:spcBef>
+                  <a:spcPts val="0"/>
+                </a:spcBef>
+                <a:spcAft>
+                  <a:spcPts val="0"/>
+                </a:spcAft>
+              </a:pPr>
+              <a:r>
+                <a:rPr sz="880">
+                  <a:solidFill>
+                    <a:srgbClr val="4D4D4D">
+                      <a:alpha val="100000"/>
+                    </a:srgbClr>
+                  </a:solidFill>
+                  <a:latin typeface="Helvetica"/>
+                  <a:cs typeface="Helvetica"/>
+                </a:rPr>
+                <a:t>-40</a:t>
+              </a:r>
+            </a:p>
+          </p:txBody>
+        </p:sp>
+        <p:sp>
+          <p:nvSpPr>
+            <p:cNvPr id="79" name="tx79"/>
+            <p:cNvSpPr/>
+            <p:nvPr/>
+          </p:nvSpPr>
+          <p:spPr>
+            <a:xfrm>
+              <a:off x="2054602" y="5716183"/>
+              <a:ext cx="161574" cy="80101"/>
+            </a:xfrm>
+            <a:prstGeom prst="rect">
+              <a:avLst/>
+            </a:prstGeom>
+            <a:noFill/>
+          </p:spPr>
+          <p:txBody>
+            <a:bodyPr lIns="0" rIns="0" tIns="0" bIns="0" anchorCtr="1" anchor="ctr" wrap="none"/>
+            <a:lstStyle/>
+            <a:p>
+              <a:pPr algn="l" marL="0" marR="0" indent="0">
+                <a:lnSpc>
+                  <a:spcPts val="880"/>
+                </a:lnSpc>
+                <a:spcBef>
+                  <a:spcPts val="0"/>
+                </a:spcBef>
+                <a:spcAft>
+                  <a:spcPts val="0"/>
+                </a:spcAft>
+              </a:pPr>
+              <a:r>
+                <a:rPr sz="880">
+                  <a:solidFill>
+                    <a:srgbClr val="4D4D4D">
+                      <a:alpha val="100000"/>
+                    </a:srgbClr>
+                  </a:solidFill>
+                  <a:latin typeface="Helvetica"/>
+                  <a:cs typeface="Helvetica"/>
+                </a:rPr>
+                <a:t>-30</a:t>
+              </a:r>
+            </a:p>
+          </p:txBody>
+        </p:sp>
+        <p:sp>
+          <p:nvSpPr>
+            <p:cNvPr id="80" name="tx80"/>
+            <p:cNvSpPr/>
+            <p:nvPr/>
+          </p:nvSpPr>
+          <p:spPr>
+            <a:xfrm>
+              <a:off x="2868203" y="5716183"/>
+              <a:ext cx="161574" cy="80101"/>
+            </a:xfrm>
+            <a:prstGeom prst="rect">
+              <a:avLst/>
+            </a:prstGeom>
+            <a:noFill/>
+          </p:spPr>
+          <p:txBody>
+            <a:bodyPr lIns="0" rIns="0" tIns="0" bIns="0" anchorCtr="1" anchor="ctr" wrap="none"/>
+            <a:lstStyle/>
+            <a:p>
+              <a:pPr algn="l" marL="0" marR="0" indent="0">
+                <a:lnSpc>
+                  <a:spcPts val="880"/>
+                </a:lnSpc>
+                <a:spcBef>
+                  <a:spcPts val="0"/>
+                </a:spcBef>
+                <a:spcAft>
+                  <a:spcPts val="0"/>
+                </a:spcAft>
+              </a:pPr>
+              <a:r>
+                <a:rPr sz="880">
+                  <a:solidFill>
+                    <a:srgbClr val="4D4D4D">
+                      <a:alpha val="100000"/>
+                    </a:srgbClr>
+                  </a:solidFill>
+                  <a:latin typeface="Helvetica"/>
+                  <a:cs typeface="Helvetica"/>
+                </a:rPr>
+                <a:t>-20</a:t>
+              </a:r>
+            </a:p>
+          </p:txBody>
+        </p:sp>
+        <p:sp>
+          <p:nvSpPr>
+            <p:cNvPr id="81" name="tx81"/>
+            <p:cNvSpPr/>
+            <p:nvPr/>
+          </p:nvSpPr>
+          <p:spPr>
+            <a:xfrm>
+              <a:off x="3681805" y="5716183"/>
+              <a:ext cx="161574" cy="80101"/>
+            </a:xfrm>
+            <a:prstGeom prst="rect">
+              <a:avLst/>
+            </a:prstGeom>
+            <a:noFill/>
+          </p:spPr>
+          <p:txBody>
+            <a:bodyPr lIns="0" rIns="0" tIns="0" bIns="0" anchorCtr="1" anchor="ctr" wrap="none"/>
+            <a:lstStyle/>
+            <a:p>
+              <a:pPr algn="l" marL="0" marR="0" indent="0">
+                <a:lnSpc>
+                  <a:spcPts val="880"/>
+                </a:lnSpc>
+                <a:spcBef>
+                  <a:spcPts val="0"/>
+                </a:spcBef>
+                <a:spcAft>
+                  <a:spcPts val="0"/>
+                </a:spcAft>
+              </a:pPr>
+              <a:r>
+                <a:rPr sz="880">
+                  <a:solidFill>
+                    <a:srgbClr val="4D4D4D">
+                      <a:alpha val="100000"/>
+                    </a:srgbClr>
+                  </a:solidFill>
+                  <a:latin typeface="Helvetica"/>
+                  <a:cs typeface="Helvetica"/>
+                </a:rPr>
+                <a:t>-10</a:t>
+              </a:r>
+            </a:p>
+          </p:txBody>
+        </p:sp>
+        <p:sp>
+          <p:nvSpPr>
+            <p:cNvPr id="82" name="tx82"/>
+            <p:cNvSpPr/>
+            <p:nvPr/>
+          </p:nvSpPr>
+          <p:spPr>
+            <a:xfrm>
+              <a:off x="4545104" y="5716183"/>
+              <a:ext cx="62179" cy="80101"/>
+            </a:xfrm>
+            <a:prstGeom prst="rect">
+              <a:avLst/>
+            </a:prstGeom>
+            <a:noFill/>
+          </p:spPr>
+          <p:txBody>
+            <a:bodyPr lIns="0" rIns="0" tIns="0" bIns="0" anchorCtr="1" anchor="ctr" wrap="none"/>
+            <a:lstStyle/>
+            <a:p>
+              <a:pPr algn="l" marL="0" marR="0" indent="0">
+                <a:lnSpc>
+                  <a:spcPts val="880"/>
+                </a:lnSpc>
+                <a:spcBef>
+                  <a:spcPts val="0"/>
+                </a:spcBef>
+                <a:spcAft>
+                  <a:spcPts val="0"/>
+                </a:spcAft>
+              </a:pPr>
+              <a:r>
+                <a:rPr sz="880">
+                  <a:solidFill>
+                    <a:srgbClr val="4D4D4D">
+                      <a:alpha val="100000"/>
+                    </a:srgbClr>
+                  </a:solidFill>
+                  <a:latin typeface="Helvetica"/>
+                  <a:cs typeface="Helvetica"/>
+                </a:rPr>
+                <a:t>0</a:t>
+              </a:r>
+            </a:p>
+          </p:txBody>
+        </p:sp>
+        <p:sp>
+          <p:nvSpPr>
+            <p:cNvPr id="83" name="tx83"/>
+            <p:cNvSpPr/>
+            <p:nvPr/>
+          </p:nvSpPr>
+          <p:spPr>
+            <a:xfrm>
+              <a:off x="5327615" y="5716183"/>
+              <a:ext cx="124358" cy="80101"/>
+            </a:xfrm>
+            <a:prstGeom prst="rect">
+              <a:avLst/>
+            </a:prstGeom>
+            <a:noFill/>
+          </p:spPr>
+          <p:txBody>
+            <a:bodyPr lIns="0" rIns="0" tIns="0" bIns="0" anchorCtr="1" anchor="ctr" wrap="none"/>
+            <a:lstStyle/>
+            <a:p>
+              <a:pPr algn="l" marL="0" marR="0" indent="0">
+                <a:lnSpc>
+                  <a:spcPts val="880"/>
+                </a:lnSpc>
+                <a:spcBef>
+                  <a:spcPts val="0"/>
+                </a:spcBef>
+                <a:spcAft>
+                  <a:spcPts val="0"/>
+                </a:spcAft>
+              </a:pPr>
+              <a:r>
+                <a:rPr sz="880">
+                  <a:solidFill>
+                    <a:srgbClr val="4D4D4D">
+                      <a:alpha val="100000"/>
+                    </a:srgbClr>
+                  </a:solidFill>
+                  <a:latin typeface="Helvetica"/>
+                  <a:cs typeface="Helvetica"/>
+                </a:rPr>
+                <a:t>10</a:t>
+              </a:r>
+            </a:p>
+          </p:txBody>
+        </p:sp>
+        <p:sp>
+          <p:nvSpPr>
+            <p:cNvPr id="84" name="tx84"/>
+            <p:cNvSpPr/>
+            <p:nvPr/>
+          </p:nvSpPr>
+          <p:spPr>
+            <a:xfrm>
+              <a:off x="6141217" y="5716183"/>
+              <a:ext cx="124358" cy="80101"/>
+            </a:xfrm>
+            <a:prstGeom prst="rect">
+              <a:avLst/>
+            </a:prstGeom>
+            <a:noFill/>
+          </p:spPr>
+          <p:txBody>
+            <a:bodyPr lIns="0" rIns="0" tIns="0" bIns="0" anchorCtr="1" anchor="ctr" wrap="none"/>
+            <a:lstStyle/>
+            <a:p>
+              <a:pPr algn="l" marL="0" marR="0" indent="0">
+                <a:lnSpc>
+                  <a:spcPts val="880"/>
+                </a:lnSpc>
+                <a:spcBef>
+                  <a:spcPts val="0"/>
+                </a:spcBef>
+                <a:spcAft>
+                  <a:spcPts val="0"/>
+                </a:spcAft>
+              </a:pPr>
+              <a:r>
+                <a:rPr sz="880">
+                  <a:solidFill>
+                    <a:srgbClr val="4D4D4D">
+                      <a:alpha val="100000"/>
+                    </a:srgbClr>
+                  </a:solidFill>
+                  <a:latin typeface="Helvetica"/>
+                  <a:cs typeface="Helvetica"/>
+                </a:rPr>
+                <a:t>20</a:t>
+              </a:r>
+            </a:p>
+          </p:txBody>
+        </p:sp>
+        <p:sp>
+          <p:nvSpPr>
+            <p:cNvPr id="85" name="tx85"/>
+            <p:cNvSpPr/>
+            <p:nvPr/>
+          </p:nvSpPr>
+          <p:spPr>
+            <a:xfrm>
+              <a:off x="6954818" y="5716183"/>
+              <a:ext cx="124358" cy="80101"/>
+            </a:xfrm>
+            <a:prstGeom prst="rect">
+              <a:avLst/>
+            </a:prstGeom>
+            <a:noFill/>
+          </p:spPr>
+          <p:txBody>
+            <a:bodyPr lIns="0" rIns="0" tIns="0" bIns="0" anchorCtr="1" anchor="ctr" wrap="none"/>
+            <a:lstStyle/>
+            <a:p>
+              <a:pPr algn="l" marL="0" marR="0" indent="0">
+                <a:lnSpc>
+                  <a:spcPts val="880"/>
+                </a:lnSpc>
+                <a:spcBef>
+                  <a:spcPts val="0"/>
+                </a:spcBef>
+                <a:spcAft>
+                  <a:spcPts val="0"/>
+                </a:spcAft>
+              </a:pPr>
+              <a:r>
+                <a:rPr sz="880">
+                  <a:solidFill>
+                    <a:srgbClr val="4D4D4D">
+                      <a:alpha val="100000"/>
+                    </a:srgbClr>
+                  </a:solidFill>
+                  <a:latin typeface="Helvetica"/>
+                  <a:cs typeface="Helvetica"/>
+                </a:rPr>
+                <a:t>30</a:t>
+              </a:r>
+            </a:p>
+          </p:txBody>
+        </p:sp>
+        <p:sp>
+          <p:nvSpPr>
+            <p:cNvPr id="86" name="tx86"/>
+            <p:cNvSpPr/>
+            <p:nvPr/>
+          </p:nvSpPr>
+          <p:spPr>
+            <a:xfrm>
+              <a:off x="7768419" y="5716183"/>
+              <a:ext cx="124358" cy="80101"/>
+            </a:xfrm>
+            <a:prstGeom prst="rect">
+              <a:avLst/>
+            </a:prstGeom>
+            <a:noFill/>
+          </p:spPr>
+          <p:txBody>
+            <a:bodyPr lIns="0" rIns="0" tIns="0" bIns="0" anchorCtr="1" anchor="ctr" wrap="none"/>
+            <a:lstStyle/>
+            <a:p>
+              <a:pPr algn="l" marL="0" marR="0" indent="0">
+                <a:lnSpc>
+                  <a:spcPts val="880"/>
+                </a:lnSpc>
+                <a:spcBef>
+                  <a:spcPts val="0"/>
+                </a:spcBef>
+                <a:spcAft>
+                  <a:spcPts val="0"/>
+                </a:spcAft>
+              </a:pPr>
+              <a:r>
+                <a:rPr sz="880">
+                  <a:solidFill>
+                    <a:srgbClr val="4D4D4D">
+                      <a:alpha val="100000"/>
+                    </a:srgbClr>
+                  </a:solidFill>
+                  <a:latin typeface="Helvetica"/>
+                  <a:cs typeface="Helvetica"/>
+                </a:rPr>
+                <a:t>40</a:t>
+              </a:r>
+            </a:p>
+          </p:txBody>
+        </p:sp>
+        <p:sp>
+          <p:nvSpPr>
+            <p:cNvPr id="87" name="tx87"/>
+            <p:cNvSpPr/>
+            <p:nvPr/>
+          </p:nvSpPr>
+          <p:spPr>
+            <a:xfrm>
+              <a:off x="2928340" y="5855859"/>
+              <a:ext cx="3578047" cy="100218"/>
+            </a:xfrm>
+            <a:prstGeom prst="rect">
+              <a:avLst/>
+            </a:prstGeom>
+            <a:noFill/>
+          </p:spPr>
+          <p:txBody>
+            <a:bodyPr lIns="0" rIns="0" tIns="0" bIns="0" anchorCtr="1" anchor="ctr" wrap="none"/>
+            <a:lstStyle/>
+            <a:p>
+              <a:pPr algn="l" marL="0" marR="0" indent="0">
+                <a:lnSpc>
+                  <a:spcPts val="1100"/>
+                </a:lnSpc>
+                <a:spcBef>
+                  <a:spcPts val="0"/>
+                </a:spcBef>
+                <a:spcAft>
+                  <a:spcPts val="0"/>
+                </a:spcAft>
+              </a:pPr>
+              <a:r>
+                <a:rPr sz="1100">
+                  <a:solidFill>
+                    <a:srgbClr val="000000">
+                      <a:alpha val="100000"/>
+                    </a:srgbClr>
+                  </a:solidFill>
+                  <a:latin typeface="Helvetica"/>
+                  <a:cs typeface="Helvetica"/>
+                </a:rPr>
+                <a:t>eGFR difference (%): 100 × (CKD-EPI Cr-Cys − CG) / CG</a:t>
+              </a:r>
+            </a:p>
+          </p:txBody>
+        </p:sp>
+        <p:sp>
+          <p:nvSpPr>
+            <p:cNvPr id="88" name="tx88"/>
+            <p:cNvSpPr/>
+            <p:nvPr/>
+          </p:nvSpPr>
+          <p:spPr>
+            <a:xfrm rot="-5400000">
+              <a:off x="138035" y="4944909"/>
+              <a:ext cx="1016904" cy="100218"/>
+            </a:xfrm>
+            <a:prstGeom prst="rect">
+              <a:avLst/>
+            </a:prstGeom>
+            <a:noFill/>
+          </p:spPr>
+          <p:txBody>
+            <a:bodyPr lIns="0" rIns="0" tIns="0" bIns="0" anchorCtr="1" anchor="ctr" wrap="none"/>
+            <a:lstStyle/>
+            <a:p>
+              <a:pPr algn="l" marL="0" marR="0" indent="0">
+                <a:lnSpc>
+                  <a:spcPts val="1100"/>
+                </a:lnSpc>
+                <a:spcBef>
+                  <a:spcPts val="0"/>
+                </a:spcBef>
+                <a:spcAft>
+                  <a:spcPts val="0"/>
+                </a:spcAft>
+              </a:pPr>
+              <a:r>
+                <a:rPr sz="1100">
+                  <a:solidFill>
+                    <a:srgbClr val="000000">
+                      <a:alpha val="100000"/>
+                    </a:srgbClr>
+                  </a:solidFill>
+                  <a:latin typeface="Helvetica"/>
+                  <a:cs typeface="Helvetica"/>
+                </a:rPr>
+                <a:t>subHR (95% CI)</a:t>
+              </a:r>
+            </a:p>
+          </p:txBody>
+        </p:sp>
+        <p:sp>
+          <p:nvSpPr>
+            <p:cNvPr id="89" name="tx89"/>
+            <p:cNvSpPr/>
+            <p:nvPr/>
+          </p:nvSpPr>
+          <p:spPr>
+            <a:xfrm>
+              <a:off x="887106" y="4159544"/>
+              <a:ext cx="6985375" cy="82021"/>
+            </a:xfrm>
+            <a:prstGeom prst="rect">
+              <a:avLst/>
+            </a:prstGeom>
+            <a:noFill/>
+          </p:spPr>
+          <p:txBody>
+            <a:bodyPr lIns="0" rIns="0" tIns="0" bIns="0" anchorCtr="1" anchor="ctr" wrap="none"/>
+            <a:lstStyle/>
+            <a:p>
+              <a:pPr algn="l" marL="0" marR="0" indent="0">
+                <a:lnSpc>
+                  <a:spcPts val="900"/>
+                </a:lnSpc>
+                <a:spcBef>
+                  <a:spcPts val="0"/>
+                </a:spcBef>
+                <a:spcAft>
+                  <a:spcPts val="0"/>
+                </a:spcAft>
+              </a:pPr>
+              <a:r>
+                <a:rPr sz="900">
+                  <a:solidFill>
+                    <a:srgbClr val="404040">
+                      <a:alpha val="100000"/>
+                    </a:srgbClr>
+                  </a:solidFill>
+                  <a:latin typeface="Helvetica"/>
+                  <a:cs typeface="Helvetica"/>
+                </a:rPr>
+                <a:t>subHR per 10 % decline: 1.34 (1.14-1.58), p_Bonf = 0.003 (n = 6)  |  per IQR decline (Δ = 29.9 %): 2.41 (1.47-3.94)  |  IQR: [-15.0, 14.9] %</a:t>
+              </a:r>
+            </a:p>
+          </p:txBody>
+        </p:sp>
+        <p:sp>
+          <p:nvSpPr>
+            <p:cNvPr id="90" name="tx90"/>
+            <p:cNvSpPr/>
+            <p:nvPr/>
+          </p:nvSpPr>
+          <p:spPr>
+            <a:xfrm>
+              <a:off x="887106" y="3932770"/>
               <a:ext cx="3054278" cy="120152"/>
             </a:xfrm>
             <a:prstGeom prst="rect">
